--- a/ground-vehicle/docs/courses/beginner-ps3/l4_neopixel_leds.pptx
+++ b/ground-vehicle/docs/courses/beginner-ps3/l4_neopixel_leds.pptx
@@ -9556,7 +9556,7 @@
       </p:sp>
       <p:sp>
         <p:nvSpPr>
-          <p:cNvPr id="7" name="Rounded Rectangle 6"/>
+          <p:cNvPr id="7" name="CODE_PANEL"/>
           <p:cNvSpPr/>
           <p:nvPr/>
         </p:nvSpPr>

--- a/ground-vehicle/docs/courses/beginner-ps3/l4_neopixel_leds.pptx
+++ b/ground-vehicle/docs/courses/beginner-ps3/l4_neopixel_leds.pptx
@@ -6,36 +6,37 @@
   </p:sldMasterIdLst>
   <p:sldIdLst>
     <p:sldId id="256" r:id="rId7"/>
-    <p:sldId id="257" r:id="rId8"/>
-    <p:sldId id="258" r:id="rId9"/>
-    <p:sldId id="259" r:id="rId10"/>
-    <p:sldId id="260" r:id="rId11"/>
-    <p:sldId id="261" r:id="rId12"/>
-    <p:sldId id="262" r:id="rId13"/>
-    <p:sldId id="263" r:id="rId14"/>
-    <p:sldId id="264" r:id="rId15"/>
-    <p:sldId id="265" r:id="rId16"/>
-    <p:sldId id="266" r:id="rId17"/>
-    <p:sldId id="267" r:id="rId18"/>
-    <p:sldId id="268" r:id="rId19"/>
-    <p:sldId id="269" r:id="rId20"/>
-    <p:sldId id="270" r:id="rId21"/>
-    <p:sldId id="271" r:id="rId22"/>
-    <p:sldId id="272" r:id="rId23"/>
-    <p:sldId id="273" r:id="rId24"/>
-    <p:sldId id="274" r:id="rId25"/>
-    <p:sldId id="275" r:id="rId26"/>
-    <p:sldId id="276" r:id="rId27"/>
-    <p:sldId id="277" r:id="rId28"/>
-    <p:sldId id="278" r:id="rId29"/>
-    <p:sldId id="279" r:id="rId30"/>
-    <p:sldId id="280" r:id="rId31"/>
-    <p:sldId id="281" r:id="rId32"/>
-    <p:sldId id="282" r:id="rId33"/>
-    <p:sldId id="283" r:id="rId34"/>
-    <p:sldId id="284" r:id="rId35"/>
-    <p:sldId id="285" r:id="rId36"/>
-    <p:sldId id="286" r:id="rId37"/>
+    <p:sldId id="257" r:id="rId9"/>
+    <p:sldId id="258" r:id="rId10"/>
+    <p:sldId id="259" r:id="rId11"/>
+    <p:sldId id="260" r:id="rId12"/>
+    <p:sldId id="261" r:id="rId13"/>
+    <p:sldId id="262" r:id="rId14"/>
+    <p:sldId id="263" r:id="rId15"/>
+    <p:sldId id="264" r:id="rId16"/>
+    <p:sldId id="265" r:id="rId17"/>
+    <p:sldId id="266" r:id="rId18"/>
+    <p:sldId id="267" r:id="rId19"/>
+    <p:sldId id="268" r:id="rId20"/>
+    <p:sldId id="269" r:id="rId21"/>
+    <p:sldId id="270" r:id="rId22"/>
+    <p:sldId id="271" r:id="rId23"/>
+    <p:sldId id="272" r:id="rId24"/>
+    <p:sldId id="273" r:id="rId25"/>
+    <p:sldId id="274" r:id="rId26"/>
+    <p:sldId id="275" r:id="rId27"/>
+    <p:sldId id="276" r:id="rId28"/>
+    <p:sldId id="277" r:id="rId29"/>
+    <p:sldId id="278" r:id="rId30"/>
+    <p:sldId id="279" r:id="rId31"/>
+    <p:sldId id="280" r:id="rId32"/>
+    <p:sldId id="281" r:id="rId33"/>
+    <p:sldId id="282" r:id="rId34"/>
+    <p:sldId id="283" r:id="rId35"/>
+    <p:sldId id="284" r:id="rId36"/>
+    <p:sldId id="285" r:id="rId37"/>
+    <p:sldId id="286" r:id="rId38"/>
+    <p:sldId id="287" r:id="rId39"/>
   </p:sldIdLst>
   <p:sldSz cx="12191695" cy="6858000" type="screen4x3"/>
   <p:notesSz cx="6858000" cy="9144000"/>
@@ -135,6 +136,3421 @@
     </a:lvl9pPr>
   </p:defaultTextStyle>
 </p:presentation>
+</file>
+
+<file path=ppt/notesMasters/notesMaster1.xml><?xml version="1.0" encoding="utf-8"?>
+<p:notesMaster xmlns:a="http://schemas.openxmlformats.org/drawingml/2006/main" xmlns:p="http://schemas.openxmlformats.org/presentationml/2006/main" xmlns:r="http://schemas.openxmlformats.org/officeDocument/2006/relationships">
+  <p:cSld>
+    <p:bg>
+      <p:bgRef idx="1001">
+        <a:schemeClr val="bg1"/>
+      </p:bgRef>
+    </p:bg>
+    <p:spTree>
+      <p:nvGrpSpPr>
+        <p:cNvPr id="1" name=""/>
+        <p:cNvGrpSpPr/>
+        <p:nvPr/>
+      </p:nvGrpSpPr>
+      <p:grpSpPr>
+        <a:xfrm>
+          <a:off x="0" y="0"/>
+          <a:ext cx="0" cy="0"/>
+          <a:chOff x="0" y="0"/>
+          <a:chExt cx="0" cy="0"/>
+        </a:xfrm>
+      </p:grpSpPr>
+      <p:sp>
+        <p:nvSpPr>
+          <p:cNvPr id="2" name="Header Placeholder 1"/>
+          <p:cNvSpPr>
+            <a:spLocks noGrp="1"/>
+          </p:cNvSpPr>
+          <p:nvPr>
+            <p:ph type="hdr" sz="quarter"/>
+          </p:nvPr>
+        </p:nvSpPr>
+        <p:spPr>
+          <a:xfrm>
+            <a:off x="0" y="0"/>
+            <a:ext cx="2971800" cy="457200"/>
+          </a:xfrm>
+          <a:prstGeom prst="rect">
+            <a:avLst/>
+          </a:prstGeom>
+        </p:spPr>
+        <p:txBody>
+          <a:bodyPr vert="horz" lIns="91440" tIns="45720" rIns="91440" bIns="45720" rtlCol="0"/>
+          <a:lstStyle>
+            <a:lvl1pPr algn="l">
+              <a:defRPr sz="1200"/>
+            </a:lvl1pPr>
+          </a:lstStyle>
+          <a:p>
+            <a:endParaRPr lang="en-US"/>
+          </a:p>
+        </p:txBody>
+      </p:sp>
+      <p:sp>
+        <p:nvSpPr>
+          <p:cNvPr id="3" name="Date Placeholder 2"/>
+          <p:cNvSpPr>
+            <a:spLocks noGrp="1"/>
+          </p:cNvSpPr>
+          <p:nvPr>
+            <p:ph type="dt" idx="1"/>
+          </p:nvPr>
+        </p:nvSpPr>
+        <p:spPr>
+          <a:xfrm>
+            <a:off x="3884613" y="0"/>
+            <a:ext cx="2971800" cy="457200"/>
+          </a:xfrm>
+          <a:prstGeom prst="rect">
+            <a:avLst/>
+          </a:prstGeom>
+        </p:spPr>
+        <p:txBody>
+          <a:bodyPr vert="horz" lIns="91440" tIns="45720" rIns="91440" bIns="45720" rtlCol="0"/>
+          <a:lstStyle>
+            <a:lvl1pPr algn="r">
+              <a:defRPr sz="1200"/>
+            </a:lvl1pPr>
+          </a:lstStyle>
+          <a:p>
+            <a:fld id="{0F89C1C7-3DCD-1040-A9CF-14679D8B5DDD}" type="datetimeFigureOut">
+              <a:rPr lang="en-US" smtClean="0"/>
+              <a:t>10/17/16</a:t>
+            </a:fld>
+            <a:endParaRPr lang="en-US"/>
+          </a:p>
+        </p:txBody>
+      </p:sp>
+      <p:sp>
+        <p:nvSpPr>
+          <p:cNvPr id="4" name="Slide Image Placeholder 3"/>
+          <p:cNvSpPr>
+            <a:spLocks noGrp="1" noRot="1" noChangeAspect="1"/>
+          </p:cNvSpPr>
+          <p:nvPr>
+            <p:ph type="sldImg" idx="2"/>
+          </p:nvPr>
+        </p:nvSpPr>
+        <p:spPr>
+          <a:xfrm>
+            <a:off x="1143000" y="685800"/>
+            <a:ext cx="4572000" cy="3429000"/>
+          </a:xfrm>
+          <a:prstGeom prst="rect">
+            <a:avLst/>
+          </a:prstGeom>
+          <a:noFill/>
+          <a:ln w="12700">
+            <a:solidFill>
+              <a:prstClr val="black"/>
+            </a:solidFill>
+          </a:ln>
+        </p:spPr>
+        <p:txBody>
+          <a:bodyPr vert="horz" lIns="91440" tIns="45720" rIns="91440" bIns="45720" rtlCol="0" anchor="ctr"/>
+          <a:lstStyle/>
+          <a:p>
+            <a:endParaRPr lang="en-US"/>
+          </a:p>
+        </p:txBody>
+      </p:sp>
+      <p:sp>
+        <p:nvSpPr>
+          <p:cNvPr id="5" name="Notes Placeholder 4"/>
+          <p:cNvSpPr>
+            <a:spLocks noGrp="1"/>
+          </p:cNvSpPr>
+          <p:nvPr>
+            <p:ph type="body" sz="quarter" idx="3"/>
+          </p:nvPr>
+        </p:nvSpPr>
+        <p:spPr>
+          <a:xfrm>
+            <a:off x="685800" y="4343400"/>
+            <a:ext cx="5486400" cy="4114800"/>
+          </a:xfrm>
+          <a:prstGeom prst="rect">
+            <a:avLst/>
+          </a:prstGeom>
+        </p:spPr>
+        <p:txBody>
+          <a:bodyPr vert="horz" lIns="91440" tIns="45720" rIns="91440" bIns="45720" rtlCol="0"/>
+          <a:lstStyle/>
+          <a:p>
+            <a:pPr lvl="0"/>
+            <a:r>
+              <a:rPr lang="en-US" smtClean="0"/>
+              <a:t>Click to edit Master text styles</a:t>
+            </a:r>
+          </a:p>
+          <a:p>
+            <a:pPr lvl="1"/>
+            <a:r>
+              <a:rPr lang="en-US" smtClean="0"/>
+              <a:t>Second level</a:t>
+            </a:r>
+          </a:p>
+          <a:p>
+            <a:pPr lvl="2"/>
+            <a:r>
+              <a:rPr lang="en-US" smtClean="0"/>
+              <a:t>Third level</a:t>
+            </a:r>
+          </a:p>
+          <a:p>
+            <a:pPr lvl="3"/>
+            <a:r>
+              <a:rPr lang="en-US" smtClean="0"/>
+              <a:t>Fourth level</a:t>
+            </a:r>
+          </a:p>
+          <a:p>
+            <a:pPr lvl="4"/>
+            <a:r>
+              <a:rPr lang="en-US" smtClean="0"/>
+              <a:t>Fifth level</a:t>
+            </a:r>
+            <a:endParaRPr lang="en-US"/>
+          </a:p>
+        </p:txBody>
+      </p:sp>
+      <p:sp>
+        <p:nvSpPr>
+          <p:cNvPr id="6" name="Footer Placeholder 5"/>
+          <p:cNvSpPr>
+            <a:spLocks noGrp="1"/>
+          </p:cNvSpPr>
+          <p:nvPr>
+            <p:ph type="ftr" sz="quarter" idx="4"/>
+          </p:nvPr>
+        </p:nvSpPr>
+        <p:spPr>
+          <a:xfrm>
+            <a:off x="0" y="8685213"/>
+            <a:ext cx="2971800" cy="457200"/>
+          </a:xfrm>
+          <a:prstGeom prst="rect">
+            <a:avLst/>
+          </a:prstGeom>
+        </p:spPr>
+        <p:txBody>
+          <a:bodyPr vert="horz" lIns="91440" tIns="45720" rIns="91440" bIns="45720" rtlCol="0" anchor="b"/>
+          <a:lstStyle>
+            <a:lvl1pPr algn="l">
+              <a:defRPr sz="1200"/>
+            </a:lvl1pPr>
+          </a:lstStyle>
+          <a:p>
+            <a:endParaRPr lang="en-US"/>
+          </a:p>
+        </p:txBody>
+      </p:sp>
+      <p:sp>
+        <p:nvSpPr>
+          <p:cNvPr id="7" name="Slide Number Placeholder 6"/>
+          <p:cNvSpPr>
+            <a:spLocks noGrp="1"/>
+          </p:cNvSpPr>
+          <p:nvPr>
+            <p:ph type="sldNum" sz="quarter" idx="5"/>
+          </p:nvPr>
+        </p:nvSpPr>
+        <p:spPr>
+          <a:xfrm>
+            <a:off x="3884613" y="8685213"/>
+            <a:ext cx="2971800" cy="457200"/>
+          </a:xfrm>
+          <a:prstGeom prst="rect">
+            <a:avLst/>
+          </a:prstGeom>
+        </p:spPr>
+        <p:txBody>
+          <a:bodyPr vert="horz" lIns="91440" tIns="45720" rIns="91440" bIns="45720" rtlCol="0" anchor="b"/>
+          <a:lstStyle>
+            <a:lvl1pPr algn="r">
+              <a:defRPr sz="1200"/>
+            </a:lvl1pPr>
+          </a:lstStyle>
+          <a:p>
+            <a:fld id="{BB5E49A5-4136-284D-997B-48E1D791AD67}" type="slidenum">
+              <a:rPr lang="en-US" smtClean="0"/>
+              <a:t>‹#›</a:t>
+            </a:fld>
+            <a:endParaRPr lang="en-US"/>
+          </a:p>
+        </p:txBody>
+      </p:sp>
+    </p:spTree>
+    <p:extLst>
+      <p:ext uri="{BB962C8B-B14F-4D97-AF65-F5344CB8AC3E}">
+        <p14:creationId xmlns:p14="http://schemas.microsoft.com/office/powerpoint/2010/main" val="2623252185"/>
+      </p:ext>
+    </p:extLst>
+  </p:cSld>
+  <p:clrMap bg1="lt1" tx1="dk1" bg2="lt2" tx2="dk2" accent1="accent1" accent2="accent2" accent3="accent3" accent4="accent4" accent5="accent5" accent6="accent6" hlink="hlink" folHlink="folHlink"/>
+  <p:notesStyle>
+    <a:lvl1pPr marL="0" algn="l" defTabSz="457200" rtl="0" eaLnBrk="1" latinLnBrk="0" hangingPunct="1">
+      <a:defRPr sz="1200" kern="1200">
+        <a:solidFill>
+          <a:schemeClr val="tx1"/>
+        </a:solidFill>
+        <a:latin typeface="+mn-lt"/>
+        <a:ea typeface="+mn-ea"/>
+        <a:cs typeface="+mn-cs"/>
+      </a:defRPr>
+    </a:lvl1pPr>
+    <a:lvl2pPr marL="457200" algn="l" defTabSz="457200" rtl="0" eaLnBrk="1" latinLnBrk="0" hangingPunct="1">
+      <a:defRPr sz="1200" kern="1200">
+        <a:solidFill>
+          <a:schemeClr val="tx1"/>
+        </a:solidFill>
+        <a:latin typeface="+mn-lt"/>
+        <a:ea typeface="+mn-ea"/>
+        <a:cs typeface="+mn-cs"/>
+      </a:defRPr>
+    </a:lvl2pPr>
+    <a:lvl3pPr marL="914400" algn="l" defTabSz="457200" rtl="0" eaLnBrk="1" latinLnBrk="0" hangingPunct="1">
+      <a:defRPr sz="1200" kern="1200">
+        <a:solidFill>
+          <a:schemeClr val="tx1"/>
+        </a:solidFill>
+        <a:latin typeface="+mn-lt"/>
+        <a:ea typeface="+mn-ea"/>
+        <a:cs typeface="+mn-cs"/>
+      </a:defRPr>
+    </a:lvl3pPr>
+    <a:lvl4pPr marL="1371600" algn="l" defTabSz="457200" rtl="0" eaLnBrk="1" latinLnBrk="0" hangingPunct="1">
+      <a:defRPr sz="1200" kern="1200">
+        <a:solidFill>
+          <a:schemeClr val="tx1"/>
+        </a:solidFill>
+        <a:latin typeface="+mn-lt"/>
+        <a:ea typeface="+mn-ea"/>
+        <a:cs typeface="+mn-cs"/>
+      </a:defRPr>
+    </a:lvl4pPr>
+    <a:lvl5pPr marL="1828800" algn="l" defTabSz="457200" rtl="0" eaLnBrk="1" latinLnBrk="0" hangingPunct="1">
+      <a:defRPr sz="1200" kern="1200">
+        <a:solidFill>
+          <a:schemeClr val="tx1"/>
+        </a:solidFill>
+        <a:latin typeface="+mn-lt"/>
+        <a:ea typeface="+mn-ea"/>
+        <a:cs typeface="+mn-cs"/>
+      </a:defRPr>
+    </a:lvl5pPr>
+    <a:lvl6pPr marL="2286000" algn="l" defTabSz="457200" rtl="0" eaLnBrk="1" latinLnBrk="0" hangingPunct="1">
+      <a:defRPr sz="1200" kern="1200">
+        <a:solidFill>
+          <a:schemeClr val="tx1"/>
+        </a:solidFill>
+        <a:latin typeface="+mn-lt"/>
+        <a:ea typeface="+mn-ea"/>
+        <a:cs typeface="+mn-cs"/>
+      </a:defRPr>
+    </a:lvl6pPr>
+    <a:lvl7pPr marL="2743200" algn="l" defTabSz="457200" rtl="0" eaLnBrk="1" latinLnBrk="0" hangingPunct="1">
+      <a:defRPr sz="1200" kern="1200">
+        <a:solidFill>
+          <a:schemeClr val="tx1"/>
+        </a:solidFill>
+        <a:latin typeface="+mn-lt"/>
+        <a:ea typeface="+mn-ea"/>
+        <a:cs typeface="+mn-cs"/>
+      </a:defRPr>
+    </a:lvl7pPr>
+    <a:lvl8pPr marL="3200400" algn="l" defTabSz="457200" rtl="0" eaLnBrk="1" latinLnBrk="0" hangingPunct="1">
+      <a:defRPr sz="1200" kern="1200">
+        <a:solidFill>
+          <a:schemeClr val="tx1"/>
+        </a:solidFill>
+        <a:latin typeface="+mn-lt"/>
+        <a:ea typeface="+mn-ea"/>
+        <a:cs typeface="+mn-cs"/>
+      </a:defRPr>
+    </a:lvl8pPr>
+    <a:lvl9pPr marL="3657600" algn="l" defTabSz="457200" rtl="0" eaLnBrk="1" latinLnBrk="0" hangingPunct="1">
+      <a:defRPr sz="1200" kern="1200">
+        <a:solidFill>
+          <a:schemeClr val="tx1"/>
+        </a:solidFill>
+        <a:latin typeface="+mn-lt"/>
+        <a:ea typeface="+mn-ea"/>
+        <a:cs typeface="+mn-cs"/>
+      </a:defRPr>
+    </a:lvl9pPr>
+  </p:notesStyle>
+</p:notesMaster>
+</file>
+
+<file path=ppt/notesSlides/notesSlide1.xml><?xml version="1.0" encoding="utf-8"?>
+<p:notes xmlns:a="http://schemas.openxmlformats.org/drawingml/2006/main" xmlns:p="http://schemas.openxmlformats.org/presentationml/2006/main" xmlns:r="http://schemas.openxmlformats.org/officeDocument/2006/relationships">
+  <p:cSld>
+    <p:spTree>
+      <p:nvGrpSpPr>
+        <p:cNvPr id="1" name=""/>
+        <p:cNvGrpSpPr/>
+        <p:nvPr/>
+      </p:nvGrpSpPr>
+      <p:grpSpPr>
+        <a:xfrm>
+          <a:off x="0" y="0"/>
+          <a:ext cx="0" cy="0"/>
+          <a:chOff x="0" y="0"/>
+          <a:chExt cx="0" cy="0"/>
+        </a:xfrm>
+      </p:grpSpPr>
+      <p:sp>
+        <p:nvSpPr>
+          <p:cNvPr id="2" name="Slide Image Placeholder 1"/>
+          <p:cNvSpPr>
+            <a:spLocks noGrp="1"/>
+          </p:cNvSpPr>
+          <p:nvPr>
+            <p:ph type="sldImg" idx="2"/>
+          </p:nvPr>
+        </p:nvSpPr>
+        <p:spPr/>
+      </p:sp>
+      <p:sp>
+        <p:nvSpPr>
+          <p:cNvPr id="3" name="Notes Placeholder 2"/>
+          <p:cNvSpPr>
+            <a:spLocks noGrp="1"/>
+          </p:cNvSpPr>
+          <p:nvPr>
+            <p:ph type="body" idx="3" sz="quarter"/>
+          </p:nvPr>
+        </p:nvSpPr>
+        <p:spPr/>
+        <p:txBody>
+          <a:bodyPr/>
+          <a:lstStyle/>
+          <a:p>
+            <a:r>
+              <a:rPr sz="1200">
+                <a:latin typeface="Calibri"/>
+              </a:rPr>
+              <a:t>Nothing moves today, so the blocks can stay in the box and the vehicles can sit on the desks.</a:t>
+            </a:r>
+          </a:p>
+          <a:p>
+            <a:r>
+              <a:rPr sz="1200">
+                <a:latin typeface="Calibri"/>
+              </a:rPr>
+              <a:t>Dim the room if you can. Everything today is easier to see with the lights down.</a:t>
+            </a:r>
+          </a:p>
+          <a:p>
+            <a:r>
+              <a:rPr sz="1200">
+                <a:latin typeface="Calibri"/>
+              </a:rPr>
+              <a:t>Ask for the LED drawings they made in Lesson 1. Today is the day they get used.</a:t>
+            </a:r>
+          </a:p>
+        </p:txBody>
+      </p:sp>
+      <p:sp>
+        <p:nvSpPr>
+          <p:cNvPr id="4" name="Slide Number Placeholder 3"/>
+          <p:cNvSpPr>
+            <a:spLocks noGrp="1"/>
+          </p:cNvSpPr>
+          <p:nvPr>
+            <p:ph type="sldNum" idx="5" sz="quarter"/>
+          </p:nvPr>
+        </p:nvSpPr>
+        <p:spPr/>
+      </p:sp>
+    </p:spTree>
+  </p:cSld>
+  <p:clrMapOvr>
+    <a:masterClrMapping/>
+  </p:clrMapOvr>
+</p:notes>
+</file>
+
+<file path=ppt/notesSlides/notesSlide10.xml><?xml version="1.0" encoding="utf-8"?>
+<p:notes xmlns:a="http://schemas.openxmlformats.org/drawingml/2006/main" xmlns:p="http://schemas.openxmlformats.org/presentationml/2006/main" xmlns:r="http://schemas.openxmlformats.org/officeDocument/2006/relationships">
+  <p:cSld>
+    <p:spTree>
+      <p:nvGrpSpPr>
+        <p:cNvPr id="1" name=""/>
+        <p:cNvGrpSpPr/>
+        <p:nvPr/>
+      </p:nvGrpSpPr>
+      <p:grpSpPr>
+        <a:xfrm>
+          <a:off x="0" y="0"/>
+          <a:ext cx="0" cy="0"/>
+          <a:chOff x="0" y="0"/>
+          <a:chExt cx="0" cy="0"/>
+        </a:xfrm>
+      </p:grpSpPr>
+      <p:sp>
+        <p:nvSpPr>
+          <p:cNvPr id="2" name="Slide Image Placeholder 1"/>
+          <p:cNvSpPr>
+            <a:spLocks noGrp="1"/>
+          </p:cNvSpPr>
+          <p:nvPr>
+            <p:ph type="sldImg" idx="2"/>
+          </p:nvPr>
+        </p:nvSpPr>
+        <p:spPr/>
+      </p:sp>
+      <p:sp>
+        <p:nvSpPr>
+          <p:cNvPr id="3" name="Notes Placeholder 2"/>
+          <p:cNvSpPr>
+            <a:spLocks noGrp="1"/>
+          </p:cNvSpPr>
+          <p:nvPr>
+            <p:ph type="body" idx="3" sz="quarter"/>
+          </p:nvPr>
+        </p:nvSpPr>
+        <p:spPr/>
+        <p:txBody>
+          <a:bodyPr/>
+          <a:lstStyle/>
+          <a:p>
+            <a:r>
+              <a:rPr sz="1200">
+                <a:latin typeface="Calibri"/>
+              </a:rPr>
+              <a:t>(Continued from the previous slide - the same notes apply.)</a:t>
+            </a:r>
+          </a:p>
+          <a:p/>
+          <a:p>
+            <a:r>
+              <a:rPr sz="1200">
+                <a:latin typeface="Calibri"/>
+              </a:rPr>
+              <a:t>This distinction confuses people for years. Ten minutes here saves hours later.</a:t>
+            </a:r>
+          </a:p>
+          <a:p>
+            <a:r>
+              <a:rPr sz="1200">
+                <a:latin typeface="Calibri"/>
+              </a:rPr>
+              <a:t>Colour value changes WHAT you asked for. Brightness scales EVERYTHING on the way out.</a:t>
+            </a:r>
+          </a:p>
+          <a:p>
+            <a:r>
+              <a:rPr sz="1200">
+                <a:latin typeface="Calibri"/>
+              </a:rPr>
+              <a:t>The lossy point explains a real bug they will hit: a fade that ends abruptly instead of going smoothly to black.</a:t>
+            </a:r>
+          </a:p>
+          <a:p>
+            <a:r>
+              <a:rPr sz="1200">
+                <a:latin typeface="Calibri"/>
+              </a:rPr>
+              <a:t>Rule of thumb worth repeating: set brightness once in setup, then work in colour values.</a:t>
+            </a:r>
+          </a:p>
+        </p:txBody>
+      </p:sp>
+      <p:sp>
+        <p:nvSpPr>
+          <p:cNvPr id="4" name="Slide Number Placeholder 3"/>
+          <p:cNvSpPr>
+            <a:spLocks noGrp="1"/>
+          </p:cNvSpPr>
+          <p:nvPr>
+            <p:ph type="sldNum" idx="5" sz="quarter"/>
+          </p:nvPr>
+        </p:nvSpPr>
+        <p:spPr/>
+      </p:sp>
+    </p:spTree>
+  </p:cSld>
+  <p:clrMapOvr>
+    <a:masterClrMapping/>
+  </p:clrMapOvr>
+</p:notes>
+</file>
+
+<file path=ppt/notesSlides/notesSlide11.xml><?xml version="1.0" encoding="utf-8"?>
+<p:notes xmlns:a="http://schemas.openxmlformats.org/drawingml/2006/main" xmlns:p="http://schemas.openxmlformats.org/presentationml/2006/main" xmlns:r="http://schemas.openxmlformats.org/officeDocument/2006/relationships">
+  <p:cSld>
+    <p:spTree>
+      <p:nvGrpSpPr>
+        <p:cNvPr id="1" name=""/>
+        <p:cNvGrpSpPr/>
+        <p:nvPr/>
+      </p:nvGrpSpPr>
+      <p:grpSpPr>
+        <a:xfrm>
+          <a:off x="0" y="0"/>
+          <a:ext cx="0" cy="0"/>
+          <a:chOff x="0" y="0"/>
+          <a:chExt cx="0" cy="0"/>
+        </a:xfrm>
+      </p:grpSpPr>
+      <p:sp>
+        <p:nvSpPr>
+          <p:cNvPr id="2" name="Slide Image Placeholder 1"/>
+          <p:cNvSpPr>
+            <a:spLocks noGrp="1"/>
+          </p:cNvSpPr>
+          <p:nvPr>
+            <p:ph type="sldImg" idx="2"/>
+          </p:nvPr>
+        </p:nvSpPr>
+        <p:spPr/>
+      </p:sp>
+      <p:sp>
+        <p:nvSpPr>
+          <p:cNvPr id="3" name="Notes Placeholder 2"/>
+          <p:cNvSpPr>
+            <a:spLocks noGrp="1"/>
+          </p:cNvSpPr>
+          <p:nvPr>
+            <p:ph type="body" idx="3" sz="quarter"/>
+          </p:nvPr>
+        </p:nvSpPr>
+        <p:spPr/>
+        <p:txBody>
+          <a:bodyPr/>
+          <a:lstStyle/>
+          <a:p>
+            <a:r>
+              <a:rPr sz="1200">
+                <a:latin typeface="Calibri"/>
+              </a:rPr>
+              <a:t>This is the science half of the lesson and it is genuinely interesting. Do not rush it because it is not code.</a:t>
+            </a:r>
+          </a:p>
+          <a:p>
+            <a:r>
+              <a:rPr sz="1200">
+                <a:latin typeface="Calibri"/>
+              </a:rPr>
+              <a:t>The key idea: three LEDs can fake every colour because your eye only has three kinds of sensor to fool.</a:t>
+            </a:r>
+          </a:p>
+          <a:p>
+            <a:r>
+              <a:rPr sz="1200">
+                <a:latin typeface="Calibri"/>
+              </a:rPr>
+              <a:t>Yellow light and red-plus-green light are physically different and look identical. That surprises people, and it should.</a:t>
+            </a:r>
+          </a:p>
+          <a:p>
+            <a:r>
+              <a:rPr sz="1200">
+                <a:latin typeface="Calibri"/>
+              </a:rPr>
+              <a:t>If somebody asks why a rainbow on the strip does not look even: that is gamma, and it is the last row of the API table.</a:t>
+            </a:r>
+          </a:p>
+        </p:txBody>
+      </p:sp>
+      <p:sp>
+        <p:nvSpPr>
+          <p:cNvPr id="4" name="Slide Number Placeholder 3"/>
+          <p:cNvSpPr>
+            <a:spLocks noGrp="1"/>
+          </p:cNvSpPr>
+          <p:nvPr>
+            <p:ph type="sldNum" idx="5" sz="quarter"/>
+          </p:nvPr>
+        </p:nvSpPr>
+        <p:spPr/>
+      </p:sp>
+    </p:spTree>
+  </p:cSld>
+  <p:clrMapOvr>
+    <a:masterClrMapping/>
+  </p:clrMapOvr>
+</p:notes>
+</file>
+
+<file path=ppt/notesSlides/notesSlide12.xml><?xml version="1.0" encoding="utf-8"?>
+<p:notes xmlns:a="http://schemas.openxmlformats.org/drawingml/2006/main" xmlns:p="http://schemas.openxmlformats.org/presentationml/2006/main" xmlns:r="http://schemas.openxmlformats.org/officeDocument/2006/relationships">
+  <p:cSld>
+    <p:spTree>
+      <p:nvGrpSpPr>
+        <p:cNvPr id="1" name=""/>
+        <p:cNvGrpSpPr/>
+        <p:nvPr/>
+      </p:nvGrpSpPr>
+      <p:grpSpPr>
+        <a:xfrm>
+          <a:off x="0" y="0"/>
+          <a:ext cx="0" cy="0"/>
+          <a:chOff x="0" y="0"/>
+          <a:chExt cx="0" cy="0"/>
+        </a:xfrm>
+      </p:grpSpPr>
+      <p:sp>
+        <p:nvSpPr>
+          <p:cNvPr id="2" name="Slide Image Placeholder 1"/>
+          <p:cNvSpPr>
+            <a:spLocks noGrp="1"/>
+          </p:cNvSpPr>
+          <p:nvPr>
+            <p:ph type="sldImg" idx="2"/>
+          </p:nvPr>
+        </p:nvSpPr>
+        <p:spPr/>
+      </p:sp>
+      <p:sp>
+        <p:nvSpPr>
+          <p:cNvPr id="3" name="Notes Placeholder 2"/>
+          <p:cNvSpPr>
+            <a:spLocks noGrp="1"/>
+          </p:cNvSpPr>
+          <p:nvPr>
+            <p:ph type="body" idx="3" sz="quarter"/>
+          </p:nvPr>
+        </p:nvSpPr>
+        <p:spPr/>
+        <p:txBody>
+          <a:bodyPr/>
+          <a:lstStyle/>
+          <a:p>
+            <a:r>
+              <a:rPr sz="1200">
+                <a:latin typeface="Calibri"/>
+              </a:rPr>
+              <a:t>(Continued from the previous slide - the same notes apply.)</a:t>
+            </a:r>
+          </a:p>
+          <a:p/>
+          <a:p>
+            <a:r>
+              <a:rPr sz="1200">
+                <a:latin typeface="Calibri"/>
+              </a:rPr>
+              <a:t>This is the science half of the lesson and it is genuinely interesting. Do not rush it because it is not code.</a:t>
+            </a:r>
+          </a:p>
+          <a:p>
+            <a:r>
+              <a:rPr sz="1200">
+                <a:latin typeface="Calibri"/>
+              </a:rPr>
+              <a:t>The key idea: three LEDs can fake every colour because your eye only has three kinds of sensor to fool.</a:t>
+            </a:r>
+          </a:p>
+          <a:p>
+            <a:r>
+              <a:rPr sz="1200">
+                <a:latin typeface="Calibri"/>
+              </a:rPr>
+              <a:t>Yellow light and red-plus-green light are physically different and look identical. That surprises people, and it should.</a:t>
+            </a:r>
+          </a:p>
+          <a:p>
+            <a:r>
+              <a:rPr sz="1200">
+                <a:latin typeface="Calibri"/>
+              </a:rPr>
+              <a:t>If somebody asks why a rainbow on the strip does not look even: that is gamma, and it is the last row of the API table.</a:t>
+            </a:r>
+          </a:p>
+        </p:txBody>
+      </p:sp>
+      <p:sp>
+        <p:nvSpPr>
+          <p:cNvPr id="4" name="Slide Number Placeholder 3"/>
+          <p:cNvSpPr>
+            <a:spLocks noGrp="1"/>
+          </p:cNvSpPr>
+          <p:nvPr>
+            <p:ph type="sldNum" idx="5" sz="quarter"/>
+          </p:nvPr>
+        </p:nvSpPr>
+        <p:spPr/>
+      </p:sp>
+    </p:spTree>
+  </p:cSld>
+  <p:clrMapOvr>
+    <a:masterClrMapping/>
+  </p:clrMapOvr>
+</p:notes>
+</file>
+
+<file path=ppt/notesSlides/notesSlide13.xml><?xml version="1.0" encoding="utf-8"?>
+<p:notes xmlns:a="http://schemas.openxmlformats.org/drawingml/2006/main" xmlns:p="http://schemas.openxmlformats.org/presentationml/2006/main" xmlns:r="http://schemas.openxmlformats.org/officeDocument/2006/relationships">
+  <p:cSld>
+    <p:spTree>
+      <p:nvGrpSpPr>
+        <p:cNvPr id="1" name=""/>
+        <p:cNvGrpSpPr/>
+        <p:nvPr/>
+      </p:nvGrpSpPr>
+      <p:grpSpPr>
+        <a:xfrm>
+          <a:off x="0" y="0"/>
+          <a:ext cx="0" cy="0"/>
+          <a:chOff x="0" y="0"/>
+          <a:chExt cx="0" cy="0"/>
+        </a:xfrm>
+      </p:grpSpPr>
+      <p:sp>
+        <p:nvSpPr>
+          <p:cNvPr id="2" name="Slide Image Placeholder 1"/>
+          <p:cNvSpPr>
+            <a:spLocks noGrp="1"/>
+          </p:cNvSpPr>
+          <p:nvPr>
+            <p:ph type="sldImg" idx="2"/>
+          </p:nvPr>
+        </p:nvSpPr>
+        <p:spPr/>
+      </p:sp>
+      <p:sp>
+        <p:nvSpPr>
+          <p:cNvPr id="3" name="Notes Placeholder 2"/>
+          <p:cNvSpPr>
+            <a:spLocks noGrp="1"/>
+          </p:cNvSpPr>
+          <p:nvPr>
+            <p:ph type="body" idx="3" sz="quarter"/>
+          </p:nvPr>
+        </p:nvSpPr>
+        <p:spPr/>
+        <p:txBody>
+          <a:bodyPr/>
+          <a:lstStyle/>
+          <a:p>
+            <a:r>
+              <a:rPr sz="1200">
+                <a:latin typeface="Calibri"/>
+              </a:rPr>
+              <a:t>Do the arithmetic on the board with them. It is four multiplications and it makes the constraint real.</a:t>
+            </a:r>
+          </a:p>
+          <a:p>
+            <a:r>
+              <a:rPr sz="1200">
+                <a:latin typeface="Calibri"/>
+              </a:rPr>
+              <a:t>Nearly two amps and nearly ten watts through a small board. That is why the number in the program is 120 and not 255.</a:t>
+            </a:r>
+          </a:p>
+          <a:p>
+            <a:r>
+              <a:rPr sz="1200">
+                <a:latin typeface="Calibri"/>
+              </a:rPr>
+              <a:t>Coloured light is cheaper than white - pure red lights one of the three channels instead of all three. Ask them to work out yellow before you tell them.</a:t>
+            </a:r>
+          </a:p>
+          <a:p>
+            <a:r>
+              <a:rPr sz="1200">
+                <a:latin typeface="Calibri"/>
+              </a:rPr>
+              <a:t>This is Ohm's law from Lesson 2, used for something real. Point back at it explicitly.</a:t>
+            </a:r>
+          </a:p>
+        </p:txBody>
+      </p:sp>
+      <p:sp>
+        <p:nvSpPr>
+          <p:cNvPr id="4" name="Slide Number Placeholder 3"/>
+          <p:cNvSpPr>
+            <a:spLocks noGrp="1"/>
+          </p:cNvSpPr>
+          <p:nvPr>
+            <p:ph type="sldNum" idx="5" sz="quarter"/>
+          </p:nvPr>
+        </p:nvSpPr>
+        <p:spPr/>
+      </p:sp>
+    </p:spTree>
+  </p:cSld>
+  <p:clrMapOvr>
+    <a:masterClrMapping/>
+  </p:clrMapOvr>
+</p:notes>
+</file>
+
+<file path=ppt/notesSlides/notesSlide14.xml><?xml version="1.0" encoding="utf-8"?>
+<p:notes xmlns:a="http://schemas.openxmlformats.org/drawingml/2006/main" xmlns:p="http://schemas.openxmlformats.org/presentationml/2006/main" xmlns:r="http://schemas.openxmlformats.org/officeDocument/2006/relationships">
+  <p:cSld>
+    <p:spTree>
+      <p:nvGrpSpPr>
+        <p:cNvPr id="1" name=""/>
+        <p:cNvGrpSpPr/>
+        <p:nvPr/>
+      </p:nvGrpSpPr>
+      <p:grpSpPr>
+        <a:xfrm>
+          <a:off x="0" y="0"/>
+          <a:ext cx="0" cy="0"/>
+          <a:chOff x="0" y="0"/>
+          <a:chExt cx="0" cy="0"/>
+        </a:xfrm>
+      </p:grpSpPr>
+      <p:sp>
+        <p:nvSpPr>
+          <p:cNvPr id="2" name="Slide Image Placeholder 1"/>
+          <p:cNvSpPr>
+            <a:spLocks noGrp="1"/>
+          </p:cNvSpPr>
+          <p:nvPr>
+            <p:ph type="sldImg" idx="2"/>
+          </p:nvPr>
+        </p:nvSpPr>
+        <p:spPr/>
+      </p:sp>
+      <p:sp>
+        <p:nvSpPr>
+          <p:cNvPr id="3" name="Notes Placeholder 2"/>
+          <p:cNvSpPr>
+            <a:spLocks noGrp="1"/>
+          </p:cNvSpPr>
+          <p:nvPr>
+            <p:ph type="body" idx="3" sz="quarter"/>
+          </p:nvPr>
+        </p:nvSpPr>
+        <p:spPr/>
+        <p:txBody>
+          <a:bodyPr/>
+          <a:lstStyle/>
+          <a:p>
+            <a:r>
+              <a:rPr sz="1200">
+                <a:latin typeface="Calibri"/>
+              </a:rPr>
+              <a:t>(Continued from the previous slide - the same notes apply.)</a:t>
+            </a:r>
+          </a:p>
+          <a:p/>
+          <a:p>
+            <a:r>
+              <a:rPr sz="1200">
+                <a:latin typeface="Calibri"/>
+              </a:rPr>
+              <a:t>Do the arithmetic on the board with them. It is four multiplications and it makes the constraint real.</a:t>
+            </a:r>
+          </a:p>
+          <a:p>
+            <a:r>
+              <a:rPr sz="1200">
+                <a:latin typeface="Calibri"/>
+              </a:rPr>
+              <a:t>Nearly two amps and nearly ten watts through a small board. That is why the number in the program is 120 and not 255.</a:t>
+            </a:r>
+          </a:p>
+          <a:p>
+            <a:r>
+              <a:rPr sz="1200">
+                <a:latin typeface="Calibri"/>
+              </a:rPr>
+              <a:t>Coloured light is cheaper than white - pure red lights one of the three channels instead of all three. Ask them to work out yellow before you tell them.</a:t>
+            </a:r>
+          </a:p>
+          <a:p>
+            <a:r>
+              <a:rPr sz="1200">
+                <a:latin typeface="Calibri"/>
+              </a:rPr>
+              <a:t>This is Ohm's law from Lesson 2, used for something real. Point back at it explicitly.</a:t>
+            </a:r>
+          </a:p>
+        </p:txBody>
+      </p:sp>
+      <p:sp>
+        <p:nvSpPr>
+          <p:cNvPr id="4" name="Slide Number Placeholder 3"/>
+          <p:cNvSpPr>
+            <a:spLocks noGrp="1"/>
+          </p:cNvSpPr>
+          <p:nvPr>
+            <p:ph type="sldNum" idx="5" sz="quarter"/>
+          </p:nvPr>
+        </p:nvSpPr>
+        <p:spPr/>
+      </p:sp>
+    </p:spTree>
+  </p:cSld>
+  <p:clrMapOvr>
+    <a:masterClrMapping/>
+  </p:clrMapOvr>
+</p:notes>
+</file>
+
+<file path=ppt/notesSlides/notesSlide15.xml><?xml version="1.0" encoding="utf-8"?>
+<p:notes xmlns:a="http://schemas.openxmlformats.org/drawingml/2006/main" xmlns:p="http://schemas.openxmlformats.org/presentationml/2006/main" xmlns:r="http://schemas.openxmlformats.org/officeDocument/2006/relationships">
+  <p:cSld>
+    <p:spTree>
+      <p:nvGrpSpPr>
+        <p:cNvPr id="1" name=""/>
+        <p:cNvGrpSpPr/>
+        <p:nvPr/>
+      </p:nvGrpSpPr>
+      <p:grpSpPr>
+        <a:xfrm>
+          <a:off x="0" y="0"/>
+          <a:ext cx="0" cy="0"/>
+          <a:chOff x="0" y="0"/>
+          <a:chExt cx="0" cy="0"/>
+        </a:xfrm>
+      </p:grpSpPr>
+      <p:sp>
+        <p:nvSpPr>
+          <p:cNvPr id="2" name="Slide Image Placeholder 1"/>
+          <p:cNvSpPr>
+            <a:spLocks noGrp="1"/>
+          </p:cNvSpPr>
+          <p:nvPr>
+            <p:ph type="sldImg" idx="2"/>
+          </p:nvPr>
+        </p:nvSpPr>
+        <p:spPr/>
+      </p:sp>
+      <p:sp>
+        <p:nvSpPr>
+          <p:cNvPr id="3" name="Notes Placeholder 2"/>
+          <p:cNvSpPr>
+            <a:spLocks noGrp="1"/>
+          </p:cNvSpPr>
+          <p:nvPr>
+            <p:ph type="body" idx="3" sz="quarter"/>
+          </p:nvPr>
+        </p:nvSpPr>
+        <p:spPr/>
+        <p:txBody>
+          <a:bodyPr/>
+          <a:lstStyle/>
+          <a:p>
+            <a:r>
+              <a:rPr sz="1200">
+                <a:latin typeface="Calibri"/>
+              </a:rPr>
+              <a:t>(Continued from the previous slide - the same notes apply.)</a:t>
+            </a:r>
+          </a:p>
+          <a:p/>
+          <a:p>
+            <a:r>
+              <a:rPr sz="1200">
+                <a:latin typeface="Calibri"/>
+              </a:rPr>
+              <a:t>Do the arithmetic on the board with them. It is four multiplications and it makes the constraint real.</a:t>
+            </a:r>
+          </a:p>
+          <a:p>
+            <a:r>
+              <a:rPr sz="1200">
+                <a:latin typeface="Calibri"/>
+              </a:rPr>
+              <a:t>Nearly two amps and nearly ten watts through a small board. That is why the number in the program is 120 and not 255.</a:t>
+            </a:r>
+          </a:p>
+          <a:p>
+            <a:r>
+              <a:rPr sz="1200">
+                <a:latin typeface="Calibri"/>
+              </a:rPr>
+              <a:t>Coloured light is cheaper than white - pure red lights one of the three channels instead of all three. Ask them to work out yellow before you tell them.</a:t>
+            </a:r>
+          </a:p>
+          <a:p>
+            <a:r>
+              <a:rPr sz="1200">
+                <a:latin typeface="Calibri"/>
+              </a:rPr>
+              <a:t>This is Ohm's law from Lesson 2, used for something real. Point back at it explicitly.</a:t>
+            </a:r>
+          </a:p>
+        </p:txBody>
+      </p:sp>
+      <p:sp>
+        <p:nvSpPr>
+          <p:cNvPr id="4" name="Slide Number Placeholder 3"/>
+          <p:cNvSpPr>
+            <a:spLocks noGrp="1"/>
+          </p:cNvSpPr>
+          <p:nvPr>
+            <p:ph type="sldNum" idx="5" sz="quarter"/>
+          </p:nvPr>
+        </p:nvSpPr>
+        <p:spPr/>
+      </p:sp>
+    </p:spTree>
+  </p:cSld>
+  <p:clrMapOvr>
+    <a:masterClrMapping/>
+  </p:clrMapOvr>
+</p:notes>
+</file>
+
+<file path=ppt/notesSlides/notesSlide16.xml><?xml version="1.0" encoding="utf-8"?>
+<p:notes xmlns:a="http://schemas.openxmlformats.org/drawingml/2006/main" xmlns:p="http://schemas.openxmlformats.org/presentationml/2006/main" xmlns:r="http://schemas.openxmlformats.org/officeDocument/2006/relationships">
+  <p:cSld>
+    <p:spTree>
+      <p:nvGrpSpPr>
+        <p:cNvPr id="1" name=""/>
+        <p:cNvGrpSpPr/>
+        <p:nvPr/>
+      </p:nvGrpSpPr>
+      <p:grpSpPr>
+        <a:xfrm>
+          <a:off x="0" y="0"/>
+          <a:ext cx="0" cy="0"/>
+          <a:chOff x="0" y="0"/>
+          <a:chExt cx="0" cy="0"/>
+        </a:xfrm>
+      </p:grpSpPr>
+      <p:sp>
+        <p:nvSpPr>
+          <p:cNvPr id="2" name="Slide Image Placeholder 1"/>
+          <p:cNvSpPr>
+            <a:spLocks noGrp="1"/>
+          </p:cNvSpPr>
+          <p:nvPr>
+            <p:ph type="sldImg" idx="2"/>
+          </p:nvPr>
+        </p:nvSpPr>
+        <p:spPr/>
+      </p:sp>
+      <p:sp>
+        <p:nvSpPr>
+          <p:cNvPr id="3" name="Notes Placeholder 2"/>
+          <p:cNvSpPr>
+            <a:spLocks noGrp="1"/>
+          </p:cNvSpPr>
+          <p:nvPr>
+            <p:ph type="body" idx="3" sz="quarter"/>
+          </p:nvPr>
+        </p:nvSpPr>
+        <p:spPr/>
+        <p:txBody>
+          <a:bodyPr/>
+          <a:lstStyle/>
+          <a:p>
+            <a:r>
+              <a:rPr sz="1200">
+                <a:latin typeface="Calibri"/>
+              </a:rPr>
+              <a:t>Two relationships, and between them they explain every resistor and every current budget on this vehicle.</a:t>
+            </a:r>
+          </a:p>
+          <a:p>
+            <a:r>
+              <a:rPr sz="1200">
+                <a:latin typeface="Calibri"/>
+              </a:rPr>
+              <a:t>Do one worked example on the board before they look at the slide, and make them tell you which quantity is the unknown.</a:t>
+            </a:r>
+          </a:p>
+          <a:p>
+            <a:r>
+              <a:rPr sz="1200">
+                <a:latin typeface="Calibri"/>
+              </a:rPr>
+              <a:t>Units matter more than the algebra here. Volts, amps, ohms, watts - keep saying them.</a:t>
+            </a:r>
+          </a:p>
+          <a:p>
+            <a:r>
+              <a:rPr sz="1200">
+                <a:latin typeface="Calibri"/>
+              </a:rPr>
+              <a:t>The reason this is in a robotics course: the LED resistor and the 32-LED current budget are both this, and getting them wrong smells of hot plastic.</a:t>
+            </a:r>
+          </a:p>
+        </p:txBody>
+      </p:sp>
+      <p:sp>
+        <p:nvSpPr>
+          <p:cNvPr id="4" name="Slide Number Placeholder 3"/>
+          <p:cNvSpPr>
+            <a:spLocks noGrp="1"/>
+          </p:cNvSpPr>
+          <p:nvPr>
+            <p:ph type="sldNum" idx="5" sz="quarter"/>
+          </p:nvPr>
+        </p:nvSpPr>
+        <p:spPr/>
+      </p:sp>
+    </p:spTree>
+  </p:cSld>
+  <p:clrMapOvr>
+    <a:masterClrMapping/>
+  </p:clrMapOvr>
+</p:notes>
+</file>
+
+<file path=ppt/notesSlides/notesSlide17.xml><?xml version="1.0" encoding="utf-8"?>
+<p:notes xmlns:a="http://schemas.openxmlformats.org/drawingml/2006/main" xmlns:p="http://schemas.openxmlformats.org/presentationml/2006/main" xmlns:r="http://schemas.openxmlformats.org/officeDocument/2006/relationships">
+  <p:cSld>
+    <p:spTree>
+      <p:nvGrpSpPr>
+        <p:cNvPr id="1" name=""/>
+        <p:cNvGrpSpPr/>
+        <p:nvPr/>
+      </p:nvGrpSpPr>
+      <p:grpSpPr>
+        <a:xfrm>
+          <a:off x="0" y="0"/>
+          <a:ext cx="0" cy="0"/>
+          <a:chOff x="0" y="0"/>
+          <a:chExt cx="0" cy="0"/>
+        </a:xfrm>
+      </p:grpSpPr>
+      <p:sp>
+        <p:nvSpPr>
+          <p:cNvPr id="2" name="Slide Image Placeholder 1"/>
+          <p:cNvSpPr>
+            <a:spLocks noGrp="1"/>
+          </p:cNvSpPr>
+          <p:nvPr>
+            <p:ph type="sldImg" idx="2"/>
+          </p:nvPr>
+        </p:nvSpPr>
+        <p:spPr/>
+      </p:sp>
+      <p:sp>
+        <p:nvSpPr>
+          <p:cNvPr id="3" name="Notes Placeholder 2"/>
+          <p:cNvSpPr>
+            <a:spLocks noGrp="1"/>
+          </p:cNvSpPr>
+          <p:nvPr>
+            <p:ph type="body" idx="3" sz="quarter"/>
+          </p:nvPr>
+        </p:nvSpPr>
+        <p:spPr/>
+        <p:txBody>
+          <a:bodyPr/>
+          <a:lstStyle/>
+          <a:p>
+            <a:r>
+              <a:rPr sz="1200">
+                <a:latin typeface="Calibri"/>
+              </a:rPr>
+              <a:t>Twenty seconds. First of three.</a:t>
+            </a:r>
+          </a:p>
+        </p:txBody>
+      </p:sp>
+      <p:sp>
+        <p:nvSpPr>
+          <p:cNvPr id="4" name="Slide Number Placeholder 3"/>
+          <p:cNvSpPr>
+            <a:spLocks noGrp="1"/>
+          </p:cNvSpPr>
+          <p:nvPr>
+            <p:ph type="sldNum" idx="5" sz="quarter"/>
+          </p:nvPr>
+        </p:nvSpPr>
+        <p:spPr/>
+      </p:sp>
+    </p:spTree>
+  </p:cSld>
+  <p:clrMapOvr>
+    <a:masterClrMapping/>
+  </p:clrMapOvr>
+</p:notes>
+</file>
+
+<file path=ppt/notesSlides/notesSlide18.xml><?xml version="1.0" encoding="utf-8"?>
+<p:notes xmlns:a="http://schemas.openxmlformats.org/drawingml/2006/main" xmlns:p="http://schemas.openxmlformats.org/presentationml/2006/main" xmlns:r="http://schemas.openxmlformats.org/officeDocument/2006/relationships">
+  <p:cSld>
+    <p:spTree>
+      <p:nvGrpSpPr>
+        <p:cNvPr id="1" name=""/>
+        <p:cNvGrpSpPr/>
+        <p:nvPr/>
+      </p:nvGrpSpPr>
+      <p:grpSpPr>
+        <a:xfrm>
+          <a:off x="0" y="0"/>
+          <a:ext cx="0" cy="0"/>
+          <a:chOff x="0" y="0"/>
+          <a:chExt cx="0" cy="0"/>
+        </a:xfrm>
+      </p:grpSpPr>
+      <p:sp>
+        <p:nvSpPr>
+          <p:cNvPr id="2" name="Slide Image Placeholder 1"/>
+          <p:cNvSpPr>
+            <a:spLocks noGrp="1"/>
+          </p:cNvSpPr>
+          <p:nvPr>
+            <p:ph type="sldImg" idx="2"/>
+          </p:nvPr>
+        </p:nvSpPr>
+        <p:spPr/>
+      </p:sp>
+      <p:sp>
+        <p:nvSpPr>
+          <p:cNvPr id="3" name="Notes Placeholder 2"/>
+          <p:cNvSpPr>
+            <a:spLocks noGrp="1"/>
+          </p:cNvSpPr>
+          <p:nvPr>
+            <p:ph type="body" idx="3" sz="quarter"/>
+          </p:nvPr>
+        </p:nvSpPr>
+        <p:spPr/>
+        <p:txBody>
+          <a:bodyPr/>
+          <a:lstStyle/>
+          <a:p>
+            <a:r>
+              <a:rPr sz="1200">
+                <a:latin typeface="Calibri"/>
+              </a:rPr>
+              <a:t>Step 3 is a deliberate, supervised look at what full brightness costs. Say carefully, and do not let anybody hold a hand against the bars.</a:t>
+            </a:r>
+          </a:p>
+          <a:p>
+            <a:r>
+              <a:rPr sz="1200">
+                <a:latin typeface="Calibri"/>
+              </a:rPr>
+              <a:t>Yellow costs about twice red because it lights two channels rather than one. Get that answer from the room.</a:t>
+            </a:r>
+          </a:p>
+          <a:p>
+            <a:r>
+              <a:rPr sz="1200">
+                <a:latin typeface="Calibri"/>
+              </a:rPr>
+              <a:t>Step 5 lighting every other LED is a nice cheap surprise. Step 6 gets them to replace their own loop with strip.fill().</a:t>
+            </a:r>
+          </a:p>
+          <a:p>
+            <a:r>
+              <a:rPr sz="1200">
+                <a:latin typeface="Calibri"/>
+              </a:rPr>
+              <a:t>At brightness 60 the worst case is roughly a quarter of two amps, so about 450 mA.</a:t>
+            </a:r>
+          </a:p>
+        </p:txBody>
+      </p:sp>
+      <p:sp>
+        <p:nvSpPr>
+          <p:cNvPr id="4" name="Slide Number Placeholder 3"/>
+          <p:cNvSpPr>
+            <a:spLocks noGrp="1"/>
+          </p:cNvSpPr>
+          <p:nvPr>
+            <p:ph type="sldNum" idx="5" sz="quarter"/>
+          </p:nvPr>
+        </p:nvSpPr>
+        <p:spPr/>
+      </p:sp>
+    </p:spTree>
+  </p:cSld>
+  <p:clrMapOvr>
+    <a:masterClrMapping/>
+  </p:clrMapOvr>
+</p:notes>
+</file>
+
+<file path=ppt/notesSlides/notesSlide19.xml><?xml version="1.0" encoding="utf-8"?>
+<p:notes xmlns:a="http://schemas.openxmlformats.org/drawingml/2006/main" xmlns:p="http://schemas.openxmlformats.org/presentationml/2006/main" xmlns:r="http://schemas.openxmlformats.org/officeDocument/2006/relationships">
+  <p:cSld>
+    <p:spTree>
+      <p:nvGrpSpPr>
+        <p:cNvPr id="1" name=""/>
+        <p:cNvGrpSpPr/>
+        <p:nvPr/>
+      </p:nvGrpSpPr>
+      <p:grpSpPr>
+        <a:xfrm>
+          <a:off x="0" y="0"/>
+          <a:ext cx="0" cy="0"/>
+          <a:chOff x="0" y="0"/>
+          <a:chExt cx="0" cy="0"/>
+        </a:xfrm>
+      </p:grpSpPr>
+      <p:sp>
+        <p:nvSpPr>
+          <p:cNvPr id="2" name="Slide Image Placeholder 1"/>
+          <p:cNvSpPr>
+            <a:spLocks noGrp="1"/>
+          </p:cNvSpPr>
+          <p:nvPr>
+            <p:ph type="sldImg" idx="2"/>
+          </p:nvPr>
+        </p:nvSpPr>
+        <p:spPr/>
+      </p:sp>
+      <p:sp>
+        <p:nvSpPr>
+          <p:cNvPr id="3" name="Notes Placeholder 2"/>
+          <p:cNvSpPr>
+            <a:spLocks noGrp="1"/>
+          </p:cNvSpPr>
+          <p:nvPr>
+            <p:ph type="body" idx="3" sz="quarter"/>
+          </p:nvPr>
+        </p:nvSpPr>
+        <p:spPr/>
+        <p:txBody>
+          <a:bodyPr/>
+          <a:lstStyle/>
+          <a:p>
+            <a:r>
+              <a:rPr sz="1200">
+                <a:latin typeface="Calibri"/>
+              </a:rPr>
+              <a:t>Put a vehicle on the desk in the same orientation as the diagram before you say anything. Students who cannot match the picture to the object will guess for the rest of the lesson.</a:t>
+            </a:r>
+          </a:p>
+          <a:p>
+            <a:r>
+              <a:rPr sz="1200">
+                <a:latin typeface="Calibri"/>
+              </a:rPr>
+              <a:t>The numbers run in the order the data flows, not in any order that looks tidy from outside. Say so - it is the answer to the question they are about to ask.</a:t>
+            </a:r>
+          </a:p>
+          <a:p>
+            <a:r>
+              <a:rPr sz="1200">
+                <a:latin typeface="Calibri"/>
+              </a:rPr>
+              <a:t>Get them to point at LED 0 and LED 31 on a real vehicle before moving on.</a:t>
+            </a:r>
+          </a:p>
+          <a:p>
+            <a:r>
+              <a:rPr sz="1200">
+                <a:latin typeface="Calibri"/>
+              </a:rPr>
+              <a:t>This map is worth printing. They will use it in every lighting exercise from here to the end of the course.</a:t>
+            </a:r>
+          </a:p>
+        </p:txBody>
+      </p:sp>
+      <p:sp>
+        <p:nvSpPr>
+          <p:cNvPr id="4" name="Slide Number Placeholder 3"/>
+          <p:cNvSpPr>
+            <a:spLocks noGrp="1"/>
+          </p:cNvSpPr>
+          <p:nvPr>
+            <p:ph type="sldNum" idx="5" sz="quarter"/>
+          </p:nvPr>
+        </p:nvSpPr>
+        <p:spPr/>
+      </p:sp>
+    </p:spTree>
+  </p:cSld>
+  <p:clrMapOvr>
+    <a:masterClrMapping/>
+  </p:clrMapOvr>
+</p:notes>
+</file>
+
+<file path=ppt/notesSlides/notesSlide2.xml><?xml version="1.0" encoding="utf-8"?>
+<p:notes xmlns:a="http://schemas.openxmlformats.org/drawingml/2006/main" xmlns:p="http://schemas.openxmlformats.org/presentationml/2006/main" xmlns:r="http://schemas.openxmlformats.org/officeDocument/2006/relationships">
+  <p:cSld>
+    <p:spTree>
+      <p:nvGrpSpPr>
+        <p:cNvPr id="1" name=""/>
+        <p:cNvGrpSpPr/>
+        <p:nvPr/>
+      </p:nvGrpSpPr>
+      <p:grpSpPr>
+        <a:xfrm>
+          <a:off x="0" y="0"/>
+          <a:ext cx="0" cy="0"/>
+          <a:chOff x="0" y="0"/>
+          <a:chExt cx="0" cy="0"/>
+        </a:xfrm>
+      </p:grpSpPr>
+      <p:sp>
+        <p:nvSpPr>
+          <p:cNvPr id="2" name="Slide Image Placeholder 1"/>
+          <p:cNvSpPr>
+            <a:spLocks noGrp="1"/>
+          </p:cNvSpPr>
+          <p:nvPr>
+            <p:ph type="sldImg" idx="2"/>
+          </p:nvPr>
+        </p:nvSpPr>
+        <p:spPr/>
+      </p:sp>
+      <p:sp>
+        <p:nvSpPr>
+          <p:cNvPr id="3" name="Notes Placeholder 2"/>
+          <p:cNvSpPr>
+            <a:spLocks noGrp="1"/>
+          </p:cNvSpPr>
+          <p:nvPr>
+            <p:ph type="body" idx="3" sz="quarter"/>
+          </p:nvPr>
+        </p:nvSpPr>
+        <p:spPr/>
+        <p:txBody>
+          <a:bodyPr/>
+          <a:lstStyle/>
+          <a:p>
+            <a:r>
+              <a:rPr sz="1200">
+                <a:latin typeface="Calibri"/>
+              </a:rPr>
+              <a:t>Objective three - working out the current a pattern draws - is the one that connects this lesson back to Ohm's law in Lesson 2.</a:t>
+            </a:r>
+          </a:p>
+          <a:p>
+            <a:r>
+              <a:rPr sz="1200">
+                <a:latin typeface="Calibri"/>
+              </a:rPr>
+              <a:t>The last objective is the twenty-minute design exercise at the end. Flag it now so they start thinking early.</a:t>
+            </a:r>
+          </a:p>
+        </p:txBody>
+      </p:sp>
+      <p:sp>
+        <p:nvSpPr>
+          <p:cNvPr id="4" name="Slide Number Placeholder 3"/>
+          <p:cNvSpPr>
+            <a:spLocks noGrp="1"/>
+          </p:cNvSpPr>
+          <p:nvPr>
+            <p:ph type="sldNum" idx="5" sz="quarter"/>
+          </p:nvPr>
+        </p:nvSpPr>
+        <p:spPr/>
+      </p:sp>
+    </p:spTree>
+  </p:cSld>
+  <p:clrMapOvr>
+    <a:masterClrMapping/>
+  </p:clrMapOvr>
+</p:notes>
+</file>
+
+<file path=ppt/notesSlides/notesSlide20.xml><?xml version="1.0" encoding="utf-8"?>
+<p:notes xmlns:a="http://schemas.openxmlformats.org/drawingml/2006/main" xmlns:p="http://schemas.openxmlformats.org/presentationml/2006/main" xmlns:r="http://schemas.openxmlformats.org/officeDocument/2006/relationships">
+  <p:cSld>
+    <p:spTree>
+      <p:nvGrpSpPr>
+        <p:cNvPr id="1" name=""/>
+        <p:cNvGrpSpPr/>
+        <p:nvPr/>
+      </p:nvGrpSpPr>
+      <p:grpSpPr>
+        <a:xfrm>
+          <a:off x="0" y="0"/>
+          <a:ext cx="0" cy="0"/>
+          <a:chOff x="0" y="0"/>
+          <a:chExt cx="0" cy="0"/>
+        </a:xfrm>
+      </p:grpSpPr>
+      <p:sp>
+        <p:nvSpPr>
+          <p:cNvPr id="2" name="Slide Image Placeholder 1"/>
+          <p:cNvSpPr>
+            <a:spLocks noGrp="1"/>
+          </p:cNvSpPr>
+          <p:nvPr>
+            <p:ph type="sldImg" idx="2"/>
+          </p:nvPr>
+        </p:nvSpPr>
+        <p:spPr/>
+      </p:sp>
+      <p:sp>
+        <p:nvSpPr>
+          <p:cNvPr id="3" name="Notes Placeholder 2"/>
+          <p:cNvSpPr>
+            <a:spLocks noGrp="1"/>
+          </p:cNvSpPr>
+          <p:nvPr>
+            <p:ph type="body" idx="3" sz="quarter"/>
+          </p:nvPr>
+        </p:nvSpPr>
+        <p:spPr/>
+        <p:txBody>
+          <a:bodyPr/>
+          <a:lstStyle/>
+          <a:p>
+            <a:r>
+              <a:rPr sz="1200">
+                <a:latin typeface="Calibri"/>
+              </a:rPr>
+              <a:t>Twenty seconds. Two of three.</a:t>
+            </a:r>
+          </a:p>
+        </p:txBody>
+      </p:sp>
+      <p:sp>
+        <p:nvSpPr>
+          <p:cNvPr id="4" name="Slide Number Placeholder 3"/>
+          <p:cNvSpPr>
+            <a:spLocks noGrp="1"/>
+          </p:cNvSpPr>
+          <p:nvPr>
+            <p:ph type="sldNum" idx="5" sz="quarter"/>
+          </p:nvPr>
+        </p:nvSpPr>
+        <p:spPr/>
+      </p:sp>
+    </p:spTree>
+  </p:cSld>
+  <p:clrMapOvr>
+    <a:masterClrMapping/>
+  </p:clrMapOvr>
+</p:notes>
+</file>
+
+<file path=ppt/notesSlides/notesSlide21.xml><?xml version="1.0" encoding="utf-8"?>
+<p:notes xmlns:a="http://schemas.openxmlformats.org/drawingml/2006/main" xmlns:p="http://schemas.openxmlformats.org/presentationml/2006/main" xmlns:r="http://schemas.openxmlformats.org/officeDocument/2006/relationships">
+  <p:cSld>
+    <p:spTree>
+      <p:nvGrpSpPr>
+        <p:cNvPr id="1" name=""/>
+        <p:cNvGrpSpPr/>
+        <p:nvPr/>
+      </p:nvGrpSpPr>
+      <p:grpSpPr>
+        <a:xfrm>
+          <a:off x="0" y="0"/>
+          <a:ext cx="0" cy="0"/>
+          <a:chOff x="0" y="0"/>
+          <a:chExt cx="0" cy="0"/>
+        </a:xfrm>
+      </p:grpSpPr>
+      <p:sp>
+        <p:nvSpPr>
+          <p:cNvPr id="2" name="Slide Image Placeholder 1"/>
+          <p:cNvSpPr>
+            <a:spLocks noGrp="1"/>
+          </p:cNvSpPr>
+          <p:nvPr>
+            <p:ph type="sldImg" idx="2"/>
+          </p:nvPr>
+        </p:nvSpPr>
+        <p:spPr/>
+      </p:sp>
+      <p:sp>
+        <p:nvSpPr>
+          <p:cNvPr id="3" name="Notes Placeholder 2"/>
+          <p:cNvSpPr>
+            <a:spLocks noGrp="1"/>
+          </p:cNvSpPr>
+          <p:nvPr>
+            <p:ph type="body" idx="3" sz="quarter"/>
+          </p:nvPr>
+        </p:nvSpPr>
+        <p:spPr/>
+        <p:txBody>
+          <a:bodyPr/>
+          <a:lstStyle/>
+          <a:p>
+            <a:r>
+              <a:rPr sz="1200">
+                <a:latin typeface="Calibri"/>
+              </a:rPr>
+              <a:t>This is the activity that pays off for the rest of the course. Make sure every group finishes with a labelled drawing they keep.</a:t>
+            </a:r>
+          </a:p>
+          <a:p>
+            <a:r>
+              <a:rPr sz="1200">
+                <a:latin typeface="Calibri"/>
+              </a:rPr>
+              <a:t>Vehicles all facing the same way, or the left-and-right conversation gets confusing fast.</a:t>
+            </a:r>
+          </a:p>
+          <a:p>
+            <a:r>
+              <a:rPr sz="1200">
+                <a:latin typeface="Calibri"/>
+              </a:rPr>
+              <a:t>Steps 6 and 7 are the real work. The middle four of the front bar and the four corners both need them to reason about the numbering rather than read it off.</a:t>
+            </a:r>
+          </a:p>
+          <a:p>
+            <a:r>
+              <a:rPr sz="1200">
+                <a:latin typeface="Calibri"/>
+              </a:rPr>
+              <a:t>The LED directly behind number 3 is the one the mirror section shows them. Let the program answer it, not you.</a:t>
+            </a:r>
+          </a:p>
+        </p:txBody>
+      </p:sp>
+      <p:sp>
+        <p:nvSpPr>
+          <p:cNvPr id="4" name="Slide Number Placeholder 3"/>
+          <p:cNvSpPr>
+            <a:spLocks noGrp="1"/>
+          </p:cNvSpPr>
+          <p:nvPr>
+            <p:ph type="sldNum" idx="5" sz="quarter"/>
+          </p:nvPr>
+        </p:nvSpPr>
+        <p:spPr/>
+      </p:sp>
+    </p:spTree>
+  </p:cSld>
+  <p:clrMapOvr>
+    <a:masterClrMapping/>
+  </p:clrMapOvr>
+</p:notes>
+</file>
+
+<file path=ppt/notesSlides/notesSlide22.xml><?xml version="1.0" encoding="utf-8"?>
+<p:notes xmlns:a="http://schemas.openxmlformats.org/drawingml/2006/main" xmlns:p="http://schemas.openxmlformats.org/presentationml/2006/main" xmlns:r="http://schemas.openxmlformats.org/officeDocument/2006/relationships">
+  <p:cSld>
+    <p:spTree>
+      <p:nvGrpSpPr>
+        <p:cNvPr id="1" name=""/>
+        <p:cNvGrpSpPr/>
+        <p:nvPr/>
+      </p:nvGrpSpPr>
+      <p:grpSpPr>
+        <a:xfrm>
+          <a:off x="0" y="0"/>
+          <a:ext cx="0" cy="0"/>
+          <a:chOff x="0" y="0"/>
+          <a:chExt cx="0" cy="0"/>
+        </a:xfrm>
+      </p:grpSpPr>
+      <p:sp>
+        <p:nvSpPr>
+          <p:cNvPr id="2" name="Slide Image Placeholder 1"/>
+          <p:cNvSpPr>
+            <a:spLocks noGrp="1"/>
+          </p:cNvSpPr>
+          <p:nvPr>
+            <p:ph type="sldImg" idx="2"/>
+          </p:nvPr>
+        </p:nvSpPr>
+        <p:spPr/>
+      </p:sp>
+      <p:sp>
+        <p:nvSpPr>
+          <p:cNvPr id="3" name="Notes Placeholder 2"/>
+          <p:cNvSpPr>
+            <a:spLocks noGrp="1"/>
+          </p:cNvSpPr>
+          <p:nvPr>
+            <p:ph type="body" idx="3" sz="quarter"/>
+          </p:nvPr>
+        </p:nvSpPr>
+        <p:spPr/>
+        <p:txBody>
+          <a:bodyPr/>
+          <a:lstStyle/>
+          <a:p>
+            <a:r>
+              <a:rPr sz="1200">
+                <a:latin typeface="Calibri"/>
+              </a:rPr>
+              <a:t>(Continued from the previous slide - the same notes apply.)</a:t>
+            </a:r>
+          </a:p>
+          <a:p/>
+          <a:p>
+            <a:r>
+              <a:rPr sz="1200">
+                <a:latin typeface="Calibri"/>
+              </a:rPr>
+              <a:t>This is the activity that pays off for the rest of the course. Make sure every group finishes with a labelled drawing they keep.</a:t>
+            </a:r>
+          </a:p>
+          <a:p>
+            <a:r>
+              <a:rPr sz="1200">
+                <a:latin typeface="Calibri"/>
+              </a:rPr>
+              <a:t>Vehicles all facing the same way, or the left-and-right conversation gets confusing fast.</a:t>
+            </a:r>
+          </a:p>
+          <a:p>
+            <a:r>
+              <a:rPr sz="1200">
+                <a:latin typeface="Calibri"/>
+              </a:rPr>
+              <a:t>Steps 6 and 7 are the real work. The middle four of the front bar and the four corners both need them to reason about the numbering rather than read it off.</a:t>
+            </a:r>
+          </a:p>
+          <a:p>
+            <a:r>
+              <a:rPr sz="1200">
+                <a:latin typeface="Calibri"/>
+              </a:rPr>
+              <a:t>The LED directly behind number 3 is the one the mirror section shows them. Let the program answer it, not you.</a:t>
+            </a:r>
+          </a:p>
+        </p:txBody>
+      </p:sp>
+      <p:sp>
+        <p:nvSpPr>
+          <p:cNvPr id="4" name="Slide Number Placeholder 3"/>
+          <p:cNvSpPr>
+            <a:spLocks noGrp="1"/>
+          </p:cNvSpPr>
+          <p:nvPr>
+            <p:ph type="sldNum" idx="5" sz="quarter"/>
+          </p:nvPr>
+        </p:nvSpPr>
+        <p:spPr/>
+      </p:sp>
+    </p:spTree>
+  </p:cSld>
+  <p:clrMapOvr>
+    <a:masterClrMapping/>
+  </p:clrMapOvr>
+</p:notes>
+</file>
+
+<file path=ppt/notesSlides/notesSlide23.xml><?xml version="1.0" encoding="utf-8"?>
+<p:notes xmlns:a="http://schemas.openxmlformats.org/drawingml/2006/main" xmlns:p="http://schemas.openxmlformats.org/presentationml/2006/main" xmlns:r="http://schemas.openxmlformats.org/officeDocument/2006/relationships">
+  <p:cSld>
+    <p:spTree>
+      <p:nvGrpSpPr>
+        <p:cNvPr id="1" name=""/>
+        <p:cNvGrpSpPr/>
+        <p:nvPr/>
+      </p:nvGrpSpPr>
+      <p:grpSpPr>
+        <a:xfrm>
+          <a:off x="0" y="0"/>
+          <a:ext cx="0" cy="0"/>
+          <a:chOff x="0" y="0"/>
+          <a:chExt cx="0" cy="0"/>
+        </a:xfrm>
+      </p:grpSpPr>
+      <p:sp>
+        <p:nvSpPr>
+          <p:cNvPr id="2" name="Slide Image Placeholder 1"/>
+          <p:cNvSpPr>
+            <a:spLocks noGrp="1"/>
+          </p:cNvSpPr>
+          <p:nvPr>
+            <p:ph type="sldImg" idx="2"/>
+          </p:nvPr>
+        </p:nvSpPr>
+        <p:spPr/>
+      </p:sp>
+      <p:sp>
+        <p:nvSpPr>
+          <p:cNvPr id="3" name="Notes Placeholder 2"/>
+          <p:cNvSpPr>
+            <a:spLocks noGrp="1"/>
+          </p:cNvSpPr>
+          <p:nvPr>
+            <p:ph type="body" idx="3" sz="quarter"/>
+          </p:nvPr>
+        </p:nvSpPr>
+        <p:spPr/>
+        <p:txBody>
+          <a:bodyPr/>
+          <a:lstStyle/>
+          <a:p>
+            <a:r>
+              <a:rPr sz="1200">
+                <a:latin typeface="Calibri"/>
+              </a:rPr>
+              <a:t>Show the long way first and let somebody groan. That is the motivation for the loop.</a:t>
+            </a:r>
+          </a:p>
+          <a:p>
+            <a:r>
+              <a:rPr sz="1200">
+                <a:latin typeface="Calibri"/>
+              </a:rPr>
+              <a:t>Read the three parts of the for header out loud as a sentence: start here, keep going while this is true, add one each time.</a:t>
+            </a:r>
+          </a:p>
+          <a:p>
+            <a:r>
+              <a:rPr sz="1200">
+                <a:latin typeface="Calibri"/>
+              </a:rPr>
+              <a:t>The &lt; versus &lt;= point is worth a full minute. With FRONT_LAST at 15 they need &lt;= or they lose LED 15.</a:t>
+            </a:r>
+          </a:p>
+          <a:p>
+            <a:r>
+              <a:rPr sz="1200">
+                <a:latin typeface="Calibri"/>
+              </a:rPr>
+              <a:t>Say out loud that off-by-one is the most common bug in programming and that this is where they meet it. It normalises getting it wrong.</a:t>
+            </a:r>
+          </a:p>
+        </p:txBody>
+      </p:sp>
+      <p:sp>
+        <p:nvSpPr>
+          <p:cNvPr id="4" name="Slide Number Placeholder 3"/>
+          <p:cNvSpPr>
+            <a:spLocks noGrp="1"/>
+          </p:cNvSpPr>
+          <p:nvPr>
+            <p:ph type="sldNum" idx="5" sz="quarter"/>
+          </p:nvPr>
+        </p:nvSpPr>
+        <p:spPr/>
+      </p:sp>
+    </p:spTree>
+  </p:cSld>
+  <p:clrMapOvr>
+    <a:masterClrMapping/>
+  </p:clrMapOvr>
+</p:notes>
+</file>
+
+<file path=ppt/notesSlides/notesSlide24.xml><?xml version="1.0" encoding="utf-8"?>
+<p:notes xmlns:a="http://schemas.openxmlformats.org/drawingml/2006/main" xmlns:p="http://schemas.openxmlformats.org/presentationml/2006/main" xmlns:r="http://schemas.openxmlformats.org/officeDocument/2006/relationships">
+  <p:cSld>
+    <p:spTree>
+      <p:nvGrpSpPr>
+        <p:cNvPr id="1" name=""/>
+        <p:cNvGrpSpPr/>
+        <p:nvPr/>
+      </p:nvGrpSpPr>
+      <p:grpSpPr>
+        <a:xfrm>
+          <a:off x="0" y="0"/>
+          <a:ext cx="0" cy="0"/>
+          <a:chOff x="0" y="0"/>
+          <a:chExt cx="0" cy="0"/>
+        </a:xfrm>
+      </p:grpSpPr>
+      <p:sp>
+        <p:nvSpPr>
+          <p:cNvPr id="2" name="Slide Image Placeholder 1"/>
+          <p:cNvSpPr>
+            <a:spLocks noGrp="1"/>
+          </p:cNvSpPr>
+          <p:nvPr>
+            <p:ph type="sldImg" idx="2"/>
+          </p:nvPr>
+        </p:nvSpPr>
+        <p:spPr/>
+      </p:sp>
+      <p:sp>
+        <p:nvSpPr>
+          <p:cNvPr id="3" name="Notes Placeholder 2"/>
+          <p:cNvSpPr>
+            <a:spLocks noGrp="1"/>
+          </p:cNvSpPr>
+          <p:nvPr>
+            <p:ph type="body" idx="3" sz="quarter"/>
+          </p:nvPr>
+        </p:nvSpPr>
+        <p:spPr/>
+        <p:txBody>
+          <a:bodyPr/>
+          <a:lstStyle/>
+          <a:p>
+            <a:r>
+              <a:rPr sz="1200">
+                <a:latin typeface="Calibri"/>
+              </a:rPr>
+              <a:t>Four patterns, four different ideas. Do not read all the detail - name the idea behind each and let the code teach the rest.</a:t>
+            </a:r>
+          </a:p>
+          <a:p>
+            <a:r>
+              <a:rPr sz="1200">
+                <a:latin typeface="Calibri"/>
+              </a:rPr>
+              <a:t>theaterChase is the one with three nested loops. If anybody is going to get lost today it is here, so slow down.</a:t>
+            </a:r>
+          </a:p>
+          <a:p>
+            <a:r>
+              <a:rPr sz="1200">
+                <a:latin typeface="Calibri"/>
+              </a:rPr>
+              <a:t>Hue is the interesting one: a single number that goes all the way round the colour wheel, instead of three separate channels.</a:t>
+            </a:r>
+          </a:p>
+          <a:p>
+            <a:r>
+              <a:rPr sz="1200">
+                <a:latin typeface="Calibri"/>
+              </a:rPr>
+              <a:t>The scanner is the one they will remember. Mention that it comes back in Lesson 5, done properly without delay().</a:t>
+            </a:r>
+          </a:p>
+        </p:txBody>
+      </p:sp>
+      <p:sp>
+        <p:nvSpPr>
+          <p:cNvPr id="4" name="Slide Number Placeholder 3"/>
+          <p:cNvSpPr>
+            <a:spLocks noGrp="1"/>
+          </p:cNvSpPr>
+          <p:nvPr>
+            <p:ph type="sldNum" idx="5" sz="quarter"/>
+          </p:nvPr>
+        </p:nvSpPr>
+        <p:spPr/>
+      </p:sp>
+    </p:spTree>
+  </p:cSld>
+  <p:clrMapOvr>
+    <a:masterClrMapping/>
+  </p:clrMapOvr>
+</p:notes>
+</file>
+
+<file path=ppt/notesSlides/notesSlide25.xml><?xml version="1.0" encoding="utf-8"?>
+<p:notes xmlns:a="http://schemas.openxmlformats.org/drawingml/2006/main" xmlns:p="http://schemas.openxmlformats.org/presentationml/2006/main" xmlns:r="http://schemas.openxmlformats.org/officeDocument/2006/relationships">
+  <p:cSld>
+    <p:spTree>
+      <p:nvGrpSpPr>
+        <p:cNvPr id="1" name=""/>
+        <p:cNvGrpSpPr/>
+        <p:nvPr/>
+      </p:nvGrpSpPr>
+      <p:grpSpPr>
+        <a:xfrm>
+          <a:off x="0" y="0"/>
+          <a:ext cx="0" cy="0"/>
+          <a:chOff x="0" y="0"/>
+          <a:chExt cx="0" cy="0"/>
+        </a:xfrm>
+      </p:grpSpPr>
+      <p:sp>
+        <p:nvSpPr>
+          <p:cNvPr id="2" name="Slide Image Placeholder 1"/>
+          <p:cNvSpPr>
+            <a:spLocks noGrp="1"/>
+          </p:cNvSpPr>
+          <p:nvPr>
+            <p:ph type="sldImg" idx="2"/>
+          </p:nvPr>
+        </p:nvSpPr>
+        <p:spPr/>
+      </p:sp>
+      <p:sp>
+        <p:nvSpPr>
+          <p:cNvPr id="3" name="Notes Placeholder 2"/>
+          <p:cNvSpPr>
+            <a:spLocks noGrp="1"/>
+          </p:cNvSpPr>
+          <p:nvPr>
+            <p:ph type="body" idx="3" sz="quarter"/>
+          </p:nvPr>
+        </p:nvSpPr>
+        <p:spPr/>
+        <p:txBody>
+          <a:bodyPr/>
+          <a:lstStyle/>
+          <a:p>
+            <a:r>
+              <a:rPr sz="1200">
+                <a:latin typeface="Calibri"/>
+              </a:rPr>
+              <a:t>(Continued from the previous slide - the same notes apply.)</a:t>
+            </a:r>
+          </a:p>
+          <a:p/>
+          <a:p>
+            <a:r>
+              <a:rPr sz="1200">
+                <a:latin typeface="Calibri"/>
+              </a:rPr>
+              <a:t>Four patterns, four different ideas. Do not read all the detail - name the idea behind each and let the code teach the rest.</a:t>
+            </a:r>
+          </a:p>
+          <a:p>
+            <a:r>
+              <a:rPr sz="1200">
+                <a:latin typeface="Calibri"/>
+              </a:rPr>
+              <a:t>theaterChase is the one with three nested loops. If anybody is going to get lost today it is here, so slow down.</a:t>
+            </a:r>
+          </a:p>
+          <a:p>
+            <a:r>
+              <a:rPr sz="1200">
+                <a:latin typeface="Calibri"/>
+              </a:rPr>
+              <a:t>Hue is the interesting one: a single number that goes all the way round the colour wheel, instead of three separate channels.</a:t>
+            </a:r>
+          </a:p>
+          <a:p>
+            <a:r>
+              <a:rPr sz="1200">
+                <a:latin typeface="Calibri"/>
+              </a:rPr>
+              <a:t>The scanner is the one they will remember. Mention that it comes back in Lesson 5, done properly without delay().</a:t>
+            </a:r>
+          </a:p>
+        </p:txBody>
+      </p:sp>
+      <p:sp>
+        <p:nvSpPr>
+          <p:cNvPr id="4" name="Slide Number Placeholder 3"/>
+          <p:cNvSpPr>
+            <a:spLocks noGrp="1"/>
+          </p:cNvSpPr>
+          <p:nvPr>
+            <p:ph type="sldNum" idx="5" sz="quarter"/>
+          </p:nvPr>
+        </p:nvSpPr>
+        <p:spPr/>
+      </p:sp>
+    </p:spTree>
+  </p:cSld>
+  <p:clrMapOvr>
+    <a:masterClrMapping/>
+  </p:clrMapOvr>
+</p:notes>
+</file>
+
+<file path=ppt/notesSlides/notesSlide26.xml><?xml version="1.0" encoding="utf-8"?>
+<p:notes xmlns:a="http://schemas.openxmlformats.org/drawingml/2006/main" xmlns:p="http://schemas.openxmlformats.org/presentationml/2006/main" xmlns:r="http://schemas.openxmlformats.org/officeDocument/2006/relationships">
+  <p:cSld>
+    <p:spTree>
+      <p:nvGrpSpPr>
+        <p:cNvPr id="1" name=""/>
+        <p:cNvGrpSpPr/>
+        <p:nvPr/>
+      </p:nvGrpSpPr>
+      <p:grpSpPr>
+        <a:xfrm>
+          <a:off x="0" y="0"/>
+          <a:ext cx="0" cy="0"/>
+          <a:chOff x="0" y="0"/>
+          <a:chExt cx="0" cy="0"/>
+        </a:xfrm>
+      </p:grpSpPr>
+      <p:sp>
+        <p:nvSpPr>
+          <p:cNvPr id="2" name="Slide Image Placeholder 1"/>
+          <p:cNvSpPr>
+            <a:spLocks noGrp="1"/>
+          </p:cNvSpPr>
+          <p:nvPr>
+            <p:ph type="sldImg" idx="2"/>
+          </p:nvPr>
+        </p:nvSpPr>
+        <p:spPr/>
+      </p:sp>
+      <p:sp>
+        <p:nvSpPr>
+          <p:cNvPr id="3" name="Notes Placeholder 2"/>
+          <p:cNvSpPr>
+            <a:spLocks noGrp="1"/>
+          </p:cNvSpPr>
+          <p:nvPr>
+            <p:ph type="body" idx="3" sz="quarter"/>
+          </p:nvPr>
+        </p:nvSpPr>
+        <p:spPr/>
+        <p:txBody>
+          <a:bodyPr/>
+          <a:lstStyle/>
+          <a:p>
+            <a:r>
+              <a:rPr sz="1200">
+                <a:latin typeface="Calibri"/>
+              </a:rPr>
+              <a:t>Twenty seconds. Last activity before the design exercise.</a:t>
+            </a:r>
+          </a:p>
+        </p:txBody>
+      </p:sp>
+      <p:sp>
+        <p:nvSpPr>
+          <p:cNvPr id="4" name="Slide Number Placeholder 3"/>
+          <p:cNvSpPr>
+            <a:spLocks noGrp="1"/>
+          </p:cNvSpPr>
+          <p:nvPr>
+            <p:ph type="sldNum" idx="5" sz="quarter"/>
+          </p:nvPr>
+        </p:nvSpPr>
+        <p:spPr/>
+      </p:sp>
+    </p:spTree>
+  </p:cSld>
+  <p:clrMapOvr>
+    <a:masterClrMapping/>
+  </p:clrMapOvr>
+</p:notes>
+</file>
+
+<file path=ppt/notesSlides/notesSlide27.xml><?xml version="1.0" encoding="utf-8"?>
+<p:notes xmlns:a="http://schemas.openxmlformats.org/drawingml/2006/main" xmlns:p="http://schemas.openxmlformats.org/presentationml/2006/main" xmlns:r="http://schemas.openxmlformats.org/officeDocument/2006/relationships">
+  <p:cSld>
+    <p:spTree>
+      <p:nvGrpSpPr>
+        <p:cNvPr id="1" name=""/>
+        <p:cNvGrpSpPr/>
+        <p:nvPr/>
+      </p:nvGrpSpPr>
+      <p:grpSpPr>
+        <a:xfrm>
+          <a:off x="0" y="0"/>
+          <a:ext cx="0" cy="0"/>
+          <a:chOff x="0" y="0"/>
+          <a:chExt cx="0" cy="0"/>
+        </a:xfrm>
+      </p:grpSpPr>
+      <p:sp>
+        <p:nvSpPr>
+          <p:cNvPr id="2" name="Slide Image Placeholder 1"/>
+          <p:cNvSpPr>
+            <a:spLocks noGrp="1"/>
+          </p:cNvSpPr>
+          <p:nvPr>
+            <p:ph type="sldImg" idx="2"/>
+          </p:nvPr>
+        </p:nvSpPr>
+        <p:spPr/>
+      </p:sp>
+      <p:sp>
+        <p:nvSpPr>
+          <p:cNvPr id="3" name="Notes Placeholder 2"/>
+          <p:cNvSpPr>
+            <a:spLocks noGrp="1"/>
+          </p:cNvSpPr>
+          <p:nvPr>
+            <p:ph type="body" idx="3" sz="quarter"/>
+          </p:nvPr>
+        </p:nvSpPr>
+        <p:spPr/>
+        <p:txBody>
+          <a:bodyPr/>
+          <a:lstStyle/>
+          <a:p>
+            <a:r>
+              <a:rPr sz="1200">
+                <a:latin typeface="Calibri"/>
+              </a:rPr>
+              <a:t>Every step here is change-one-thing-and-look. Keep them to one change at a time.</a:t>
+            </a:r>
+          </a:p>
+          <a:p>
+            <a:r>
+              <a:rPr sz="1200">
+                <a:latin typeface="Calibri"/>
+              </a:rPr>
+              <a:t>Step 6 - copying a function, renaming it and running it backwards - is the first time they write something rather than adjust it. Give it time.</a:t>
+            </a:r>
+          </a:p>
+          <a:p>
+            <a:r>
+              <a:rPr sz="1200">
+                <a:latin typeface="Calibri"/>
+              </a:rPr>
+              <a:t>The inner loop steps in threes because only every third LED is lit at once. Get that from the room.</a:t>
+            </a:r>
+          </a:p>
+          <a:p>
+            <a:r>
+              <a:rPr sz="1200">
+                <a:latin typeface="Calibri"/>
+              </a:rPr>
+              <a:t>&gt;&gt; 1 halves a number by shifting its bits right, which is a cheap way to dim a colour. Show it on the board if they have not met bit shifts.</a:t>
+            </a:r>
+          </a:p>
+        </p:txBody>
+      </p:sp>
+      <p:sp>
+        <p:nvSpPr>
+          <p:cNvPr id="4" name="Slide Number Placeholder 3"/>
+          <p:cNvSpPr>
+            <a:spLocks noGrp="1"/>
+          </p:cNvSpPr>
+          <p:nvPr>
+            <p:ph type="sldNum" idx="5" sz="quarter"/>
+          </p:nvPr>
+        </p:nvSpPr>
+        <p:spPr/>
+      </p:sp>
+    </p:spTree>
+  </p:cSld>
+  <p:clrMapOvr>
+    <a:masterClrMapping/>
+  </p:clrMapOvr>
+</p:notes>
+</file>
+
+<file path=ppt/notesSlides/notesSlide28.xml><?xml version="1.0" encoding="utf-8"?>
+<p:notes xmlns:a="http://schemas.openxmlformats.org/drawingml/2006/main" xmlns:p="http://schemas.openxmlformats.org/presentationml/2006/main" xmlns:r="http://schemas.openxmlformats.org/officeDocument/2006/relationships">
+  <p:cSld>
+    <p:spTree>
+      <p:nvGrpSpPr>
+        <p:cNvPr id="1" name=""/>
+        <p:cNvGrpSpPr/>
+        <p:nvPr/>
+      </p:nvGrpSpPr>
+      <p:grpSpPr>
+        <a:xfrm>
+          <a:off x="0" y="0"/>
+          <a:ext cx="0" cy="0"/>
+          <a:chOff x="0" y="0"/>
+          <a:chExt cx="0" cy="0"/>
+        </a:xfrm>
+      </p:grpSpPr>
+      <p:sp>
+        <p:nvSpPr>
+          <p:cNvPr id="2" name="Slide Image Placeholder 1"/>
+          <p:cNvSpPr>
+            <a:spLocks noGrp="1"/>
+          </p:cNvSpPr>
+          <p:nvPr>
+            <p:ph type="sldImg" idx="2"/>
+          </p:nvPr>
+        </p:nvSpPr>
+        <p:spPr/>
+      </p:sp>
+      <p:sp>
+        <p:nvSpPr>
+          <p:cNvPr id="3" name="Notes Placeholder 2"/>
+          <p:cNvSpPr>
+            <a:spLocks noGrp="1"/>
+          </p:cNvSpPr>
+          <p:nvPr>
+            <p:ph type="body" idx="3" sz="quarter"/>
+          </p:nvPr>
+        </p:nvSpPr>
+        <p:spPr/>
+        <p:txBody>
+          <a:bodyPr/>
+          <a:lstStyle/>
+          <a:p>
+            <a:r>
+              <a:rPr sz="1200">
+                <a:latin typeface="Calibri"/>
+              </a:rPr>
+              <a:t>Twenty minutes, hands off, let them build. Circulate but do not solve.</a:t>
+            </a:r>
+          </a:p>
+          <a:p>
+            <a:r>
+              <a:rPr sz="1200">
+                <a:latin typeface="Calibri"/>
+              </a:rPr>
+              <a:t>The two rules matter: it has to be a function called from loop(), and it has to use a for loop. Those are the two things this lesson taught.</a:t>
+            </a:r>
+          </a:p>
+          <a:p>
+            <a:r>
+              <a:rPr sz="1200">
+                <a:latin typeface="Calibri"/>
+              </a:rPr>
+              <a:t>Leave five minutes at the end for showing. Every group demonstrates, even if it half works.</a:t>
+            </a:r>
+          </a:p>
+          <a:p>
+            <a:r>
+              <a:rPr sz="1200">
+                <a:latin typeface="Calibri"/>
+              </a:rPr>
+              <a:t>Pick a winner and mean it - it gets used in the race next lesson.</a:t>
+            </a:r>
+          </a:p>
+          <a:p>
+            <a:r>
+              <a:rPr sz="1200">
+                <a:latin typeface="Calibri"/>
+              </a:rPr>
+              <a:t>The stoplight and the D-pad quadrants are the two easiest starting points if a group is stuck - both are for loops over a known range, which is exactly what they just practised.</a:t>
+            </a:r>
+          </a:p>
+        </p:txBody>
+      </p:sp>
+      <p:sp>
+        <p:nvSpPr>
+          <p:cNvPr id="4" name="Slide Number Placeholder 3"/>
+          <p:cNvSpPr>
+            <a:spLocks noGrp="1"/>
+          </p:cNvSpPr>
+          <p:nvPr>
+            <p:ph type="sldNum" idx="5" sz="quarter"/>
+          </p:nvPr>
+        </p:nvSpPr>
+        <p:spPr/>
+      </p:sp>
+    </p:spTree>
+  </p:cSld>
+  <p:clrMapOvr>
+    <a:masterClrMapping/>
+  </p:clrMapOvr>
+</p:notes>
+</file>
+
+<file path=ppt/notesSlides/notesSlide29.xml><?xml version="1.0" encoding="utf-8"?>
+<p:notes xmlns:a="http://schemas.openxmlformats.org/drawingml/2006/main" xmlns:p="http://schemas.openxmlformats.org/presentationml/2006/main" xmlns:r="http://schemas.openxmlformats.org/officeDocument/2006/relationships">
+  <p:cSld>
+    <p:spTree>
+      <p:nvGrpSpPr>
+        <p:cNvPr id="1" name=""/>
+        <p:cNvGrpSpPr/>
+        <p:nvPr/>
+      </p:nvGrpSpPr>
+      <p:grpSpPr>
+        <a:xfrm>
+          <a:off x="0" y="0"/>
+          <a:ext cx="0" cy="0"/>
+          <a:chOff x="0" y="0"/>
+          <a:chExt cx="0" cy="0"/>
+        </a:xfrm>
+      </p:grpSpPr>
+      <p:sp>
+        <p:nvSpPr>
+          <p:cNvPr id="2" name="Slide Image Placeholder 1"/>
+          <p:cNvSpPr>
+            <a:spLocks noGrp="1"/>
+          </p:cNvSpPr>
+          <p:nvPr>
+            <p:ph type="sldImg" idx="2"/>
+          </p:nvPr>
+        </p:nvSpPr>
+        <p:spPr/>
+      </p:sp>
+      <p:sp>
+        <p:nvSpPr>
+          <p:cNvPr id="3" name="Notes Placeholder 2"/>
+          <p:cNvSpPr>
+            <a:spLocks noGrp="1"/>
+          </p:cNvSpPr>
+          <p:nvPr>
+            <p:ph type="body" idx="3" sz="quarter"/>
+          </p:nvPr>
+        </p:nvSpPr>
+        <p:spPr/>
+        <p:txBody>
+          <a:bodyPr/>
+          <a:lstStyle/>
+          <a:p>
+            <a:r>
+              <a:rPr sz="1200">
+                <a:latin typeface="Calibri"/>
+              </a:rPr>
+              <a:t>(Continued from the previous slide - the same notes apply.)</a:t>
+            </a:r>
+          </a:p>
+          <a:p/>
+          <a:p>
+            <a:r>
+              <a:rPr sz="1200">
+                <a:latin typeface="Calibri"/>
+              </a:rPr>
+              <a:t>Twenty minutes, hands off, let them build. Circulate but do not solve.</a:t>
+            </a:r>
+          </a:p>
+          <a:p>
+            <a:r>
+              <a:rPr sz="1200">
+                <a:latin typeface="Calibri"/>
+              </a:rPr>
+              <a:t>The two rules matter: it has to be a function called from loop(), and it has to use a for loop. Those are the two things this lesson taught.</a:t>
+            </a:r>
+          </a:p>
+          <a:p>
+            <a:r>
+              <a:rPr sz="1200">
+                <a:latin typeface="Calibri"/>
+              </a:rPr>
+              <a:t>Leave five minutes at the end for showing. Every group demonstrates, even if it half works.</a:t>
+            </a:r>
+          </a:p>
+          <a:p>
+            <a:r>
+              <a:rPr sz="1200">
+                <a:latin typeface="Calibri"/>
+              </a:rPr>
+              <a:t>Pick a winner and mean it - it gets used in the race next lesson.</a:t>
+            </a:r>
+          </a:p>
+          <a:p>
+            <a:r>
+              <a:rPr sz="1200">
+                <a:latin typeface="Calibri"/>
+              </a:rPr>
+              <a:t>The stoplight and the D-pad quadrants are the two easiest starting points if a group is stuck - both are for loops over a known range, which is exactly what they just practised.</a:t>
+            </a:r>
+          </a:p>
+        </p:txBody>
+      </p:sp>
+      <p:sp>
+        <p:nvSpPr>
+          <p:cNvPr id="4" name="Slide Number Placeholder 3"/>
+          <p:cNvSpPr>
+            <a:spLocks noGrp="1"/>
+          </p:cNvSpPr>
+          <p:nvPr>
+            <p:ph type="sldNum" idx="5" sz="quarter"/>
+          </p:nvPr>
+        </p:nvSpPr>
+        <p:spPr/>
+      </p:sp>
+    </p:spTree>
+  </p:cSld>
+  <p:clrMapOvr>
+    <a:masterClrMapping/>
+  </p:clrMapOvr>
+</p:notes>
+</file>
+
+<file path=ppt/notesSlides/notesSlide3.xml><?xml version="1.0" encoding="utf-8"?>
+<p:notes xmlns:a="http://schemas.openxmlformats.org/drawingml/2006/main" xmlns:p="http://schemas.openxmlformats.org/presentationml/2006/main" xmlns:r="http://schemas.openxmlformats.org/officeDocument/2006/relationships">
+  <p:cSld>
+    <p:spTree>
+      <p:nvGrpSpPr>
+        <p:cNvPr id="1" name=""/>
+        <p:cNvGrpSpPr/>
+        <p:nvPr/>
+      </p:nvGrpSpPr>
+      <p:grpSpPr>
+        <a:xfrm>
+          <a:off x="0" y="0"/>
+          <a:ext cx="0" cy="0"/>
+          <a:chOff x="0" y="0"/>
+          <a:chExt cx="0" cy="0"/>
+        </a:xfrm>
+      </p:grpSpPr>
+      <p:sp>
+        <p:nvSpPr>
+          <p:cNvPr id="2" name="Slide Image Placeholder 1"/>
+          <p:cNvSpPr>
+            <a:spLocks noGrp="1"/>
+          </p:cNvSpPr>
+          <p:nvPr>
+            <p:ph type="sldImg" idx="2"/>
+          </p:nvPr>
+        </p:nvSpPr>
+        <p:spPr/>
+      </p:sp>
+      <p:sp>
+        <p:nvSpPr>
+          <p:cNvPr id="3" name="Notes Placeholder 2"/>
+          <p:cNvSpPr>
+            <a:spLocks noGrp="1"/>
+          </p:cNvSpPr>
+          <p:nvPr>
+            <p:ph type="body" idx="3" sz="quarter"/>
+          </p:nvPr>
+        </p:nvSpPr>
+        <p:spPr/>
+        <p:txBody>
+          <a:bodyPr/>
+          <a:lstStyle/>
+          <a:p>
+            <a:r>
+              <a:rPr sz="1200">
+                <a:latin typeface="Calibri"/>
+              </a:rPr>
+              <a:t>Sixty seconds.</a:t>
+            </a:r>
+          </a:p>
+          <a:p>
+            <a:r>
+              <a:rPr sz="1200">
+                <a:latin typeface="Calibri"/>
+              </a:rPr>
+              <a:t>Say clearly that nothing moves today. It changes how the room behaves.</a:t>
+            </a:r>
+          </a:p>
+        </p:txBody>
+      </p:sp>
+      <p:sp>
+        <p:nvSpPr>
+          <p:cNvPr id="4" name="Slide Number Placeholder 3"/>
+          <p:cNvSpPr>
+            <a:spLocks noGrp="1"/>
+          </p:cNvSpPr>
+          <p:nvPr>
+            <p:ph type="sldNum" idx="5" sz="quarter"/>
+          </p:nvPr>
+        </p:nvSpPr>
+        <p:spPr/>
+      </p:sp>
+    </p:spTree>
+  </p:cSld>
+  <p:clrMapOvr>
+    <a:masterClrMapping/>
+  </p:clrMapOvr>
+</p:notes>
+</file>
+
+<file path=ppt/notesSlides/notesSlide30.xml><?xml version="1.0" encoding="utf-8"?>
+<p:notes xmlns:a="http://schemas.openxmlformats.org/drawingml/2006/main" xmlns:p="http://schemas.openxmlformats.org/presentationml/2006/main" xmlns:r="http://schemas.openxmlformats.org/officeDocument/2006/relationships">
+  <p:cSld>
+    <p:spTree>
+      <p:nvGrpSpPr>
+        <p:cNvPr id="1" name=""/>
+        <p:cNvGrpSpPr/>
+        <p:nvPr/>
+      </p:nvGrpSpPr>
+      <p:grpSpPr>
+        <a:xfrm>
+          <a:off x="0" y="0"/>
+          <a:ext cx="0" cy="0"/>
+          <a:chOff x="0" y="0"/>
+          <a:chExt cx="0" cy="0"/>
+        </a:xfrm>
+      </p:grpSpPr>
+      <p:sp>
+        <p:nvSpPr>
+          <p:cNvPr id="2" name="Slide Image Placeholder 1"/>
+          <p:cNvSpPr>
+            <a:spLocks noGrp="1"/>
+          </p:cNvSpPr>
+          <p:nvPr>
+            <p:ph type="sldImg" idx="2"/>
+          </p:nvPr>
+        </p:nvSpPr>
+        <p:spPr/>
+      </p:sp>
+      <p:sp>
+        <p:nvSpPr>
+          <p:cNvPr id="3" name="Notes Placeholder 2"/>
+          <p:cNvSpPr>
+            <a:spLocks noGrp="1"/>
+          </p:cNvSpPr>
+          <p:nvPr>
+            <p:ph type="body" idx="3" sz="quarter"/>
+          </p:nvPr>
+        </p:nvSpPr>
+        <p:spPr/>
+        <p:txBody>
+          <a:bodyPr/>
+          <a:lstStyle/>
+          <a:p>
+            <a:r>
+              <a:rPr sz="1200">
+                <a:latin typeface="Calibri"/>
+              </a:rPr>
+              <a:t>(Continued from the previous slide - the same notes apply.)</a:t>
+            </a:r>
+          </a:p>
+          <a:p/>
+          <a:p>
+            <a:r>
+              <a:rPr sz="1200">
+                <a:latin typeface="Calibri"/>
+              </a:rPr>
+              <a:t>Twenty minutes, hands off, let them build. Circulate but do not solve.</a:t>
+            </a:r>
+          </a:p>
+          <a:p>
+            <a:r>
+              <a:rPr sz="1200">
+                <a:latin typeface="Calibri"/>
+              </a:rPr>
+              <a:t>The two rules matter: it has to be a function called from loop(), and it has to use a for loop. Those are the two things this lesson taught.</a:t>
+            </a:r>
+          </a:p>
+          <a:p>
+            <a:r>
+              <a:rPr sz="1200">
+                <a:latin typeface="Calibri"/>
+              </a:rPr>
+              <a:t>Leave five minutes at the end for showing. Every group demonstrates, even if it half works.</a:t>
+            </a:r>
+          </a:p>
+          <a:p>
+            <a:r>
+              <a:rPr sz="1200">
+                <a:latin typeface="Calibri"/>
+              </a:rPr>
+              <a:t>Pick a winner and mean it - it gets used in the race next lesson.</a:t>
+            </a:r>
+          </a:p>
+          <a:p>
+            <a:r>
+              <a:rPr sz="1200">
+                <a:latin typeface="Calibri"/>
+              </a:rPr>
+              <a:t>The stoplight and the D-pad quadrants are the two easiest starting points if a group is stuck - both are for loops over a known range, which is exactly what they just practised.</a:t>
+            </a:r>
+          </a:p>
+        </p:txBody>
+      </p:sp>
+      <p:sp>
+        <p:nvSpPr>
+          <p:cNvPr id="4" name="Slide Number Placeholder 3"/>
+          <p:cNvSpPr>
+            <a:spLocks noGrp="1"/>
+          </p:cNvSpPr>
+          <p:nvPr>
+            <p:ph type="sldNum" idx="5" sz="quarter"/>
+          </p:nvPr>
+        </p:nvSpPr>
+        <p:spPr/>
+      </p:sp>
+    </p:spTree>
+  </p:cSld>
+  <p:clrMapOvr>
+    <a:masterClrMapping/>
+  </p:clrMapOvr>
+</p:notes>
+</file>
+
+<file path=ppt/notesSlides/notesSlide31.xml><?xml version="1.0" encoding="utf-8"?>
+<p:notes xmlns:a="http://schemas.openxmlformats.org/drawingml/2006/main" xmlns:p="http://schemas.openxmlformats.org/presentationml/2006/main" xmlns:r="http://schemas.openxmlformats.org/officeDocument/2006/relationships">
+  <p:cSld>
+    <p:spTree>
+      <p:nvGrpSpPr>
+        <p:cNvPr id="1" name=""/>
+        <p:cNvGrpSpPr/>
+        <p:nvPr/>
+      </p:nvGrpSpPr>
+      <p:grpSpPr>
+        <a:xfrm>
+          <a:off x="0" y="0"/>
+          <a:ext cx="0" cy="0"/>
+          <a:chOff x="0" y="0"/>
+          <a:chExt cx="0" cy="0"/>
+        </a:xfrm>
+      </p:grpSpPr>
+      <p:sp>
+        <p:nvSpPr>
+          <p:cNvPr id="2" name="Slide Image Placeholder 1"/>
+          <p:cNvSpPr>
+            <a:spLocks noGrp="1"/>
+          </p:cNvSpPr>
+          <p:nvPr>
+            <p:ph type="sldImg" idx="2"/>
+          </p:nvPr>
+        </p:nvSpPr>
+        <p:spPr/>
+      </p:sp>
+      <p:sp>
+        <p:nvSpPr>
+          <p:cNvPr id="3" name="Notes Placeholder 2"/>
+          <p:cNvSpPr>
+            <a:spLocks noGrp="1"/>
+          </p:cNvSpPr>
+          <p:nvPr>
+            <p:ph type="body" idx="3" sz="quarter"/>
+          </p:nvPr>
+        </p:nvSpPr>
+        <p:spPr/>
+        <p:txBody>
+          <a:bodyPr/>
+          <a:lstStyle/>
+          <a:p>
+            <a:r>
+              <a:rPr sz="1200">
+                <a:latin typeface="Calibri"/>
+              </a:rPr>
+              <a:t>Do not read this out. Point at it and tell them to work down it before changing any code.</a:t>
+            </a:r>
+          </a:p>
+          <a:p>
+            <a:r>
+              <a:rPr sz="1200">
+                <a:latin typeface="Calibri"/>
+              </a:rPr>
+              <a:t>Row one will happen to somebody in the next ten minutes.</a:t>
+            </a:r>
+          </a:p>
+          <a:p>
+            <a:r>
+              <a:rPr sz="1200">
+                <a:latin typeface="Calibri"/>
+              </a:rPr>
+              <a:t>The last row is a good one: a dead pixel still passes data through, so everything after it keeps working. That is the chain idea again.</a:t>
+            </a:r>
+          </a:p>
+        </p:txBody>
+      </p:sp>
+      <p:sp>
+        <p:nvSpPr>
+          <p:cNvPr id="4" name="Slide Number Placeholder 3"/>
+          <p:cNvSpPr>
+            <a:spLocks noGrp="1"/>
+          </p:cNvSpPr>
+          <p:nvPr>
+            <p:ph type="sldNum" idx="5" sz="quarter"/>
+          </p:nvPr>
+        </p:nvSpPr>
+        <p:spPr/>
+      </p:sp>
+    </p:spTree>
+  </p:cSld>
+  <p:clrMapOvr>
+    <a:masterClrMapping/>
+  </p:clrMapOvr>
+</p:notes>
+</file>
+
+<file path=ppt/notesSlides/notesSlide32.xml><?xml version="1.0" encoding="utf-8"?>
+<p:notes xmlns:a="http://schemas.openxmlformats.org/drawingml/2006/main" xmlns:p="http://schemas.openxmlformats.org/presentationml/2006/main" xmlns:r="http://schemas.openxmlformats.org/officeDocument/2006/relationships">
+  <p:cSld>
+    <p:spTree>
+      <p:nvGrpSpPr>
+        <p:cNvPr id="1" name=""/>
+        <p:cNvGrpSpPr/>
+        <p:nvPr/>
+      </p:nvGrpSpPr>
+      <p:grpSpPr>
+        <a:xfrm>
+          <a:off x="0" y="0"/>
+          <a:ext cx="0" cy="0"/>
+          <a:chOff x="0" y="0"/>
+          <a:chExt cx="0" cy="0"/>
+        </a:xfrm>
+      </p:grpSpPr>
+      <p:sp>
+        <p:nvSpPr>
+          <p:cNvPr id="2" name="Slide Image Placeholder 1"/>
+          <p:cNvSpPr>
+            <a:spLocks noGrp="1"/>
+          </p:cNvSpPr>
+          <p:nvPr>
+            <p:ph type="sldImg" idx="2"/>
+          </p:nvPr>
+        </p:nvSpPr>
+        <p:spPr/>
+      </p:sp>
+      <p:sp>
+        <p:nvSpPr>
+          <p:cNvPr id="3" name="Notes Placeholder 2"/>
+          <p:cNvSpPr>
+            <a:spLocks noGrp="1"/>
+          </p:cNvSpPr>
+          <p:nvPr>
+            <p:ph type="body" idx="3" sz="quarter"/>
+          </p:nvPr>
+        </p:nvSpPr>
+        <p:spPr/>
+        <p:txBody>
+          <a:bodyPr/>
+          <a:lstStyle/>
+          <a:p>
+            <a:r>
+              <a:rPr sz="1200">
+                <a:latin typeface="Calibri"/>
+              </a:rPr>
+              <a:t>Conversation, not a test.</a:t>
+            </a:r>
+          </a:p>
+          <a:p>
+            <a:r>
+              <a:rPr sz="1200">
+                <a:latin typeface="Calibri"/>
+              </a:rPr>
+              <a:t>Answers, in order: each pixel keeps the first message and passes the rest along; 5 V, ground, data in, data out; you forgot strip.show(); yellow, because red and green together look yellow to your eye; about 1.9 amps.</a:t>
+            </a:r>
+          </a:p>
+          <a:p>
+            <a:r>
+              <a:rPr sz="1200">
+                <a:latin typeface="Calibri"/>
+              </a:rPr>
+              <a:t>Questions 6 and 7 they should answer from their own drawing, not from memory.</a:t>
+            </a:r>
+          </a:p>
+          <a:p>
+            <a:r>
+              <a:rPr sz="1200">
+                <a:latin typeface="Calibri"/>
+              </a:rPr>
+              <a:t>Question 8 should be written out. Check a few.</a:t>
+            </a:r>
+          </a:p>
+          <a:p>
+            <a:r>
+              <a:rPr sz="1200">
+                <a:latin typeface="Calibri"/>
+              </a:rPr>
+              <a:t>Tell them next lesson is everything at once, and a race.</a:t>
+            </a:r>
+          </a:p>
+        </p:txBody>
+      </p:sp>
+      <p:sp>
+        <p:nvSpPr>
+          <p:cNvPr id="4" name="Slide Number Placeholder 3"/>
+          <p:cNvSpPr>
+            <a:spLocks noGrp="1"/>
+          </p:cNvSpPr>
+          <p:nvPr>
+            <p:ph type="sldNum" idx="5" sz="quarter"/>
+          </p:nvPr>
+        </p:nvSpPr>
+        <p:spPr/>
+      </p:sp>
+    </p:spTree>
+  </p:cSld>
+  <p:clrMapOvr>
+    <a:masterClrMapping/>
+  </p:clrMapOvr>
+</p:notes>
+</file>
+
+<file path=ppt/notesSlides/notesSlide4.xml><?xml version="1.0" encoding="utf-8"?>
+<p:notes xmlns:a="http://schemas.openxmlformats.org/drawingml/2006/main" xmlns:p="http://schemas.openxmlformats.org/presentationml/2006/main" xmlns:r="http://schemas.openxmlformats.org/officeDocument/2006/relationships">
+  <p:cSld>
+    <p:spTree>
+      <p:nvGrpSpPr>
+        <p:cNvPr id="1" name=""/>
+        <p:cNvGrpSpPr/>
+        <p:nvPr/>
+      </p:nvGrpSpPr>
+      <p:grpSpPr>
+        <a:xfrm>
+          <a:off x="0" y="0"/>
+          <a:ext cx="0" cy="0"/>
+          <a:chOff x="0" y="0"/>
+          <a:chExt cx="0" cy="0"/>
+        </a:xfrm>
+      </p:grpSpPr>
+      <p:sp>
+        <p:nvSpPr>
+          <p:cNvPr id="2" name="Slide Image Placeholder 1"/>
+          <p:cNvSpPr>
+            <a:spLocks noGrp="1"/>
+          </p:cNvSpPr>
+          <p:nvPr>
+            <p:ph type="sldImg" idx="2"/>
+          </p:nvPr>
+        </p:nvSpPr>
+        <p:spPr/>
+      </p:sp>
+      <p:sp>
+        <p:nvSpPr>
+          <p:cNvPr id="3" name="Notes Placeholder 2"/>
+          <p:cNvSpPr>
+            <a:spLocks noGrp="1"/>
+          </p:cNvSpPr>
+          <p:nvPr>
+            <p:ph type="body" idx="3" sz="quarter"/>
+          </p:nvPr>
+        </p:nvSpPr>
+        <p:spPr/>
+        <p:txBody>
+          <a:bodyPr/>
+          <a:lstStyle/>
+          <a:p>
+            <a:r>
+              <a:rPr sz="1200">
+                <a:latin typeface="Calibri"/>
+              </a:rPr>
+              <a:t>Two breaks, and the design exercise at 2:30. Tell them the best pattern gets used in the race next lesson - that is worth ten minutes of extra effort from everybody.</a:t>
+            </a:r>
+          </a:p>
+        </p:txBody>
+      </p:sp>
+      <p:sp>
+        <p:nvSpPr>
+          <p:cNvPr id="4" name="Slide Number Placeholder 3"/>
+          <p:cNvSpPr>
+            <a:spLocks noGrp="1"/>
+          </p:cNvSpPr>
+          <p:nvPr>
+            <p:ph type="sldNum" idx="5" sz="quarter"/>
+          </p:nvPr>
+        </p:nvSpPr>
+        <p:spPr/>
+      </p:sp>
+    </p:spTree>
+  </p:cSld>
+  <p:clrMapOvr>
+    <a:masterClrMapping/>
+  </p:clrMapOvr>
+</p:notes>
+</file>
+
+<file path=ppt/notesSlides/notesSlide5.xml><?xml version="1.0" encoding="utf-8"?>
+<p:notes xmlns:a="http://schemas.openxmlformats.org/drawingml/2006/main" xmlns:p="http://schemas.openxmlformats.org/presentationml/2006/main" xmlns:r="http://schemas.openxmlformats.org/officeDocument/2006/relationships">
+  <p:cSld>
+    <p:spTree>
+      <p:nvGrpSpPr>
+        <p:cNvPr id="1" name=""/>
+        <p:cNvGrpSpPr/>
+        <p:nvPr/>
+      </p:nvGrpSpPr>
+      <p:grpSpPr>
+        <a:xfrm>
+          <a:off x="0" y="0"/>
+          <a:ext cx="0" cy="0"/>
+          <a:chOff x="0" y="0"/>
+          <a:chExt cx="0" cy="0"/>
+        </a:xfrm>
+      </p:grpSpPr>
+      <p:sp>
+        <p:nvSpPr>
+          <p:cNvPr id="2" name="Slide Image Placeholder 1"/>
+          <p:cNvSpPr>
+            <a:spLocks noGrp="1"/>
+          </p:cNvSpPr>
+          <p:nvPr>
+            <p:ph type="sldImg" idx="2"/>
+          </p:nvPr>
+        </p:nvSpPr>
+        <p:spPr/>
+      </p:sp>
+      <p:sp>
+        <p:nvSpPr>
+          <p:cNvPr id="3" name="Notes Placeholder 2"/>
+          <p:cNvSpPr>
+            <a:spLocks noGrp="1"/>
+          </p:cNvSpPr>
+          <p:nvPr>
+            <p:ph type="body" idx="3" sz="quarter"/>
+          </p:nvPr>
+        </p:nvSpPr>
+        <p:spPr/>
+        <p:txBody>
+          <a:bodyPr/>
+          <a:lstStyle/>
+          <a:p>
+            <a:r>
+              <a:rPr sz="1200">
+                <a:latin typeface="Calibri"/>
+              </a:rPr>
+              <a:t>The chain idea is the whole lesson. Draw it on the board: data in, keep the first message, pass the rest out.</a:t>
+            </a:r>
+          </a:p>
+          <a:p>
+            <a:r>
+              <a:rPr sz="1200">
+                <a:latin typeface="Calibri"/>
+              </a:rPr>
+              <a:t>That is why one wire drives thirty-two lights, and why the numbering runs in data order rather than in any order that looks tidy.</a:t>
+            </a:r>
+          </a:p>
+          <a:p>
+            <a:r>
+              <a:rPr sz="1200">
+                <a:latin typeface="Calibri"/>
+              </a:rPr>
+              <a:t>The 350-pixel practical limit answers the question somebody always asks about how long a chain can be.</a:t>
+            </a:r>
+          </a:p>
+          <a:p>
+            <a:r>
+              <a:rPr sz="1200">
+                <a:latin typeface="Calibri"/>
+              </a:rPr>
+              <a:t>WS2812B is the part number. Worth saying once - they will meet it everywhere.</a:t>
+            </a:r>
+          </a:p>
+        </p:txBody>
+      </p:sp>
+      <p:sp>
+        <p:nvSpPr>
+          <p:cNvPr id="4" name="Slide Number Placeholder 3"/>
+          <p:cNvSpPr>
+            <a:spLocks noGrp="1"/>
+          </p:cNvSpPr>
+          <p:nvPr>
+            <p:ph type="sldNum" idx="5" sz="quarter"/>
+          </p:nvPr>
+        </p:nvSpPr>
+        <p:spPr/>
+      </p:sp>
+    </p:spTree>
+  </p:cSld>
+  <p:clrMapOvr>
+    <a:masterClrMapping/>
+  </p:clrMapOvr>
+</p:notes>
+</file>
+
+<file path=ppt/notesSlides/notesSlide6.xml><?xml version="1.0" encoding="utf-8"?>
+<p:notes xmlns:a="http://schemas.openxmlformats.org/drawingml/2006/main" xmlns:p="http://schemas.openxmlformats.org/presentationml/2006/main" xmlns:r="http://schemas.openxmlformats.org/officeDocument/2006/relationships">
+  <p:cSld>
+    <p:spTree>
+      <p:nvGrpSpPr>
+        <p:cNvPr id="1" name=""/>
+        <p:cNvGrpSpPr/>
+        <p:nvPr/>
+      </p:nvGrpSpPr>
+      <p:grpSpPr>
+        <a:xfrm>
+          <a:off x="0" y="0"/>
+          <a:ext cx="0" cy="0"/>
+          <a:chOff x="0" y="0"/>
+          <a:chExt cx="0" cy="0"/>
+        </a:xfrm>
+      </p:grpSpPr>
+      <p:sp>
+        <p:nvSpPr>
+          <p:cNvPr id="2" name="Slide Image Placeholder 1"/>
+          <p:cNvSpPr>
+            <a:spLocks noGrp="1"/>
+          </p:cNvSpPr>
+          <p:nvPr>
+            <p:ph type="sldImg" idx="2"/>
+          </p:nvPr>
+        </p:nvSpPr>
+        <p:spPr/>
+      </p:sp>
+      <p:sp>
+        <p:nvSpPr>
+          <p:cNvPr id="3" name="Notes Placeholder 2"/>
+          <p:cNvSpPr>
+            <a:spLocks noGrp="1"/>
+          </p:cNvSpPr>
+          <p:nvPr>
+            <p:ph type="body" idx="3" sz="quarter"/>
+          </p:nvPr>
+        </p:nvSpPr>
+        <p:spPr/>
+        <p:txBody>
+          <a:bodyPr/>
+          <a:lstStyle/>
+          <a:p>
+            <a:r>
+              <a:rPr sz="1200">
+                <a:latin typeface="Calibri"/>
+              </a:rPr>
+              <a:t>(Continued from the previous slide - the same notes apply.)</a:t>
+            </a:r>
+          </a:p>
+          <a:p/>
+          <a:p>
+            <a:r>
+              <a:rPr sz="1200">
+                <a:latin typeface="Calibri"/>
+              </a:rPr>
+              <a:t>The chain idea is the whole lesson. Draw it on the board: data in, keep the first message, pass the rest out.</a:t>
+            </a:r>
+          </a:p>
+          <a:p>
+            <a:r>
+              <a:rPr sz="1200">
+                <a:latin typeface="Calibri"/>
+              </a:rPr>
+              <a:t>That is why one wire drives thirty-two lights, and why the numbering runs in data order rather than in any order that looks tidy.</a:t>
+            </a:r>
+          </a:p>
+          <a:p>
+            <a:r>
+              <a:rPr sz="1200">
+                <a:latin typeface="Calibri"/>
+              </a:rPr>
+              <a:t>The 350-pixel practical limit answers the question somebody always asks about how long a chain can be.</a:t>
+            </a:r>
+          </a:p>
+          <a:p>
+            <a:r>
+              <a:rPr sz="1200">
+                <a:latin typeface="Calibri"/>
+              </a:rPr>
+              <a:t>WS2812B is the part number. Worth saying once - they will meet it everywhere.</a:t>
+            </a:r>
+          </a:p>
+        </p:txBody>
+      </p:sp>
+      <p:sp>
+        <p:nvSpPr>
+          <p:cNvPr id="4" name="Slide Number Placeholder 3"/>
+          <p:cNvSpPr>
+            <a:spLocks noGrp="1"/>
+          </p:cNvSpPr>
+          <p:nvPr>
+            <p:ph type="sldNum" idx="5" sz="quarter"/>
+          </p:nvPr>
+        </p:nvSpPr>
+        <p:spPr/>
+      </p:sp>
+    </p:spTree>
+  </p:cSld>
+  <p:clrMapOvr>
+    <a:masterClrMapping/>
+  </p:clrMapOvr>
+</p:notes>
+</file>
+
+<file path=ppt/notesSlides/notesSlide7.xml><?xml version="1.0" encoding="utf-8"?>
+<p:notes xmlns:a="http://schemas.openxmlformats.org/drawingml/2006/main" xmlns:p="http://schemas.openxmlformats.org/presentationml/2006/main" xmlns:r="http://schemas.openxmlformats.org/officeDocument/2006/relationships">
+  <p:cSld>
+    <p:spTree>
+      <p:nvGrpSpPr>
+        <p:cNvPr id="1" name=""/>
+        <p:cNvGrpSpPr/>
+        <p:nvPr/>
+      </p:nvGrpSpPr>
+      <p:grpSpPr>
+        <a:xfrm>
+          <a:off x="0" y="0"/>
+          <a:ext cx="0" cy="0"/>
+          <a:chOff x="0" y="0"/>
+          <a:chExt cx="0" cy="0"/>
+        </a:xfrm>
+      </p:grpSpPr>
+      <p:sp>
+        <p:nvSpPr>
+          <p:cNvPr id="2" name="Slide Image Placeholder 1"/>
+          <p:cNvSpPr>
+            <a:spLocks noGrp="1"/>
+          </p:cNvSpPr>
+          <p:nvPr>
+            <p:ph type="sldImg" idx="2"/>
+          </p:nvPr>
+        </p:nvSpPr>
+        <p:spPr/>
+      </p:sp>
+      <p:sp>
+        <p:nvSpPr>
+          <p:cNvPr id="3" name="Notes Placeholder 2"/>
+          <p:cNvSpPr>
+            <a:spLocks noGrp="1"/>
+          </p:cNvSpPr>
+          <p:nvPr>
+            <p:ph type="body" idx="3" sz="quarter"/>
+          </p:nvPr>
+        </p:nvSpPr>
+        <p:spPr/>
+        <p:txBody>
+          <a:bodyPr/>
+          <a:lstStyle/>
+          <a:p>
+            <a:r>
+              <a:rPr sz="1200">
+                <a:latin typeface="Calibri"/>
+              </a:rPr>
+              <a:t>Nine calls, and everything in this lesson and in the vehicle program is built from them. Tell them to photograph this slide.</a:t>
+            </a:r>
+          </a:p>
+          <a:p>
+            <a:r>
+              <a:rPr sz="1200">
+                <a:latin typeface="Calibri"/>
+              </a:rPr>
+              <a:t>The note is the thing to land: six of the nine only touch memory. Nothing reaches the vehicle until show().</a:t>
+            </a:r>
+          </a:p>
+          <a:p>
+            <a:r>
+              <a:rPr sz="1200">
+                <a:latin typeface="Calibri"/>
+              </a:rPr>
+              <a:t>gamma32 is on the list for completeness. One sentence - it makes fades look even to your eye - and move on.</a:t>
+            </a:r>
+          </a:p>
+        </p:txBody>
+      </p:sp>
+      <p:sp>
+        <p:nvSpPr>
+          <p:cNvPr id="4" name="Slide Number Placeholder 3"/>
+          <p:cNvSpPr>
+            <a:spLocks noGrp="1"/>
+          </p:cNvSpPr>
+          <p:nvPr>
+            <p:ph type="sldNum" idx="5" sz="quarter"/>
+          </p:nvPr>
+        </p:nvSpPr>
+        <p:spPr/>
+      </p:sp>
+    </p:spTree>
+  </p:cSld>
+  <p:clrMapOvr>
+    <a:masterClrMapping/>
+  </p:clrMapOvr>
+</p:notes>
+</file>
+
+<file path=ppt/notesSlides/notesSlide8.xml><?xml version="1.0" encoding="utf-8"?>
+<p:notes xmlns:a="http://schemas.openxmlformats.org/drawingml/2006/main" xmlns:p="http://schemas.openxmlformats.org/presentationml/2006/main" xmlns:r="http://schemas.openxmlformats.org/officeDocument/2006/relationships">
+  <p:cSld>
+    <p:spTree>
+      <p:nvGrpSpPr>
+        <p:cNvPr id="1" name=""/>
+        <p:cNvGrpSpPr/>
+        <p:nvPr/>
+      </p:nvGrpSpPr>
+      <p:grpSpPr>
+        <a:xfrm>
+          <a:off x="0" y="0"/>
+          <a:ext cx="0" cy="0"/>
+          <a:chOff x="0" y="0"/>
+          <a:chExt cx="0" cy="0"/>
+        </a:xfrm>
+      </p:grpSpPr>
+      <p:sp>
+        <p:nvSpPr>
+          <p:cNvPr id="2" name="Slide Image Placeholder 1"/>
+          <p:cNvSpPr>
+            <a:spLocks noGrp="1"/>
+          </p:cNvSpPr>
+          <p:nvPr>
+            <p:ph type="sldImg" idx="2"/>
+          </p:nvPr>
+        </p:nvSpPr>
+        <p:spPr/>
+      </p:sp>
+      <p:sp>
+        <p:nvSpPr>
+          <p:cNvPr id="3" name="Notes Placeholder 2"/>
+          <p:cNvSpPr>
+            <a:spLocks noGrp="1"/>
+          </p:cNvSpPr>
+          <p:nvPr>
+            <p:ph type="body" idx="3" sz="quarter"/>
+          </p:nvPr>
+        </p:nvSpPr>
+        <p:spPr/>
+        <p:txBody>
+          <a:bodyPr/>
+          <a:lstStyle/>
+          <a:p>
+            <a:r>
+              <a:rPr sz="1200">
+                <a:latin typeface="Calibri"/>
+              </a:rPr>
+              <a:t>One pixel is three tiny LEDs behind one lens. Hold a vehicle close enough that somebody in the front row can see them.</a:t>
+            </a:r>
+          </a:p>
+          <a:p>
+            <a:r>
+              <a:rPr sz="1200">
+                <a:latin typeface="Calibri"/>
+              </a:rPr>
+              <a:t>Three numbers, 0 to 255 each, is 16.7 million colours. Worth doing the multiplication on the board.</a:t>
+            </a:r>
+          </a:p>
+          <a:p>
+            <a:r>
+              <a:rPr sz="1200">
+                <a:latin typeface="Calibri"/>
+              </a:rPr>
+              <a:t>Warn them now: 255, 255, 255 is every LED at full, and it is both blinding and expensive in current. The power budget slide follows for a reason.</a:t>
+            </a:r>
+          </a:p>
+          <a:p>
+            <a:r>
+              <a:rPr sz="1200">
+                <a:latin typeface="Calibri"/>
+              </a:rPr>
+              <a:t>If time allows, get them to predict a colour before they type it, then check. Predicting is what makes it stick.</a:t>
+            </a:r>
+          </a:p>
+        </p:txBody>
+      </p:sp>
+      <p:sp>
+        <p:nvSpPr>
+          <p:cNvPr id="4" name="Slide Number Placeholder 3"/>
+          <p:cNvSpPr>
+            <a:spLocks noGrp="1"/>
+          </p:cNvSpPr>
+          <p:nvPr>
+            <p:ph type="sldNum" idx="5" sz="quarter"/>
+          </p:nvPr>
+        </p:nvSpPr>
+        <p:spPr/>
+      </p:sp>
+    </p:spTree>
+  </p:cSld>
+  <p:clrMapOvr>
+    <a:masterClrMapping/>
+  </p:clrMapOvr>
+</p:notes>
+</file>
+
+<file path=ppt/notesSlides/notesSlide9.xml><?xml version="1.0" encoding="utf-8"?>
+<p:notes xmlns:a="http://schemas.openxmlformats.org/drawingml/2006/main" xmlns:p="http://schemas.openxmlformats.org/presentationml/2006/main" xmlns:r="http://schemas.openxmlformats.org/officeDocument/2006/relationships">
+  <p:cSld>
+    <p:spTree>
+      <p:nvGrpSpPr>
+        <p:cNvPr id="1" name=""/>
+        <p:cNvGrpSpPr/>
+        <p:nvPr/>
+      </p:nvGrpSpPr>
+      <p:grpSpPr>
+        <a:xfrm>
+          <a:off x="0" y="0"/>
+          <a:ext cx="0" cy="0"/>
+          <a:chOff x="0" y="0"/>
+          <a:chExt cx="0" cy="0"/>
+        </a:xfrm>
+      </p:grpSpPr>
+      <p:sp>
+        <p:nvSpPr>
+          <p:cNvPr id="2" name="Slide Image Placeholder 1"/>
+          <p:cNvSpPr>
+            <a:spLocks noGrp="1"/>
+          </p:cNvSpPr>
+          <p:nvPr>
+            <p:ph type="sldImg" idx="2"/>
+          </p:nvPr>
+        </p:nvSpPr>
+        <p:spPr/>
+      </p:sp>
+      <p:sp>
+        <p:nvSpPr>
+          <p:cNvPr id="3" name="Notes Placeholder 2"/>
+          <p:cNvSpPr>
+            <a:spLocks noGrp="1"/>
+          </p:cNvSpPr>
+          <p:nvPr>
+            <p:ph type="body" idx="3" sz="quarter"/>
+          </p:nvPr>
+        </p:nvSpPr>
+        <p:spPr/>
+        <p:txBody>
+          <a:bodyPr/>
+          <a:lstStyle/>
+          <a:p>
+            <a:r>
+              <a:rPr sz="1200">
+                <a:latin typeface="Calibri"/>
+              </a:rPr>
+              <a:t>This distinction confuses people for years. Ten minutes here saves hours later.</a:t>
+            </a:r>
+          </a:p>
+          <a:p>
+            <a:r>
+              <a:rPr sz="1200">
+                <a:latin typeface="Calibri"/>
+              </a:rPr>
+              <a:t>Colour value changes WHAT you asked for. Brightness scales EVERYTHING on the way out.</a:t>
+            </a:r>
+          </a:p>
+          <a:p>
+            <a:r>
+              <a:rPr sz="1200">
+                <a:latin typeface="Calibri"/>
+              </a:rPr>
+              <a:t>The lossy point explains a real bug they will hit: a fade that ends abruptly instead of going smoothly to black.</a:t>
+            </a:r>
+          </a:p>
+          <a:p>
+            <a:r>
+              <a:rPr sz="1200">
+                <a:latin typeface="Calibri"/>
+              </a:rPr>
+              <a:t>Rule of thumb worth repeating: set brightness once in setup, then work in colour values.</a:t>
+            </a:r>
+          </a:p>
+        </p:txBody>
+      </p:sp>
+      <p:sp>
+        <p:nvSpPr>
+          <p:cNvPr id="4" name="Slide Number Placeholder 3"/>
+          <p:cNvSpPr>
+            <a:spLocks noGrp="1"/>
+          </p:cNvSpPr>
+          <p:nvPr>
+            <p:ph type="sldNum" idx="5" sz="quarter"/>
+          </p:nvPr>
+        </p:nvSpPr>
+        <p:spPr/>
+      </p:sp>
+    </p:spTree>
+  </p:cSld>
+  <p:clrMapOvr>
+    <a:masterClrMapping/>
+  </p:clrMapOvr>
+</p:notes>
 </file>
 
 <file path=ppt/slideLayouts/slideLayout1.xml><?xml version="1.0" encoding="utf-8"?>
@@ -3601,7 +7017,7 @@
         </p:blipFill>
         <p:spPr>
           <a:xfrm>
-            <a:off x="7223760" y="1371600"/>
+            <a:off x="7223760" y="2023797"/>
             <a:ext cx="4480560" cy="3359046"/>
           </a:xfrm>
           <a:prstGeom prst="rect">
@@ -3897,6 +7313,81 @@
                 <a:latin typeface="Calibri"/>
               </a:defRPr>
             </a:pPr>
+            <a:r>
+              <a:rPr sz="1800" b="0">
+                <a:solidFill>
+                  <a:srgbClr val="222222"/>
+                </a:solidFill>
+                <a:latin typeface="Calibri"/>
+              </a:rPr>
+              <a:t>Two things worth knowing about setBrightness:</a:t>
+            </a:r>
+          </a:p>
+          <a:p>
+            <a:pPr lvl="1" algn="l">
+              <a:lnSpc>
+                <a:spcPct val="100000"/>
+              </a:lnSpc>
+              <a:spcAft>
+                <a:spcPts val="900"/>
+              </a:spcAft>
+              <a:defRPr sz="1800" b="0">
+                <a:solidFill>
+                  <a:srgbClr val="222222"/>
+                </a:solidFill>
+                <a:latin typeface="Calibri"/>
+              </a:defRPr>
+            </a:pPr>
+            <a:r>
+              <a:rPr sz="1800" b="0">
+                <a:solidFill>
+                  <a:srgbClr val="222222"/>
+                </a:solidFill>
+                <a:latin typeface="Calibri"/>
+              </a:rPr>
+              <a:t>It is applied when show() is called, so changing it does nothing until the next show().</a:t>
+            </a:r>
+          </a:p>
+          <a:p>
+            <a:pPr lvl="1" algn="l">
+              <a:lnSpc>
+                <a:spcPct val="100000"/>
+              </a:lnSpc>
+              <a:spcAft>
+                <a:spcPts val="900"/>
+              </a:spcAft>
+              <a:defRPr sz="1800" b="0">
+                <a:solidFill>
+                  <a:srgbClr val="222222"/>
+                </a:solidFill>
+                <a:latin typeface="Calibri"/>
+              </a:defRPr>
+            </a:pPr>
+            <a:r>
+              <a:rPr sz="1800" b="0">
+                <a:solidFill>
+                  <a:srgbClr val="222222"/>
+                </a:solidFill>
+                <a:latin typeface="Calibri"/>
+              </a:rPr>
+              <a:t>It is LOSSY. Set a pixel to 4, scale by 60/255, and it rounds to 0. Very dim colours disappear rather than getting dimmer, which is why a fade can end abruptly.</a:t>
+            </a:r>
+          </a:p>
+          <a:p>
+            <a:pPr algn="l">
+              <a:lnSpc>
+                <a:spcPct val="100000"/>
+              </a:lnSpc>
+              <a:spcAft>
+                <a:spcPts val="900"/>
+              </a:spcAft>
+              <a:defRPr sz="1800" b="0">
+                <a:solidFill>
+                  <a:srgbClr val="222222"/>
+                </a:solidFill>
+                <a:latin typeface="Calibri"/>
+              </a:defRPr>
+            </a:pPr>
           </a:p>
           <a:p>
             <a:pPr algn="l">
@@ -4759,6 +8250,22 @@
                 <a:latin typeface="Calibri"/>
               </a:defRPr>
             </a:pPr>
+          </a:p>
+          <a:p>
+            <a:pPr algn="l">
+              <a:lnSpc>
+                <a:spcPct val="100000"/>
+              </a:lnSpc>
+              <a:spcAft>
+                <a:spcPts val="400"/>
+              </a:spcAft>
+              <a:defRPr sz="1800" b="0">
+                <a:solidFill>
+                  <a:srgbClr val="222222"/>
+                </a:solidFill>
+                <a:latin typeface="Calibri"/>
+              </a:defRPr>
+            </a:pPr>
             <a:r>
               <a:rPr sz="1800" b="0">
                 <a:solidFill>
@@ -4840,6 +8347,22 @@
             <a:spAutoFit/>
           </a:bodyPr>
           <a:lstStyle/>
+          <a:p>
+            <a:pPr algn="l">
+              <a:lnSpc>
+                <a:spcPct val="100000"/>
+              </a:lnSpc>
+              <a:spcAft>
+                <a:spcPts val="400"/>
+              </a:spcAft>
+              <a:defRPr sz="1800" b="0">
+                <a:solidFill>
+                  <a:srgbClr val="222222"/>
+                </a:solidFill>
+                <a:latin typeface="Calibri"/>
+              </a:defRPr>
+            </a:pPr>
+          </a:p>
           <a:p>
             <a:pPr algn="l">
               <a:lnSpc>
@@ -5331,72 +8854,6 @@
               <a:t>At 5 volts:  1920 mA x 5 V = 9600 mW = 9.6 watts</a:t>
             </a:r>
           </a:p>
-          <a:p>
-            <a:pPr algn="l">
-              <a:lnSpc>
-                <a:spcPct val="100000"/>
-              </a:lnSpc>
-              <a:spcAft>
-                <a:spcPts val="900"/>
-              </a:spcAft>
-              <a:defRPr sz="1800" b="0">
-                <a:solidFill>
-                  <a:srgbClr val="222222"/>
-                </a:solidFill>
-                <a:latin typeface="Calibri"/>
-              </a:defRPr>
-            </a:pPr>
-          </a:p>
-          <a:p>
-            <a:pPr algn="l">
-              <a:lnSpc>
-                <a:spcPct val="100000"/>
-              </a:lnSpc>
-              <a:spcAft>
-                <a:spcPts val="900"/>
-              </a:spcAft>
-              <a:defRPr sz="1800" b="0">
-                <a:solidFill>
-                  <a:srgbClr val="222222"/>
-                </a:solidFill>
-                <a:latin typeface="Calibri"/>
-              </a:defRPr>
-            </a:pPr>
-            <a:r>
-              <a:rPr sz="1800" b="0">
-                <a:solidFill>
-                  <a:srgbClr val="222222"/>
-                </a:solidFill>
-                <a:latin typeface="Calibri"/>
-              </a:rPr>
-              <a:t>That is a lot of power through a small board, and it makes real heat. Two things keep it sane:</a:t>
-            </a:r>
-          </a:p>
-          <a:p>
-            <a:pPr lvl="1" algn="l">
-              <a:lnSpc>
-                <a:spcPct val="100000"/>
-              </a:lnSpc>
-              <a:spcAft>
-                <a:spcPts val="900"/>
-              </a:spcAft>
-              <a:defRPr sz="1800" b="0">
-                <a:solidFill>
-                  <a:srgbClr val="222222"/>
-                </a:solidFill>
-                <a:latin typeface="Calibri"/>
-              </a:defRPr>
-            </a:pPr>
-            <a:r>
-              <a:rPr sz="1800" b="0">
-                <a:solidFill>
-                  <a:srgbClr val="222222"/>
-                </a:solidFill>
-                <a:latin typeface="Calibri"/>
-              </a:rPr>
-              <a:t>setBrightness() scales EVERY pixel before it is sent. At 60 out of 255 you draw roughly a quarter of the worst case.</a:t>
-            </a:r>
-          </a:p>
         </p:txBody>
       </p:sp>
     </p:spTree>
@@ -5625,6 +9082,56 @@
           </a:bodyPr>
           <a:lstStyle/>
           <a:p>
+            <a:pPr algn="l">
+              <a:lnSpc>
+                <a:spcPct val="100000"/>
+              </a:lnSpc>
+              <a:spcAft>
+                <a:spcPts val="900"/>
+              </a:spcAft>
+              <a:defRPr sz="1800" b="0">
+                <a:solidFill>
+                  <a:srgbClr val="222222"/>
+                </a:solidFill>
+                <a:latin typeface="Calibri"/>
+              </a:defRPr>
+            </a:pPr>
+            <a:r>
+              <a:rPr sz="1800" b="0">
+                <a:solidFill>
+                  <a:srgbClr val="222222"/>
+                </a:solidFill>
+                <a:latin typeface="Calibri"/>
+              </a:rPr>
+              <a:t>That is a lot of power through a small board, and it makes real heat. Two things keep it sane:</a:t>
+            </a:r>
+          </a:p>
+          <a:p>
+            <a:pPr lvl="1" algn="l">
+              <a:lnSpc>
+                <a:spcPct val="100000"/>
+              </a:lnSpc>
+              <a:spcAft>
+                <a:spcPts val="900"/>
+              </a:spcAft>
+              <a:defRPr sz="1800" b="0">
+                <a:solidFill>
+                  <a:srgbClr val="222222"/>
+                </a:solidFill>
+                <a:latin typeface="Calibri"/>
+              </a:defRPr>
+            </a:pPr>
+            <a:r>
+              <a:rPr sz="1800" b="0">
+                <a:solidFill>
+                  <a:srgbClr val="222222"/>
+                </a:solidFill>
+                <a:latin typeface="Calibri"/>
+              </a:rPr>
+              <a:t>setBrightness() scales EVERY pixel before it is sent. At 60 out of 255 you draw roughly a quarter of the worst case.</a:t>
+            </a:r>
+          </a:p>
+          <a:p>
             <a:pPr lvl="1" algn="l">
               <a:lnSpc>
                 <a:spcPct val="100000"/>
@@ -13097,81 +16604,6 @@
               <a:t>3.  Write the numbers onto a sketch of the vehicle. Keep it.</a:t>
             </a:r>
           </a:p>
-          <a:p>
-            <a:pPr algn="l">
-              <a:lnSpc>
-                <a:spcPct val="100000"/>
-              </a:lnSpc>
-              <a:spcAft>
-                <a:spcPts val="400"/>
-              </a:spcAft>
-              <a:defRPr sz="1800" b="0">
-                <a:solidFill>
-                  <a:srgbClr val="222222"/>
-                </a:solidFill>
-                <a:latin typeface="Calibri"/>
-              </a:defRPr>
-            </a:pPr>
-            <a:r>
-              <a:rPr sz="1800" b="0">
-                <a:solidFill>
-                  <a:srgbClr val="222222"/>
-                </a:solidFill>
-                <a:latin typeface="Calibri"/>
-              </a:rPr>
-              <a:t>4.  During the four-sides section, check that LEFT really is 0-7 and 24-31.</a:t>
-            </a:r>
-          </a:p>
-          <a:p>
-            <a:pPr algn="l">
-              <a:lnSpc>
-                <a:spcPct val="100000"/>
-              </a:lnSpc>
-              <a:spcAft>
-                <a:spcPts val="400"/>
-              </a:spcAft>
-              <a:defRPr sz="1800" b="0">
-                <a:solidFill>
-                  <a:srgbClr val="222222"/>
-                </a:solidFill>
-                <a:latin typeface="Calibri"/>
-              </a:defRPr>
-            </a:pPr>
-            <a:r>
-              <a:rPr sz="1800" b="0">
-                <a:solidFill>
-                  <a:srgbClr val="222222"/>
-                </a:solidFill>
-                <a:latin typeface="Calibri"/>
-              </a:rPr>
-              <a:t>5.  During the mirror section, check that the two lit LEDs really are opposite each other.</a:t>
-            </a:r>
-          </a:p>
-          <a:p>
-            <a:pPr algn="l">
-              <a:lnSpc>
-                <a:spcPct val="100000"/>
-              </a:lnSpc>
-              <a:spcAft>
-                <a:spcPts val="400"/>
-              </a:spcAft>
-              <a:defRPr sz="1800" b="0">
-                <a:solidFill>
-                  <a:srgbClr val="222222"/>
-                </a:solidFill>
-                <a:latin typeface="Calibri"/>
-              </a:defRPr>
-            </a:pPr>
-            <a:r>
-              <a:rPr sz="1800" b="0">
-                <a:solidFill>
-                  <a:srgbClr val="222222"/>
-                </a:solidFill>
-                <a:latin typeface="Calibri"/>
-              </a:rPr>
-              <a:t>6.  Change showSide so that FRONT lights only the middle four LEDs. Which numbers are those?</a:t>
-            </a:r>
-          </a:p>
         </p:txBody>
       </p:sp>
       <p:sp>
@@ -13702,6 +17134,81 @@
                 </a:solidFill>
                 <a:latin typeface="Calibri"/>
               </a:rPr>
+              <a:t>4.  During the four-sides section, check that LEFT really is 0-7 and 24-31.</a:t>
+            </a:r>
+          </a:p>
+          <a:p>
+            <a:pPr algn="l">
+              <a:lnSpc>
+                <a:spcPct val="100000"/>
+              </a:lnSpc>
+              <a:spcAft>
+                <a:spcPts val="400"/>
+              </a:spcAft>
+              <a:defRPr sz="1800" b="0">
+                <a:solidFill>
+                  <a:srgbClr val="222222"/>
+                </a:solidFill>
+                <a:latin typeface="Calibri"/>
+              </a:defRPr>
+            </a:pPr>
+            <a:r>
+              <a:rPr sz="1800" b="0">
+                <a:solidFill>
+                  <a:srgbClr val="222222"/>
+                </a:solidFill>
+                <a:latin typeface="Calibri"/>
+              </a:rPr>
+              <a:t>5.  During the mirror section, check that the two lit LEDs really are opposite each other.</a:t>
+            </a:r>
+          </a:p>
+          <a:p>
+            <a:pPr algn="l">
+              <a:lnSpc>
+                <a:spcPct val="100000"/>
+              </a:lnSpc>
+              <a:spcAft>
+                <a:spcPts val="400"/>
+              </a:spcAft>
+              <a:defRPr sz="1800" b="0">
+                <a:solidFill>
+                  <a:srgbClr val="222222"/>
+                </a:solidFill>
+                <a:latin typeface="Calibri"/>
+              </a:defRPr>
+            </a:pPr>
+            <a:r>
+              <a:rPr sz="1800" b="0">
+                <a:solidFill>
+                  <a:srgbClr val="222222"/>
+                </a:solidFill>
+                <a:latin typeface="Calibri"/>
+              </a:rPr>
+              <a:t>6.  Change showSide so that FRONT lights only the middle four LEDs. Which numbers are those?</a:t>
+            </a:r>
+          </a:p>
+          <a:p>
+            <a:pPr algn="l">
+              <a:lnSpc>
+                <a:spcPct val="100000"/>
+              </a:lnSpc>
+              <a:spcAft>
+                <a:spcPts val="400"/>
+              </a:spcAft>
+              <a:defRPr sz="1800" b="0">
+                <a:solidFill>
+                  <a:srgbClr val="222222"/>
+                </a:solidFill>
+                <a:latin typeface="Calibri"/>
+              </a:defRPr>
+            </a:pPr>
+            <a:r>
+              <a:rPr sz="1800" b="0">
+                <a:solidFill>
+                  <a:srgbClr val="222222"/>
+                </a:solidFill>
+                <a:latin typeface="Calibri"/>
+              </a:rPr>
               <a:t>7.  Add a section that lights the four CORNERS.</a:t>
             </a:r>
           </a:p>
@@ -14799,47 +18306,6 @@
               <a:t>One loop, one delay per LED.</a:t>
             </a:r>
           </a:p>
-          <a:p>
-            <a:pPr algn="l">
-              <a:lnSpc>
-                <a:spcPct val="100000"/>
-              </a:lnSpc>
-              <a:spcAft>
-                <a:spcPts val="400"/>
-              </a:spcAft>
-              <a:defRPr sz="1800" b="0">
-                <a:solidFill>
-                  <a:srgbClr val="222222"/>
-                </a:solidFill>
-                <a:latin typeface="Calibri"/>
-              </a:defRPr>
-            </a:pPr>
-          </a:p>
-          <a:p>
-            <a:pPr algn="l">
-              <a:lnSpc>
-                <a:spcPct val="100000"/>
-              </a:lnSpc>
-              <a:spcAft>
-                <a:spcPts val="400"/>
-              </a:spcAft>
-              <a:defRPr sz="1800" b="0">
-                <a:solidFill>
-                  <a:srgbClr val="222222"/>
-                </a:solidFill>
-                <a:latin typeface="Calibri"/>
-              </a:defRPr>
-            </a:pPr>
-            <a:r>
-              <a:rPr sz="1800" b="0">
-                <a:solidFill>
-                  <a:srgbClr val="222222"/>
-                </a:solidFill>
-                <a:latin typeface="Calibri"/>
-              </a:rPr>
-              <a:t>theaterChase lights every third LED and shuffles the pattern along by one each frame, so the lights appear to chase each other.</a:t>
-            </a:r>
-          </a:p>
         </p:txBody>
       </p:sp>
       <p:sp>
@@ -15237,6 +18703,31 @@
           </a:bodyPr>
           <a:lstStyle/>
           <a:p>
+            <a:pPr algn="l">
+              <a:lnSpc>
+                <a:spcPct val="100000"/>
+              </a:lnSpc>
+              <a:spcAft>
+                <a:spcPts val="400"/>
+              </a:spcAft>
+              <a:defRPr sz="1800" b="0">
+                <a:solidFill>
+                  <a:srgbClr val="222222"/>
+                </a:solidFill>
+                <a:latin typeface="Calibri"/>
+              </a:defRPr>
+            </a:pPr>
+            <a:r>
+              <a:rPr sz="1800" b="0">
+                <a:solidFill>
+                  <a:srgbClr val="222222"/>
+                </a:solidFill>
+                <a:latin typeface="Calibri"/>
+              </a:rPr>
+              <a:t>theaterChase lights every third LED and shuffles the pattern along by one each frame, so the lights appear to chase each other.</a:t>
+            </a:r>
+          </a:p>
+          <a:p>
             <a:pPr lvl="1" algn="l">
               <a:lnSpc>
                 <a:spcPct val="100000"/>
@@ -15332,6 +18823,22 @@
             <a:spAutoFit/>
           </a:bodyPr>
           <a:lstStyle/>
+          <a:p>
+            <a:pPr algn="l">
+              <a:lnSpc>
+                <a:spcPct val="100000"/>
+              </a:lnSpc>
+              <a:spcAft>
+                <a:spcPts val="400"/>
+              </a:spcAft>
+              <a:defRPr sz="1800" b="0">
+                <a:solidFill>
+                  <a:srgbClr val="222222"/>
+                </a:solidFill>
+                <a:latin typeface="Calibri"/>
+              </a:defRPr>
+            </a:pPr>
+          </a:p>
           <a:p>
             <a:pPr algn="l">
               <a:lnSpc>
@@ -17258,7 +20765,7 @@
             </a:r>
           </a:p>
           <a:p>
-            <a:pPr algn="l">
+            <a:pPr lvl="1" algn="l">
               <a:lnSpc>
                 <a:spcPct val="100000"/>
               </a:lnSpc>
@@ -17272,22 +20779,6 @@
                 <a:latin typeface="Calibri"/>
               </a:defRPr>
             </a:pPr>
-          </a:p>
-          <a:p>
-            <a:pPr algn="l">
-              <a:lnSpc>
-                <a:spcPct val="100000"/>
-              </a:lnSpc>
-              <a:spcAft>
-                <a:spcPts val="900"/>
-              </a:spcAft>
-              <a:defRPr sz="1800" b="0">
-                <a:solidFill>
-                  <a:srgbClr val="222222"/>
-                </a:solidFill>
-                <a:latin typeface="Calibri"/>
-              </a:defRPr>
-            </a:pPr>
             <a:r>
               <a:rPr sz="1800" b="0">
                 <a:solidFill>
@@ -17295,7 +20786,7 @@
                 </a:solidFill>
                 <a:latin typeface="Calibri"/>
               </a:rPr>
-              <a:t>Rules: it must be a function you call from loop(), and it must use at least one for loop.</a:t>
+              <a:t>A stoplight - the front bar red, then amber, then green, on a timer, with the rear bar showing the same thing</a:t>
             </a:r>
           </a:p>
         </p:txBody>
@@ -17526,7 +21017,7 @@
           </a:bodyPr>
           <a:lstStyle/>
           <a:p>
-            <a:pPr algn="l">
+            <a:pPr lvl="1" algn="l">
               <a:lnSpc>
                 <a:spcPct val="100000"/>
               </a:lnSpc>
@@ -17540,22 +21031,6 @@
                 <a:latin typeface="Calibri"/>
               </a:defRPr>
             </a:pPr>
-          </a:p>
-          <a:p>
-            <a:pPr algn="l">
-              <a:lnSpc>
-                <a:spcPct val="100000"/>
-              </a:lnSpc>
-              <a:spcAft>
-                <a:spcPts val="900"/>
-              </a:spcAft>
-              <a:defRPr sz="1800" b="0">
-                <a:solidFill>
-                  <a:srgbClr val="222222"/>
-                </a:solidFill>
-                <a:latin typeface="Calibri"/>
-              </a:defRPr>
-            </a:pPr>
             <a:r>
               <a:rPr sz="1800" b="0">
                 <a:solidFill>
@@ -17563,7 +21038,7 @@
                 </a:solidFill>
                 <a:latin typeface="Calibri"/>
               </a:rPr>
-              <a:t>Then show the class. Best one gets used in the race next lesson.</a:t>
+              <a:t>D-pad quadrants - press up, right, down or left and light only that quarter of the vehicle</a:t>
             </a:r>
           </a:p>
         </p:txBody>
@@ -18061,7 +21536,7 @@
                 </a:solidFill>
                 <a:latin typeface="Calibri"/>
               </a:rPr>
-              <a:t>When the lights will not do what you want</a:t>
+              <a:t>Design a pattern of your own  (continued)</a:t>
             </a:r>
           </a:p>
         </p:txBody>
@@ -18202,6 +21677,315 @@
                 <a:latin typeface="Calibri"/>
               </a:rPr>
               <a:t>29</a:t>
+            </a:r>
+          </a:p>
+        </p:txBody>
+      </p:sp>
+      <p:sp>
+        <p:nvSpPr>
+          <p:cNvPr id="6" name="TextBox 5"/>
+          <p:cNvSpPr txBox="1"/>
+          <p:nvPr/>
+        </p:nvSpPr>
+        <p:spPr>
+          <a:xfrm>
+            <a:off x="502920" y="1188720"/>
+            <a:ext cx="11185855" cy="5074920"/>
+          </a:xfrm>
+          <a:prstGeom prst="rect">
+            <a:avLst/>
+          </a:prstGeom>
+          <a:noFill/>
+        </p:spPr>
+        <p:txBody>
+          <a:bodyPr wrap="square" lIns="0" tIns="0" rIns="0" bIns="0">
+            <a:spAutoFit/>
+          </a:bodyPr>
+          <a:lstStyle/>
+          <a:p>
+            <a:pPr algn="l">
+              <a:lnSpc>
+                <a:spcPct val="100000"/>
+              </a:lnSpc>
+              <a:spcAft>
+                <a:spcPts val="900"/>
+              </a:spcAft>
+              <a:defRPr sz="1800" b="0">
+                <a:solidFill>
+                  <a:srgbClr val="222222"/>
+                </a:solidFill>
+                <a:latin typeface="Calibri"/>
+              </a:defRPr>
+            </a:pPr>
+          </a:p>
+          <a:p>
+            <a:pPr algn="l">
+              <a:lnSpc>
+                <a:spcPct val="100000"/>
+              </a:lnSpc>
+              <a:spcAft>
+                <a:spcPts val="900"/>
+              </a:spcAft>
+              <a:defRPr sz="1800" b="0">
+                <a:solidFill>
+                  <a:srgbClr val="222222"/>
+                </a:solidFill>
+                <a:latin typeface="Calibri"/>
+              </a:defRPr>
+            </a:pPr>
+            <a:r>
+              <a:rPr sz="1800" b="0">
+                <a:solidFill>
+                  <a:srgbClr val="222222"/>
+                </a:solidFill>
+                <a:latin typeface="Calibri"/>
+              </a:rPr>
+              <a:t>Rules: it must be a function you call from loop(), and it must use at least one for loop.</a:t>
+            </a:r>
+          </a:p>
+          <a:p>
+            <a:pPr algn="l">
+              <a:lnSpc>
+                <a:spcPct val="100000"/>
+              </a:lnSpc>
+              <a:spcAft>
+                <a:spcPts val="900"/>
+              </a:spcAft>
+              <a:defRPr sz="1800" b="0">
+                <a:solidFill>
+                  <a:srgbClr val="222222"/>
+                </a:solidFill>
+                <a:latin typeface="Calibri"/>
+              </a:defRPr>
+            </a:pPr>
+          </a:p>
+          <a:p>
+            <a:pPr algn="l">
+              <a:lnSpc>
+                <a:spcPct val="100000"/>
+              </a:lnSpc>
+              <a:spcAft>
+                <a:spcPts val="900"/>
+              </a:spcAft>
+              <a:defRPr sz="1800" b="0">
+                <a:solidFill>
+                  <a:srgbClr val="222222"/>
+                </a:solidFill>
+                <a:latin typeface="Calibri"/>
+              </a:defRPr>
+            </a:pPr>
+            <a:r>
+              <a:rPr sz="1800" b="0">
+                <a:solidFill>
+                  <a:srgbClr val="222222"/>
+                </a:solidFill>
+                <a:latin typeface="Calibri"/>
+              </a:rPr>
+              <a:t>Then show the class. Best one gets used in the race next lesson.</a:t>
+            </a:r>
+          </a:p>
+        </p:txBody>
+      </p:sp>
+    </p:spTree>
+  </p:cSld>
+  <p:clrMapOvr>
+    <a:masterClrMapping/>
+  </p:clrMapOvr>
+</p:sld>
+</file>
+
+<file path=ppt/slides/slide31.xml><?xml version="1.0" encoding="utf-8"?>
+<p:sld xmlns:a="http://schemas.openxmlformats.org/drawingml/2006/main" xmlns:p="http://schemas.openxmlformats.org/presentationml/2006/main" xmlns:r="http://schemas.openxmlformats.org/officeDocument/2006/relationships">
+  <p:cSld>
+    <p:spTree>
+      <p:nvGrpSpPr>
+        <p:cNvPr id="1" name=""/>
+        <p:cNvGrpSpPr/>
+        <p:nvPr/>
+      </p:nvGrpSpPr>
+      <p:grpSpPr/>
+      <p:sp>
+        <p:nvSpPr>
+          <p:cNvPr id="2" name="Title 1"/>
+          <p:cNvSpPr>
+            <a:spLocks noGrp="1"/>
+          </p:cNvSpPr>
+          <p:nvPr>
+            <p:ph type="title"/>
+          </p:nvPr>
+        </p:nvSpPr>
+        <p:spPr>
+          <a:xfrm>
+            <a:off x="502920" y="274320"/>
+            <a:ext cx="11185855" cy="777240"/>
+          </a:xfrm>
+        </p:spPr>
+        <p:txBody>
+          <a:bodyPr wrap="square" anchor="b"/>
+          <a:lstStyle/>
+          <a:p>
+            <a:pPr algn="l">
+              <a:lnSpc>
+                <a:spcPct val="100000"/>
+              </a:lnSpc>
+              <a:spcAft>
+                <a:spcPts val="0"/>
+              </a:spcAft>
+              <a:defRPr sz="2800" b="1">
+                <a:solidFill>
+                  <a:srgbClr val="1F3A5F"/>
+                </a:solidFill>
+                <a:latin typeface="Calibri"/>
+              </a:defRPr>
+            </a:pPr>
+            <a:r>
+              <a:rPr sz="2800" b="1">
+                <a:solidFill>
+                  <a:srgbClr val="1F3A5F"/>
+                </a:solidFill>
+                <a:latin typeface="Calibri"/>
+              </a:rPr>
+              <a:t>When the lights will not do what you want</a:t>
+            </a:r>
+          </a:p>
+        </p:txBody>
+      </p:sp>
+      <p:sp>
+        <p:nvSpPr>
+          <p:cNvPr id="3" name="Rectangle 2"/>
+          <p:cNvSpPr/>
+          <p:nvPr/>
+        </p:nvSpPr>
+        <p:spPr>
+          <a:xfrm>
+            <a:off x="502920" y="1097280"/>
+            <a:ext cx="11185855" cy="19050"/>
+          </a:xfrm>
+          <a:prstGeom prst="rect">
+            <a:avLst/>
+          </a:prstGeom>
+          <a:solidFill>
+            <a:srgbClr val="C8D2DE"/>
+          </a:solidFill>
+          <a:ln>
+            <a:noFill/>
+          </a:ln>
+          <a:effectLst/>
+        </p:spPr>
+        <p:style>
+          <a:lnRef idx="1">
+            <a:schemeClr val="accent1"/>
+          </a:lnRef>
+          <a:fillRef idx="3">
+            <a:schemeClr val="accent1"/>
+          </a:fillRef>
+          <a:effectRef idx="2">
+            <a:schemeClr val="accent1"/>
+          </a:effectRef>
+          <a:fontRef idx="minor">
+            <a:schemeClr val="lt1"/>
+          </a:fontRef>
+        </p:style>
+        <p:txBody>
+          <a:bodyPr rtlCol="0" anchor="ctr"/>
+          <a:lstStyle/>
+          <a:p>
+            <a:pPr algn="ctr"/>
+          </a:p>
+        </p:txBody>
+      </p:sp>
+      <p:sp>
+        <p:nvSpPr>
+          <p:cNvPr id="4" name="TextBox 3"/>
+          <p:cNvSpPr txBox="1"/>
+          <p:nvPr/>
+        </p:nvSpPr>
+        <p:spPr>
+          <a:xfrm>
+            <a:off x="502920" y="6382512"/>
+            <a:ext cx="10545775" cy="274320"/>
+          </a:xfrm>
+          <a:prstGeom prst="rect">
+            <a:avLst/>
+          </a:prstGeom>
+          <a:noFill/>
+        </p:spPr>
+        <p:txBody>
+          <a:bodyPr wrap="square" lIns="0" tIns="0">
+            <a:spAutoFit/>
+          </a:bodyPr>
+          <a:lstStyle/>
+          <a:p>
+            <a:pPr algn="l">
+              <a:lnSpc>
+                <a:spcPct val="100000"/>
+              </a:lnSpc>
+              <a:spcAft>
+                <a:spcPts val="0"/>
+              </a:spcAft>
+              <a:defRPr sz="1000" b="0">
+                <a:solidFill>
+                  <a:srgbClr val="666666"/>
+                </a:solidFill>
+                <a:latin typeface="Calibri"/>
+              </a:defRPr>
+            </a:pPr>
+            <a:r>
+              <a:rPr sz="1000" b="0">
+                <a:solidFill>
+                  <a:srgbClr val="666666"/>
+                </a:solidFill>
+                <a:latin typeface="Calibri"/>
+              </a:rPr>
+              <a:t>Pathfinder Beginner - PS3  |  Lesson 4</a:t>
+            </a:r>
+          </a:p>
+        </p:txBody>
+      </p:sp>
+      <p:sp>
+        <p:nvSpPr>
+          <p:cNvPr id="5" name="TextBox 4"/>
+          <p:cNvSpPr txBox="1"/>
+          <p:nvPr/>
+        </p:nvSpPr>
+        <p:spPr>
+          <a:xfrm>
+            <a:off x="11231575" y="6382512"/>
+            <a:ext cx="457200" cy="274320"/>
+          </a:xfrm>
+          <a:prstGeom prst="rect">
+            <a:avLst/>
+          </a:prstGeom>
+          <a:noFill/>
+        </p:spPr>
+        <p:txBody>
+          <a:bodyPr wrap="square" lIns="0" tIns="0">
+            <a:spAutoFit/>
+          </a:bodyPr>
+          <a:lstStyle/>
+          <a:p>
+            <a:pPr algn="r">
+              <a:lnSpc>
+                <a:spcPct val="100000"/>
+              </a:lnSpc>
+              <a:spcAft>
+                <a:spcPts val="0"/>
+              </a:spcAft>
+              <a:defRPr sz="1000" b="0">
+                <a:solidFill>
+                  <a:srgbClr val="666666"/>
+                </a:solidFill>
+                <a:latin typeface="Calibri"/>
+              </a:defRPr>
+            </a:pPr>
+            <a:r>
+              <a:rPr sz="1000" b="0">
+                <a:solidFill>
+                  <a:srgbClr val="666666"/>
+                </a:solidFill>
+                <a:latin typeface="Calibri"/>
+              </a:rPr>
+              <a:t>30</a:t>
             </a:r>
           </a:p>
         </p:txBody>
@@ -18833,7 +22617,7 @@
 </p:sld>
 </file>
 
-<file path=ppt/slides/slide31.xml><?xml version="1.0" encoding="utf-8"?>
+<file path=ppt/slides/slide32.xml><?xml version="1.0" encoding="utf-8"?>
 <p:sld xmlns:a="http://schemas.openxmlformats.org/drawingml/2006/main" xmlns:p="http://schemas.openxmlformats.org/presentationml/2006/main" xmlns:r="http://schemas.openxmlformats.org/officeDocument/2006/relationships">
   <p:cSld>
     <p:spTree>
@@ -19024,7 +22808,7 @@
                 </a:solidFill>
                 <a:latin typeface="Calibri"/>
               </a:rPr>
-              <a:t>30</a:t>
+              <a:t>31</a:t>
             </a:r>
           </a:p>
         </p:txBody>
@@ -20370,47 +24154,6 @@
               <a:t>Send a stream of colour messages into the first pixel. It keeps the FIRST message for itself and passes the rest out of its data-out pin to the next one, which does the same.</a:t>
             </a:r>
           </a:p>
-          <a:p>
-            <a:pPr algn="l">
-              <a:lnSpc>
-                <a:spcPct val="100000"/>
-              </a:lnSpc>
-              <a:spcAft>
-                <a:spcPts val="900"/>
-              </a:spcAft>
-              <a:defRPr sz="1800" b="0">
-                <a:solidFill>
-                  <a:srgbClr val="222222"/>
-                </a:solidFill>
-                <a:latin typeface="Calibri"/>
-              </a:defRPr>
-            </a:pPr>
-          </a:p>
-          <a:p>
-            <a:pPr algn="l">
-              <a:lnSpc>
-                <a:spcPct val="100000"/>
-              </a:lnSpc>
-              <a:spcAft>
-                <a:spcPts val="900"/>
-              </a:spcAft>
-              <a:defRPr sz="1800" b="0">
-                <a:solidFill>
-                  <a:srgbClr val="222222"/>
-                </a:solidFill>
-                <a:latin typeface="Calibri"/>
-              </a:defRPr>
-            </a:pPr>
-            <a:r>
-              <a:rPr sz="1800" b="0">
-                <a:solidFill>
-                  <a:srgbClr val="222222"/>
-                </a:solidFill>
-                <a:latin typeface="Calibri"/>
-              </a:rPr>
-              <a:t>So one wire drives the whole chain. Our vehicle has 32 of them on GPIO 5 - and they are numbered in the order the data flows, which is why the numbering does what it does.</a:t>
-            </a:r>
-          </a:p>
         </p:txBody>
       </p:sp>
     </p:spTree>
@@ -20638,6 +24381,63 @@
             <a:spAutoFit/>
           </a:bodyPr>
           <a:lstStyle/>
+          <a:p>
+            <a:pPr algn="l">
+              <a:lnSpc>
+                <a:spcPct val="100000"/>
+              </a:lnSpc>
+              <a:spcAft>
+                <a:spcPts val="900"/>
+              </a:spcAft>
+              <a:defRPr sz="1800" b="0">
+                <a:solidFill>
+                  <a:srgbClr val="222222"/>
+                </a:solidFill>
+                <a:latin typeface="Calibri"/>
+              </a:defRPr>
+            </a:pPr>
+          </a:p>
+          <a:p>
+            <a:pPr algn="l">
+              <a:lnSpc>
+                <a:spcPct val="100000"/>
+              </a:lnSpc>
+              <a:spcAft>
+                <a:spcPts val="900"/>
+              </a:spcAft>
+              <a:defRPr sz="1800" b="0">
+                <a:solidFill>
+                  <a:srgbClr val="222222"/>
+                </a:solidFill>
+                <a:latin typeface="Calibri"/>
+              </a:defRPr>
+            </a:pPr>
+            <a:r>
+              <a:rPr sz="1800" b="0">
+                <a:solidFill>
+                  <a:srgbClr val="222222"/>
+                </a:solidFill>
+                <a:latin typeface="Calibri"/>
+              </a:rPr>
+              <a:t>So one wire drives the whole chain. Our vehicle has 32 of them on GPIO 5 - and they are numbered in the order the data flows, which is why the numbering does what it does.</a:t>
+            </a:r>
+          </a:p>
+          <a:p>
+            <a:pPr algn="l">
+              <a:lnSpc>
+                <a:spcPct val="100000"/>
+              </a:lnSpc>
+              <a:spcAft>
+                <a:spcPts val="900"/>
+              </a:spcAft>
+              <a:defRPr sz="1800" b="0">
+                <a:solidFill>
+                  <a:srgbClr val="222222"/>
+                </a:solidFill>
+                <a:latin typeface="Calibri"/>
+              </a:defRPr>
+            </a:pPr>
+          </a:p>
           <a:p>
             <a:pPr algn="l">
               <a:lnSpc>
@@ -21858,7 +25658,7 @@
         </p:nvSpPr>
         <p:spPr>
           <a:xfrm>
-            <a:off x="502920" y="5623560"/>
+            <a:off x="502920" y="5038344"/>
             <a:ext cx="5486400" cy="367792"/>
           </a:xfrm>
           <a:prstGeom prst="rect">
@@ -23368,97 +27168,6 @@
                 <a:latin typeface="Calibri"/>
               </a:rPr>
               <a:t>strip.setBrightness(60) scales EVERY channel of EVERY pixel on the way out. It changes how bright the whole strip is without changing any of the colours you set.</a:t>
-            </a:r>
-          </a:p>
-          <a:p>
-            <a:pPr algn="l">
-              <a:lnSpc>
-                <a:spcPct val="100000"/>
-              </a:lnSpc>
-              <a:spcAft>
-                <a:spcPts val="900"/>
-              </a:spcAft>
-              <a:defRPr sz="1800" b="0">
-                <a:solidFill>
-                  <a:srgbClr val="222222"/>
-                </a:solidFill>
-                <a:latin typeface="Calibri"/>
-              </a:defRPr>
-            </a:pPr>
-          </a:p>
-          <a:p>
-            <a:pPr algn="l">
-              <a:lnSpc>
-                <a:spcPct val="100000"/>
-              </a:lnSpc>
-              <a:spcAft>
-                <a:spcPts val="900"/>
-              </a:spcAft>
-              <a:defRPr sz="1800" b="0">
-                <a:solidFill>
-                  <a:srgbClr val="222222"/>
-                </a:solidFill>
-                <a:latin typeface="Calibri"/>
-              </a:defRPr>
-            </a:pPr>
-            <a:r>
-              <a:rPr sz="1800" b="0">
-                <a:solidFill>
-                  <a:srgbClr val="222222"/>
-                </a:solidFill>
-                <a:latin typeface="Calibri"/>
-              </a:rPr>
-              <a:t>Two things worth knowing about setBrightness:</a:t>
-            </a:r>
-          </a:p>
-          <a:p>
-            <a:pPr lvl="1" algn="l">
-              <a:lnSpc>
-                <a:spcPct val="100000"/>
-              </a:lnSpc>
-              <a:spcAft>
-                <a:spcPts val="900"/>
-              </a:spcAft>
-              <a:defRPr sz="1800" b="0">
-                <a:solidFill>
-                  <a:srgbClr val="222222"/>
-                </a:solidFill>
-                <a:latin typeface="Calibri"/>
-              </a:defRPr>
-            </a:pPr>
-            <a:r>
-              <a:rPr sz="1800" b="0">
-                <a:solidFill>
-                  <a:srgbClr val="222222"/>
-                </a:solidFill>
-                <a:latin typeface="Calibri"/>
-              </a:rPr>
-              <a:t>It is applied when show() is called, so changing it does nothing until the next show().</a:t>
-            </a:r>
-          </a:p>
-          <a:p>
-            <a:pPr lvl="1" algn="l">
-              <a:lnSpc>
-                <a:spcPct val="100000"/>
-              </a:lnSpc>
-              <a:spcAft>
-                <a:spcPts val="900"/>
-              </a:spcAft>
-              <a:defRPr sz="1800" b="0">
-                <a:solidFill>
-                  <a:srgbClr val="222222"/>
-                </a:solidFill>
-                <a:latin typeface="Calibri"/>
-              </a:defRPr>
-            </a:pPr>
-            <a:r>
-              <a:rPr sz="1800" b="0">
-                <a:solidFill>
-                  <a:srgbClr val="222222"/>
-                </a:solidFill>
-                <a:latin typeface="Calibri"/>
-              </a:rPr>
-              <a:t>It is LOSSY. Set a pixel to 4, scale by 60/255, and it rounds to 0. Very dim colours disappear rather than getting dimmer, which is why a fade can end abruptly.</a:t>
             </a:r>
           </a:p>
         </p:txBody>
@@ -23789,4 +27498,324 @@
   </a:objectDefaults>
   <a:extraClrSchemeLst/>
 </a:theme>
+</file>
+
+<file path=ppt/theme/theme2.xml><?xml version="1.0" encoding="utf-8"?>
+<a:theme xmlns:a="http://schemas.openxmlformats.org/drawingml/2006/main" name="Office Theme">
+  <a:themeElements>
+    <a:clrScheme name="Office">
+      <a:dk1>
+        <a:sysClr val="windowText" lastClr="000000"/>
+      </a:dk1>
+      <a:lt1>
+        <a:sysClr val="window" lastClr="FFFFFF"/>
+      </a:lt1>
+      <a:dk2>
+        <a:srgbClr val="1F497D"/>
+      </a:dk2>
+      <a:lt2>
+        <a:srgbClr val="EEECE1"/>
+      </a:lt2>
+      <a:accent1>
+        <a:srgbClr val="4F81BD"/>
+      </a:accent1>
+      <a:accent2>
+        <a:srgbClr val="C0504D"/>
+      </a:accent2>
+      <a:accent3>
+        <a:srgbClr val="9BBB59"/>
+      </a:accent3>
+      <a:accent4>
+        <a:srgbClr val="8064A2"/>
+      </a:accent4>
+      <a:accent5>
+        <a:srgbClr val="4BACC6"/>
+      </a:accent5>
+      <a:accent6>
+        <a:srgbClr val="F79646"/>
+      </a:accent6>
+      <a:hlink>
+        <a:srgbClr val="0000FF"/>
+      </a:hlink>
+      <a:folHlink>
+        <a:srgbClr val="800080"/>
+      </a:folHlink>
+    </a:clrScheme>
+    <a:fontScheme name="Office">
+      <a:majorFont>
+        <a:latin typeface="Calibri"/>
+        <a:ea typeface=""/>
+        <a:cs typeface=""/>
+        <a:font script="Jpan" typeface="ＭＳ Ｐゴシック"/>
+        <a:font script="Hang" typeface="맑은 고딕"/>
+        <a:font script="Hans" typeface="宋体"/>
+        <a:font script="Hant" typeface="新細明體"/>
+        <a:font script="Arab" typeface="Times New Roman"/>
+        <a:font script="Hebr" typeface="Times New Roman"/>
+        <a:font script="Thai" typeface="Angsana New"/>
+        <a:font script="Ethi" typeface="Nyala"/>
+        <a:font script="Beng" typeface="Vrinda"/>
+        <a:font script="Gujr" typeface="Shruti"/>
+        <a:font script="Khmr" typeface="MoolBoran"/>
+        <a:font script="Knda" typeface="Tunga"/>
+        <a:font script="Guru" typeface="Raavi"/>
+        <a:font script="Cans" typeface="Euphemia"/>
+        <a:font script="Cher" typeface="Plantagenet Cherokee"/>
+        <a:font script="Yiii" typeface="Microsoft Yi Baiti"/>
+        <a:font script="Tibt" typeface="Microsoft Himalaya"/>
+        <a:font script="Thaa" typeface="MV Boli"/>
+        <a:font script="Deva" typeface="Mangal"/>
+        <a:font script="Telu" typeface="Gautami"/>
+        <a:font script="Taml" typeface="Latha"/>
+        <a:font script="Syrc" typeface="Estrangelo Edessa"/>
+        <a:font script="Orya" typeface="Kalinga"/>
+        <a:font script="Mlym" typeface="Kartika"/>
+        <a:font script="Laoo" typeface="DokChampa"/>
+        <a:font script="Sinh" typeface="Iskoola Pota"/>
+        <a:font script="Mong" typeface="Mongolian Baiti"/>
+        <a:font script="Viet" typeface="Times New Roman"/>
+        <a:font script="Uigh" typeface="Microsoft Uighur"/>
+        <a:font script="Geor" typeface="Sylfaen"/>
+      </a:majorFont>
+      <a:minorFont>
+        <a:latin typeface="Calibri"/>
+        <a:ea typeface=""/>
+        <a:cs typeface=""/>
+        <a:font script="Jpan" typeface="ＭＳ Ｐゴシック"/>
+        <a:font script="Hang" typeface="맑은 고딕"/>
+        <a:font script="Hans" typeface="宋体"/>
+        <a:font script="Hant" typeface="新細明體"/>
+        <a:font script="Arab" typeface="Arial"/>
+        <a:font script="Hebr" typeface="Arial"/>
+        <a:font script="Thai" typeface="Cordia New"/>
+        <a:font script="Ethi" typeface="Nyala"/>
+        <a:font script="Beng" typeface="Vrinda"/>
+        <a:font script="Gujr" typeface="Shruti"/>
+        <a:font script="Khmr" typeface="DaunPenh"/>
+        <a:font script="Knda" typeface="Tunga"/>
+        <a:font script="Guru" typeface="Raavi"/>
+        <a:font script="Cans" typeface="Euphemia"/>
+        <a:font script="Cher" typeface="Plantagenet Cherokee"/>
+        <a:font script="Yiii" typeface="Microsoft Yi Baiti"/>
+        <a:font script="Tibt" typeface="Microsoft Himalaya"/>
+        <a:font script="Thaa" typeface="MV Boli"/>
+        <a:font script="Deva" typeface="Mangal"/>
+        <a:font script="Telu" typeface="Gautami"/>
+        <a:font script="Taml" typeface="Latha"/>
+        <a:font script="Syrc" typeface="Estrangelo Edessa"/>
+        <a:font script="Orya" typeface="Kalinga"/>
+        <a:font script="Mlym" typeface="Kartika"/>
+        <a:font script="Laoo" typeface="DokChampa"/>
+        <a:font script="Sinh" typeface="Iskoola Pota"/>
+        <a:font script="Mong" typeface="Mongolian Baiti"/>
+        <a:font script="Viet" typeface="Arial"/>
+        <a:font script="Uigh" typeface="Microsoft Uighur"/>
+        <a:font script="Geor" typeface="Sylfaen"/>
+      </a:minorFont>
+    </a:fontScheme>
+    <a:fmtScheme name="Office">
+      <a:fillStyleLst>
+        <a:solidFill>
+          <a:schemeClr val="phClr"/>
+        </a:solidFill>
+        <a:gradFill rotWithShape="1">
+          <a:gsLst>
+            <a:gs pos="0">
+              <a:schemeClr val="phClr">
+                <a:tint val="50000"/>
+                <a:satMod val="300000"/>
+              </a:schemeClr>
+            </a:gs>
+            <a:gs pos="35000">
+              <a:schemeClr val="phClr">
+                <a:tint val="37000"/>
+                <a:satMod val="300000"/>
+              </a:schemeClr>
+            </a:gs>
+            <a:gs pos="100000">
+              <a:schemeClr val="phClr">
+                <a:tint val="15000"/>
+                <a:satMod val="350000"/>
+              </a:schemeClr>
+            </a:gs>
+          </a:gsLst>
+          <a:lin ang="16200000" scaled="1"/>
+        </a:gradFill>
+        <a:gradFill rotWithShape="1">
+          <a:gsLst>
+            <a:gs pos="0">
+              <a:schemeClr val="phClr">
+                <a:tint val="100000"/>
+                <a:shade val="100000"/>
+                <a:satMod val="130000"/>
+              </a:schemeClr>
+            </a:gs>
+            <a:gs pos="100000">
+              <a:schemeClr val="phClr">
+                <a:tint val="50000"/>
+                <a:shade val="100000"/>
+                <a:satMod val="350000"/>
+              </a:schemeClr>
+            </a:gs>
+          </a:gsLst>
+          <a:lin ang="16200000" scaled="0"/>
+        </a:gradFill>
+      </a:fillStyleLst>
+      <a:lnStyleLst>
+        <a:ln w="9525" cap="flat" cmpd="sng" algn="ctr">
+          <a:solidFill>
+            <a:schemeClr val="phClr">
+              <a:shade val="95000"/>
+              <a:satMod val="105000"/>
+            </a:schemeClr>
+          </a:solidFill>
+          <a:prstDash val="solid"/>
+        </a:ln>
+        <a:ln w="25400" cap="flat" cmpd="sng" algn="ctr">
+          <a:solidFill>
+            <a:schemeClr val="phClr"/>
+          </a:solidFill>
+          <a:prstDash val="solid"/>
+        </a:ln>
+        <a:ln w="38100" cap="flat" cmpd="sng" algn="ctr">
+          <a:solidFill>
+            <a:schemeClr val="phClr"/>
+          </a:solidFill>
+          <a:prstDash val="solid"/>
+        </a:ln>
+      </a:lnStyleLst>
+      <a:effectStyleLst>
+        <a:effectStyle>
+          <a:effectLst>
+            <a:outerShdw blurRad="40000" dist="20000" dir="5400000" rotWithShape="0">
+              <a:srgbClr val="000000">
+                <a:alpha val="38000"/>
+              </a:srgbClr>
+            </a:outerShdw>
+          </a:effectLst>
+        </a:effectStyle>
+        <a:effectStyle>
+          <a:effectLst>
+            <a:outerShdw blurRad="40000" dist="23000" dir="5400000" rotWithShape="0">
+              <a:srgbClr val="000000">
+                <a:alpha val="35000"/>
+              </a:srgbClr>
+            </a:outerShdw>
+          </a:effectLst>
+        </a:effectStyle>
+        <a:effectStyle>
+          <a:effectLst>
+            <a:outerShdw blurRad="40000" dist="23000" dir="5400000" rotWithShape="0">
+              <a:srgbClr val="000000">
+                <a:alpha val="35000"/>
+              </a:srgbClr>
+            </a:outerShdw>
+          </a:effectLst>
+          <a:scene3d>
+            <a:camera prst="orthographicFront">
+              <a:rot lat="0" lon="0" rev="0"/>
+            </a:camera>
+            <a:lightRig rig="threePt" dir="t">
+              <a:rot lat="0" lon="0" rev="1200000"/>
+            </a:lightRig>
+          </a:scene3d>
+          <a:sp3d>
+            <a:bevelT w="63500" h="25400"/>
+          </a:sp3d>
+        </a:effectStyle>
+      </a:effectStyleLst>
+      <a:bgFillStyleLst>
+        <a:solidFill>
+          <a:schemeClr val="phClr"/>
+        </a:solidFill>
+        <a:gradFill rotWithShape="1">
+          <a:gsLst>
+            <a:gs pos="0">
+              <a:schemeClr val="phClr">
+                <a:tint val="40000"/>
+                <a:satMod val="350000"/>
+              </a:schemeClr>
+            </a:gs>
+            <a:gs pos="40000">
+              <a:schemeClr val="phClr">
+                <a:tint val="45000"/>
+                <a:shade val="99000"/>
+                <a:satMod val="350000"/>
+              </a:schemeClr>
+            </a:gs>
+            <a:gs pos="100000">
+              <a:schemeClr val="phClr">
+                <a:shade val="20000"/>
+                <a:satMod val="255000"/>
+              </a:schemeClr>
+            </a:gs>
+          </a:gsLst>
+          <a:path path="circle">
+            <a:fillToRect l="50000" t="-80000" r="50000" b="180000"/>
+          </a:path>
+        </a:gradFill>
+        <a:gradFill rotWithShape="1">
+          <a:gsLst>
+            <a:gs pos="0">
+              <a:schemeClr val="phClr">
+                <a:tint val="80000"/>
+                <a:satMod val="300000"/>
+              </a:schemeClr>
+            </a:gs>
+            <a:gs pos="100000">
+              <a:schemeClr val="phClr">
+                <a:shade val="30000"/>
+                <a:satMod val="200000"/>
+              </a:schemeClr>
+            </a:gs>
+          </a:gsLst>
+          <a:path path="circle">
+            <a:fillToRect l="50000" t="50000" r="50000" b="50000"/>
+          </a:path>
+        </a:gradFill>
+      </a:bgFillStyleLst>
+    </a:fmtScheme>
+  </a:themeElements>
+  <a:objectDefaults>
+    <a:spDef>
+      <a:spPr/>
+      <a:bodyPr/>
+      <a:lstStyle/>
+      <a:style>
+        <a:lnRef idx="1">
+          <a:schemeClr val="accent1"/>
+        </a:lnRef>
+        <a:fillRef idx="3">
+          <a:schemeClr val="accent1"/>
+        </a:fillRef>
+        <a:effectRef idx="2">
+          <a:schemeClr val="accent1"/>
+        </a:effectRef>
+        <a:fontRef idx="minor">
+          <a:schemeClr val="lt1"/>
+        </a:fontRef>
+      </a:style>
+    </a:spDef>
+    <a:lnDef>
+      <a:spPr/>
+      <a:bodyPr/>
+      <a:lstStyle/>
+      <a:style>
+        <a:lnRef idx="2">
+          <a:schemeClr val="accent1"/>
+        </a:lnRef>
+        <a:fillRef idx="0">
+          <a:schemeClr val="accent1"/>
+        </a:fillRef>
+        <a:effectRef idx="1">
+          <a:schemeClr val="accent1"/>
+        </a:effectRef>
+        <a:fontRef idx="minor">
+          <a:schemeClr val="tx1"/>
+        </a:fontRef>
+      </a:style>
+    </a:lnDef>
+  </a:objectDefaults>
+  <a:extraClrSchemeLst/>
+</a:theme>
 </file>
--- a/ground-vehicle/docs/courses/beginner-ps3/l4_neopixel_leds.pptx
+++ b/ground-vehicle/docs/courses/beginner-ps3/l4_neopixel_leds.pptx
@@ -638,7 +638,7 @@
               <a:rPr sz="1200">
                 <a:latin typeface="Calibri"/>
               </a:rPr>
-              <a:t>The key idea: three LEDs can fake every colour because your eye only has three kinds of sensor to fool.</a:t>
+              <a:t>The key idea: three LEDs can fake every color because your eye only has three kinds of sensor to fool.</a:t>
             </a:r>
           </a:p>
           <a:p>
@@ -743,7 +743,7 @@
               <a:rPr sz="1200">
                 <a:latin typeface="Calibri"/>
               </a:rPr>
-              <a:t>Coloured light is cheaper than white - pure red lights one of the three channels instead of all three. Ask them to work out yellow before you tell them.</a:t>
+              <a:t>Colored light is cheaper than white - pure red lights one of the three channels instead of all three. Ask them to work out yellow before you tell them.</a:t>
             </a:r>
           </a:p>
           <a:p>
@@ -849,7 +849,7 @@
               <a:rPr sz="1200">
                 <a:latin typeface="Calibri"/>
               </a:rPr>
-              <a:t>Coloured light is cheaper than white - pure red lights one of the three channels instead of all three. Ask them to work out yellow before you tell them.</a:t>
+              <a:t>Colored light is cheaper than white - pure red lights one of the three channels instead of all three. Ask them to work out yellow before you tell them.</a:t>
             </a:r>
           </a:p>
           <a:p>
@@ -955,7 +955,7 @@
               <a:rPr sz="1200">
                 <a:latin typeface="Calibri"/>
               </a:rPr>
-              <a:t>Coloured light is cheaper than white - pure red lights one of the three channels instead of all three. Ask them to work out yellow before you tell them.</a:t>
+              <a:t>Colored light is cheaper than white - pure red lights one of the three channels instead of all three. Ask them to work out yellow before you tell them.</a:t>
             </a:r>
           </a:p>
           <a:p>
@@ -1473,7 +1473,7 @@
               <a:rPr sz="1200">
                 <a:latin typeface="Calibri"/>
               </a:rPr>
-              <a:t>This is the activity that pays off for the rest of the course. Make sure every group finishes with a labelled drawing they keep.</a:t>
+              <a:t>This is the activity that pays off for the rest of the course. Make sure every group finishes with a labeled drawing they keep.</a:t>
             </a:r>
           </a:p>
           <a:p>
@@ -1764,7 +1764,7 @@
               <a:rPr sz="1200">
                 <a:latin typeface="Calibri"/>
               </a:rPr>
-              <a:t>Hue is the interesting one: a single number that goes all the way round the colour wheel, instead of three separate channels.</a:t>
+              <a:t>Hue is the interesting one: a single number that goes all the way round the color wheel, instead of three separate channels.</a:t>
             </a:r>
           </a:p>
           <a:p>
@@ -1870,7 +1870,7 @@
               <a:rPr sz="1200">
                 <a:latin typeface="Calibri"/>
               </a:rPr>
-              <a:t>Hue is the interesting one: a single number that goes all the way round the colour wheel, instead of three separate channels.</a:t>
+              <a:t>Hue is the interesting one: a single number that goes all the way round the color wheel, instead of three separate channels.</a:t>
             </a:r>
           </a:p>
           <a:p>
@@ -2048,7 +2048,7 @@
               <a:rPr sz="1200">
                 <a:latin typeface="Calibri"/>
               </a:rPr>
-              <a:t>&gt;&gt; 1 halves a number by shifting its bits right, which is a cheap way to dim a colour. Show it on the board if they have not met bit shifts.</a:t>
+              <a:t>&gt;&gt; 1 halves a number by shifting its bits right, which is a cheap way to dim a color. Show it on the board if they have not met bit shifts.</a:t>
             </a:r>
           </a:p>
         </p:txBody>
@@ -2153,7 +2153,7 @@
               <a:rPr sz="1200">
                 <a:latin typeface="Calibri"/>
               </a:rPr>
-              <a:t>The stoplight and the D-pad quadrants are the two easiest starting points if a group is stuck - both are for loops over a known range, which is exactly what they just practised.</a:t>
+              <a:t>The stoplight and the D-pad quadrants are the two easiest starting points if a group is stuck - both are for loops over a known range, which is exactly what they just practiced.</a:t>
             </a:r>
           </a:p>
         </p:txBody>
@@ -2267,7 +2267,7 @@
               <a:rPr sz="1200">
                 <a:latin typeface="Calibri"/>
               </a:rPr>
-              <a:t>The stoplight and the D-pad quadrants are the two easiest starting points if a group is stuck - both are for loops over a known range, which is exactly what they just practised.</a:t>
+              <a:t>The stoplight and the D-pad quadrants are the two easiest starting points if a group is stuck - both are for loops over a known range, which is exactly what they just practiced.</a:t>
             </a:r>
           </a:p>
         </p:txBody>
@@ -2882,7 +2882,7 @@
               <a:rPr sz="1200">
                 <a:latin typeface="Calibri"/>
               </a:rPr>
-              <a:t>Three numbers, 0 to 255 each, is 16.7 million colours. Worth doing the multiplication on the board.</a:t>
+              <a:t>Three numbers, 0 to 255 each, is 16.7 million colors. Worth doing the multiplication on the board.</a:t>
             </a:r>
           </a:p>
           <a:p>
@@ -2898,7 +2898,7 @@
               <a:rPr sz="1200">
                 <a:latin typeface="Calibri"/>
               </a:rPr>
-              <a:t>If time allows, get them to predict a colour before they type it, then check. Predicting is what makes it stick.</a:t>
+              <a:t>If time allows, get them to predict a color before they type it, then check. Predicting is what makes it stick.</a:t>
             </a:r>
           </a:p>
         </p:txBody>
@@ -2979,7 +2979,7 @@
               <a:rPr sz="1200">
                 <a:latin typeface="Calibri"/>
               </a:rPr>
-              <a:t>Colour value changes WHAT you asked for. Brightness scales EVERYTHING on the way out.</a:t>
+              <a:t>Color value changes WHAT you asked for. Brightness scales EVERYTHING on the way out.</a:t>
             </a:r>
           </a:p>
           <a:p>
@@ -2995,7 +2995,7 @@
               <a:rPr sz="1200">
                 <a:latin typeface="Calibri"/>
               </a:rPr>
-              <a:t>Rule of thumb worth repeating: set brightness once in setup, then work in colour values.</a:t>
+              <a:t>Rule of thumb worth repeating: set brightness once in setup, then work in color values.</a:t>
             </a:r>
           </a:p>
         </p:txBody>
@@ -3076,7 +3076,7 @@
               <a:rPr sz="1200">
                 <a:latin typeface="Calibri"/>
               </a:rPr>
-              <a:t>The key idea: three LEDs can fake every colour because your eye only has three kinds of sensor to fool.</a:t>
+              <a:t>The key idea: three LEDs can fake every color because your eye only has three kinds of sensor to fool.</a:t>
             </a:r>
           </a:p>
           <a:p>
@@ -6305,7 +6305,7 @@
                 </a:solidFill>
                 <a:latin typeface="Calibri"/>
               </a:rPr>
-              <a:t>Addressable LEDs, colour, power budgets, and making 32 lights do what you tell them.</a:t>
+              <a:t>Addressable LEDs, color, power budgets, and making 32 lights do what you tell them.</a:t>
             </a:r>
           </a:p>
         </p:txBody>
@@ -6696,7 +6696,7 @@
                 </a:solidFill>
                 <a:latin typeface="Calibri"/>
               </a:rPr>
-              <a:t>How your eye turns wavelengths into colour  (continued)</a:t>
+              <a:t>How your eye turns wavelengths into color  (continued)</a:t>
             </a:r>
           </a:p>
         </p:txBody>
@@ -7060,7 +7060,7 @@
                 </a:solidFill>
                 <a:latin typeface="Calibri"/>
               </a:rPr>
-              <a:t>This is why three LEDs can fake every colour you can see. They are not producing yellow light - they are producing red and green light in the ratio that makes your cones report yellow.</a:t>
+              <a:t>This is why three LEDs can fake every color you can see. They are not producing yellow light - they are producing red and green light in the ratio that makes your cones report yellow.</a:t>
             </a:r>
           </a:p>
           <a:p>
@@ -7828,7 +7828,7 @@
                 </a:solidFill>
                 <a:latin typeface="Calibri"/>
               </a:rPr>
-              <a:t>Coloured light is cheaper than white. Pure red only lights one of the three, so it costs about a third of what white costs.</a:t>
+              <a:t>Colored light is cheaper than white. Pure red only lights one of the three, so it costs about a third of what white costs.</a:t>
             </a:r>
           </a:p>
         </p:txBody>
@@ -10321,7 +10321,7 @@
                 </a:solidFill>
                 <a:latin typeface="Calibri"/>
               </a:rPr>
-              <a:t>Do it now  -  all 32, one colour at a time</a:t>
+              <a:t>Do it now  -  all 32, one color at a time</a:t>
             </a:r>
           </a:p>
         </p:txBody>
@@ -10525,7 +10525,7 @@
                 </a:solidFill>
                 <a:latin typeface="Consolas"/>
               </a:rPr>
-              <a:t>l4a_all_one_colour</a:t>
+              <a:t>l4a_all_one_color</a:t>
             </a:r>
             <a:r>
               <a:rPr sz="1200">
@@ -10607,7 +10607,7 @@
                 </a:solidFill>
                 <a:latin typeface="Calibri"/>
               </a:rPr>
-              <a:t>2.  Note the estimated current for each colour. Which is cheapest? Which is most expensive? Why?</a:t>
+              <a:t>2.  Note the estimated current for each color. Which is cheapest? Which is most expensive? Why?</a:t>
             </a:r>
           </a:p>
           <a:p>
@@ -10803,7 +10803,7 @@
                 </a:solidFill>
                 <a:latin typeface="Calibri"/>
               </a:rPr>
-              <a:t>All 32 LEDs cycling through seven colours and off, with the estimated current printed for each.</a:t>
+              <a:t>All 32 LEDs cycling through seven colors and off, with the estimated current printed for each.</a:t>
             </a:r>
           </a:p>
         </p:txBody>
@@ -15493,7 +15493,7 @@
                 </a:solidFill>
                 <a:latin typeface="Calibri"/>
               </a:rPr>
-              <a:t>2.   Mix any colour from red, green and blue values</a:t>
+              <a:t>2.   Mix any color from red, green and blue values</a:t>
             </a:r>
           </a:p>
           <a:p>
@@ -16662,7 +16662,7 @@
                 </a:solidFill>
                 <a:latin typeface="Calibri"/>
               </a:rPr>
-              <a:t>colorWipe fills the strip one LED at a time, in order, so the colour appears to sweep along it.</a:t>
+              <a:t>colorWipe fills the strip one LED at a time, in order, so the color appears to sweep along it.</a:t>
             </a:r>
           </a:p>
           <a:p>
@@ -16783,7 +16783,7 @@
                 </a:solidFill>
                 <a:latin typeface="Calibri"/>
               </a:rPr>
-              <a:t>rainbow uses HUE instead of red, green and blue - one number that goes all the way round the colour wheel, 0 to 65535.</a:t>
+              <a:t>rainbow uses HUE instead of red, green and blue - one number that goes all the way round the color wheel, 0 to 65535.</a:t>
             </a:r>
           </a:p>
           <a:p>
@@ -18437,7 +18437,7 @@
                 </a:solidFill>
                 <a:latin typeface="Calibri"/>
               </a:rPr>
-              <a:t>5.  Change the scanner colour to blue. You now have a Cylon instead of KITT.</a:t>
+              <a:t>5.  Change the scanner color to blue. You now have a Cylon instead of KITT.</a:t>
             </a:r>
           </a:p>
           <a:p>
@@ -18558,7 +18558,7 @@
                 </a:solidFill>
                 <a:latin typeface="Calibri"/>
               </a:rPr>
-              <a:t>Colour wipe, theatre chase, a flowing rainbow, then the scanner sweeping front and rear together.</a:t>
+              <a:t>Color wipe, theatre chase, a flowing rainbow, then the scanner sweeping front and rear together.</a:t>
             </a:r>
           </a:p>
         </p:txBody>
@@ -20001,7 +20001,7 @@
                           </a:solidFill>
                           <a:latin typeface="Calibri"/>
                         </a:rPr>
-                        <a:t>Colours are wrong - red shows green</a:t>
+                        <a:t>Colors are wrong - red shows green</a:t>
                       </a:r>
                     </a:p>
                   </a:txBody>
@@ -20023,7 +20023,7 @@
                           </a:solidFill>
                           <a:latin typeface="Calibri"/>
                         </a:rPr>
-                        <a:t>Wrong colour order</a:t>
+                        <a:t>Wrong color order</a:t>
                       </a:r>
                     </a:p>
                   </a:txBody>
@@ -20702,7 +20702,7 @@
                 </a:solidFill>
                 <a:latin typeface="Calibri"/>
               </a:rPr>
-              <a:t>4.  What colour is strip.Color(255, 255, 0)? Why?</a:t>
+              <a:t>4.  What color is strip.Color(255, 255, 0)? Why?</a:t>
             </a:r>
           </a:p>
           <a:p>
@@ -21594,7 +21594,7 @@
                           </a:solidFill>
                           <a:latin typeface="Calibri"/>
                         </a:rPr>
-                        <a:t>Colour: RGB, wavelength, and how your eye works</a:t>
+                        <a:t>Color: RGB, wavelength, and how your eye works</a:t>
                       </a:r>
                     </a:p>
                   </a:txBody>
@@ -21640,7 +21640,7 @@
                           </a:solidFill>
                           <a:latin typeface="Calibri"/>
                         </a:rPr>
-                        <a:t>The power budget. Upload l4a_all_one_colour</a:t>
+                        <a:t>The power budget. Upload l4a_all_one_color</a:t>
                       </a:r>
                     </a:p>
                   </a:txBody>
@@ -22308,7 +22308,7 @@
                 </a:solidFill>
                 <a:latin typeface="Calibri"/>
               </a:rPr>
-              <a:t>Send a stream of colour messages into the first pixel. It keeps the FIRST message for itself and passes the rest out of its data-out pin to the next one, which does the same.</a:t>
+              <a:t>Send a stream of color messages into the first pixel. It keeps the FIRST message for itself and passes the rest out of its data-out pin to the next one, which does the same.</a:t>
             </a:r>
           </a:p>
           <a:p>
@@ -22842,7 +22842,7 @@
                           </a:solidFill>
                           <a:latin typeface="Calibri"/>
                         </a:rPr>
-                        <a:t>Packs three 0-255 numbers into one colour value</a:t>
+                        <a:t>Packs three 0-255 numbers into one color value</a:t>
                       </a:r>
                     </a:p>
                   </a:txBody>
@@ -22934,7 +22934,7 @@
                           </a:solidFill>
                           <a:latin typeface="Calibri"/>
                         </a:rPr>
-                        <a:t>Sets every pixel to the same colour, in memory</a:t>
+                        <a:t>Sets every pixel to the same color, in memory</a:t>
                       </a:r>
                     </a:p>
                   </a:txBody>
@@ -23118,7 +23118,7 @@
                           </a:solidFill>
                           <a:latin typeface="Calibri"/>
                         </a:rPr>
-                        <a:t>Corrects a colour so fades look even to your eye</a:t>
+                        <a:t>Corrects a color so fades look even to your eye</a:t>
                       </a:r>
                     </a:p>
                   </a:txBody>
@@ -23258,7 +23258,7 @@
                 </a:solidFill>
                 <a:latin typeface="Calibri"/>
               </a:rPr>
-              <a:t>One pixel is three LEDs, and colour is a mixture</a:t>
+              <a:t>One pixel is three LEDs, and color is a mixture</a:t>
             </a:r>
           </a:p>
         </p:txBody>
@@ -24779,7 +24779,7 @@
                 </a:solidFill>
                 <a:latin typeface="Calibri"/>
               </a:rPr>
-              <a:t>setBrightness is not the same as a smaller colour value</a:t>
+              <a:t>setBrightness is not the same as a smaller color value</a:t>
             </a:r>
           </a:p>
         </p:txBody>
@@ -25097,7 +25097,7 @@
                 </a:solidFill>
                 <a:latin typeface="Calibri"/>
               </a:rPr>
-              <a:t>strip.setBrightness(60) scales EVERY channel of EVERY pixel on the way out. It changes how bright the whole strip is without changing any of the colours you set.</a:t>
+              <a:t>strip.setBrightness(60) scales EVERY channel of EVERY pixel on the way out. It changes how bright the whole strip is without changing any of the colors you set.</a:t>
             </a:r>
           </a:p>
         </p:txBody>
@@ -25195,7 +25195,7 @@
                 </a:solidFill>
                 <a:latin typeface="Calibri"/>
               </a:rPr>
-              <a:t>It is LOSSY. Set a pixel to 4, scale by 60/255, and it rounds to 0. Very dim colours disappear rather than getting dimmer, which is why a fade can end abruptly.</a:t>
+              <a:t>It is LOSSY. Set a pixel to 4, scale by 60/255, and it rounds to 0. Very dim colors disappear rather than getting dimmer, which is why a fade can end abruptly.</a:t>
             </a:r>
           </a:p>
           <a:p>
@@ -25236,7 +25236,7 @@
                 </a:solidFill>
                 <a:latin typeface="Calibri"/>
               </a:rPr>
-              <a:t>Rule of thumb: use setBrightness once, in setup(), to fix the overall level for the room and the power budget. Use the colour values for everything else.</a:t>
+              <a:t>Rule of thumb: use setBrightness once, in setup(), to fix the overall level for the room and the power budget. Use the color values for everything else.</a:t>
             </a:r>
           </a:p>
         </p:txBody>
@@ -25300,7 +25300,7 @@
                 </a:solidFill>
                 <a:latin typeface="Calibri"/>
               </a:rPr>
-              <a:t>How your eye turns wavelengths into colour</a:t>
+              <a:t>How your eye turns wavelengths into color</a:t>
             </a:r>
           </a:p>
         </p:txBody>
@@ -25536,7 +25536,7 @@
                 </a:solidFill>
                 <a:latin typeface="Calibri"/>
               </a:rPr>
-              <a:t>Visible light runs from about 380 nanometres, which you see as violet, to about 750, which you see as deep red.</a:t>
+              <a:t>Visible light runs from about 380 nanometers, which you see as violet, to about 750, which you see as deep red.</a:t>
             </a:r>
           </a:p>
           <a:p>

--- a/ground-vehicle/docs/courses/beginner-ps3/l4_neopixel_leds.pptx
+++ b/ground-vehicle/docs/courses/beginner-ps3/l4_neopixel_leds.pptx
@@ -25056,7 +25056,7 @@
                 </a:solidFill>
                 <a:latin typeface="Calibri"/>
               </a:rPr>
-              <a:t>strip.Color(60, 0, 0) sets the RED channel to a quarter. The green and blue channels are untouched. This changes the COLOUR you asked for.</a:t>
+              <a:t>strip.Color(60, 0, 0) sets the RED channel to a quarter. The green and blue channels are untouched. This changes the COLOR you asked for.</a:t>
             </a:r>
           </a:p>
           <a:p>

--- a/ground-vehicle/docs/courses/beginner-ps3/l4_neopixel_leds.pptx
+++ b/ground-vehicle/docs/courses/beginner-ps3/l4_neopixel_leds.pptx
@@ -10548,7 +10548,7 @@
         <p:spPr>
           <a:xfrm>
             <a:off x="502920" y="1901952"/>
-            <a:ext cx="5387187" cy="4361688"/>
+            <a:ext cx="6249137" cy="4361688"/>
           </a:xfrm>
           <a:prstGeom prst="rect">
             <a:avLst/>
@@ -10568,15 +10568,15 @@
               <a:spcAft>
                 <a:spcPts val="800"/>
               </a:spcAft>
-              <a:defRPr sz="1800" b="0">
-                <a:solidFill>
-                  <a:srgbClr val="222222"/>
-                </a:solidFill>
-                <a:latin typeface="Calibri"/>
-              </a:defRPr>
-            </a:pPr>
-            <a:r>
-              <a:rPr sz="1800" b="0">
+              <a:defRPr sz="1900" b="0">
+                <a:solidFill>
+                  <a:srgbClr val="222222"/>
+                </a:solidFill>
+                <a:latin typeface="Calibri"/>
+              </a:defRPr>
+            </a:pPr>
+            <a:r>
+              <a:rPr sz="1900" b="0">
                 <a:solidFill>
                   <a:srgbClr val="222222"/>
                 </a:solidFill>
@@ -10593,15 +10593,15 @@
               <a:spcAft>
                 <a:spcPts val="800"/>
               </a:spcAft>
-              <a:defRPr sz="1800" b="0">
-                <a:solidFill>
-                  <a:srgbClr val="222222"/>
-                </a:solidFill>
-                <a:latin typeface="Calibri"/>
-              </a:defRPr>
-            </a:pPr>
-            <a:r>
-              <a:rPr sz="1800" b="0">
+              <a:defRPr sz="1900" b="0">
+                <a:solidFill>
+                  <a:srgbClr val="222222"/>
+                </a:solidFill>
+                <a:latin typeface="Calibri"/>
+              </a:defRPr>
+            </a:pPr>
+            <a:r>
+              <a:rPr sz="1900" b="0">
                 <a:solidFill>
                   <a:srgbClr val="222222"/>
                 </a:solidFill>
@@ -10618,15 +10618,15 @@
               <a:spcAft>
                 <a:spcPts val="800"/>
               </a:spcAft>
-              <a:defRPr sz="1800" b="0">
-                <a:solidFill>
-                  <a:srgbClr val="222222"/>
-                </a:solidFill>
-                <a:latin typeface="Calibri"/>
-              </a:defRPr>
-            </a:pPr>
-            <a:r>
-              <a:rPr sz="1800" b="0">
+              <a:defRPr sz="1900" b="0">
+                <a:solidFill>
+                  <a:srgbClr val="222222"/>
+                </a:solidFill>
+                <a:latin typeface="Calibri"/>
+              </a:defRPr>
+            </a:pPr>
+            <a:r>
+              <a:rPr sz="1900" b="0">
                 <a:solidFill>
                   <a:srgbClr val="222222"/>
                 </a:solidFill>
@@ -10643,15 +10643,15 @@
               <a:spcAft>
                 <a:spcPts val="800"/>
               </a:spcAft>
-              <a:defRPr sz="1800" b="0">
-                <a:solidFill>
-                  <a:srgbClr val="222222"/>
-                </a:solidFill>
-                <a:latin typeface="Calibri"/>
-              </a:defRPr>
-            </a:pPr>
-            <a:r>
-              <a:rPr sz="1800" b="0">
+              <a:defRPr sz="1900" b="0">
+                <a:solidFill>
+                  <a:srgbClr val="222222"/>
+                </a:solidFill>
+                <a:latin typeface="Calibri"/>
+              </a:defRPr>
+            </a:pPr>
+            <a:r>
+              <a:rPr sz="1900" b="0">
                 <a:solidFill>
                   <a:srgbClr val="222222"/>
                 </a:solidFill>
@@ -10668,15 +10668,15 @@
               <a:spcAft>
                 <a:spcPts val="800"/>
               </a:spcAft>
-              <a:defRPr sz="1800" b="0">
-                <a:solidFill>
-                  <a:srgbClr val="222222"/>
-                </a:solidFill>
-                <a:latin typeface="Calibri"/>
-              </a:defRPr>
-            </a:pPr>
-            <a:r>
-              <a:rPr sz="1800" b="0">
+              <a:defRPr sz="1900" b="0">
+                <a:solidFill>
+                  <a:srgbClr val="222222"/>
+                </a:solidFill>
+                <a:latin typeface="Calibri"/>
+              </a:defRPr>
+            </a:pPr>
+            <a:r>
+              <a:rPr sz="1900" b="0">
                 <a:solidFill>
                   <a:srgbClr val="222222"/>
                 </a:solidFill>
@@ -10693,15 +10693,15 @@
               <a:spcAft>
                 <a:spcPts val="800"/>
               </a:spcAft>
-              <a:defRPr sz="1800" b="0">
-                <a:solidFill>
-                  <a:srgbClr val="222222"/>
-                </a:solidFill>
-                <a:latin typeface="Calibri"/>
-              </a:defRPr>
-            </a:pPr>
-            <a:r>
-              <a:rPr sz="1800" b="0">
+              <a:defRPr sz="1900" b="0">
+                <a:solidFill>
+                  <a:srgbClr val="222222"/>
+                </a:solidFill>
+                <a:latin typeface="Calibri"/>
+              </a:defRPr>
+            </a:pPr>
+            <a:r>
+              <a:rPr sz="1900" b="0">
                 <a:solidFill>
                   <a:srgbClr val="222222"/>
                 </a:solidFill>
@@ -10720,8 +10720,8 @@
         </p:nvSpPr>
         <p:spPr>
           <a:xfrm>
-            <a:off x="6301587" y="1901952"/>
-            <a:ext cx="5387187" cy="365760"/>
+            <a:off x="7163537" y="1901952"/>
+            <a:ext cx="4525238" cy="365760"/>
           </a:xfrm>
           <a:prstGeom prst="rect">
             <a:avLst/>
@@ -10768,8 +10768,8 @@
         </p:nvSpPr>
         <p:spPr>
           <a:xfrm>
-            <a:off x="6301587" y="2304288"/>
-            <a:ext cx="5387187" cy="1778508"/>
+            <a:off x="7163537" y="2304288"/>
+            <a:ext cx="4525238" cy="1458305"/>
           </a:xfrm>
           <a:prstGeom prst="rect">
             <a:avLst/>
@@ -10789,15 +10789,15 @@
               <a:spcAft>
                 <a:spcPts val="300"/>
               </a:spcAft>
-              <a:defRPr sz="2600" b="0">
-                <a:solidFill>
-                  <a:srgbClr val="222222"/>
-                </a:solidFill>
-                <a:latin typeface="Calibri"/>
-              </a:defRPr>
-            </a:pPr>
-            <a:r>
-              <a:rPr sz="2600" b="0">
+              <a:defRPr sz="2200" b="0">
+                <a:solidFill>
+                  <a:srgbClr val="222222"/>
+                </a:solidFill>
+                <a:latin typeface="Calibri"/>
+              </a:defRPr>
+            </a:pPr>
+            <a:r>
+              <a:rPr sz="2200" b="0">
                 <a:solidFill>
                   <a:srgbClr val="222222"/>
                 </a:solidFill>
@@ -10816,8 +10816,8 @@
         </p:nvSpPr>
         <p:spPr>
           <a:xfrm>
-            <a:off x="6301587" y="4119372"/>
-            <a:ext cx="5387187" cy="365760"/>
+            <a:off x="7163537" y="3835745"/>
+            <a:ext cx="4525238" cy="365760"/>
           </a:xfrm>
           <a:prstGeom prst="rect">
             <a:avLst/>
@@ -10864,8 +10864,8 @@
         </p:nvSpPr>
         <p:spPr>
           <a:xfrm>
-            <a:off x="6301587" y="4521708"/>
-            <a:ext cx="5387187" cy="1778508"/>
+            <a:off x="7163537" y="4238081"/>
+            <a:ext cx="4525238" cy="2025558"/>
           </a:xfrm>
           <a:prstGeom prst="rect">
             <a:avLst/>
@@ -10883,17 +10883,17 @@
                 <a:spcPct val="100000"/>
               </a:lnSpc>
               <a:spcAft>
-                <a:spcPts val="300"/>
-              </a:spcAft>
-              <a:defRPr sz="2600" b="0">
-                <a:solidFill>
-                  <a:srgbClr val="222222"/>
-                </a:solidFill>
-                <a:latin typeface="Calibri"/>
-              </a:defRPr>
-            </a:pPr>
-            <a:r>
-              <a:rPr sz="2600" b="0">
+                <a:spcPts val="600"/>
+              </a:spcAft>
+              <a:defRPr sz="2800" b="0">
+                <a:solidFill>
+                  <a:srgbClr val="222222"/>
+                </a:solidFill>
+                <a:latin typeface="Calibri"/>
+              </a:defRPr>
+            </a:pPr>
+            <a:r>
+              <a:rPr sz="2800" b="0">
                 <a:solidFill>
                   <a:srgbClr val="222222"/>
                 </a:solidFill>
@@ -10908,17 +10908,17 @@
                 <a:spcPct val="100000"/>
               </a:lnSpc>
               <a:spcAft>
-                <a:spcPts val="300"/>
-              </a:spcAft>
-              <a:defRPr sz="2600" b="0">
-                <a:solidFill>
-                  <a:srgbClr val="222222"/>
-                </a:solidFill>
-                <a:latin typeface="Calibri"/>
-              </a:defRPr>
-            </a:pPr>
-            <a:r>
-              <a:rPr sz="2600" b="0">
+                <a:spcPts val="600"/>
+              </a:spcAft>
+              <a:defRPr sz="2800" b="0">
+                <a:solidFill>
+                  <a:srgbClr val="222222"/>
+                </a:solidFill>
+                <a:latin typeface="Calibri"/>
+              </a:defRPr>
+            </a:pPr>
+            <a:r>
+              <a:rPr sz="2800" b="0">
                 <a:solidFill>
                   <a:srgbClr val="222222"/>
                 </a:solidFill>
@@ -14767,7 +14767,7 @@
         <p:spPr>
           <a:xfrm>
             <a:off x="502920" y="1901952"/>
-            <a:ext cx="5387187" cy="4361688"/>
+            <a:ext cx="6249137" cy="4361688"/>
           </a:xfrm>
           <a:prstGeom prst="rect">
             <a:avLst/>
@@ -14964,8 +14964,8 @@
         </p:nvSpPr>
         <p:spPr>
           <a:xfrm>
-            <a:off x="6301587" y="1901952"/>
-            <a:ext cx="5387187" cy="365760"/>
+            <a:off x="7163537" y="1901952"/>
+            <a:ext cx="4525238" cy="365760"/>
           </a:xfrm>
           <a:prstGeom prst="rect">
             <a:avLst/>
@@ -15012,8 +15012,8 @@
         </p:nvSpPr>
         <p:spPr>
           <a:xfrm>
-            <a:off x="6301587" y="2304288"/>
-            <a:ext cx="5387187" cy="1778508"/>
+            <a:off x="7163537" y="2304288"/>
+            <a:ext cx="4525238" cy="1672143"/>
           </a:xfrm>
           <a:prstGeom prst="rect">
             <a:avLst/>
@@ -15033,15 +15033,15 @@
               <a:spcAft>
                 <a:spcPts val="300"/>
               </a:spcAft>
-              <a:defRPr sz="2600" b="0">
-                <a:solidFill>
-                  <a:srgbClr val="222222"/>
-                </a:solidFill>
-                <a:latin typeface="Calibri"/>
-              </a:defRPr>
-            </a:pPr>
-            <a:r>
-              <a:rPr sz="2600" b="0">
+              <a:defRPr sz="2500" b="0">
+                <a:solidFill>
+                  <a:srgbClr val="222222"/>
+                </a:solidFill>
+                <a:latin typeface="Calibri"/>
+              </a:defRPr>
+            </a:pPr>
+            <a:r>
+              <a:rPr sz="2500" b="0">
                 <a:solidFill>
                   <a:srgbClr val="222222"/>
                 </a:solidFill>
@@ -15060,8 +15060,8 @@
         </p:nvSpPr>
         <p:spPr>
           <a:xfrm>
-            <a:off x="6301587" y="4119372"/>
-            <a:ext cx="5387187" cy="365760"/>
+            <a:off x="7163537" y="4049583"/>
+            <a:ext cx="4525238" cy="365760"/>
           </a:xfrm>
           <a:prstGeom prst="rect">
             <a:avLst/>
@@ -15108,8 +15108,8 @@
         </p:nvSpPr>
         <p:spPr>
           <a:xfrm>
-            <a:off x="6301587" y="4521708"/>
-            <a:ext cx="5387187" cy="1778508"/>
+            <a:off x="7163537" y="4451919"/>
+            <a:ext cx="4525238" cy="1811720"/>
           </a:xfrm>
           <a:prstGeom prst="rect">
             <a:avLst/>
@@ -15129,15 +15129,15 @@
               <a:spcAft>
                 <a:spcPts val="300"/>
               </a:spcAft>
-              <a:defRPr sz="2600" b="0">
-                <a:solidFill>
-                  <a:srgbClr val="222222"/>
-                </a:solidFill>
-                <a:latin typeface="Calibri"/>
-              </a:defRPr>
-            </a:pPr>
-            <a:r>
-              <a:rPr sz="2600" b="0">
+              <a:defRPr sz="2400" b="0">
+                <a:solidFill>
+                  <a:srgbClr val="222222"/>
+                </a:solidFill>
+                <a:latin typeface="Calibri"/>
+              </a:defRPr>
+            </a:pPr>
+            <a:r>
+              <a:rPr sz="2400" b="0">
                 <a:solidFill>
                   <a:srgbClr val="222222"/>
                 </a:solidFill>
@@ -15154,15 +15154,15 @@
               <a:spcAft>
                 <a:spcPts val="300"/>
               </a:spcAft>
-              <a:defRPr sz="2600" b="0">
-                <a:solidFill>
-                  <a:srgbClr val="222222"/>
-                </a:solidFill>
-                <a:latin typeface="Calibri"/>
-              </a:defRPr>
-            </a:pPr>
-            <a:r>
-              <a:rPr sz="2600" b="0">
+              <a:defRPr sz="2400" b="0">
+                <a:solidFill>
+                  <a:srgbClr val="222222"/>
+                </a:solidFill>
+                <a:latin typeface="Calibri"/>
+              </a:defRPr>
+            </a:pPr>
+            <a:r>
+              <a:rPr sz="2400" b="0">
                 <a:solidFill>
                   <a:srgbClr val="222222"/>
                 </a:solidFill>
@@ -18303,7 +18303,7 @@
         <p:spPr>
           <a:xfrm>
             <a:off x="502920" y="1901952"/>
-            <a:ext cx="5387187" cy="4361688"/>
+            <a:ext cx="6249137" cy="4361688"/>
           </a:xfrm>
           <a:prstGeom prst="rect">
             <a:avLst/>
@@ -18475,8 +18475,8 @@
         </p:nvSpPr>
         <p:spPr>
           <a:xfrm>
-            <a:off x="6301587" y="1901952"/>
-            <a:ext cx="5387187" cy="365760"/>
+            <a:off x="7163537" y="1901952"/>
+            <a:ext cx="4525238" cy="365760"/>
           </a:xfrm>
           <a:prstGeom prst="rect">
             <a:avLst/>
@@ -18523,8 +18523,8 @@
         </p:nvSpPr>
         <p:spPr>
           <a:xfrm>
-            <a:off x="6301587" y="2304288"/>
-            <a:ext cx="5387187" cy="1778508"/>
+            <a:off x="7163537" y="2304288"/>
+            <a:ext cx="4525238" cy="1458305"/>
           </a:xfrm>
           <a:prstGeom prst="rect">
             <a:avLst/>
@@ -18544,15 +18544,15 @@
               <a:spcAft>
                 <a:spcPts val="300"/>
               </a:spcAft>
-              <a:defRPr sz="2600" b="0">
-                <a:solidFill>
-                  <a:srgbClr val="222222"/>
-                </a:solidFill>
-                <a:latin typeface="Calibri"/>
-              </a:defRPr>
-            </a:pPr>
-            <a:r>
-              <a:rPr sz="2600" b="0">
+              <a:defRPr sz="2200" b="0">
+                <a:solidFill>
+                  <a:srgbClr val="222222"/>
+                </a:solidFill>
+                <a:latin typeface="Calibri"/>
+              </a:defRPr>
+            </a:pPr>
+            <a:r>
+              <a:rPr sz="2200" b="0">
                 <a:solidFill>
                   <a:srgbClr val="222222"/>
                 </a:solidFill>
@@ -18571,8 +18571,8 @@
         </p:nvSpPr>
         <p:spPr>
           <a:xfrm>
-            <a:off x="6301587" y="4119372"/>
-            <a:ext cx="5387187" cy="365760"/>
+            <a:off x="7163537" y="3835745"/>
+            <a:ext cx="4525238" cy="365760"/>
           </a:xfrm>
           <a:prstGeom prst="rect">
             <a:avLst/>
@@ -18619,8 +18619,8 @@
         </p:nvSpPr>
         <p:spPr>
           <a:xfrm>
-            <a:off x="6301587" y="4521708"/>
-            <a:ext cx="5387187" cy="1778508"/>
+            <a:off x="7163537" y="4238081"/>
+            <a:ext cx="4525238" cy="2025558"/>
           </a:xfrm>
           <a:prstGeom prst="rect">
             <a:avLst/>
@@ -18640,15 +18640,15 @@
               <a:spcAft>
                 <a:spcPts val="300"/>
               </a:spcAft>
-              <a:defRPr sz="2600" b="0">
-                <a:solidFill>
-                  <a:srgbClr val="222222"/>
-                </a:solidFill>
-                <a:latin typeface="Calibri"/>
-              </a:defRPr>
-            </a:pPr>
-            <a:r>
-              <a:rPr sz="2600" b="0">
+              <a:defRPr sz="2500" b="0">
+                <a:solidFill>
+                  <a:srgbClr val="222222"/>
+                </a:solidFill>
+                <a:latin typeface="Calibri"/>
+              </a:defRPr>
+            </a:pPr>
+            <a:r>
+              <a:rPr sz="2500" b="0">
                 <a:solidFill>
                   <a:srgbClr val="222222"/>
                 </a:solidFill>
@@ -18665,15 +18665,15 @@
               <a:spcAft>
                 <a:spcPts val="300"/>
               </a:spcAft>
-              <a:defRPr sz="2600" b="0">
-                <a:solidFill>
-                  <a:srgbClr val="222222"/>
-                </a:solidFill>
-                <a:latin typeface="Calibri"/>
-              </a:defRPr>
-            </a:pPr>
-            <a:r>
-              <a:rPr sz="2600" b="0">
+              <a:defRPr sz="2500" b="0">
+                <a:solidFill>
+                  <a:srgbClr val="222222"/>
+                </a:solidFill>
+                <a:latin typeface="Calibri"/>
+              </a:defRPr>
+            </a:pPr>
+            <a:r>
+              <a:rPr sz="2500" b="0">
                 <a:solidFill>
                   <a:srgbClr val="222222"/>
                 </a:solidFill>

--- a/ground-vehicle/docs/courses/beginner-ps3/l4_neopixel_leds.pptx
+++ b/ground-vehicle/docs/courses/beginner-ps3/l4_neopixel_leds.pptx
@@ -5862,6 +5862,22 @@
               <a:spcAft>
                 <a:spcPts val="100"/>
               </a:spcAft>
+              <a:defRPr sz="600" b="0">
+                <a:solidFill>
+                  <a:srgbClr val="666666"/>
+                </a:solidFill>
+                <a:latin typeface="Calibri"/>
+              </a:defRPr>
+            </a:pPr>
+          </a:p>
+          <a:p>
+            <a:pPr algn="l">
+              <a:lnSpc>
+                <a:spcPct val="100000"/>
+              </a:lnSpc>
+              <a:spcAft>
+                <a:spcPts val="100"/>
+              </a:spcAft>
               <a:defRPr sz="1200" b="0">
                 <a:solidFill>
                   <a:srgbClr val="666666"/>
@@ -5869,6 +5885,15 @@
                 <a:latin typeface="Calibri"/>
               </a:defRPr>
             </a:pPr>
+            <a:r>
+              <a:rPr sz="1200" b="0">
+                <a:solidFill>
+                  <a:srgbClr val="666666"/>
+                </a:solidFill>
+                <a:latin typeface="Calibri"/>
+              </a:rPr>
+              <a:t>Kevin Bowen, President  -  kbowen6@icloud.com</a:t>
+            </a:r>
           </a:p>
           <a:p>
             <a:pPr algn="l">
@@ -5892,7 +5917,7 @@
                 </a:solidFill>
                 <a:latin typeface="Calibri"/>
               </a:rPr>
-              <a:t>Kevin Bowen, President  -  kbowen6@icloud.com</a:t>
+              <a:t>Malcom Graham, VP Education      Louis Parker, VP Technology</a:t>
             </a:r>
           </a:p>
           <a:p>
@@ -5917,7 +5942,7 @@
                 </a:solidFill>
                 <a:latin typeface="Calibri"/>
               </a:rPr>
-              <a:t>Malcom Graham, VP Education      Louis Parker, VP Technology</a:t>
+              <a:t>Valen Farre, System Engineer      Gary Howland, Animation</a:t>
             </a:r>
           </a:p>
           <a:p>
@@ -5942,7 +5967,7 @@
                 </a:solidFill>
                 <a:latin typeface="Calibri"/>
               </a:rPr>
-              <a:t>Valen Farre, System Engineer      Gary Howland, Animation</a:t>
+              <a:t>Eddie Revollo, Artificial Intelligence</a:t>
             </a:r>
           </a:p>
           <a:p>
@@ -5967,7 +5992,7 @@
                 </a:solidFill>
                 <a:latin typeface="Calibri"/>
               </a:rPr>
-              <a:t>Eddie Revollo, Artificial Intelligence</a:t>
+              <a:t>Interns: Oscar Canazales, Krishnansh Vemulapalli, Soham Gangal, Erik Olsen</a:t>
             </a:r>
           </a:p>
           <a:p>
@@ -5978,32 +6003,7 @@
               <a:spcAft>
                 <a:spcPts val="100"/>
               </a:spcAft>
-              <a:defRPr sz="1200" b="0">
-                <a:solidFill>
-                  <a:srgbClr val="666666"/>
-                </a:solidFill>
-                <a:latin typeface="Calibri"/>
-              </a:defRPr>
-            </a:pPr>
-            <a:r>
-              <a:rPr sz="1200" b="0">
-                <a:solidFill>
-                  <a:srgbClr val="666666"/>
-                </a:solidFill>
-                <a:latin typeface="Calibri"/>
-              </a:rPr>
-              <a:t>Interns: Oscar Canazales, Krishnansh Vemulapalli, Soham Gangal, Erik Olsen</a:t>
-            </a:r>
-          </a:p>
-          <a:p>
-            <a:pPr algn="l">
-              <a:lnSpc>
-                <a:spcPct val="100000"/>
-              </a:lnSpc>
-              <a:spcAft>
-                <a:spcPts val="100"/>
-              </a:spcAft>
-              <a:defRPr sz="1200" b="0">
+              <a:defRPr sz="600" b="0">
                 <a:solidFill>
                   <a:srgbClr val="666666"/>
                 </a:solidFill>
@@ -7048,7 +7048,7 @@
               <a:spcAft>
                 <a:spcPts val="200"/>
               </a:spcAft>
-              <a:defRPr sz="1800" b="0">
+              <a:defRPr sz="900" b="0">
                 <a:solidFill>
                   <a:srgbClr val="222222"/>
                 </a:solidFill>
@@ -7500,7 +7500,7 @@
               <a:spcAft>
                 <a:spcPts val="200"/>
               </a:spcAft>
-              <a:defRPr sz="1800" b="0">
+              <a:defRPr sz="900" b="0">
                 <a:solidFill>
                   <a:srgbClr val="222222"/>
                 </a:solidFill>
@@ -7954,6 +7954,22 @@
               <a:spcAft>
                 <a:spcPts val="0"/>
               </a:spcAft>
+              <a:defRPr sz="900" b="0">
+                <a:solidFill>
+                  <a:srgbClr val="222222"/>
+                </a:solidFill>
+                <a:latin typeface="Calibri"/>
+              </a:defRPr>
+            </a:pPr>
+          </a:p>
+          <a:p>
+            <a:pPr algn="ctr">
+              <a:lnSpc>
+                <a:spcPct val="100000"/>
+              </a:lnSpc>
+              <a:spcAft>
+                <a:spcPts val="0"/>
+              </a:spcAft>
               <a:defRPr sz="1800" b="0">
                 <a:solidFill>
                   <a:srgbClr val="222222"/>
@@ -7961,6 +7977,15 @@
                 <a:latin typeface="Calibri"/>
               </a:defRPr>
             </a:pPr>
+            <a:r>
+              <a:rPr sz="1800" b="0">
+                <a:solidFill>
+                  <a:srgbClr val="222222"/>
+                </a:solidFill>
+                <a:latin typeface="Calibri"/>
+              </a:rPr>
+              <a:t>3 LEDs x 20 mA</a:t>
+            </a:r>
           </a:p>
           <a:p>
             <a:pPr algn="ctr">
@@ -7984,7 +8009,7 @@
                 </a:solidFill>
                 <a:latin typeface="Calibri"/>
               </a:rPr>
-              <a:t>3 LEDs x 20 mA</a:t>
+              <a:t>= 60 mA</a:t>
             </a:r>
           </a:p>
           <a:p>
@@ -7995,6 +8020,22 @@
               <a:spcAft>
                 <a:spcPts val="0"/>
               </a:spcAft>
+              <a:defRPr sz="900" b="0">
+                <a:solidFill>
+                  <a:srgbClr val="222222"/>
+                </a:solidFill>
+                <a:latin typeface="Calibri"/>
+              </a:defRPr>
+            </a:pPr>
+          </a:p>
+          <a:p>
+            <a:pPr algn="ctr">
+              <a:lnSpc>
+                <a:spcPct val="100000"/>
+              </a:lnSpc>
+              <a:spcAft>
+                <a:spcPts val="0"/>
+              </a:spcAft>
               <a:defRPr sz="1800" b="0">
                 <a:solidFill>
                   <a:srgbClr val="222222"/>
@@ -8009,7 +8050,7 @@
                 </a:solidFill>
                 <a:latin typeface="Calibri"/>
               </a:rPr>
-              <a:t>= 60 mA</a:t>
+              <a:t>P = I x V</a:t>
             </a:r>
           </a:p>
           <a:p>
@@ -8027,6 +8068,15 @@
                 <a:latin typeface="Calibri"/>
               </a:defRPr>
             </a:pPr>
+            <a:r>
+              <a:rPr sz="1800" b="0">
+                <a:solidFill>
+                  <a:srgbClr val="222222"/>
+                </a:solidFill>
+                <a:latin typeface="Calibri"/>
+              </a:rPr>
+              <a:t>= 0.06 x 5</a:t>
+            </a:r>
           </a:p>
           <a:p>
             <a:pPr algn="ctr">
@@ -8050,7 +8100,7 @@
                 </a:solidFill>
                 <a:latin typeface="Calibri"/>
               </a:rPr>
-              <a:t>P = I x V</a:t>
+              <a:t>= 0.3 W</a:t>
             </a:r>
           </a:p>
           <a:p>
@@ -8061,57 +8111,7 @@
               <a:spcAft>
                 <a:spcPts val="0"/>
               </a:spcAft>
-              <a:defRPr sz="1800" b="0">
-                <a:solidFill>
-                  <a:srgbClr val="222222"/>
-                </a:solidFill>
-                <a:latin typeface="Calibri"/>
-              </a:defRPr>
-            </a:pPr>
-            <a:r>
-              <a:rPr sz="1800" b="0">
-                <a:solidFill>
-                  <a:srgbClr val="222222"/>
-                </a:solidFill>
-                <a:latin typeface="Calibri"/>
-              </a:rPr>
-              <a:t>= 0.06 x 5</a:t>
-            </a:r>
-          </a:p>
-          <a:p>
-            <a:pPr algn="ctr">
-              <a:lnSpc>
-                <a:spcPct val="100000"/>
-              </a:lnSpc>
-              <a:spcAft>
-                <a:spcPts val="0"/>
-              </a:spcAft>
-              <a:defRPr sz="1800" b="0">
-                <a:solidFill>
-                  <a:srgbClr val="222222"/>
-                </a:solidFill>
-                <a:latin typeface="Calibri"/>
-              </a:defRPr>
-            </a:pPr>
-            <a:r>
-              <a:rPr sz="1800" b="0">
-                <a:solidFill>
-                  <a:srgbClr val="222222"/>
-                </a:solidFill>
-                <a:latin typeface="Calibri"/>
-              </a:rPr>
-              <a:t>= 0.3 W</a:t>
-            </a:r>
-          </a:p>
-          <a:p>
-            <a:pPr algn="ctr">
-              <a:lnSpc>
-                <a:spcPct val="100000"/>
-              </a:lnSpc>
-              <a:spcAft>
-                <a:spcPts val="0"/>
-              </a:spcAft>
-              <a:defRPr sz="1800" b="0">
+              <a:defRPr sz="900" b="0">
                 <a:solidFill>
                   <a:srgbClr val="222222"/>
                 </a:solidFill>
@@ -14451,7 +14451,7 @@
                 <a:spcPct val="100000"/>
               </a:lnSpc>
               <a:spcAft>
-                <a:spcPts val="600"/>
+                <a:spcPts val="700"/>
               </a:spcAft>
               <a:defRPr sz="1800" b="0">
                 <a:solidFill>
@@ -14476,7 +14476,7 @@
                 <a:spcPct val="100000"/>
               </a:lnSpc>
               <a:spcAft>
-                <a:spcPts val="600"/>
+                <a:spcPts val="700"/>
               </a:spcAft>
               <a:defRPr sz="1800" b="0">
                 <a:solidFill>
@@ -14501,7 +14501,7 @@
                 <a:spcPct val="100000"/>
               </a:lnSpc>
               <a:spcAft>
-                <a:spcPts val="600"/>
+                <a:spcPts val="700"/>
               </a:spcAft>
               <a:defRPr sz="1800" b="0">
                 <a:solidFill>
@@ -14526,7 +14526,23 @@
                 <a:spcPct val="100000"/>
               </a:lnSpc>
               <a:spcAft>
-                <a:spcPts val="600"/>
+                <a:spcPts val="700"/>
+              </a:spcAft>
+              <a:defRPr sz="900" b="0">
+                <a:solidFill>
+                  <a:srgbClr val="222222"/>
+                </a:solidFill>
+                <a:latin typeface="Calibri"/>
+              </a:defRPr>
+            </a:pPr>
+          </a:p>
+          <a:p>
+            <a:pPr algn="l">
+              <a:lnSpc>
+                <a:spcPct val="100000"/>
+              </a:lnSpc>
+              <a:spcAft>
+                <a:spcPts val="700"/>
               </a:spcAft>
               <a:defRPr sz="1800" b="0">
                 <a:solidFill>
@@ -14535,6 +14551,15 @@
                 <a:latin typeface="Calibri"/>
               </a:defRPr>
             </a:pPr>
+            <a:r>
+              <a:rPr sz="1800" b="0">
+                <a:solidFill>
+                  <a:srgbClr val="222222"/>
+                </a:solidFill>
+                <a:latin typeface="Calibri"/>
+              </a:rPr>
+              <a:t>EVERY pixel the same? strip.fill() already does it. Save the loop for when the pixels differ.</a:t>
+            </a:r>
           </a:p>
           <a:p>
             <a:pPr algn="l">
@@ -14542,24 +14567,15 @@
                 <a:spcPct val="100000"/>
               </a:lnSpc>
               <a:spcAft>
-                <a:spcPts val="600"/>
-              </a:spcAft>
-              <a:defRPr sz="1800" b="0">
-                <a:solidFill>
-                  <a:srgbClr val="222222"/>
-                </a:solidFill>
-                <a:latin typeface="Calibri"/>
-              </a:defRPr>
-            </a:pPr>
-            <a:r>
-              <a:rPr sz="1800" b="0">
-                <a:solidFill>
-                  <a:srgbClr val="222222"/>
-                </a:solidFill>
-                <a:latin typeface="Calibri"/>
-              </a:rPr>
-              <a:t>EVERY pixel the same? strip.fill() already does it. Save the loop for when the pixels differ.</a:t>
-            </a:r>
+                <a:spcPts val="700"/>
+              </a:spcAft>
+              <a:defRPr sz="900" b="0">
+                <a:solidFill>
+                  <a:srgbClr val="222222"/>
+                </a:solidFill>
+                <a:latin typeface="Calibri"/>
+              </a:defRPr>
+            </a:pPr>
           </a:p>
           <a:p>
             <a:pPr algn="l">
@@ -14567,23 +14583,7 @@
                 <a:spcPct val="100000"/>
               </a:lnSpc>
               <a:spcAft>
-                <a:spcPts val="600"/>
-              </a:spcAft>
-              <a:defRPr sz="1800" b="0">
-                <a:solidFill>
-                  <a:srgbClr val="222222"/>
-                </a:solidFill>
-                <a:latin typeface="Calibri"/>
-              </a:defRPr>
-            </a:pPr>
-          </a:p>
-          <a:p>
-            <a:pPr algn="l">
-              <a:lnSpc>
-                <a:spcPct val="100000"/>
-              </a:lnSpc>
-              <a:spcAft>
-                <a:spcPts val="600"/>
+                <a:spcPts val="700"/>
               </a:spcAft>
               <a:defRPr sz="1800" b="0">
                 <a:solidFill>
@@ -19015,15 +19015,15 @@
               <a:spcAft>
                 <a:spcPts val="600"/>
               </a:spcAft>
-              <a:defRPr sz="2400" b="0">
-                <a:solidFill>
-                  <a:srgbClr val="222222"/>
-                </a:solidFill>
-                <a:latin typeface="Calibri"/>
-              </a:defRPr>
-            </a:pPr>
-            <a:r>
-              <a:rPr sz="2400" b="0">
+              <a:defRPr sz="2600" b="0">
+                <a:solidFill>
+                  <a:srgbClr val="222222"/>
+                </a:solidFill>
+                <a:latin typeface="Calibri"/>
+              </a:defRPr>
+            </a:pPr>
+            <a:r>
+              <a:rPr sz="2600" b="0">
                 <a:solidFill>
                   <a:srgbClr val="222222"/>
                 </a:solidFill>
@@ -19040,15 +19040,15 @@
               <a:spcAft>
                 <a:spcPts val="600"/>
               </a:spcAft>
-              <a:defRPr sz="2400" b="0">
-                <a:solidFill>
-                  <a:srgbClr val="222222"/>
-                </a:solidFill>
-                <a:latin typeface="Calibri"/>
-              </a:defRPr>
-            </a:pPr>
-            <a:r>
-              <a:rPr sz="2400" b="0">
+              <a:defRPr sz="2600" b="0">
+                <a:solidFill>
+                  <a:srgbClr val="222222"/>
+                </a:solidFill>
+                <a:latin typeface="Calibri"/>
+              </a:defRPr>
+            </a:pPr>
+            <a:r>
+              <a:rPr sz="2600" b="0">
                 <a:solidFill>
                   <a:srgbClr val="222222"/>
                 </a:solidFill>
@@ -19065,15 +19065,15 @@
               <a:spcAft>
                 <a:spcPts val="600"/>
               </a:spcAft>
-              <a:defRPr sz="2400" b="0">
-                <a:solidFill>
-                  <a:srgbClr val="222222"/>
-                </a:solidFill>
-                <a:latin typeface="Calibri"/>
-              </a:defRPr>
-            </a:pPr>
-            <a:r>
-              <a:rPr sz="2400" b="0">
+              <a:defRPr sz="2600" b="0">
+                <a:solidFill>
+                  <a:srgbClr val="222222"/>
+                </a:solidFill>
+                <a:latin typeface="Calibri"/>
+              </a:defRPr>
+            </a:pPr>
+            <a:r>
+              <a:rPr sz="2600" b="0">
                 <a:solidFill>
                   <a:srgbClr val="222222"/>
                 </a:solidFill>
@@ -19090,15 +19090,15 @@
               <a:spcAft>
                 <a:spcPts val="600"/>
               </a:spcAft>
-              <a:defRPr sz="2400" b="0">
-                <a:solidFill>
-                  <a:srgbClr val="222222"/>
-                </a:solidFill>
-                <a:latin typeface="Calibri"/>
-              </a:defRPr>
-            </a:pPr>
-            <a:r>
-              <a:rPr sz="2400" b="0">
+              <a:defRPr sz="2600" b="0">
+                <a:solidFill>
+                  <a:srgbClr val="222222"/>
+                </a:solidFill>
+                <a:latin typeface="Calibri"/>
+              </a:defRPr>
+            </a:pPr>
+            <a:r>
+              <a:rPr sz="2600" b="0">
                 <a:solidFill>
                   <a:srgbClr val="222222"/>
                 </a:solidFill>
@@ -19115,7 +19115,7 @@
               <a:spcAft>
                 <a:spcPts val="600"/>
               </a:spcAft>
-              <a:defRPr sz="2400" b="0">
+              <a:defRPr sz="1300" b="0">
                 <a:solidFill>
                   <a:srgbClr val="222222"/>
                 </a:solidFill>
@@ -19131,15 +19131,15 @@
               <a:spcAft>
                 <a:spcPts val="600"/>
               </a:spcAft>
-              <a:defRPr sz="2400" b="0">
-                <a:solidFill>
-                  <a:srgbClr val="222222"/>
-                </a:solidFill>
-                <a:latin typeface="Calibri"/>
-              </a:defRPr>
-            </a:pPr>
-            <a:r>
-              <a:rPr sz="2400" b="0">
+              <a:defRPr sz="2600" b="0">
+                <a:solidFill>
+                  <a:srgbClr val="222222"/>
+                </a:solidFill>
+                <a:latin typeface="Calibri"/>
+              </a:defRPr>
+            </a:pPr>
+            <a:r>
+              <a:rPr sz="2600" b="0">
                 <a:solidFill>
                   <a:srgbClr val="222222"/>
                 </a:solidFill>
@@ -22609,15 +22609,15 @@
               <a:spcAft>
                 <a:spcPts val="900"/>
               </a:spcAft>
-              <a:defRPr sz="1800" b="0">
-                <a:solidFill>
-                  <a:srgbClr val="222222"/>
-                </a:solidFill>
-                <a:latin typeface="Calibri"/>
-              </a:defRPr>
-            </a:pPr>
-            <a:r>
-              <a:rPr sz="1800" b="0">
+              <a:defRPr sz="1900" b="0">
+                <a:solidFill>
+                  <a:srgbClr val="222222"/>
+                </a:solidFill>
+                <a:latin typeface="Calibri"/>
+              </a:defRPr>
+            </a:pPr>
+            <a:r>
+              <a:rPr sz="1900" b="0">
                 <a:solidFill>
                   <a:srgbClr val="222222"/>
                 </a:solidFill>
@@ -22634,7 +22634,7 @@
               <a:spcAft>
                 <a:spcPts val="900"/>
               </a:spcAft>
-              <a:defRPr sz="1800" b="0">
+              <a:defRPr sz="950" b="0">
                 <a:solidFill>
                   <a:srgbClr val="222222"/>
                 </a:solidFill>
@@ -22650,15 +22650,15 @@
               <a:spcAft>
                 <a:spcPts val="900"/>
               </a:spcAft>
-              <a:defRPr sz="1800" b="0">
-                <a:solidFill>
-                  <a:srgbClr val="222222"/>
-                </a:solidFill>
-                <a:latin typeface="Calibri"/>
-              </a:defRPr>
-            </a:pPr>
-            <a:r>
-              <a:rPr sz="1800" b="0">
+              <a:defRPr sz="1900" b="0">
+                <a:solidFill>
+                  <a:srgbClr val="222222"/>
+                </a:solidFill>
+                <a:latin typeface="Calibri"/>
+              </a:defRPr>
+            </a:pPr>
+            <a:r>
+              <a:rPr sz="1900" b="0">
                 <a:solidFill>
                   <a:srgbClr val="222222"/>
                 </a:solidFill>
@@ -22675,7 +22675,7 @@
               <a:spcAft>
                 <a:spcPts val="900"/>
               </a:spcAft>
-              <a:defRPr sz="1800" b="0">
+              <a:defRPr sz="950" b="0">
                 <a:solidFill>
                   <a:srgbClr val="222222"/>
                 </a:solidFill>
@@ -22691,15 +22691,15 @@
               <a:spcAft>
                 <a:spcPts val="900"/>
               </a:spcAft>
-              <a:defRPr sz="1800" b="0">
-                <a:solidFill>
-                  <a:srgbClr val="222222"/>
-                </a:solidFill>
-                <a:latin typeface="Calibri"/>
-              </a:defRPr>
-            </a:pPr>
-            <a:r>
-              <a:rPr sz="1800" b="0">
+              <a:defRPr sz="1900" b="0">
+                <a:solidFill>
+                  <a:srgbClr val="222222"/>
+                </a:solidFill>
+                <a:latin typeface="Calibri"/>
+              </a:defRPr>
+            </a:pPr>
+            <a:r>
+              <a:rPr sz="1900" b="0">
                 <a:solidFill>
                   <a:srgbClr val="222222"/>
                 </a:solidFill>
@@ -22814,7 +22814,7 @@
               <a:spcAft>
                 <a:spcPts val="900"/>
               </a:spcAft>
-              <a:defRPr sz="1800" b="0">
+              <a:defRPr sz="900" b="0">
                 <a:solidFill>
                   <a:srgbClr val="222222"/>
                 </a:solidFill>

--- a/ground-vehicle/docs/courses/beginner-ps3/l4_neopixel_leds.pptx
+++ b/ground-vehicle/docs/courses/beginner-ps3/l4_neopixel_leds.pptx
@@ -6323,7 +6323,7 @@
         <p:spPr>
           <a:xfrm>
             <a:off x="502920" y="1188720"/>
-            <a:ext cx="5364327" cy="457200"/>
+            <a:ext cx="4972924" cy="457200"/>
           </a:xfrm>
           <a:prstGeom prst="rect">
             <a:avLst/>
@@ -6371,7 +6371,7 @@
         <p:spPr>
           <a:xfrm>
             <a:off x="502920" y="1700784"/>
-            <a:ext cx="5364327" cy="3474720"/>
+            <a:ext cx="4972924" cy="3474720"/>
           </a:xfrm>
           <a:prstGeom prst="rect">
             <a:avLst/>
@@ -6391,15 +6391,15 @@
               <a:spcAft>
                 <a:spcPts val="800"/>
               </a:spcAft>
-              <a:defRPr sz="2000" b="0">
-                <a:solidFill>
-                  <a:srgbClr val="222222"/>
-                </a:solidFill>
-                <a:latin typeface="Calibri"/>
-              </a:defRPr>
-            </a:pPr>
-            <a:r>
-              <a:rPr sz="2000" b="0">
+              <a:defRPr sz="1900" b="0">
+                <a:solidFill>
+                  <a:srgbClr val="222222"/>
+                </a:solidFill>
+                <a:latin typeface="Calibri"/>
+              </a:defRPr>
+            </a:pPr>
+            <a:r>
+              <a:rPr sz="1900" b="0">
                 <a:solidFill>
                   <a:srgbClr val="222222"/>
                 </a:solidFill>
@@ -6416,15 +6416,15 @@
               <a:spcAft>
                 <a:spcPts val="800"/>
               </a:spcAft>
-              <a:defRPr sz="2000" b="0">
-                <a:solidFill>
-                  <a:srgbClr val="222222"/>
-                </a:solidFill>
-                <a:latin typeface="Calibri"/>
-              </a:defRPr>
-            </a:pPr>
-            <a:r>
-              <a:rPr sz="2000" b="0">
+              <a:defRPr sz="1900" b="0">
+                <a:solidFill>
+                  <a:srgbClr val="222222"/>
+                </a:solidFill>
+                <a:latin typeface="Calibri"/>
+              </a:defRPr>
+            </a:pPr>
+            <a:r>
+              <a:rPr sz="1900" b="0">
                 <a:solidFill>
                   <a:srgbClr val="222222"/>
                 </a:solidFill>
@@ -6441,15 +6441,15 @@
               <a:spcAft>
                 <a:spcPts val="800"/>
               </a:spcAft>
-              <a:defRPr sz="2000" b="0">
-                <a:solidFill>
-                  <a:srgbClr val="222222"/>
-                </a:solidFill>
-                <a:latin typeface="Calibri"/>
-              </a:defRPr>
-            </a:pPr>
-            <a:r>
-              <a:rPr sz="2000" b="0">
+              <a:defRPr sz="1900" b="0">
+                <a:solidFill>
+                  <a:srgbClr val="222222"/>
+                </a:solidFill>
+                <a:latin typeface="Calibri"/>
+              </a:defRPr>
+            </a:pPr>
+            <a:r>
+              <a:rPr sz="1900" b="0">
                 <a:solidFill>
                   <a:srgbClr val="222222"/>
                 </a:solidFill>
@@ -6466,15 +6466,15 @@
               <a:spcAft>
                 <a:spcPts val="800"/>
               </a:spcAft>
-              <a:defRPr sz="2000" b="0">
-                <a:solidFill>
-                  <a:srgbClr val="222222"/>
-                </a:solidFill>
-                <a:latin typeface="Calibri"/>
-              </a:defRPr>
-            </a:pPr>
-            <a:r>
-              <a:rPr sz="2000" b="0">
+              <a:defRPr sz="1900" b="0">
+                <a:solidFill>
+                  <a:srgbClr val="222222"/>
+                </a:solidFill>
+                <a:latin typeface="Calibri"/>
+              </a:defRPr>
+            </a:pPr>
+            <a:r>
+              <a:rPr sz="1900" b="0">
                 <a:solidFill>
                   <a:srgbClr val="222222"/>
                 </a:solidFill>
@@ -6491,15 +6491,15 @@
               <a:spcAft>
                 <a:spcPts val="800"/>
               </a:spcAft>
-              <a:defRPr sz="2000" b="0">
-                <a:solidFill>
-                  <a:srgbClr val="222222"/>
-                </a:solidFill>
-                <a:latin typeface="Calibri"/>
-              </a:defRPr>
-            </a:pPr>
-            <a:r>
-              <a:rPr sz="2000" b="0">
+              <a:defRPr sz="1900" b="0">
+                <a:solidFill>
+                  <a:srgbClr val="222222"/>
+                </a:solidFill>
+                <a:latin typeface="Calibri"/>
+              </a:defRPr>
+            </a:pPr>
+            <a:r>
+              <a:rPr sz="1900" b="0">
                 <a:solidFill>
                   <a:srgbClr val="222222"/>
                 </a:solidFill>
@@ -6516,15 +6516,15 @@
               <a:spcAft>
                 <a:spcPts val="800"/>
               </a:spcAft>
-              <a:defRPr sz="2000" b="0">
-                <a:solidFill>
-                  <a:srgbClr val="222222"/>
-                </a:solidFill>
-                <a:latin typeface="Calibri"/>
-              </a:defRPr>
-            </a:pPr>
-            <a:r>
-              <a:rPr sz="2000" b="0">
+              <a:defRPr sz="1900" b="0">
+                <a:solidFill>
+                  <a:srgbClr val="222222"/>
+                </a:solidFill>
+                <a:latin typeface="Calibri"/>
+              </a:defRPr>
+            </a:pPr>
+            <a:r>
+              <a:rPr sz="1900" b="0">
                 <a:solidFill>
                   <a:srgbClr val="222222"/>
                 </a:solidFill>
@@ -6543,8 +6543,8 @@
         </p:nvSpPr>
         <p:spPr>
           <a:xfrm>
-            <a:off x="6324447" y="1188720"/>
-            <a:ext cx="5364327" cy="457200"/>
+            <a:off x="5933044" y="1188720"/>
+            <a:ext cx="5755731" cy="457200"/>
           </a:xfrm>
           <a:prstGeom prst="rect">
             <a:avLst/>
@@ -6591,8 +6591,8 @@
         </p:nvSpPr>
         <p:spPr>
           <a:xfrm>
-            <a:off x="6324447" y="1700784"/>
-            <a:ext cx="5364327" cy="3474720"/>
+            <a:off x="5933044" y="1700784"/>
+            <a:ext cx="5755731" cy="3474720"/>
           </a:xfrm>
           <a:prstGeom prst="rect">
             <a:avLst/>
@@ -14817,7 +14817,7 @@
         <p:spPr>
           <a:xfrm>
             <a:off x="502920" y="1188720"/>
-            <a:ext cx="5364327" cy="457200"/>
+            <a:ext cx="5106693" cy="457200"/>
           </a:xfrm>
           <a:prstGeom prst="rect">
             <a:avLst/>
@@ -14865,7 +14865,7 @@
         <p:spPr>
           <a:xfrm>
             <a:off x="502920" y="1700784"/>
-            <a:ext cx="5364327" cy="3474720"/>
+            <a:ext cx="5106693" cy="3474720"/>
           </a:xfrm>
           <a:prstGeom prst="rect">
             <a:avLst/>
@@ -14987,8 +14987,8 @@
         </p:nvSpPr>
         <p:spPr>
           <a:xfrm>
-            <a:off x="6324447" y="1188720"/>
-            <a:ext cx="5364327" cy="457200"/>
+            <a:off x="6066813" y="1188720"/>
+            <a:ext cx="5621962" cy="457200"/>
           </a:xfrm>
           <a:prstGeom prst="rect">
             <a:avLst/>
@@ -15035,8 +15035,8 @@
         </p:nvSpPr>
         <p:spPr>
           <a:xfrm>
-            <a:off x="6324447" y="1700784"/>
-            <a:ext cx="5364327" cy="3474720"/>
+            <a:off x="6066813" y="1700784"/>
+            <a:ext cx="5621962" cy="3474720"/>
           </a:xfrm>
           <a:prstGeom prst="rect">
             <a:avLst/>
@@ -21854,7 +21854,7 @@
         <p:spPr>
           <a:xfrm>
             <a:off x="502920" y="1188720"/>
-            <a:ext cx="5364327" cy="457200"/>
+            <a:ext cx="5050413" cy="457200"/>
           </a:xfrm>
           <a:prstGeom prst="rect">
             <a:avLst/>
@@ -21902,7 +21902,7 @@
         <p:spPr>
           <a:xfrm>
             <a:off x="502920" y="1700784"/>
-            <a:ext cx="5364327" cy="3474720"/>
+            <a:ext cx="5050413" cy="3474720"/>
           </a:xfrm>
           <a:prstGeom prst="rect">
             <a:avLst/>
@@ -21922,15 +21922,15 @@
               <a:spcAft>
                 <a:spcPts val="800"/>
               </a:spcAft>
-              <a:defRPr sz="1800" b="0">
-                <a:solidFill>
-                  <a:srgbClr val="222222"/>
-                </a:solidFill>
-                <a:latin typeface="Calibri"/>
-              </a:defRPr>
-            </a:pPr>
-            <a:r>
-              <a:rPr sz="1800" b="0">
+              <a:defRPr sz="1900" b="0">
+                <a:solidFill>
+                  <a:srgbClr val="222222"/>
+                </a:solidFill>
+                <a:latin typeface="Calibri"/>
+              </a:defRPr>
+            </a:pPr>
+            <a:r>
+              <a:rPr sz="1900" b="0">
                 <a:solidFill>
                   <a:srgbClr val="222222"/>
                 </a:solidFill>
@@ -21947,15 +21947,15 @@
               <a:spcAft>
                 <a:spcPts val="800"/>
               </a:spcAft>
-              <a:defRPr sz="1800" b="0">
-                <a:solidFill>
-                  <a:srgbClr val="222222"/>
-                </a:solidFill>
-                <a:latin typeface="Calibri"/>
-              </a:defRPr>
-            </a:pPr>
-            <a:r>
-              <a:rPr sz="1800" b="0">
+              <a:defRPr sz="1900" b="0">
+                <a:solidFill>
+                  <a:srgbClr val="222222"/>
+                </a:solidFill>
+                <a:latin typeface="Calibri"/>
+              </a:defRPr>
+            </a:pPr>
+            <a:r>
+              <a:rPr sz="1900" b="0">
                 <a:solidFill>
                   <a:srgbClr val="222222"/>
                 </a:solidFill>
@@ -21972,15 +21972,15 @@
               <a:spcAft>
                 <a:spcPts val="800"/>
               </a:spcAft>
-              <a:defRPr sz="1800" b="0">
-                <a:solidFill>
-                  <a:srgbClr val="222222"/>
-                </a:solidFill>
-                <a:latin typeface="Calibri"/>
-              </a:defRPr>
-            </a:pPr>
-            <a:r>
-              <a:rPr sz="1800" b="0">
+              <a:defRPr sz="1900" b="0">
+                <a:solidFill>
+                  <a:srgbClr val="222222"/>
+                </a:solidFill>
+                <a:latin typeface="Calibri"/>
+              </a:defRPr>
+            </a:pPr>
+            <a:r>
+              <a:rPr sz="1900" b="0">
                 <a:solidFill>
                   <a:srgbClr val="222222"/>
                 </a:solidFill>
@@ -21997,15 +21997,15 @@
               <a:spcAft>
                 <a:spcPts val="800"/>
               </a:spcAft>
-              <a:defRPr sz="1800" b="0">
-                <a:solidFill>
-                  <a:srgbClr val="222222"/>
-                </a:solidFill>
-                <a:latin typeface="Calibri"/>
-              </a:defRPr>
-            </a:pPr>
-            <a:r>
-              <a:rPr sz="1800" b="0">
+              <a:defRPr sz="1900" b="0">
+                <a:solidFill>
+                  <a:srgbClr val="222222"/>
+                </a:solidFill>
+                <a:latin typeface="Calibri"/>
+              </a:defRPr>
+            </a:pPr>
+            <a:r>
+              <a:rPr sz="1900" b="0">
                 <a:solidFill>
                   <a:srgbClr val="222222"/>
                 </a:solidFill>
@@ -22022,15 +22022,15 @@
               <a:spcAft>
                 <a:spcPts val="800"/>
               </a:spcAft>
-              <a:defRPr sz="1800" b="0">
-                <a:solidFill>
-                  <a:srgbClr val="222222"/>
-                </a:solidFill>
-                <a:latin typeface="Calibri"/>
-              </a:defRPr>
-            </a:pPr>
-            <a:r>
-              <a:rPr sz="1800" b="0">
+              <a:defRPr sz="1900" b="0">
+                <a:solidFill>
+                  <a:srgbClr val="222222"/>
+                </a:solidFill>
+                <a:latin typeface="Calibri"/>
+              </a:defRPr>
+            </a:pPr>
+            <a:r>
+              <a:rPr sz="1900" b="0">
                 <a:solidFill>
                   <a:srgbClr val="222222"/>
                 </a:solidFill>
@@ -22047,15 +22047,15 @@
               <a:spcAft>
                 <a:spcPts val="800"/>
               </a:spcAft>
-              <a:defRPr sz="1800" b="0">
-                <a:solidFill>
-                  <a:srgbClr val="222222"/>
-                </a:solidFill>
-                <a:latin typeface="Calibri"/>
-              </a:defRPr>
-            </a:pPr>
-            <a:r>
-              <a:rPr sz="1800" b="0">
+              <a:defRPr sz="1900" b="0">
+                <a:solidFill>
+                  <a:srgbClr val="222222"/>
+                </a:solidFill>
+                <a:latin typeface="Calibri"/>
+              </a:defRPr>
+            </a:pPr>
+            <a:r>
+              <a:rPr sz="1900" b="0">
                 <a:solidFill>
                   <a:srgbClr val="222222"/>
                 </a:solidFill>
@@ -22072,15 +22072,15 @@
               <a:spcAft>
                 <a:spcPts val="800"/>
               </a:spcAft>
-              <a:defRPr sz="1800" b="0">
-                <a:solidFill>
-                  <a:srgbClr val="222222"/>
-                </a:solidFill>
-                <a:latin typeface="Calibri"/>
-              </a:defRPr>
-            </a:pPr>
-            <a:r>
-              <a:rPr sz="1800" b="0">
+              <a:defRPr sz="1900" b="0">
+                <a:solidFill>
+                  <a:srgbClr val="222222"/>
+                </a:solidFill>
+                <a:latin typeface="Calibri"/>
+              </a:defRPr>
+            </a:pPr>
+            <a:r>
+              <a:rPr sz="1900" b="0">
                 <a:solidFill>
                   <a:srgbClr val="222222"/>
                 </a:solidFill>
@@ -22099,8 +22099,8 @@
         </p:nvSpPr>
         <p:spPr>
           <a:xfrm>
-            <a:off x="6324447" y="1188720"/>
-            <a:ext cx="5364327" cy="457200"/>
+            <a:off x="6010533" y="1188720"/>
+            <a:ext cx="5678242" cy="457200"/>
           </a:xfrm>
           <a:prstGeom prst="rect">
             <a:avLst/>
@@ -22147,8 +22147,8 @@
         </p:nvSpPr>
         <p:spPr>
           <a:xfrm>
-            <a:off x="6324447" y="1700784"/>
-            <a:ext cx="5364327" cy="3474720"/>
+            <a:off x="6010533" y="1700784"/>
+            <a:ext cx="5678242" cy="3474720"/>
           </a:xfrm>
           <a:prstGeom prst="rect">
             <a:avLst/>
@@ -22166,17 +22166,17 @@
                 <a:spcPct val="100000"/>
               </a:lnSpc>
               <a:spcAft>
-                <a:spcPts val="400"/>
-              </a:spcAft>
-              <a:defRPr sz="1800" b="0">
-                <a:solidFill>
-                  <a:srgbClr val="222222"/>
-                </a:solidFill>
-                <a:latin typeface="Calibri"/>
-              </a:defRPr>
-            </a:pPr>
-            <a:r>
-              <a:rPr sz="1800" b="0">
+                <a:spcPts val="800"/>
+              </a:spcAft>
+              <a:defRPr sz="1900" b="0">
+                <a:solidFill>
+                  <a:srgbClr val="222222"/>
+                </a:solidFill>
+                <a:latin typeface="Calibri"/>
+              </a:defRPr>
+            </a:pPr>
+            <a:r>
+              <a:rPr sz="1900" b="0">
                 <a:solidFill>
                   <a:srgbClr val="222222"/>
                 </a:solidFill>
@@ -22191,17 +22191,17 @@
                 <a:spcPct val="100000"/>
               </a:lnSpc>
               <a:spcAft>
-                <a:spcPts val="400"/>
-              </a:spcAft>
-              <a:defRPr sz="1800" b="0">
-                <a:solidFill>
-                  <a:srgbClr val="222222"/>
-                </a:solidFill>
-                <a:latin typeface="Calibri"/>
-              </a:defRPr>
-            </a:pPr>
-            <a:r>
-              <a:rPr sz="1800" b="0">
+                <a:spcPts val="800"/>
+              </a:spcAft>
+              <a:defRPr sz="1900" b="0">
+                <a:solidFill>
+                  <a:srgbClr val="222222"/>
+                </a:solidFill>
+                <a:latin typeface="Calibri"/>
+              </a:defRPr>
+            </a:pPr>
+            <a:r>
+              <a:rPr sz="1900" b="0">
                 <a:solidFill>
                   <a:srgbClr val="222222"/>
                 </a:solidFill>
@@ -22216,17 +22216,17 @@
                 <a:spcPct val="100000"/>
               </a:lnSpc>
               <a:spcAft>
-                <a:spcPts val="400"/>
-              </a:spcAft>
-              <a:defRPr sz="1800" b="0">
-                <a:solidFill>
-                  <a:srgbClr val="222222"/>
-                </a:solidFill>
-                <a:latin typeface="Calibri"/>
-              </a:defRPr>
-            </a:pPr>
-            <a:r>
-              <a:rPr sz="1800" b="0">
+                <a:spcPts val="800"/>
+              </a:spcAft>
+              <a:defRPr sz="1900" b="0">
+                <a:solidFill>
+                  <a:srgbClr val="222222"/>
+                </a:solidFill>
+                <a:latin typeface="Calibri"/>
+              </a:defRPr>
+            </a:pPr>
+            <a:r>
+              <a:rPr sz="1900" b="0">
                 <a:solidFill>
                   <a:srgbClr val="222222"/>
                 </a:solidFill>
@@ -22241,17 +22241,17 @@
                 <a:spcPct val="100000"/>
               </a:lnSpc>
               <a:spcAft>
-                <a:spcPts val="400"/>
-              </a:spcAft>
-              <a:defRPr sz="1800" b="0">
-                <a:solidFill>
-                  <a:srgbClr val="222222"/>
-                </a:solidFill>
-                <a:latin typeface="Calibri"/>
-              </a:defRPr>
-            </a:pPr>
-            <a:r>
-              <a:rPr sz="1800" b="0">
+                <a:spcPts val="800"/>
+              </a:spcAft>
+              <a:defRPr sz="1900" b="0">
+                <a:solidFill>
+                  <a:srgbClr val="222222"/>
+                </a:solidFill>
+                <a:latin typeface="Calibri"/>
+              </a:defRPr>
+            </a:pPr>
+            <a:r>
+              <a:rPr sz="1900" b="0">
                 <a:solidFill>
                   <a:srgbClr val="222222"/>
                 </a:solidFill>

--- a/ground-vehicle/docs/courses/beginner-ps3/l4_neopixel_leds.pptx
+++ b/ground-vehicle/docs/courses/beginner-ps3/l4_neopixel_leds.pptx
@@ -8282,22 +8282,24 @@
       <p:grpSpPr/>
       <p:sp>
         <p:nvSpPr>
-          <p:cNvPr id="2" name="Title 1"/>
-          <p:cNvSpPr>
-            <a:spLocks noGrp="1"/>
-          </p:cNvSpPr>
-          <p:nvPr>
-            <p:ph type="title"/>
-          </p:nvPr>
-        </p:nvSpPr>
-        <p:spPr>
-          <a:xfrm>
-            <a:off x="502920" y="274320"/>
-            <a:ext cx="11185855" cy="777240"/>
-          </a:xfrm>
-        </p:spPr>
-        <p:txBody>
-          <a:bodyPr wrap="square" anchor="b"/>
+          <p:cNvPr id="2" name="TextBox 1"/>
+          <p:cNvSpPr txBox="1"/>
+          <p:nvPr/>
+        </p:nvSpPr>
+        <p:spPr>
+          <a:xfrm>
+            <a:off x="502920" y="6382512"/>
+            <a:ext cx="10545775" cy="274320"/>
+          </a:xfrm>
+          <a:prstGeom prst="rect">
+            <a:avLst/>
+          </a:prstGeom>
+          <a:noFill/>
+        </p:spPr>
+        <p:txBody>
+          <a:bodyPr wrap="square" lIns="0" tIns="0">
+            <a:spAutoFit/>
+          </a:bodyPr>
           <a:lstStyle/>
           <a:p>
             <a:pPr algn="l">
@@ -8307,41 +8309,89 @@
               <a:spcAft>
                 <a:spcPts val="0"/>
               </a:spcAft>
-              <a:defRPr sz="2800" b="1">
-                <a:solidFill>
-                  <a:srgbClr val="1F3A5F"/>
-                </a:solidFill>
-                <a:latin typeface="Calibri"/>
-              </a:defRPr>
-            </a:pPr>
-            <a:r>
-              <a:rPr sz="2800" b="1">
-                <a:solidFill>
-                  <a:srgbClr val="1F3A5F"/>
-                </a:solidFill>
-                <a:latin typeface="Calibri"/>
-              </a:rPr>
-              <a:t>Where we are</a:t>
-            </a:r>
-          </a:p>
-        </p:txBody>
-      </p:sp>
-      <p:sp>
-        <p:nvSpPr>
-          <p:cNvPr id="3" name="Rectangle 2"/>
+              <a:defRPr sz="1000" b="0">
+                <a:solidFill>
+                  <a:srgbClr val="666666"/>
+                </a:solidFill>
+                <a:latin typeface="Calibri"/>
+              </a:defRPr>
+            </a:pPr>
+            <a:r>
+              <a:rPr sz="1000" b="0">
+                <a:solidFill>
+                  <a:srgbClr val="666666"/>
+                </a:solidFill>
+                <a:latin typeface="Calibri"/>
+              </a:rPr>
+              <a:t>Pathfinder Beginner - PS3  |  Lesson 4</a:t>
+            </a:r>
+          </a:p>
+        </p:txBody>
+      </p:sp>
+      <p:sp>
+        <p:nvSpPr>
+          <p:cNvPr id="3" name="TextBox 2"/>
+          <p:cNvSpPr txBox="1"/>
+          <p:nvPr/>
+        </p:nvSpPr>
+        <p:spPr>
+          <a:xfrm>
+            <a:off x="11231575" y="6382512"/>
+            <a:ext cx="457200" cy="274320"/>
+          </a:xfrm>
+          <a:prstGeom prst="rect">
+            <a:avLst/>
+          </a:prstGeom>
+          <a:noFill/>
+        </p:spPr>
+        <p:txBody>
+          <a:bodyPr wrap="square" lIns="0" tIns="0">
+            <a:spAutoFit/>
+          </a:bodyPr>
+          <a:lstStyle/>
+          <a:p>
+            <a:pPr algn="r">
+              <a:lnSpc>
+                <a:spcPct val="100000"/>
+              </a:lnSpc>
+              <a:spcAft>
+                <a:spcPts val="0"/>
+              </a:spcAft>
+              <a:defRPr sz="1000" b="0">
+                <a:solidFill>
+                  <a:srgbClr val="666666"/>
+                </a:solidFill>
+                <a:latin typeface="Calibri"/>
+              </a:defRPr>
+            </a:pPr>
+            <a:r>
+              <a:rPr sz="1000" b="0">
+                <a:solidFill>
+                  <a:srgbClr val="666666"/>
+                </a:solidFill>
+                <a:latin typeface="Calibri"/>
+              </a:rPr>
+              <a:t>11</a:t>
+            </a:r>
+          </a:p>
+        </p:txBody>
+      </p:sp>
+      <p:sp>
+        <p:nvSpPr>
+          <p:cNvPr id="4" name="Rectangle 3"/>
           <p:cNvSpPr/>
           <p:nvPr/>
         </p:nvSpPr>
         <p:spPr>
           <a:xfrm>
-            <a:off x="502920" y="1097280"/>
-            <a:ext cx="11185855" cy="19050"/>
+            <a:off x="0" y="1234440"/>
+            <a:ext cx="256032" cy="1554480"/>
           </a:xfrm>
           <a:prstGeom prst="rect">
             <a:avLst/>
           </a:prstGeom>
           <a:solidFill>
-            <a:srgbClr val="C8D2DE"/>
+            <a:srgbClr val="0E7C86"/>
           </a:solidFill>
           <a:ln>
             <a:noFill/>
@@ -8372,14 +8422,14 @@
       </p:sp>
       <p:sp>
         <p:nvSpPr>
-          <p:cNvPr id="4" name="TextBox 3"/>
+          <p:cNvPr id="5" name="TextBox 4"/>
           <p:cNvSpPr txBox="1"/>
           <p:nvPr/>
         </p:nvSpPr>
         <p:spPr>
           <a:xfrm>
-            <a:off x="502920" y="6382512"/>
-            <a:ext cx="10545775" cy="274320"/>
+            <a:off x="777240" y="1325880"/>
+            <a:ext cx="10515600" cy="1051560"/>
           </a:xfrm>
           <a:prstGeom prst="rect">
             <a:avLst/>
@@ -8387,7 +8437,7 @@
           <a:noFill/>
         </p:spPr>
         <p:txBody>
-          <a:bodyPr wrap="square" lIns="0" tIns="0">
+          <a:bodyPr wrap="square" lIns="0" tIns="0" rIns="0" bIns="0">
             <a:spAutoFit/>
           </a:bodyPr>
           <a:lstStyle/>
@@ -8399,35 +8449,35 @@
               <a:spcAft>
                 <a:spcPts val="0"/>
               </a:spcAft>
-              <a:defRPr sz="1000" b="0">
-                <a:solidFill>
-                  <a:srgbClr val="666666"/>
-                </a:solidFill>
-                <a:latin typeface="Calibri"/>
-              </a:defRPr>
-            </a:pPr>
-            <a:r>
-              <a:rPr sz="1000" b="0">
-                <a:solidFill>
-                  <a:srgbClr val="666666"/>
-                </a:solidFill>
-                <a:latin typeface="Calibri"/>
-              </a:rPr>
-              <a:t>Pathfinder Beginner - PS3  |  Lesson 4</a:t>
-            </a:r>
-          </a:p>
-        </p:txBody>
-      </p:sp>
-      <p:sp>
-        <p:nvSpPr>
-          <p:cNvPr id="5" name="TextBox 4"/>
+              <a:defRPr sz="3600" b="1">
+                <a:solidFill>
+                  <a:srgbClr val="1F3A5F"/>
+                </a:solidFill>
+                <a:latin typeface="Calibri"/>
+              </a:defRPr>
+            </a:pPr>
+            <a:r>
+              <a:rPr sz="3600" b="1">
+                <a:solidFill>
+                  <a:srgbClr val="1F3A5F"/>
+                </a:solidFill>
+                <a:latin typeface="Calibri"/>
+              </a:rPr>
+              <a:t>The power budget</a:t>
+            </a:r>
+          </a:p>
+        </p:txBody>
+      </p:sp>
+      <p:sp>
+        <p:nvSpPr>
+          <p:cNvPr id="6" name="TextBox 5"/>
           <p:cNvSpPr txBox="1"/>
           <p:nvPr/>
         </p:nvSpPr>
         <p:spPr>
           <a:xfrm>
-            <a:off x="11231575" y="6382512"/>
-            <a:ext cx="457200" cy="274320"/>
+            <a:off x="777240" y="2423160"/>
+            <a:ext cx="10515600" cy="685800"/>
           </a:xfrm>
           <a:prstGeom prst="rect">
             <a:avLst/>
@@ -8435,19 +8485,19 @@
           <a:noFill/>
         </p:spPr>
         <p:txBody>
-          <a:bodyPr wrap="square" lIns="0" tIns="0">
+          <a:bodyPr wrap="square" lIns="0" tIns="0" rIns="0" bIns="0">
             <a:spAutoFit/>
           </a:bodyPr>
           <a:lstStyle/>
           <a:p>
-            <a:pPr algn="r">
-              <a:lnSpc>
-                <a:spcPct val="100000"/>
-              </a:lnSpc>
-              <a:spcAft>
-                <a:spcPts val="0"/>
-              </a:spcAft>
-              <a:defRPr sz="1000" b="0">
+            <a:pPr algn="l">
+              <a:lnSpc>
+                <a:spcPct val="100000"/>
+              </a:lnSpc>
+              <a:spcAft>
+                <a:spcPts val="400"/>
+              </a:spcAft>
+              <a:defRPr sz="1600" b="0">
                 <a:solidFill>
                   <a:srgbClr val="666666"/>
                 </a:solidFill>
@@ -8455,27 +8505,27 @@
               </a:defRPr>
             </a:pPr>
             <a:r>
-              <a:rPr sz="1000" b="0">
+              <a:rPr sz="1600" b="0">
                 <a:solidFill>
                   <a:srgbClr val="666666"/>
                 </a:solidFill>
                 <a:latin typeface="Calibri"/>
               </a:rPr>
-              <a:t>11</a:t>
-            </a:r>
-          </a:p>
-        </p:txBody>
-      </p:sp>
-      <p:sp>
-        <p:nvSpPr>
-          <p:cNvPr id="6" name="Rounded Rectangle 5"/>
+              <a:t>About 20 minutes</a:t>
+            </a:r>
+          </a:p>
+        </p:txBody>
+      </p:sp>
+      <p:sp>
+        <p:nvSpPr>
+          <p:cNvPr id="7" name="Rounded Rectangle 6"/>
           <p:cNvSpPr/>
           <p:nvPr/>
         </p:nvSpPr>
         <p:spPr>
           <a:xfrm>
-            <a:off x="502920" y="2240280"/>
-            <a:ext cx="2686735" cy="1737360"/>
+            <a:off x="502920" y="3886200"/>
+            <a:ext cx="2686735" cy="1325880"/>
           </a:xfrm>
           <a:prstGeom prst="roundRect">
             <a:avLst>
@@ -8538,14 +8588,14 @@
       </p:sp>
       <p:sp>
         <p:nvSpPr>
-          <p:cNvPr id="7" name="TextBox 6"/>
+          <p:cNvPr id="8" name="TextBox 7"/>
           <p:cNvSpPr txBox="1"/>
           <p:nvPr/>
         </p:nvSpPr>
         <p:spPr>
           <a:xfrm>
-            <a:off x="502920" y="1856232"/>
-            <a:ext cx="2686735" cy="347472"/>
+            <a:off x="502920" y="3520440"/>
+            <a:ext cx="2686735" cy="310896"/>
           </a:xfrm>
           <a:prstGeom prst="rect">
             <a:avLst/>
@@ -8563,9 +8613,9 @@
                 <a:spcPct val="100000"/>
               </a:lnSpc>
               <a:spcAft>
-                <a:spcPts val="600"/>
-              </a:spcAft>
-              <a:defRPr sz="1200" b="1">
+                <a:spcPts val="200"/>
+              </a:spcAft>
+              <a:defRPr sz="1100" b="1">
                 <a:solidFill>
                   <a:srgbClr val="0E7C86"/>
                 </a:solidFill>
@@ -8573,7 +8623,7 @@
               </a:defRPr>
             </a:pPr>
             <a:r>
-              <a:rPr sz="1200" b="1">
+              <a:rPr sz="1100" b="1">
                 <a:solidFill>
                   <a:srgbClr val="0E7C86"/>
                 </a:solidFill>
@@ -8586,14 +8636,14 @@
       </p:sp>
       <p:sp>
         <p:nvSpPr>
-          <p:cNvPr id="8" name="Rounded Rectangle 7"/>
+          <p:cNvPr id="9" name="Rounded Rectangle 8"/>
           <p:cNvSpPr/>
           <p:nvPr/>
         </p:nvSpPr>
         <p:spPr>
           <a:xfrm>
-            <a:off x="3335959" y="2240280"/>
-            <a:ext cx="2686735" cy="1737360"/>
+            <a:off x="3335959" y="3886200"/>
+            <a:ext cx="2686735" cy="1325880"/>
           </a:xfrm>
           <a:prstGeom prst="roundRect">
             <a:avLst>
@@ -8656,14 +8706,14 @@
       </p:sp>
       <p:sp>
         <p:nvSpPr>
-          <p:cNvPr id="9" name="TextBox 8"/>
+          <p:cNvPr id="10" name="TextBox 9"/>
           <p:cNvSpPr txBox="1"/>
           <p:nvPr/>
         </p:nvSpPr>
         <p:spPr>
           <a:xfrm>
-            <a:off x="3335959" y="1856232"/>
-            <a:ext cx="2686735" cy="347472"/>
+            <a:off x="3335959" y="3520440"/>
+            <a:ext cx="2686735" cy="310896"/>
           </a:xfrm>
           <a:prstGeom prst="rect">
             <a:avLst/>
@@ -8681,9 +8731,9 @@
                 <a:spcPct val="100000"/>
               </a:lnSpc>
               <a:spcAft>
-                <a:spcPts val="600"/>
-              </a:spcAft>
-              <a:defRPr sz="1200" b="1">
+                <a:spcPts val="200"/>
+              </a:spcAft>
+              <a:defRPr sz="1100" b="1">
                 <a:solidFill>
                   <a:srgbClr val="0E7C86"/>
                 </a:solidFill>
@@ -8691,7 +8741,7 @@
               </a:defRPr>
             </a:pPr>
             <a:r>
-              <a:rPr sz="1200" b="1">
+              <a:rPr sz="1100" b="1">
                 <a:solidFill>
                   <a:srgbClr val="0E7C86"/>
                 </a:solidFill>
@@ -8704,14 +8754,14 @@
       </p:sp>
       <p:sp>
         <p:nvSpPr>
-          <p:cNvPr id="10" name="Rounded Rectangle 9"/>
+          <p:cNvPr id="11" name="Rounded Rectangle 10"/>
           <p:cNvSpPr/>
           <p:nvPr/>
         </p:nvSpPr>
         <p:spPr>
           <a:xfrm>
-            <a:off x="6168998" y="2240280"/>
-            <a:ext cx="2686735" cy="1737360"/>
+            <a:off x="6168998" y="3886200"/>
+            <a:ext cx="2686735" cy="1325880"/>
           </a:xfrm>
           <a:prstGeom prst="roundRect">
             <a:avLst>
@@ -8774,14 +8824,14 @@
       </p:sp>
       <p:sp>
         <p:nvSpPr>
-          <p:cNvPr id="11" name="Rounded Rectangle 10"/>
+          <p:cNvPr id="12" name="Rounded Rectangle 11"/>
           <p:cNvSpPr/>
           <p:nvPr/>
         </p:nvSpPr>
         <p:spPr>
           <a:xfrm>
-            <a:off x="9002037" y="2240280"/>
-            <a:ext cx="2686735" cy="1737360"/>
+            <a:off x="9002037" y="3886200"/>
+            <a:ext cx="2686735" cy="1325880"/>
           </a:xfrm>
           <a:prstGeom prst="roundRect">
             <a:avLst>
@@ -12453,22 +12503,24 @@
       <p:grpSpPr/>
       <p:sp>
         <p:nvSpPr>
-          <p:cNvPr id="2" name="Title 1"/>
-          <p:cNvSpPr>
-            <a:spLocks noGrp="1"/>
-          </p:cNvSpPr>
-          <p:nvPr>
-            <p:ph type="title"/>
-          </p:nvPr>
-        </p:nvSpPr>
-        <p:spPr>
-          <a:xfrm>
-            <a:off x="502920" y="274320"/>
-            <a:ext cx="11185855" cy="777240"/>
-          </a:xfrm>
-        </p:spPr>
-        <p:txBody>
-          <a:bodyPr wrap="square" anchor="b"/>
+          <p:cNvPr id="2" name="TextBox 1"/>
+          <p:cNvSpPr txBox="1"/>
+          <p:nvPr/>
+        </p:nvSpPr>
+        <p:spPr>
+          <a:xfrm>
+            <a:off x="502920" y="6382512"/>
+            <a:ext cx="10545775" cy="274320"/>
+          </a:xfrm>
+          <a:prstGeom prst="rect">
+            <a:avLst/>
+          </a:prstGeom>
+          <a:noFill/>
+        </p:spPr>
+        <p:txBody>
+          <a:bodyPr wrap="square" lIns="0" tIns="0">
+            <a:spAutoFit/>
+          </a:bodyPr>
           <a:lstStyle/>
           <a:p>
             <a:pPr algn="l">
@@ -12478,41 +12530,89 @@
               <a:spcAft>
                 <a:spcPts val="0"/>
               </a:spcAft>
-              <a:defRPr sz="2800" b="1">
-                <a:solidFill>
-                  <a:srgbClr val="1F3A5F"/>
-                </a:solidFill>
-                <a:latin typeface="Calibri"/>
-              </a:defRPr>
-            </a:pPr>
-            <a:r>
-              <a:rPr sz="2800" b="1">
-                <a:solidFill>
-                  <a:srgbClr val="1F3A5F"/>
-                </a:solidFill>
-                <a:latin typeface="Calibri"/>
-              </a:rPr>
-              <a:t>Where we are</a:t>
-            </a:r>
-          </a:p>
-        </p:txBody>
-      </p:sp>
-      <p:sp>
-        <p:nvSpPr>
-          <p:cNvPr id="3" name="Rectangle 2"/>
+              <a:defRPr sz="1000" b="0">
+                <a:solidFill>
+                  <a:srgbClr val="666666"/>
+                </a:solidFill>
+                <a:latin typeface="Calibri"/>
+              </a:defRPr>
+            </a:pPr>
+            <a:r>
+              <a:rPr sz="1000" b="0">
+                <a:solidFill>
+                  <a:srgbClr val="666666"/>
+                </a:solidFill>
+                <a:latin typeface="Calibri"/>
+              </a:rPr>
+              <a:t>Pathfinder Beginner - PS3  |  Lesson 4</a:t>
+            </a:r>
+          </a:p>
+        </p:txBody>
+      </p:sp>
+      <p:sp>
+        <p:nvSpPr>
+          <p:cNvPr id="3" name="TextBox 2"/>
+          <p:cNvSpPr txBox="1"/>
+          <p:nvPr/>
+        </p:nvSpPr>
+        <p:spPr>
+          <a:xfrm>
+            <a:off x="11231575" y="6382512"/>
+            <a:ext cx="457200" cy="274320"/>
+          </a:xfrm>
+          <a:prstGeom prst="rect">
+            <a:avLst/>
+          </a:prstGeom>
+          <a:noFill/>
+        </p:spPr>
+        <p:txBody>
+          <a:bodyPr wrap="square" lIns="0" tIns="0">
+            <a:spAutoFit/>
+          </a:bodyPr>
+          <a:lstStyle/>
+          <a:p>
+            <a:pPr algn="r">
+              <a:lnSpc>
+                <a:spcPct val="100000"/>
+              </a:lnSpc>
+              <a:spcAft>
+                <a:spcPts val="0"/>
+              </a:spcAft>
+              <a:defRPr sz="1000" b="0">
+                <a:solidFill>
+                  <a:srgbClr val="666666"/>
+                </a:solidFill>
+                <a:latin typeface="Calibri"/>
+              </a:defRPr>
+            </a:pPr>
+            <a:r>
+              <a:rPr sz="1000" b="0">
+                <a:solidFill>
+                  <a:srgbClr val="666666"/>
+                </a:solidFill>
+                <a:latin typeface="Calibri"/>
+              </a:rPr>
+              <a:t>14</a:t>
+            </a:r>
+          </a:p>
+        </p:txBody>
+      </p:sp>
+      <p:sp>
+        <p:nvSpPr>
+          <p:cNvPr id="4" name="Rectangle 3"/>
           <p:cNvSpPr/>
           <p:nvPr/>
         </p:nvSpPr>
         <p:spPr>
           <a:xfrm>
-            <a:off x="502920" y="1097280"/>
-            <a:ext cx="11185855" cy="19050"/>
+            <a:off x="0" y="1234440"/>
+            <a:ext cx="256032" cy="1554480"/>
           </a:xfrm>
           <a:prstGeom prst="rect">
             <a:avLst/>
           </a:prstGeom>
           <a:solidFill>
-            <a:srgbClr val="C8D2DE"/>
+            <a:srgbClr val="0E7C86"/>
           </a:solidFill>
           <a:ln>
             <a:noFill/>
@@ -12543,14 +12643,14 @@
       </p:sp>
       <p:sp>
         <p:nvSpPr>
-          <p:cNvPr id="4" name="TextBox 3"/>
+          <p:cNvPr id="5" name="TextBox 4"/>
           <p:cNvSpPr txBox="1"/>
           <p:nvPr/>
         </p:nvSpPr>
         <p:spPr>
           <a:xfrm>
-            <a:off x="502920" y="6382512"/>
-            <a:ext cx="10545775" cy="274320"/>
+            <a:off x="777240" y="1325880"/>
+            <a:ext cx="10515600" cy="1051560"/>
           </a:xfrm>
           <a:prstGeom prst="rect">
             <a:avLst/>
@@ -12558,7 +12658,7 @@
           <a:noFill/>
         </p:spPr>
         <p:txBody>
-          <a:bodyPr wrap="square" lIns="0" tIns="0">
+          <a:bodyPr wrap="square" lIns="0" tIns="0" rIns="0" bIns="0">
             <a:spAutoFit/>
           </a:bodyPr>
           <a:lstStyle/>
@@ -12570,35 +12670,35 @@
               <a:spcAft>
                 <a:spcPts val="0"/>
               </a:spcAft>
-              <a:defRPr sz="1000" b="0">
-                <a:solidFill>
-                  <a:srgbClr val="666666"/>
-                </a:solidFill>
-                <a:latin typeface="Calibri"/>
-              </a:defRPr>
-            </a:pPr>
-            <a:r>
-              <a:rPr sz="1000" b="0">
-                <a:solidFill>
-                  <a:srgbClr val="666666"/>
-                </a:solidFill>
-                <a:latin typeface="Calibri"/>
-              </a:rPr>
-              <a:t>Pathfinder Beginner - PS3  |  Lesson 4</a:t>
-            </a:r>
-          </a:p>
-        </p:txBody>
-      </p:sp>
-      <p:sp>
-        <p:nvSpPr>
-          <p:cNvPr id="5" name="TextBox 4"/>
+              <a:defRPr sz="3600" b="1">
+                <a:solidFill>
+                  <a:srgbClr val="1F3A5F"/>
+                </a:solidFill>
+                <a:latin typeface="Calibri"/>
+              </a:defRPr>
+            </a:pPr>
+            <a:r>
+              <a:rPr sz="3600" b="1">
+                <a:solidFill>
+                  <a:srgbClr val="1F3A5F"/>
+                </a:solidFill>
+                <a:latin typeface="Calibri"/>
+              </a:rPr>
+              <a:t>The LED map</a:t>
+            </a:r>
+          </a:p>
+        </p:txBody>
+      </p:sp>
+      <p:sp>
+        <p:nvSpPr>
+          <p:cNvPr id="6" name="TextBox 5"/>
           <p:cNvSpPr txBox="1"/>
           <p:nvPr/>
         </p:nvSpPr>
         <p:spPr>
           <a:xfrm>
-            <a:off x="11231575" y="6382512"/>
-            <a:ext cx="457200" cy="274320"/>
+            <a:off x="777240" y="2423160"/>
+            <a:ext cx="10515600" cy="685800"/>
           </a:xfrm>
           <a:prstGeom prst="rect">
             <a:avLst/>
@@ -12606,19 +12706,19 @@
           <a:noFill/>
         </p:spPr>
         <p:txBody>
-          <a:bodyPr wrap="square" lIns="0" tIns="0">
+          <a:bodyPr wrap="square" lIns="0" tIns="0" rIns="0" bIns="0">
             <a:spAutoFit/>
           </a:bodyPr>
           <a:lstStyle/>
           <a:p>
-            <a:pPr algn="r">
-              <a:lnSpc>
-                <a:spcPct val="100000"/>
-              </a:lnSpc>
-              <a:spcAft>
-                <a:spcPts val="0"/>
-              </a:spcAft>
-              <a:defRPr sz="1000" b="0">
+            <a:pPr algn="l">
+              <a:lnSpc>
+                <a:spcPct val="100000"/>
+              </a:lnSpc>
+              <a:spcAft>
+                <a:spcPts val="400"/>
+              </a:spcAft>
+              <a:defRPr sz="1600" b="0">
                 <a:solidFill>
                   <a:srgbClr val="666666"/>
                 </a:solidFill>
@@ -12626,27 +12726,27 @@
               </a:defRPr>
             </a:pPr>
             <a:r>
-              <a:rPr sz="1000" b="0">
+              <a:rPr sz="1600" b="0">
                 <a:solidFill>
                   <a:srgbClr val="666666"/>
                 </a:solidFill>
                 <a:latin typeface="Calibri"/>
               </a:rPr>
-              <a:t>14</a:t>
-            </a:r>
-          </a:p>
-        </p:txBody>
-      </p:sp>
-      <p:sp>
-        <p:nvSpPr>
-          <p:cNvPr id="6" name="Rounded Rectangle 5"/>
+              <a:t>About 25 minutes</a:t>
+            </a:r>
+          </a:p>
+        </p:txBody>
+      </p:sp>
+      <p:sp>
+        <p:nvSpPr>
+          <p:cNvPr id="7" name="Rounded Rectangle 6"/>
           <p:cNvSpPr/>
           <p:nvPr/>
         </p:nvSpPr>
         <p:spPr>
           <a:xfrm>
-            <a:off x="502920" y="2240280"/>
-            <a:ext cx="2686735" cy="1737360"/>
+            <a:off x="502920" y="3886200"/>
+            <a:ext cx="2686735" cy="1325880"/>
           </a:xfrm>
           <a:prstGeom prst="roundRect">
             <a:avLst>
@@ -12709,14 +12809,14 @@
       </p:sp>
       <p:sp>
         <p:nvSpPr>
-          <p:cNvPr id="7" name="TextBox 6"/>
+          <p:cNvPr id="8" name="TextBox 7"/>
           <p:cNvSpPr txBox="1"/>
           <p:nvPr/>
         </p:nvSpPr>
         <p:spPr>
           <a:xfrm>
-            <a:off x="502920" y="1856232"/>
-            <a:ext cx="2686735" cy="347472"/>
+            <a:off x="502920" y="3520440"/>
+            <a:ext cx="2686735" cy="310896"/>
           </a:xfrm>
           <a:prstGeom prst="rect">
             <a:avLst/>
@@ -12734,9 +12834,9 @@
                 <a:spcPct val="100000"/>
               </a:lnSpc>
               <a:spcAft>
-                <a:spcPts val="600"/>
-              </a:spcAft>
-              <a:defRPr sz="1200" b="1">
+                <a:spcPts val="200"/>
+              </a:spcAft>
+              <a:defRPr sz="1100" b="1">
                 <a:solidFill>
                   <a:srgbClr val="0E7C86"/>
                 </a:solidFill>
@@ -12744,7 +12844,7 @@
               </a:defRPr>
             </a:pPr>
             <a:r>
-              <a:rPr sz="1200" b="1">
+              <a:rPr sz="1100" b="1">
                 <a:solidFill>
                   <a:srgbClr val="0E7C86"/>
                 </a:solidFill>
@@ -12757,14 +12857,14 @@
       </p:sp>
       <p:sp>
         <p:nvSpPr>
-          <p:cNvPr id="8" name="Rounded Rectangle 7"/>
+          <p:cNvPr id="9" name="Rounded Rectangle 8"/>
           <p:cNvSpPr/>
           <p:nvPr/>
         </p:nvSpPr>
         <p:spPr>
           <a:xfrm>
-            <a:off x="3335959" y="2240280"/>
-            <a:ext cx="2686735" cy="1737360"/>
+            <a:off x="3335959" y="3886200"/>
+            <a:ext cx="2686735" cy="1325880"/>
           </a:xfrm>
           <a:prstGeom prst="roundRect">
             <a:avLst>
@@ -12827,14 +12927,14 @@
       </p:sp>
       <p:sp>
         <p:nvSpPr>
-          <p:cNvPr id="9" name="TextBox 8"/>
+          <p:cNvPr id="10" name="TextBox 9"/>
           <p:cNvSpPr txBox="1"/>
           <p:nvPr/>
         </p:nvSpPr>
         <p:spPr>
           <a:xfrm>
-            <a:off x="3335959" y="1856232"/>
-            <a:ext cx="2686735" cy="347472"/>
+            <a:off x="3335959" y="3520440"/>
+            <a:ext cx="2686735" cy="310896"/>
           </a:xfrm>
           <a:prstGeom prst="rect">
             <a:avLst/>
@@ -12852,9 +12952,9 @@
                 <a:spcPct val="100000"/>
               </a:lnSpc>
               <a:spcAft>
-                <a:spcPts val="600"/>
-              </a:spcAft>
-              <a:defRPr sz="1200" b="1">
+                <a:spcPts val="200"/>
+              </a:spcAft>
+              <a:defRPr sz="1100" b="1">
                 <a:solidFill>
                   <a:srgbClr val="0E7C86"/>
                 </a:solidFill>
@@ -12862,7 +12962,7 @@
               </a:defRPr>
             </a:pPr>
             <a:r>
-              <a:rPr sz="1200" b="1">
+              <a:rPr sz="1100" b="1">
                 <a:solidFill>
                   <a:srgbClr val="0E7C86"/>
                 </a:solidFill>
@@ -12875,14 +12975,14 @@
       </p:sp>
       <p:sp>
         <p:nvSpPr>
-          <p:cNvPr id="10" name="Rounded Rectangle 9"/>
+          <p:cNvPr id="11" name="Rounded Rectangle 10"/>
           <p:cNvSpPr/>
           <p:nvPr/>
         </p:nvSpPr>
         <p:spPr>
           <a:xfrm>
-            <a:off x="6168998" y="2240280"/>
-            <a:ext cx="2686735" cy="1737360"/>
+            <a:off x="6168998" y="3886200"/>
+            <a:ext cx="2686735" cy="1325880"/>
           </a:xfrm>
           <a:prstGeom prst="roundRect">
             <a:avLst>
@@ -12945,14 +13045,14 @@
       </p:sp>
       <p:sp>
         <p:nvSpPr>
-          <p:cNvPr id="11" name="TextBox 10"/>
+          <p:cNvPr id="12" name="TextBox 11"/>
           <p:cNvSpPr txBox="1"/>
           <p:nvPr/>
         </p:nvSpPr>
         <p:spPr>
           <a:xfrm>
-            <a:off x="6168998" y="1856232"/>
-            <a:ext cx="2686735" cy="347472"/>
+            <a:off x="6168998" y="3520440"/>
+            <a:ext cx="2686735" cy="310896"/>
           </a:xfrm>
           <a:prstGeom prst="rect">
             <a:avLst/>
@@ -12970,9 +13070,9 @@
                 <a:spcPct val="100000"/>
               </a:lnSpc>
               <a:spcAft>
-                <a:spcPts val="600"/>
-              </a:spcAft>
-              <a:defRPr sz="1200" b="1">
+                <a:spcPts val="200"/>
+              </a:spcAft>
+              <a:defRPr sz="1100" b="1">
                 <a:solidFill>
                   <a:srgbClr val="0E7C86"/>
                 </a:solidFill>
@@ -12980,7 +13080,7 @@
               </a:defRPr>
             </a:pPr>
             <a:r>
-              <a:rPr sz="1200" b="1">
+              <a:rPr sz="1100" b="1">
                 <a:solidFill>
                   <a:srgbClr val="0E7C86"/>
                 </a:solidFill>
@@ -12993,14 +13093,14 @@
       </p:sp>
       <p:sp>
         <p:nvSpPr>
-          <p:cNvPr id="12" name="Rounded Rectangle 11"/>
+          <p:cNvPr id="13" name="Rounded Rectangle 12"/>
           <p:cNvSpPr/>
           <p:nvPr/>
         </p:nvSpPr>
         <p:spPr>
           <a:xfrm>
-            <a:off x="9002037" y="2240280"/>
-            <a:ext cx="2686735" cy="1737360"/>
+            <a:off x="9002037" y="3886200"/>
+            <a:ext cx="2686735" cy="1325880"/>
           </a:xfrm>
           <a:prstGeom prst="roundRect">
             <a:avLst>
@@ -15236,22 +15336,24 @@
       <p:grpSpPr/>
       <p:sp>
         <p:nvSpPr>
-          <p:cNvPr id="2" name="Title 1"/>
-          <p:cNvSpPr>
-            <a:spLocks noGrp="1"/>
-          </p:cNvSpPr>
-          <p:nvPr>
-            <p:ph type="title"/>
-          </p:nvPr>
-        </p:nvSpPr>
-        <p:spPr>
-          <a:xfrm>
-            <a:off x="502920" y="274320"/>
-            <a:ext cx="11185855" cy="777240"/>
-          </a:xfrm>
-        </p:spPr>
-        <p:txBody>
-          <a:bodyPr wrap="square" anchor="b"/>
+          <p:cNvPr id="2" name="TextBox 1"/>
+          <p:cNvSpPr txBox="1"/>
+          <p:nvPr/>
+        </p:nvSpPr>
+        <p:spPr>
+          <a:xfrm>
+            <a:off x="502920" y="6382512"/>
+            <a:ext cx="10545775" cy="274320"/>
+          </a:xfrm>
+          <a:prstGeom prst="rect">
+            <a:avLst/>
+          </a:prstGeom>
+          <a:noFill/>
+        </p:spPr>
+        <p:txBody>
+          <a:bodyPr wrap="square" lIns="0" tIns="0">
+            <a:spAutoFit/>
+          </a:bodyPr>
           <a:lstStyle/>
           <a:p>
             <a:pPr algn="l">
@@ -15261,41 +15363,89 @@
               <a:spcAft>
                 <a:spcPts val="0"/>
               </a:spcAft>
-              <a:defRPr sz="2800" b="1">
-                <a:solidFill>
-                  <a:srgbClr val="1F3A5F"/>
-                </a:solidFill>
-                <a:latin typeface="Calibri"/>
-              </a:defRPr>
-            </a:pPr>
-            <a:r>
-              <a:rPr sz="2800" b="1">
-                <a:solidFill>
-                  <a:srgbClr val="1F3A5F"/>
-                </a:solidFill>
-                <a:latin typeface="Calibri"/>
-              </a:rPr>
-              <a:t>Where we are</a:t>
-            </a:r>
-          </a:p>
-        </p:txBody>
-      </p:sp>
-      <p:sp>
-        <p:nvSpPr>
-          <p:cNvPr id="3" name="Rectangle 2"/>
+              <a:defRPr sz="1000" b="0">
+                <a:solidFill>
+                  <a:srgbClr val="666666"/>
+                </a:solidFill>
+                <a:latin typeface="Calibri"/>
+              </a:defRPr>
+            </a:pPr>
+            <a:r>
+              <a:rPr sz="1000" b="0">
+                <a:solidFill>
+                  <a:srgbClr val="666666"/>
+                </a:solidFill>
+                <a:latin typeface="Calibri"/>
+              </a:rPr>
+              <a:t>Pathfinder Beginner - PS3  |  Lesson 4</a:t>
+            </a:r>
+          </a:p>
+        </p:txBody>
+      </p:sp>
+      <p:sp>
+        <p:nvSpPr>
+          <p:cNvPr id="3" name="TextBox 2"/>
+          <p:cNvSpPr txBox="1"/>
+          <p:nvPr/>
+        </p:nvSpPr>
+        <p:spPr>
+          <a:xfrm>
+            <a:off x="11231575" y="6382512"/>
+            <a:ext cx="457200" cy="274320"/>
+          </a:xfrm>
+          <a:prstGeom prst="rect">
+            <a:avLst/>
+          </a:prstGeom>
+          <a:noFill/>
+        </p:spPr>
+        <p:txBody>
+          <a:bodyPr wrap="square" lIns="0" tIns="0">
+            <a:spAutoFit/>
+          </a:bodyPr>
+          <a:lstStyle/>
+          <a:p>
+            <a:pPr algn="r">
+              <a:lnSpc>
+                <a:spcPct val="100000"/>
+              </a:lnSpc>
+              <a:spcAft>
+                <a:spcPts val="0"/>
+              </a:spcAft>
+              <a:defRPr sz="1000" b="0">
+                <a:solidFill>
+                  <a:srgbClr val="666666"/>
+                </a:solidFill>
+                <a:latin typeface="Calibri"/>
+              </a:defRPr>
+            </a:pPr>
+            <a:r>
+              <a:rPr sz="1000" b="0">
+                <a:solidFill>
+                  <a:srgbClr val="666666"/>
+                </a:solidFill>
+                <a:latin typeface="Calibri"/>
+              </a:rPr>
+              <a:t>18</a:t>
+            </a:r>
+          </a:p>
+        </p:txBody>
+      </p:sp>
+      <p:sp>
+        <p:nvSpPr>
+          <p:cNvPr id="4" name="Rectangle 3"/>
           <p:cNvSpPr/>
           <p:nvPr/>
         </p:nvSpPr>
         <p:spPr>
           <a:xfrm>
-            <a:off x="502920" y="1097280"/>
-            <a:ext cx="11185855" cy="19050"/>
+            <a:off x="0" y="1234440"/>
+            <a:ext cx="256032" cy="1554480"/>
           </a:xfrm>
           <a:prstGeom prst="rect">
             <a:avLst/>
           </a:prstGeom>
           <a:solidFill>
-            <a:srgbClr val="C8D2DE"/>
+            <a:srgbClr val="0E7C86"/>
           </a:solidFill>
           <a:ln>
             <a:noFill/>
@@ -15326,14 +15476,14 @@
       </p:sp>
       <p:sp>
         <p:nvSpPr>
-          <p:cNvPr id="4" name="TextBox 3"/>
+          <p:cNvPr id="5" name="TextBox 4"/>
           <p:cNvSpPr txBox="1"/>
           <p:nvPr/>
         </p:nvSpPr>
         <p:spPr>
           <a:xfrm>
-            <a:off x="502920" y="6382512"/>
-            <a:ext cx="10545775" cy="274320"/>
+            <a:off x="777240" y="1325880"/>
+            <a:ext cx="10515600" cy="1051560"/>
           </a:xfrm>
           <a:prstGeom prst="rect">
             <a:avLst/>
@@ -15341,7 +15491,7 @@
           <a:noFill/>
         </p:spPr>
         <p:txBody>
-          <a:bodyPr wrap="square" lIns="0" tIns="0">
+          <a:bodyPr wrap="square" lIns="0" tIns="0" rIns="0" bIns="0">
             <a:spAutoFit/>
           </a:bodyPr>
           <a:lstStyle/>
@@ -15353,35 +15503,35 @@
               <a:spcAft>
                 <a:spcPts val="0"/>
               </a:spcAft>
-              <a:defRPr sz="1000" b="0">
-                <a:solidFill>
-                  <a:srgbClr val="666666"/>
-                </a:solidFill>
-                <a:latin typeface="Calibri"/>
-              </a:defRPr>
-            </a:pPr>
-            <a:r>
-              <a:rPr sz="1000" b="0">
-                <a:solidFill>
-                  <a:srgbClr val="666666"/>
-                </a:solidFill>
-                <a:latin typeface="Calibri"/>
-              </a:rPr>
-              <a:t>Pathfinder Beginner - PS3  |  Lesson 4</a:t>
-            </a:r>
-          </a:p>
-        </p:txBody>
-      </p:sp>
-      <p:sp>
-        <p:nvSpPr>
-          <p:cNvPr id="5" name="TextBox 4"/>
+              <a:defRPr sz="3600" b="1">
+                <a:solidFill>
+                  <a:srgbClr val="1F3A5F"/>
+                </a:solidFill>
+                <a:latin typeface="Calibri"/>
+              </a:defRPr>
+            </a:pPr>
+            <a:r>
+              <a:rPr sz="3600" b="1">
+                <a:solidFill>
+                  <a:srgbClr val="1F3A5F"/>
+                </a:solidFill>
+                <a:latin typeface="Calibri"/>
+              </a:rPr>
+              <a:t>Patterns</a:t>
+            </a:r>
+          </a:p>
+        </p:txBody>
+      </p:sp>
+      <p:sp>
+        <p:nvSpPr>
+          <p:cNvPr id="6" name="TextBox 5"/>
           <p:cNvSpPr txBox="1"/>
           <p:nvPr/>
         </p:nvSpPr>
         <p:spPr>
           <a:xfrm>
-            <a:off x="11231575" y="6382512"/>
-            <a:ext cx="457200" cy="274320"/>
+            <a:off x="777240" y="2423160"/>
+            <a:ext cx="10515600" cy="685800"/>
           </a:xfrm>
           <a:prstGeom prst="rect">
             <a:avLst/>
@@ -15389,19 +15539,19 @@
           <a:noFill/>
         </p:spPr>
         <p:txBody>
-          <a:bodyPr wrap="square" lIns="0" tIns="0">
+          <a:bodyPr wrap="square" lIns="0" tIns="0" rIns="0" bIns="0">
             <a:spAutoFit/>
           </a:bodyPr>
           <a:lstStyle/>
           <a:p>
-            <a:pPr algn="r">
-              <a:lnSpc>
-                <a:spcPct val="100000"/>
-              </a:lnSpc>
-              <a:spcAft>
-                <a:spcPts val="0"/>
-              </a:spcAft>
-              <a:defRPr sz="1000" b="0">
+            <a:pPr algn="l">
+              <a:lnSpc>
+                <a:spcPct val="100000"/>
+              </a:lnSpc>
+              <a:spcAft>
+                <a:spcPts val="400"/>
+              </a:spcAft>
+              <a:defRPr sz="1600" b="0">
                 <a:solidFill>
                   <a:srgbClr val="666666"/>
                 </a:solidFill>
@@ -15409,27 +15559,27 @@
               </a:defRPr>
             </a:pPr>
             <a:r>
-              <a:rPr sz="1000" b="0">
+              <a:rPr sz="1600" b="0">
                 <a:solidFill>
                   <a:srgbClr val="666666"/>
                 </a:solidFill>
                 <a:latin typeface="Calibri"/>
               </a:rPr>
-              <a:t>18</a:t>
-            </a:r>
-          </a:p>
-        </p:txBody>
-      </p:sp>
-      <p:sp>
-        <p:nvSpPr>
-          <p:cNvPr id="6" name="Rounded Rectangle 5"/>
+              <a:t>About 25 minutes</a:t>
+            </a:r>
+          </a:p>
+        </p:txBody>
+      </p:sp>
+      <p:sp>
+        <p:nvSpPr>
+          <p:cNvPr id="7" name="Rounded Rectangle 6"/>
           <p:cNvSpPr/>
           <p:nvPr/>
         </p:nvSpPr>
         <p:spPr>
           <a:xfrm>
-            <a:off x="502920" y="2240280"/>
-            <a:ext cx="2686735" cy="1737360"/>
+            <a:off x="502920" y="3886200"/>
+            <a:ext cx="2686735" cy="1325880"/>
           </a:xfrm>
           <a:prstGeom prst="roundRect">
             <a:avLst>
@@ -15492,14 +15642,14 @@
       </p:sp>
       <p:sp>
         <p:nvSpPr>
-          <p:cNvPr id="7" name="TextBox 6"/>
+          <p:cNvPr id="8" name="TextBox 7"/>
           <p:cNvSpPr txBox="1"/>
           <p:nvPr/>
         </p:nvSpPr>
         <p:spPr>
           <a:xfrm>
-            <a:off x="502920" y="1856232"/>
-            <a:ext cx="2686735" cy="347472"/>
+            <a:off x="502920" y="3520440"/>
+            <a:ext cx="2686735" cy="310896"/>
           </a:xfrm>
           <a:prstGeom prst="rect">
             <a:avLst/>
@@ -15517,9 +15667,9 @@
                 <a:spcPct val="100000"/>
               </a:lnSpc>
               <a:spcAft>
-                <a:spcPts val="600"/>
-              </a:spcAft>
-              <a:defRPr sz="1200" b="1">
+                <a:spcPts val="200"/>
+              </a:spcAft>
+              <a:defRPr sz="1100" b="1">
                 <a:solidFill>
                   <a:srgbClr val="0E7C86"/>
                 </a:solidFill>
@@ -15527,7 +15677,7 @@
               </a:defRPr>
             </a:pPr>
             <a:r>
-              <a:rPr sz="1200" b="1">
+              <a:rPr sz="1100" b="1">
                 <a:solidFill>
                   <a:srgbClr val="0E7C86"/>
                 </a:solidFill>
@@ -15540,14 +15690,14 @@
       </p:sp>
       <p:sp>
         <p:nvSpPr>
-          <p:cNvPr id="8" name="Rounded Rectangle 7"/>
+          <p:cNvPr id="9" name="Rounded Rectangle 8"/>
           <p:cNvSpPr/>
           <p:nvPr/>
         </p:nvSpPr>
         <p:spPr>
           <a:xfrm>
-            <a:off x="3335959" y="2240280"/>
-            <a:ext cx="2686735" cy="1737360"/>
+            <a:off x="3335959" y="3886200"/>
+            <a:ext cx="2686735" cy="1325880"/>
           </a:xfrm>
           <a:prstGeom prst="roundRect">
             <a:avLst>
@@ -15610,14 +15760,14 @@
       </p:sp>
       <p:sp>
         <p:nvSpPr>
-          <p:cNvPr id="9" name="TextBox 8"/>
+          <p:cNvPr id="10" name="TextBox 9"/>
           <p:cNvSpPr txBox="1"/>
           <p:nvPr/>
         </p:nvSpPr>
         <p:spPr>
           <a:xfrm>
-            <a:off x="3335959" y="1856232"/>
-            <a:ext cx="2686735" cy="347472"/>
+            <a:off x="3335959" y="3520440"/>
+            <a:ext cx="2686735" cy="310896"/>
           </a:xfrm>
           <a:prstGeom prst="rect">
             <a:avLst/>
@@ -15635,9 +15785,9 @@
                 <a:spcPct val="100000"/>
               </a:lnSpc>
               <a:spcAft>
-                <a:spcPts val="600"/>
-              </a:spcAft>
-              <a:defRPr sz="1200" b="1">
+                <a:spcPts val="200"/>
+              </a:spcAft>
+              <a:defRPr sz="1100" b="1">
                 <a:solidFill>
                   <a:srgbClr val="0E7C86"/>
                 </a:solidFill>
@@ -15645,7 +15795,7 @@
               </a:defRPr>
             </a:pPr>
             <a:r>
-              <a:rPr sz="1200" b="1">
+              <a:rPr sz="1100" b="1">
                 <a:solidFill>
                   <a:srgbClr val="0E7C86"/>
                 </a:solidFill>
@@ -15658,14 +15808,14 @@
       </p:sp>
       <p:sp>
         <p:nvSpPr>
-          <p:cNvPr id="10" name="Rounded Rectangle 9"/>
+          <p:cNvPr id="11" name="Rounded Rectangle 10"/>
           <p:cNvSpPr/>
           <p:nvPr/>
         </p:nvSpPr>
         <p:spPr>
           <a:xfrm>
-            <a:off x="6168998" y="2240280"/>
-            <a:ext cx="2686735" cy="1737360"/>
+            <a:off x="6168998" y="3886200"/>
+            <a:ext cx="2686735" cy="1325880"/>
           </a:xfrm>
           <a:prstGeom prst="roundRect">
             <a:avLst>
@@ -15728,14 +15878,14 @@
       </p:sp>
       <p:sp>
         <p:nvSpPr>
-          <p:cNvPr id="11" name="TextBox 10"/>
+          <p:cNvPr id="12" name="TextBox 11"/>
           <p:cNvSpPr txBox="1"/>
           <p:nvPr/>
         </p:nvSpPr>
         <p:spPr>
           <a:xfrm>
-            <a:off x="6168998" y="1856232"/>
-            <a:ext cx="2686735" cy="347472"/>
+            <a:off x="6168998" y="3520440"/>
+            <a:ext cx="2686735" cy="310896"/>
           </a:xfrm>
           <a:prstGeom prst="rect">
             <a:avLst/>
@@ -15753,9 +15903,9 @@
                 <a:spcPct val="100000"/>
               </a:lnSpc>
               <a:spcAft>
-                <a:spcPts val="600"/>
-              </a:spcAft>
-              <a:defRPr sz="1200" b="1">
+                <a:spcPts val="200"/>
+              </a:spcAft>
+              <a:defRPr sz="1100" b="1">
                 <a:solidFill>
                   <a:srgbClr val="0E7C86"/>
                 </a:solidFill>
@@ -15763,7 +15913,7 @@
               </a:defRPr>
             </a:pPr>
             <a:r>
-              <a:rPr sz="1200" b="1">
+              <a:rPr sz="1100" b="1">
                 <a:solidFill>
                   <a:srgbClr val="0E7C86"/>
                 </a:solidFill>
@@ -15776,14 +15926,14 @@
       </p:sp>
       <p:sp>
         <p:nvSpPr>
-          <p:cNvPr id="12" name="Rounded Rectangle 11"/>
+          <p:cNvPr id="13" name="Rounded Rectangle 12"/>
           <p:cNvSpPr/>
           <p:nvPr/>
         </p:nvSpPr>
         <p:spPr>
           <a:xfrm>
-            <a:off x="9002037" y="2240280"/>
-            <a:ext cx="2686735" cy="1737360"/>
+            <a:off x="9002037" y="3886200"/>
+            <a:ext cx="2686735" cy="1325880"/>
           </a:xfrm>
           <a:prstGeom prst="roundRect">
             <a:avLst>
@@ -15846,14 +15996,14 @@
       </p:sp>
       <p:sp>
         <p:nvSpPr>
-          <p:cNvPr id="13" name="TextBox 12"/>
+          <p:cNvPr id="14" name="TextBox 13"/>
           <p:cNvSpPr txBox="1"/>
           <p:nvPr/>
         </p:nvSpPr>
         <p:spPr>
           <a:xfrm>
-            <a:off x="9002037" y="1856232"/>
-            <a:ext cx="2686735" cy="347472"/>
+            <a:off x="9002037" y="3520440"/>
+            <a:ext cx="2686735" cy="310896"/>
           </a:xfrm>
           <a:prstGeom prst="rect">
             <a:avLst/>
@@ -15871,9 +16021,9 @@
                 <a:spcPct val="100000"/>
               </a:lnSpc>
               <a:spcAft>
-                <a:spcPts val="600"/>
-              </a:spcAft>
-              <a:defRPr sz="1200" b="1">
+                <a:spcPts val="200"/>
+              </a:spcAft>
+              <a:defRPr sz="1100" b="1">
                 <a:solidFill>
                   <a:srgbClr val="0E7C86"/>
                 </a:solidFill>
@@ -15881,7 +16031,7 @@
               </a:defRPr>
             </a:pPr>
             <a:r>
-              <a:rPr sz="1200" b="1">
+              <a:rPr sz="1100" b="1">
                 <a:solidFill>
                   <a:srgbClr val="0E7C86"/>
                 </a:solidFill>

--- a/ground-vehicle/docs/courses/beginner-ps3/l4_neopixel_leds.pptx
+++ b/ground-vehicle/docs/courses/beginner-ps3/l4_neopixel_leds.pptx
@@ -8511,7 +8511,7 @@
                 </a:solidFill>
                 <a:latin typeface="Calibri"/>
               </a:rPr>
-              <a:t>About 20 minutes</a:t>
+              <a:t>About 25 minutes</a:t>
             </a:r>
           </a:p>
         </p:txBody>
@@ -12732,7 +12732,7 @@
                 </a:solidFill>
                 <a:latin typeface="Calibri"/>
               </a:rPr>
-              <a:t>About 25 minutes</a:t>
+              <a:t>About 30 minutes</a:t>
             </a:r>
           </a:p>
         </p:txBody>
@@ -15565,7 +15565,7 @@
                 </a:solidFill>
                 <a:latin typeface="Calibri"/>
               </a:rPr>
-              <a:t>About 25 minutes</a:t>
+              <a:t>About 50 minutes</a:t>
             </a:r>
           </a:p>
         </p:txBody>

--- a/ground-vehicle/docs/courses/beginner-ps3/l4_neopixel_leds.pptx
+++ b/ground-vehicle/docs/courses/beginner-ps3/l4_neopixel_leds.pptx
@@ -6309,7 +6309,7 @@
                 </a:solidFill>
                 <a:latin typeface="Calibri"/>
               </a:rPr>
-              <a:t>9</a:t>
+              <a:t>10</a:t>
             </a:r>
           </a:p>
         </p:txBody>
@@ -6946,7 +6946,7 @@
                 </a:solidFill>
                 <a:latin typeface="Calibri"/>
               </a:rPr>
-              <a:t>10</a:t>
+              <a:t>11</a:t>
             </a:r>
           </a:p>
         </p:txBody>
@@ -8371,7 +8371,7 @@
                 </a:solidFill>
                 <a:latin typeface="Calibri"/>
               </a:rPr>
-              <a:t>11</a:t>
+              <a:t>12</a:t>
             </a:r>
           </a:p>
         </p:txBody>
@@ -9091,7 +9091,7 @@
                 </a:solidFill>
                 <a:latin typeface="Calibri"/>
               </a:rPr>
-              <a:t>12</a:t>
+              <a:t>13</a:t>
             </a:r>
           </a:p>
         </p:txBody>
@@ -9758,7 +9758,7 @@
                 </a:solidFill>
                 <a:latin typeface="Calibri"/>
               </a:rPr>
-              <a:t>13</a:t>
+              <a:t>14</a:t>
             </a:r>
           </a:p>
         </p:txBody>
@@ -12592,7 +12592,7 @@
                 </a:solidFill>
                 <a:latin typeface="Calibri"/>
               </a:rPr>
-              <a:t>14</a:t>
+              <a:t>15</a:t>
             </a:r>
           </a:p>
         </p:txBody>
@@ -13360,7 +13360,7 @@
                 </a:solidFill>
                 <a:latin typeface="Calibri"/>
               </a:rPr>
-              <a:t>15</a:t>
+              <a:t>16</a:t>
             </a:r>
           </a:p>
         </p:txBody>
@@ -14052,7 +14052,7 @@
                 </a:solidFill>
                 <a:latin typeface="Calibri"/>
               </a:rPr>
-              <a:t>16</a:t>
+              <a:t>17</a:t>
             </a:r>
           </a:p>
         </p:txBody>
@@ -14903,7 +14903,7 @@
                 </a:solidFill>
                 <a:latin typeface="Calibri"/>
               </a:rPr>
-              <a:t>17</a:t>
+              <a:t>18</a:t>
             </a:r>
           </a:p>
         </p:txBody>
@@ -15425,7 +15425,7 @@
                 </a:solidFill>
                 <a:latin typeface="Calibri"/>
               </a:rPr>
-              <a:t>18</a:t>
+              <a:t>19</a:t>
             </a:r>
           </a:p>
         </p:txBody>
@@ -16241,7 +16241,7 @@
                 </a:solidFill>
                 <a:latin typeface="Calibri"/>
               </a:rPr>
-              <a:t>1</a:t>
+              <a:t>2</a:t>
             </a:r>
           </a:p>
         </p:txBody>
@@ -16666,7 +16666,7 @@
                 </a:solidFill>
                 <a:latin typeface="Calibri"/>
               </a:rPr>
-              <a:t>19</a:t>
+              <a:t>20</a:t>
             </a:r>
           </a:p>
         </p:txBody>
@@ -17333,7 +17333,7 @@
                 </a:solidFill>
                 <a:latin typeface="Calibri"/>
               </a:rPr>
-              <a:t>20</a:t>
+              <a:t>21</a:t>
             </a:r>
           </a:p>
         </p:txBody>
@@ -17833,7 +17833,7 @@
                 </a:solidFill>
                 <a:latin typeface="Calibri"/>
               </a:rPr>
-              <a:t>21</a:t>
+              <a:t>22</a:t>
             </a:r>
           </a:p>
         </p:txBody>
@@ -18656,7 +18656,7 @@
                 </a:solidFill>
                 <a:latin typeface="Calibri"/>
               </a:rPr>
-              <a:t>22</a:t>
+              <a:t>23</a:t>
             </a:r>
           </a:p>
         </p:txBody>
@@ -19131,7 +19131,7 @@
                 </a:solidFill>
                 <a:latin typeface="Calibri"/>
               </a:rPr>
-              <a:t>2</a:t>
+              <a:t>3</a:t>
             </a:r>
           </a:p>
         </p:txBody>
@@ -19565,7 +19565,7 @@
                 </a:solidFill>
                 <a:latin typeface="Calibri"/>
               </a:rPr>
-              <a:t>3</a:t>
+              <a:t>4</a:t>
             </a:r>
           </a:p>
         </p:txBody>
@@ -20255,7 +20255,7 @@
                 </a:solidFill>
                 <a:latin typeface="Calibri"/>
               </a:rPr>
-              <a:t>4</a:t>
+              <a:t>5</a:t>
             </a:r>
           </a:p>
         </p:txBody>
@@ -20815,7 +20815,7 @@
                 </a:solidFill>
                 <a:latin typeface="Calibri"/>
               </a:rPr>
-              <a:t>5</a:t>
+              <a:t>6</a:t>
             </a:r>
           </a:p>
         </p:txBody>
@@ -21619,7 +21619,7 @@
                 </a:solidFill>
                 <a:latin typeface="Calibri"/>
               </a:rPr>
-              <a:t>6</a:t>
+              <a:t>7</a:t>
             </a:r>
           </a:p>
         </p:txBody>
@@ -21990,7 +21990,7 @@
                 </a:solidFill>
                 <a:latin typeface="Calibri"/>
               </a:rPr>
-              <a:t>7</a:t>
+              <a:t>8</a:t>
             </a:r>
           </a:p>
         </p:txBody>
@@ -22677,7 +22677,7 @@
                 </a:solidFill>
                 <a:latin typeface="Calibri"/>
               </a:rPr>
-              <a:t>8</a:t>
+              <a:t>9</a:t>
             </a:r>
           </a:p>
         </p:txBody>

--- a/ground-vehicle/docs/courses/beginner-ps3/l4_neopixel_leds.pptx
+++ b/ground-vehicle/docs/courses/beginner-ps3/l4_neopixel_leds.pptx
@@ -6736,7 +6736,7 @@
               <a:t>WATCH OUT   </a:t>
             </a:r>
             <a:r>
-              <a:rPr sz="1500">
+              <a:rPr sz="1800">
                 <a:solidFill>
                   <a:srgbClr val="222222"/>
                 </a:solidFill>
@@ -8251,7 +8251,7 @@
               <a:t>KEY POINT   </a:t>
             </a:r>
             <a:r>
-              <a:rPr sz="1500">
+              <a:rPr sz="1800">
                 <a:solidFill>
                   <a:srgbClr val="222222"/>
                 </a:solidFill>
@@ -12472,7 +12472,7 @@
               <a:t>KEY POINT   </a:t>
             </a:r>
             <a:r>
-              <a:rPr sz="1500">
+              <a:rPr sz="1800">
                 <a:solidFill>
                   <a:srgbClr val="222222"/>
                 </a:solidFill>
@@ -15305,7 +15305,7 @@
               <a:t>KEY POINT   </a:t>
             </a:r>
             <a:r>
-              <a:rPr sz="1500">
+              <a:rPr sz="1800">
                 <a:solidFill>
                   <a:srgbClr val="222222"/>
                 </a:solidFill>
@@ -19355,7 +19355,7 @@
               <a:t>KEY POINT   </a:t>
             </a:r>
             <a:r>
-              <a:rPr sz="1500">
+              <a:rPr sz="1800">
                 <a:solidFill>
                   <a:srgbClr val="222222"/>
                 </a:solidFill>
@@ -20605,7 +20605,7 @@
               <a:t>KEY POINT   </a:t>
             </a:r>
             <a:r>
-              <a:rPr sz="1500">
+              <a:rPr sz="1800">
                 <a:solidFill>
                   <a:srgbClr val="222222"/>
                 </a:solidFill>
@@ -21409,7 +21409,7 @@
               <a:t>KEY POINT   </a:t>
             </a:r>
             <a:r>
-              <a:rPr sz="1500">
+              <a:rPr sz="1800">
                 <a:solidFill>
                   <a:srgbClr val="222222"/>
                 </a:solidFill>
@@ -22052,7 +22052,7 @@
         <p:spPr>
           <a:xfrm>
             <a:off x="502920" y="1700784"/>
-            <a:ext cx="5050413" cy="3474720"/>
+            <a:ext cx="5050413" cy="3369564"/>
           </a:xfrm>
           <a:prstGeom prst="rect">
             <a:avLst/>
@@ -22072,15 +22072,15 @@
               <a:spcAft>
                 <a:spcPts val="800"/>
               </a:spcAft>
-              <a:defRPr sz="1900" b="0">
-                <a:solidFill>
-                  <a:srgbClr val="222222"/>
-                </a:solidFill>
-                <a:latin typeface="Calibri"/>
-              </a:defRPr>
-            </a:pPr>
-            <a:r>
-              <a:rPr sz="1900" b="0">
+              <a:defRPr sz="1800" b="0">
+                <a:solidFill>
+                  <a:srgbClr val="222222"/>
+                </a:solidFill>
+                <a:latin typeface="Calibri"/>
+              </a:defRPr>
+            </a:pPr>
+            <a:r>
+              <a:rPr sz="1800" b="0">
                 <a:solidFill>
                   <a:srgbClr val="222222"/>
                 </a:solidFill>
@@ -22097,15 +22097,15 @@
               <a:spcAft>
                 <a:spcPts val="800"/>
               </a:spcAft>
-              <a:defRPr sz="1900" b="0">
-                <a:solidFill>
-                  <a:srgbClr val="222222"/>
-                </a:solidFill>
-                <a:latin typeface="Calibri"/>
-              </a:defRPr>
-            </a:pPr>
-            <a:r>
-              <a:rPr sz="1900" b="0">
+              <a:defRPr sz="1800" b="0">
+                <a:solidFill>
+                  <a:srgbClr val="222222"/>
+                </a:solidFill>
+                <a:latin typeface="Calibri"/>
+              </a:defRPr>
+            </a:pPr>
+            <a:r>
+              <a:rPr sz="1800" b="0">
                 <a:solidFill>
                   <a:srgbClr val="222222"/>
                 </a:solidFill>
@@ -22122,15 +22122,15 @@
               <a:spcAft>
                 <a:spcPts val="800"/>
               </a:spcAft>
-              <a:defRPr sz="1900" b="0">
-                <a:solidFill>
-                  <a:srgbClr val="222222"/>
-                </a:solidFill>
-                <a:latin typeface="Calibri"/>
-              </a:defRPr>
-            </a:pPr>
-            <a:r>
-              <a:rPr sz="1900" b="0">
+              <a:defRPr sz="1800" b="0">
+                <a:solidFill>
+                  <a:srgbClr val="222222"/>
+                </a:solidFill>
+                <a:latin typeface="Calibri"/>
+              </a:defRPr>
+            </a:pPr>
+            <a:r>
+              <a:rPr sz="1800" b="0">
                 <a:solidFill>
                   <a:srgbClr val="222222"/>
                 </a:solidFill>
@@ -22147,15 +22147,15 @@
               <a:spcAft>
                 <a:spcPts val="800"/>
               </a:spcAft>
-              <a:defRPr sz="1900" b="0">
-                <a:solidFill>
-                  <a:srgbClr val="222222"/>
-                </a:solidFill>
-                <a:latin typeface="Calibri"/>
-              </a:defRPr>
-            </a:pPr>
-            <a:r>
-              <a:rPr sz="1900" b="0">
+              <a:defRPr sz="1800" b="0">
+                <a:solidFill>
+                  <a:srgbClr val="222222"/>
+                </a:solidFill>
+                <a:latin typeface="Calibri"/>
+              </a:defRPr>
+            </a:pPr>
+            <a:r>
+              <a:rPr sz="1800" b="0">
                 <a:solidFill>
                   <a:srgbClr val="222222"/>
                 </a:solidFill>
@@ -22172,15 +22172,15 @@
               <a:spcAft>
                 <a:spcPts val="800"/>
               </a:spcAft>
-              <a:defRPr sz="1900" b="0">
-                <a:solidFill>
-                  <a:srgbClr val="222222"/>
-                </a:solidFill>
-                <a:latin typeface="Calibri"/>
-              </a:defRPr>
-            </a:pPr>
-            <a:r>
-              <a:rPr sz="1900" b="0">
+              <a:defRPr sz="1800" b="0">
+                <a:solidFill>
+                  <a:srgbClr val="222222"/>
+                </a:solidFill>
+                <a:latin typeface="Calibri"/>
+              </a:defRPr>
+            </a:pPr>
+            <a:r>
+              <a:rPr sz="1800" b="0">
                 <a:solidFill>
                   <a:srgbClr val="222222"/>
                 </a:solidFill>
@@ -22197,15 +22197,15 @@
               <a:spcAft>
                 <a:spcPts val="800"/>
               </a:spcAft>
-              <a:defRPr sz="1900" b="0">
-                <a:solidFill>
-                  <a:srgbClr val="222222"/>
-                </a:solidFill>
-                <a:latin typeface="Calibri"/>
-              </a:defRPr>
-            </a:pPr>
-            <a:r>
-              <a:rPr sz="1900" b="0">
+              <a:defRPr sz="1800" b="0">
+                <a:solidFill>
+                  <a:srgbClr val="222222"/>
+                </a:solidFill>
+                <a:latin typeface="Calibri"/>
+              </a:defRPr>
+            </a:pPr>
+            <a:r>
+              <a:rPr sz="1800" b="0">
                 <a:solidFill>
                   <a:srgbClr val="222222"/>
                 </a:solidFill>
@@ -22222,15 +22222,15 @@
               <a:spcAft>
                 <a:spcPts val="800"/>
               </a:spcAft>
-              <a:defRPr sz="1900" b="0">
-                <a:solidFill>
-                  <a:srgbClr val="222222"/>
-                </a:solidFill>
-                <a:latin typeface="Calibri"/>
-              </a:defRPr>
-            </a:pPr>
-            <a:r>
-              <a:rPr sz="1900" b="0">
+              <a:defRPr sz="1800" b="0">
+                <a:solidFill>
+                  <a:srgbClr val="222222"/>
+                </a:solidFill>
+                <a:latin typeface="Calibri"/>
+              </a:defRPr>
+            </a:pPr>
+            <a:r>
+              <a:rPr sz="1800" b="0">
                 <a:solidFill>
                   <a:srgbClr val="222222"/>
                 </a:solidFill>
@@ -22298,7 +22298,7 @@
         <p:spPr>
           <a:xfrm>
             <a:off x="6010533" y="1700784"/>
-            <a:ext cx="5678242" cy="3474720"/>
+            <a:ext cx="5678242" cy="3369564"/>
           </a:xfrm>
           <a:prstGeom prst="rect">
             <a:avLst/>
@@ -22318,15 +22318,15 @@
               <a:spcAft>
                 <a:spcPts val="800"/>
               </a:spcAft>
-              <a:defRPr sz="1900" b="0">
-                <a:solidFill>
-                  <a:srgbClr val="222222"/>
-                </a:solidFill>
-                <a:latin typeface="Calibri"/>
-              </a:defRPr>
-            </a:pPr>
-            <a:r>
-              <a:rPr sz="1900" b="0">
+              <a:defRPr sz="1800" b="0">
+                <a:solidFill>
+                  <a:srgbClr val="222222"/>
+                </a:solidFill>
+                <a:latin typeface="Calibri"/>
+              </a:defRPr>
+            </a:pPr>
+            <a:r>
+              <a:rPr sz="1800" b="0">
                 <a:solidFill>
                   <a:srgbClr val="222222"/>
                 </a:solidFill>
@@ -22343,15 +22343,15 @@
               <a:spcAft>
                 <a:spcPts val="800"/>
               </a:spcAft>
-              <a:defRPr sz="1900" b="0">
-                <a:solidFill>
-                  <a:srgbClr val="222222"/>
-                </a:solidFill>
-                <a:latin typeface="Calibri"/>
-              </a:defRPr>
-            </a:pPr>
-            <a:r>
-              <a:rPr sz="1900" b="0">
+              <a:defRPr sz="1800" b="0">
+                <a:solidFill>
+                  <a:srgbClr val="222222"/>
+                </a:solidFill>
+                <a:latin typeface="Calibri"/>
+              </a:defRPr>
+            </a:pPr>
+            <a:r>
+              <a:rPr sz="1800" b="0">
                 <a:solidFill>
                   <a:srgbClr val="222222"/>
                 </a:solidFill>
@@ -22368,15 +22368,15 @@
               <a:spcAft>
                 <a:spcPts val="800"/>
               </a:spcAft>
-              <a:defRPr sz="1900" b="0">
-                <a:solidFill>
-                  <a:srgbClr val="222222"/>
-                </a:solidFill>
-                <a:latin typeface="Calibri"/>
-              </a:defRPr>
-            </a:pPr>
-            <a:r>
-              <a:rPr sz="1900" b="0">
+              <a:defRPr sz="1800" b="0">
+                <a:solidFill>
+                  <a:srgbClr val="222222"/>
+                </a:solidFill>
+                <a:latin typeface="Calibri"/>
+              </a:defRPr>
+            </a:pPr>
+            <a:r>
+              <a:rPr sz="1800" b="0">
                 <a:solidFill>
                   <a:srgbClr val="222222"/>
                 </a:solidFill>
@@ -22393,15 +22393,15 @@
               <a:spcAft>
                 <a:spcPts val="800"/>
               </a:spcAft>
-              <a:defRPr sz="1900" b="0">
-                <a:solidFill>
-                  <a:srgbClr val="222222"/>
-                </a:solidFill>
-                <a:latin typeface="Calibri"/>
-              </a:defRPr>
-            </a:pPr>
-            <a:r>
-              <a:rPr sz="1900" b="0">
+              <a:defRPr sz="1800" b="0">
+                <a:solidFill>
+                  <a:srgbClr val="222222"/>
+                </a:solidFill>
+                <a:latin typeface="Calibri"/>
+              </a:defRPr>
+            </a:pPr>
+            <a:r>
+              <a:rPr sz="1800" b="0">
                 <a:solidFill>
                   <a:srgbClr val="222222"/>
                 </a:solidFill>
@@ -22420,8 +22420,8 @@
         </p:nvSpPr>
         <p:spPr>
           <a:xfrm>
-            <a:off x="502920" y="5303520"/>
-            <a:ext cx="11185855" cy="960120"/>
+            <a:off x="502920" y="5198364"/>
+            <a:ext cx="11185855" cy="1065276"/>
           </a:xfrm>
           <a:prstGeom prst="roundRect">
             <a:avLst>
@@ -22467,7 +22467,7 @@
               <a:t>KEY POINT   </a:t>
             </a:r>
             <a:r>
-              <a:rPr sz="1500">
+              <a:rPr sz="1800">
                 <a:solidFill>
                   <a:srgbClr val="222222"/>
                 </a:solidFill>

--- a/ground-vehicle/docs/courses/beginner-ps3/l4_neopixel_leds.pptx
+++ b/ground-vehicle/docs/courses/beginner-ps3/l4_neopixel_leds.pptx
@@ -2186,6 +2186,14 @@
                 <a:latin typeface="Calibri"/>
               </a:rPr>
               <a:t>WS2812B is the part number. Worth saying once - they will meet it everywhere.</a:t>
+            </a:r>
+          </a:p>
+          <a:p>
+            <a:r>
+              <a:rPr sz="1200">
+                <a:latin typeface="Calibri"/>
+              </a:rPr>
+              <a:t>The photograph is a stick of eight rather than a single pixel, and the back is worth pointing at: DI at one end, DO at the other, and 5 V and ground shared down the whole strip. That is the chain, in one picture.</a:t>
             </a:r>
           </a:p>
         </p:txBody>
@@ -20383,125 +20391,30 @@
           </a:p>
         </p:txBody>
       </p:sp>
-      <p:sp>
-        <p:nvSpPr>
-          <p:cNvPr id="7" name="Rectangle 6"/>
-          <p:cNvSpPr/>
+      <p:pic>
+        <p:nvPicPr>
+          <p:cNvPr id="7" name="Picture 6" descr="ws2812b-stick-8.jpg"/>
+          <p:cNvPicPr>
+            <a:picLocks noChangeAspect="1"/>
+          </p:cNvPicPr>
           <p:nvPr/>
-        </p:nvSpPr>
-        <p:spPr>
-          <a:xfrm>
-            <a:off x="7885585" y="1188720"/>
-            <a:ext cx="3803190" cy="3291840"/>
+        </p:nvPicPr>
+        <p:blipFill>
+          <a:blip r:embed="rId2"/>
+          <a:stretch>
+            <a:fillRect/>
+          </a:stretch>
+        </p:blipFill>
+        <p:spPr>
+          <a:xfrm>
+            <a:off x="8130587" y="1188720"/>
+            <a:ext cx="3313185" cy="3291840"/>
           </a:xfrm>
           <a:prstGeom prst="rect">
             <a:avLst/>
           </a:prstGeom>
-          <a:solidFill>
-            <a:srgbClr val="EEF3F8"/>
-          </a:solidFill>
-          <a:ln w="19050">
-            <a:solidFill>
-              <a:srgbClr val="0E7C86"/>
-            </a:solidFill>
-            <a:prstDash val="dash"/>
-          </a:ln>
-          <a:effectLst/>
-        </p:spPr>
-        <p:style>
-          <a:lnRef idx="1">
-            <a:schemeClr val="accent1"/>
-          </a:lnRef>
-          <a:fillRef idx="3">
-            <a:schemeClr val="accent1"/>
-          </a:fillRef>
-          <a:effectRef idx="2">
-            <a:schemeClr val="accent1"/>
-          </a:effectRef>
-          <a:fontRef idx="minor">
-            <a:schemeClr val="lt1"/>
-          </a:fontRef>
-        </p:style>
-        <p:txBody>
-          <a:bodyPr rtlCol="0" anchor="ctr" wrap="square" lIns="164592" rIns="164592" tIns="109728" bIns="109728"/>
-          <a:lstStyle/>
-          <a:p>
-            <a:pPr algn="ctr">
-              <a:lnSpc>
-                <a:spcPct val="100000"/>
-              </a:lnSpc>
-              <a:spcAft>
-                <a:spcPts val="700"/>
-              </a:spcAft>
-              <a:defRPr sz="1600" b="0">
-                <a:solidFill>
-                  <a:srgbClr val="0E7C86"/>
-                </a:solidFill>
-                <a:latin typeface="Calibri"/>
-              </a:defRPr>
-            </a:pPr>
-            <a:r>
-              <a:rPr sz="1600" b="1">
-                <a:solidFill>
-                  <a:srgbClr val="666666"/>
-                </a:solidFill>
-                <a:latin typeface="Calibri"/>
-              </a:rPr>
-              <a:t>PLACEHOLDER</a:t>
-            </a:r>
-          </a:p>
-          <a:p>
-            <a:pPr algn="ctr">
-              <a:lnSpc>
-                <a:spcPct val="100000"/>
-              </a:lnSpc>
-              <a:spcAft>
-                <a:spcPts val="700"/>
-              </a:spcAft>
-              <a:defRPr sz="1600" b="0">
-                <a:solidFill>
-                  <a:srgbClr val="0E7C86"/>
-                </a:solidFill>
-                <a:latin typeface="Calibri"/>
-              </a:defRPr>
-            </a:pPr>
-            <a:r>
-              <a:rPr sz="1600" b="0">
-                <a:solidFill>
-                  <a:srgbClr val="0E7C86"/>
-                </a:solidFill>
-                <a:latin typeface="Calibri"/>
-              </a:rPr>
-              <a:t>PHOTO: a single NeoPixel, close up</a:t>
-            </a:r>
-          </a:p>
-          <a:p>
-            <a:pPr algn="ctr">
-              <a:lnSpc>
-                <a:spcPct val="100000"/>
-              </a:lnSpc>
-              <a:spcAft>
-                <a:spcPts val="700"/>
-              </a:spcAft>
-              <a:defRPr sz="1600" b="0">
-                <a:solidFill>
-                  <a:srgbClr val="0E7C86"/>
-                </a:solidFill>
-                <a:latin typeface="Calibri"/>
-              </a:defRPr>
-            </a:pPr>
-            <a:r>
-              <a:rPr sz="1600" b="0">
-                <a:solidFill>
-                  <a:srgbClr val="0E7C86"/>
-                </a:solidFill>
-                <a:latin typeface="Calibri"/>
-              </a:rPr>
-              <a:t>One WS2812B on its own, big enough to see the four pads and the three dies inside the package.</a:t>
-            </a:r>
-          </a:p>
-        </p:txBody>
-      </p:sp>
+        </p:spPr>
+      </p:pic>
       <p:sp>
         <p:nvSpPr>
           <p:cNvPr id="8" name="TextBox 7"/>
@@ -20510,8 +20423,8 @@
         </p:nvSpPr>
         <p:spPr>
           <a:xfrm>
-            <a:off x="7885585" y="4535424"/>
-            <a:ext cx="3803190" cy="566928"/>
+            <a:off x="8130587" y="4535424"/>
+            <a:ext cx="3313185" cy="566928"/>
           </a:xfrm>
           <a:prstGeom prst="rect">
             <a:avLst/>
@@ -20545,7 +20458,7 @@
                 </a:solidFill>
                 <a:latin typeface="Calibri"/>
               </a:rPr>
-              <a:t>One WS2812B: 5 V, ground, data in, data out</a:t>
+              <a:t>Eight WS2812Bs, front and back: 5 V, ground, DI, DO</a:t>
             </a:r>
           </a:p>
         </p:txBody>
@@ -21624,125 +21537,30 @@
           </a:p>
         </p:txBody>
       </p:sp>
-      <p:sp>
-        <p:nvSpPr>
-          <p:cNvPr id="6" name="Rectangle 5"/>
-          <p:cNvSpPr/>
+      <p:pic>
+        <p:nvPicPr>
+          <p:cNvPr id="6" name="Picture 5" descr="rgb-additive-mixing.png"/>
+          <p:cNvPicPr>
+            <a:picLocks noChangeAspect="1"/>
+          </p:cNvPicPr>
           <p:nvPr/>
-        </p:nvSpPr>
-        <p:spPr>
-          <a:xfrm>
-            <a:off x="502920" y="1188720"/>
-            <a:ext cx="11185855" cy="4343400"/>
+        </p:nvPicPr>
+        <p:blipFill>
+          <a:blip r:embed="rId2"/>
+          <a:stretch>
+            <a:fillRect/>
+          </a:stretch>
+        </p:blipFill>
+        <p:spPr>
+          <a:xfrm>
+            <a:off x="3924147" y="1188720"/>
+            <a:ext cx="4343400" cy="4343400"/>
           </a:xfrm>
           <a:prstGeom prst="rect">
             <a:avLst/>
           </a:prstGeom>
-          <a:solidFill>
-            <a:srgbClr val="EEF3F8"/>
-          </a:solidFill>
-          <a:ln w="19050">
-            <a:solidFill>
-              <a:srgbClr val="0E7C86"/>
-            </a:solidFill>
-            <a:prstDash val="dash"/>
-          </a:ln>
-          <a:effectLst/>
-        </p:spPr>
-        <p:style>
-          <a:lnRef idx="1">
-            <a:schemeClr val="accent1"/>
-          </a:lnRef>
-          <a:fillRef idx="3">
-            <a:schemeClr val="accent1"/>
-          </a:fillRef>
-          <a:effectRef idx="2">
-            <a:schemeClr val="accent1"/>
-          </a:effectRef>
-          <a:fontRef idx="minor">
-            <a:schemeClr val="lt1"/>
-          </a:fontRef>
-        </p:style>
-        <p:txBody>
-          <a:bodyPr rtlCol="0" anchor="ctr" wrap="square" lIns="164592" rIns="164592" tIns="109728" bIns="109728"/>
-          <a:lstStyle/>
-          <a:p>
-            <a:pPr algn="ctr">
-              <a:lnSpc>
-                <a:spcPct val="100000"/>
-              </a:lnSpc>
-              <a:spcAft>
-                <a:spcPts val="700"/>
-              </a:spcAft>
-              <a:defRPr sz="1600" b="0">
-                <a:solidFill>
-                  <a:srgbClr val="0E7C86"/>
-                </a:solidFill>
-                <a:latin typeface="Calibri"/>
-              </a:defRPr>
-            </a:pPr>
-            <a:r>
-              <a:rPr sz="1600" b="1">
-                <a:solidFill>
-                  <a:srgbClr val="666666"/>
-                </a:solidFill>
-                <a:latin typeface="Calibri"/>
-              </a:rPr>
-              <a:t>PLACEHOLDER</a:t>
-            </a:r>
-          </a:p>
-          <a:p>
-            <a:pPr algn="ctr">
-              <a:lnSpc>
-                <a:spcPct val="100000"/>
-              </a:lnSpc>
-              <a:spcAft>
-                <a:spcPts val="700"/>
-              </a:spcAft>
-              <a:defRPr sz="1600" b="0">
-                <a:solidFill>
-                  <a:srgbClr val="0E7C86"/>
-                </a:solidFill>
-                <a:latin typeface="Calibri"/>
-              </a:defRPr>
-            </a:pPr>
-            <a:r>
-              <a:rPr sz="1600" b="0">
-                <a:solidFill>
-                  <a:srgbClr val="0E7C86"/>
-                </a:solidFill>
-                <a:latin typeface="Calibri"/>
-              </a:rPr>
-              <a:t>FIGURE: additive RGB mixing</a:t>
-            </a:r>
-          </a:p>
-          <a:p>
-            <a:pPr algn="ctr">
-              <a:lnSpc>
-                <a:spcPct val="100000"/>
-              </a:lnSpc>
-              <a:spcAft>
-                <a:spcPts val="700"/>
-              </a:spcAft>
-              <a:defRPr sz="1600" b="0">
-                <a:solidFill>
-                  <a:srgbClr val="0E7C86"/>
-                </a:solidFill>
-                <a:latin typeface="Calibri"/>
-              </a:defRPr>
-            </a:pPr>
-            <a:r>
-              <a:rPr sz="1600" b="0">
-                <a:solidFill>
-                  <a:srgbClr val="0E7C86"/>
-                </a:solidFill>
-                <a:latin typeface="Calibri"/>
-              </a:rPr>
-              <a:t>Three overlapping circles - red, green, blue - with yellow, cyan and magenta where two meet and white where all three do. Kevin is supplying this one.</a:t>
-            </a:r>
-          </a:p>
-        </p:txBody>
-      </p:sp>
+        </p:spPr>
+      </p:pic>
       <p:sp>
         <p:nvSpPr>
           <p:cNvPr id="7" name="TextBox 6"/>

--- a/ground-vehicle/docs/courses/beginner-ps3/l4_neopixel_leds.pptx
+++ b/ground-vehicle/docs/courses/beginner-ps3/l4_neopixel_leds.pptx
@@ -2478,7 +2478,7 @@
               <a:rPr sz="1200">
                 <a:latin typeface="Calibri"/>
               </a:rPr>
-              <a:t>Power and ground go to every pixel the same way. Ask which of the three wires is different, and why that one is drawn as a chain rather than as a rail.</a:t>
+              <a:t>Ask which of the three wires is different from the other two, and why. Power and ground go to every pixel the same way; the data wire does not.</a:t>
             </a:r>
           </a:p>
           <a:p>
@@ -2494,7 +2494,7 @@
               <a:rPr sz="1200">
                 <a:latin typeface="Calibri"/>
               </a:rPr>
-              <a:t>That is the whole reason one GPIO can drive thirty-two lights, and the reason the numbering runs in data order rather than in whatever order looks tidy from outside.</a:t>
+              <a:t>That is the whole reason one pin can drive thirty-two lights, and the reason the numbering runs in data order rather than in whatever order looks tidy from outside.</a:t>
             </a:r>
           </a:p>
           <a:p>
@@ -2502,7 +2502,7 @@
               <a:rPr sz="1200">
                 <a:latin typeface="Calibri"/>
               </a:rPr>
-              <a:t>Worth saying out loud: unplug the data lead of pixel 4 and pixels 4 to 31 all go dark, while 0 to 3 carry on. Power and ground are a rail; data is a chain.</a:t>
+              <a:t>Worth saying out loud: unplug the data lead going into pixel 4 and pixels 4 to 31 all go dark, while 0 to 3 carry on. Power and ground are a rail; data is a chain.</a:t>
             </a:r>
           </a:p>
         </p:txBody>
@@ -22169,2849 +22169,40 @@
           </a:p>
         </p:txBody>
       </p:sp>
-      <p:cxnSp>
-        <p:nvCxnSpPr>
-          <p:cNvPr id="6" name="Connector 5"/>
-          <p:cNvCxnSpPr/>
+      <p:pic>
+        <p:nvPicPr>
+          <p:cNvPr id="6" name="Picture 5" descr="neopixel-chain-eight.png"/>
+          <p:cNvPicPr>
+            <a:picLocks noChangeAspect="1"/>
+          </p:cNvPicPr>
           <p:nvPr/>
-        </p:nvCxnSpPr>
-        <p:spPr>
-          <a:xfrm>
-            <a:off x="1554480" y="1645920"/>
-            <a:ext cx="8595360" cy="0"/>
-          </a:xfrm>
-          <a:prstGeom prst="line">
-            <a:avLst/>
-          </a:prstGeom>
-          <a:ln w="22225">
-            <a:solidFill>
-              <a:srgbClr val="1F3A5F"/>
-            </a:solidFill>
-          </a:ln>
-        </p:spPr>
-        <p:style>
-          <a:lnRef idx="2">
-            <a:schemeClr val="accent1"/>
-          </a:lnRef>
-          <a:fillRef idx="0">
-            <a:schemeClr val="accent1"/>
-          </a:fillRef>
-          <a:effectRef idx="1">
-            <a:schemeClr val="accent1"/>
-          </a:effectRef>
-          <a:fontRef idx="minor">
-            <a:schemeClr val="tx1"/>
-          </a:fontRef>
-        </p:style>
-      </p:cxnSp>
-      <p:cxnSp>
-        <p:nvCxnSpPr>
-          <p:cNvPr id="7" name="Connector 6"/>
-          <p:cNvCxnSpPr/>
-          <p:nvPr/>
-        </p:nvCxnSpPr>
-        <p:spPr>
-          <a:xfrm>
-            <a:off x="1993392" y="1645920"/>
-            <a:ext cx="0" cy="502920"/>
-          </a:xfrm>
-          <a:prstGeom prst="line">
-            <a:avLst/>
-          </a:prstGeom>
-          <a:ln w="22225">
-            <a:solidFill>
-              <a:srgbClr val="1F3A5F"/>
-            </a:solidFill>
-          </a:ln>
-        </p:spPr>
-        <p:style>
-          <a:lnRef idx="2">
-            <a:schemeClr val="accent1"/>
-          </a:lnRef>
-          <a:fillRef idx="0">
-            <a:schemeClr val="accent1"/>
-          </a:fillRef>
-          <a:effectRef idx="1">
-            <a:schemeClr val="accent1"/>
-          </a:effectRef>
-          <a:fontRef idx="minor">
-            <a:schemeClr val="tx1"/>
-          </a:fontRef>
-        </p:style>
-      </p:cxnSp>
-      <p:cxnSp>
-        <p:nvCxnSpPr>
-          <p:cNvPr id="8" name="Connector 7"/>
-          <p:cNvCxnSpPr/>
-          <p:nvPr/>
-        </p:nvCxnSpPr>
-        <p:spPr>
-          <a:xfrm>
-            <a:off x="3044952" y="1645920"/>
-            <a:ext cx="0" cy="502920"/>
-          </a:xfrm>
-          <a:prstGeom prst="line">
-            <a:avLst/>
-          </a:prstGeom>
-          <a:ln w="22225">
-            <a:solidFill>
-              <a:srgbClr val="1F3A5F"/>
-            </a:solidFill>
-          </a:ln>
-        </p:spPr>
-        <p:style>
-          <a:lnRef idx="2">
-            <a:schemeClr val="accent1"/>
-          </a:lnRef>
-          <a:fillRef idx="0">
-            <a:schemeClr val="accent1"/>
-          </a:fillRef>
-          <a:effectRef idx="1">
-            <a:schemeClr val="accent1"/>
-          </a:effectRef>
-          <a:fontRef idx="minor">
-            <a:schemeClr val="tx1"/>
-          </a:fontRef>
-        </p:style>
-      </p:cxnSp>
-      <p:cxnSp>
-        <p:nvCxnSpPr>
-          <p:cNvPr id="9" name="Connector 8"/>
-          <p:cNvCxnSpPr/>
-          <p:nvPr/>
-        </p:nvCxnSpPr>
-        <p:spPr>
-          <a:xfrm>
-            <a:off x="4096512" y="1645920"/>
-            <a:ext cx="0" cy="502920"/>
-          </a:xfrm>
-          <a:prstGeom prst="line">
-            <a:avLst/>
-          </a:prstGeom>
-          <a:ln w="22225">
-            <a:solidFill>
-              <a:srgbClr val="1F3A5F"/>
-            </a:solidFill>
-          </a:ln>
-        </p:spPr>
-        <p:style>
-          <a:lnRef idx="2">
-            <a:schemeClr val="accent1"/>
-          </a:lnRef>
-          <a:fillRef idx="0">
-            <a:schemeClr val="accent1"/>
-          </a:fillRef>
-          <a:effectRef idx="1">
-            <a:schemeClr val="accent1"/>
-          </a:effectRef>
-          <a:fontRef idx="minor">
-            <a:schemeClr val="tx1"/>
-          </a:fontRef>
-        </p:style>
-      </p:cxnSp>
-      <p:cxnSp>
-        <p:nvCxnSpPr>
-          <p:cNvPr id="10" name="Connector 9"/>
-          <p:cNvCxnSpPr/>
-          <p:nvPr/>
-        </p:nvCxnSpPr>
-        <p:spPr>
-          <a:xfrm>
-            <a:off x="5148072" y="1645920"/>
-            <a:ext cx="0" cy="502920"/>
-          </a:xfrm>
-          <a:prstGeom prst="line">
-            <a:avLst/>
-          </a:prstGeom>
-          <a:ln w="22225">
-            <a:solidFill>
-              <a:srgbClr val="1F3A5F"/>
-            </a:solidFill>
-          </a:ln>
-        </p:spPr>
-        <p:style>
-          <a:lnRef idx="2">
-            <a:schemeClr val="accent1"/>
-          </a:lnRef>
-          <a:fillRef idx="0">
-            <a:schemeClr val="accent1"/>
-          </a:fillRef>
-          <a:effectRef idx="1">
-            <a:schemeClr val="accent1"/>
-          </a:effectRef>
-          <a:fontRef idx="minor">
-            <a:schemeClr val="tx1"/>
-          </a:fontRef>
-        </p:style>
-      </p:cxnSp>
-      <p:cxnSp>
-        <p:nvCxnSpPr>
-          <p:cNvPr id="11" name="Connector 10"/>
-          <p:cNvCxnSpPr/>
-          <p:nvPr/>
-        </p:nvCxnSpPr>
-        <p:spPr>
-          <a:xfrm>
-            <a:off x="6199632" y="1645920"/>
-            <a:ext cx="0" cy="502920"/>
-          </a:xfrm>
-          <a:prstGeom prst="line">
-            <a:avLst/>
-          </a:prstGeom>
-          <a:ln w="22225">
-            <a:solidFill>
-              <a:srgbClr val="1F3A5F"/>
-            </a:solidFill>
-          </a:ln>
-        </p:spPr>
-        <p:style>
-          <a:lnRef idx="2">
-            <a:schemeClr val="accent1"/>
-          </a:lnRef>
-          <a:fillRef idx="0">
-            <a:schemeClr val="accent1"/>
-          </a:fillRef>
-          <a:effectRef idx="1">
-            <a:schemeClr val="accent1"/>
-          </a:effectRef>
-          <a:fontRef idx="minor">
-            <a:schemeClr val="tx1"/>
-          </a:fontRef>
-        </p:style>
-      </p:cxnSp>
-      <p:cxnSp>
-        <p:nvCxnSpPr>
-          <p:cNvPr id="12" name="Connector 11"/>
-          <p:cNvCxnSpPr/>
-          <p:nvPr/>
-        </p:nvCxnSpPr>
-        <p:spPr>
-          <a:xfrm>
-            <a:off x="7251192" y="1645920"/>
-            <a:ext cx="0" cy="502920"/>
-          </a:xfrm>
-          <a:prstGeom prst="line">
-            <a:avLst/>
-          </a:prstGeom>
-          <a:ln w="22225">
-            <a:solidFill>
-              <a:srgbClr val="1F3A5F"/>
-            </a:solidFill>
-          </a:ln>
-        </p:spPr>
-        <p:style>
-          <a:lnRef idx="2">
-            <a:schemeClr val="accent1"/>
-          </a:lnRef>
-          <a:fillRef idx="0">
-            <a:schemeClr val="accent1"/>
-          </a:fillRef>
-          <a:effectRef idx="1">
-            <a:schemeClr val="accent1"/>
-          </a:effectRef>
-          <a:fontRef idx="minor">
-            <a:schemeClr val="tx1"/>
-          </a:fontRef>
-        </p:style>
-      </p:cxnSp>
-      <p:cxnSp>
-        <p:nvCxnSpPr>
-          <p:cNvPr id="13" name="Connector 12"/>
-          <p:cNvCxnSpPr/>
-          <p:nvPr/>
-        </p:nvCxnSpPr>
-        <p:spPr>
-          <a:xfrm>
-            <a:off x="8302752" y="1645920"/>
-            <a:ext cx="0" cy="502920"/>
-          </a:xfrm>
-          <a:prstGeom prst="line">
-            <a:avLst/>
-          </a:prstGeom>
-          <a:ln w="22225">
-            <a:solidFill>
-              <a:srgbClr val="1F3A5F"/>
-            </a:solidFill>
-          </a:ln>
-        </p:spPr>
-        <p:style>
-          <a:lnRef idx="2">
-            <a:schemeClr val="accent1"/>
-          </a:lnRef>
-          <a:fillRef idx="0">
-            <a:schemeClr val="accent1"/>
-          </a:fillRef>
-          <a:effectRef idx="1">
-            <a:schemeClr val="accent1"/>
-          </a:effectRef>
-          <a:fontRef idx="minor">
-            <a:schemeClr val="tx1"/>
-          </a:fontRef>
-        </p:style>
-      </p:cxnSp>
-      <p:cxnSp>
-        <p:nvCxnSpPr>
-          <p:cNvPr id="14" name="Connector 13"/>
-          <p:cNvCxnSpPr/>
-          <p:nvPr/>
-        </p:nvCxnSpPr>
-        <p:spPr>
-          <a:xfrm>
-            <a:off x="9354312" y="1645920"/>
-            <a:ext cx="0" cy="502920"/>
-          </a:xfrm>
-          <a:prstGeom prst="line">
-            <a:avLst/>
-          </a:prstGeom>
-          <a:ln w="22225">
-            <a:solidFill>
-              <a:srgbClr val="1F3A5F"/>
-            </a:solidFill>
-          </a:ln>
-        </p:spPr>
-        <p:style>
-          <a:lnRef idx="2">
-            <a:schemeClr val="accent1"/>
-          </a:lnRef>
-          <a:fillRef idx="0">
-            <a:schemeClr val="accent1"/>
-          </a:fillRef>
-          <a:effectRef idx="1">
-            <a:schemeClr val="accent1"/>
-          </a:effectRef>
-          <a:fontRef idx="minor">
-            <a:schemeClr val="tx1"/>
-          </a:fontRef>
-        </p:style>
-      </p:cxnSp>
-      <p:cxnSp>
-        <p:nvCxnSpPr>
-          <p:cNvPr id="15" name="Connector 14"/>
-          <p:cNvCxnSpPr/>
-          <p:nvPr/>
-        </p:nvCxnSpPr>
-        <p:spPr>
-          <a:xfrm>
-            <a:off x="1554480" y="3840480"/>
-            <a:ext cx="8595360" cy="0"/>
-          </a:xfrm>
-          <a:prstGeom prst="line">
-            <a:avLst/>
-          </a:prstGeom>
-          <a:ln w="22225">
-            <a:solidFill>
-              <a:srgbClr val="1F3A5F"/>
-            </a:solidFill>
-          </a:ln>
-        </p:spPr>
-        <p:style>
-          <a:lnRef idx="2">
-            <a:schemeClr val="accent1"/>
-          </a:lnRef>
-          <a:fillRef idx="0">
-            <a:schemeClr val="accent1"/>
-          </a:fillRef>
-          <a:effectRef idx="1">
-            <a:schemeClr val="accent1"/>
-          </a:effectRef>
-          <a:fontRef idx="minor">
-            <a:schemeClr val="tx1"/>
-          </a:fontRef>
-        </p:style>
-      </p:cxnSp>
-      <p:cxnSp>
-        <p:nvCxnSpPr>
-          <p:cNvPr id="16" name="Connector 15"/>
-          <p:cNvCxnSpPr/>
-          <p:nvPr/>
-        </p:nvCxnSpPr>
-        <p:spPr>
-          <a:xfrm>
-            <a:off x="1993392" y="3337560"/>
-            <a:ext cx="0" cy="502920"/>
-          </a:xfrm>
-          <a:prstGeom prst="line">
-            <a:avLst/>
-          </a:prstGeom>
-          <a:ln w="22225">
-            <a:solidFill>
-              <a:srgbClr val="1F3A5F"/>
-            </a:solidFill>
-          </a:ln>
-        </p:spPr>
-        <p:style>
-          <a:lnRef idx="2">
-            <a:schemeClr val="accent1"/>
-          </a:lnRef>
-          <a:fillRef idx="0">
-            <a:schemeClr val="accent1"/>
-          </a:fillRef>
-          <a:effectRef idx="1">
-            <a:schemeClr val="accent1"/>
-          </a:effectRef>
-          <a:fontRef idx="minor">
-            <a:schemeClr val="tx1"/>
-          </a:fontRef>
-        </p:style>
-      </p:cxnSp>
-      <p:cxnSp>
-        <p:nvCxnSpPr>
-          <p:cNvPr id="17" name="Connector 16"/>
-          <p:cNvCxnSpPr/>
-          <p:nvPr/>
-        </p:nvCxnSpPr>
-        <p:spPr>
-          <a:xfrm>
-            <a:off x="3044952" y="3337560"/>
-            <a:ext cx="0" cy="502920"/>
-          </a:xfrm>
-          <a:prstGeom prst="line">
-            <a:avLst/>
-          </a:prstGeom>
-          <a:ln w="22225">
-            <a:solidFill>
-              <a:srgbClr val="1F3A5F"/>
-            </a:solidFill>
-          </a:ln>
-        </p:spPr>
-        <p:style>
-          <a:lnRef idx="2">
-            <a:schemeClr val="accent1"/>
-          </a:lnRef>
-          <a:fillRef idx="0">
-            <a:schemeClr val="accent1"/>
-          </a:fillRef>
-          <a:effectRef idx="1">
-            <a:schemeClr val="accent1"/>
-          </a:effectRef>
-          <a:fontRef idx="minor">
-            <a:schemeClr val="tx1"/>
-          </a:fontRef>
-        </p:style>
-      </p:cxnSp>
-      <p:cxnSp>
-        <p:nvCxnSpPr>
-          <p:cNvPr id="18" name="Connector 17"/>
-          <p:cNvCxnSpPr/>
-          <p:nvPr/>
-        </p:nvCxnSpPr>
-        <p:spPr>
-          <a:xfrm>
-            <a:off x="4096512" y="3337560"/>
-            <a:ext cx="0" cy="502920"/>
-          </a:xfrm>
-          <a:prstGeom prst="line">
-            <a:avLst/>
-          </a:prstGeom>
-          <a:ln w="22225">
-            <a:solidFill>
-              <a:srgbClr val="1F3A5F"/>
-            </a:solidFill>
-          </a:ln>
-        </p:spPr>
-        <p:style>
-          <a:lnRef idx="2">
-            <a:schemeClr val="accent1"/>
-          </a:lnRef>
-          <a:fillRef idx="0">
-            <a:schemeClr val="accent1"/>
-          </a:fillRef>
-          <a:effectRef idx="1">
-            <a:schemeClr val="accent1"/>
-          </a:effectRef>
-          <a:fontRef idx="minor">
-            <a:schemeClr val="tx1"/>
-          </a:fontRef>
-        </p:style>
-      </p:cxnSp>
-      <p:cxnSp>
-        <p:nvCxnSpPr>
-          <p:cNvPr id="19" name="Connector 18"/>
-          <p:cNvCxnSpPr/>
-          <p:nvPr/>
-        </p:nvCxnSpPr>
-        <p:spPr>
-          <a:xfrm>
-            <a:off x="5148072" y="3337560"/>
-            <a:ext cx="0" cy="502920"/>
-          </a:xfrm>
-          <a:prstGeom prst="line">
-            <a:avLst/>
-          </a:prstGeom>
-          <a:ln w="22225">
-            <a:solidFill>
-              <a:srgbClr val="1F3A5F"/>
-            </a:solidFill>
-          </a:ln>
-        </p:spPr>
-        <p:style>
-          <a:lnRef idx="2">
-            <a:schemeClr val="accent1"/>
-          </a:lnRef>
-          <a:fillRef idx="0">
-            <a:schemeClr val="accent1"/>
-          </a:fillRef>
-          <a:effectRef idx="1">
-            <a:schemeClr val="accent1"/>
-          </a:effectRef>
-          <a:fontRef idx="minor">
-            <a:schemeClr val="tx1"/>
-          </a:fontRef>
-        </p:style>
-      </p:cxnSp>
-      <p:cxnSp>
-        <p:nvCxnSpPr>
-          <p:cNvPr id="20" name="Connector 19"/>
-          <p:cNvCxnSpPr/>
-          <p:nvPr/>
-        </p:nvCxnSpPr>
-        <p:spPr>
-          <a:xfrm>
-            <a:off x="6199632" y="3337560"/>
-            <a:ext cx="0" cy="502920"/>
-          </a:xfrm>
-          <a:prstGeom prst="line">
-            <a:avLst/>
-          </a:prstGeom>
-          <a:ln w="22225">
-            <a:solidFill>
-              <a:srgbClr val="1F3A5F"/>
-            </a:solidFill>
-          </a:ln>
-        </p:spPr>
-        <p:style>
-          <a:lnRef idx="2">
-            <a:schemeClr val="accent1"/>
-          </a:lnRef>
-          <a:fillRef idx="0">
-            <a:schemeClr val="accent1"/>
-          </a:fillRef>
-          <a:effectRef idx="1">
-            <a:schemeClr val="accent1"/>
-          </a:effectRef>
-          <a:fontRef idx="minor">
-            <a:schemeClr val="tx1"/>
-          </a:fontRef>
-        </p:style>
-      </p:cxnSp>
-      <p:cxnSp>
-        <p:nvCxnSpPr>
-          <p:cNvPr id="21" name="Connector 20"/>
-          <p:cNvCxnSpPr/>
-          <p:nvPr/>
-        </p:nvCxnSpPr>
-        <p:spPr>
-          <a:xfrm>
-            <a:off x="7251192" y="3337560"/>
-            <a:ext cx="0" cy="502920"/>
-          </a:xfrm>
-          <a:prstGeom prst="line">
-            <a:avLst/>
-          </a:prstGeom>
-          <a:ln w="22225">
-            <a:solidFill>
-              <a:srgbClr val="1F3A5F"/>
-            </a:solidFill>
-          </a:ln>
-        </p:spPr>
-        <p:style>
-          <a:lnRef idx="2">
-            <a:schemeClr val="accent1"/>
-          </a:lnRef>
-          <a:fillRef idx="0">
-            <a:schemeClr val="accent1"/>
-          </a:fillRef>
-          <a:effectRef idx="1">
-            <a:schemeClr val="accent1"/>
-          </a:effectRef>
-          <a:fontRef idx="minor">
-            <a:schemeClr val="tx1"/>
-          </a:fontRef>
-        </p:style>
-      </p:cxnSp>
-      <p:cxnSp>
-        <p:nvCxnSpPr>
-          <p:cNvPr id="22" name="Connector 21"/>
-          <p:cNvCxnSpPr/>
-          <p:nvPr/>
-        </p:nvCxnSpPr>
-        <p:spPr>
-          <a:xfrm>
-            <a:off x="8302752" y="3337560"/>
-            <a:ext cx="0" cy="502920"/>
-          </a:xfrm>
-          <a:prstGeom prst="line">
-            <a:avLst/>
-          </a:prstGeom>
-          <a:ln w="22225">
-            <a:solidFill>
-              <a:srgbClr val="1F3A5F"/>
-            </a:solidFill>
-          </a:ln>
-        </p:spPr>
-        <p:style>
-          <a:lnRef idx="2">
-            <a:schemeClr val="accent1"/>
-          </a:lnRef>
-          <a:fillRef idx="0">
-            <a:schemeClr val="accent1"/>
-          </a:fillRef>
-          <a:effectRef idx="1">
-            <a:schemeClr val="accent1"/>
-          </a:effectRef>
-          <a:fontRef idx="minor">
-            <a:schemeClr val="tx1"/>
-          </a:fontRef>
-        </p:style>
-      </p:cxnSp>
-      <p:cxnSp>
-        <p:nvCxnSpPr>
-          <p:cNvPr id="23" name="Connector 22"/>
-          <p:cNvCxnSpPr/>
-          <p:nvPr/>
-        </p:nvCxnSpPr>
-        <p:spPr>
-          <a:xfrm>
-            <a:off x="9354312" y="3337560"/>
-            <a:ext cx="0" cy="502920"/>
-          </a:xfrm>
-          <a:prstGeom prst="line">
-            <a:avLst/>
-          </a:prstGeom>
-          <a:ln w="22225">
-            <a:solidFill>
-              <a:srgbClr val="1F3A5F"/>
-            </a:solidFill>
-          </a:ln>
-        </p:spPr>
-        <p:style>
-          <a:lnRef idx="2">
-            <a:schemeClr val="accent1"/>
-          </a:lnRef>
-          <a:fillRef idx="0">
-            <a:schemeClr val="accent1"/>
-          </a:fillRef>
-          <a:effectRef idx="1">
-            <a:schemeClr val="accent1"/>
-          </a:effectRef>
-          <a:fontRef idx="minor">
-            <a:schemeClr val="tx1"/>
-          </a:fontRef>
-        </p:style>
-      </p:cxnSp>
-      <p:cxnSp>
-        <p:nvCxnSpPr>
-          <p:cNvPr id="24" name="Connector 23"/>
-          <p:cNvCxnSpPr/>
-          <p:nvPr/>
-        </p:nvCxnSpPr>
-        <p:spPr>
-          <a:xfrm>
-            <a:off x="1618488" y="2743200"/>
-            <a:ext cx="118872" cy="0"/>
-          </a:xfrm>
-          <a:prstGeom prst="line">
-            <a:avLst/>
-          </a:prstGeom>
-          <a:ln w="22225">
-            <a:solidFill>
-              <a:srgbClr val="1F3A5F"/>
-            </a:solidFill>
-          </a:ln>
-        </p:spPr>
-        <p:style>
-          <a:lnRef idx="2">
-            <a:schemeClr val="accent1"/>
-          </a:lnRef>
-          <a:fillRef idx="0">
-            <a:schemeClr val="accent1"/>
-          </a:fillRef>
-          <a:effectRef idx="1">
-            <a:schemeClr val="accent1"/>
-          </a:effectRef>
-          <a:fontRef idx="minor">
-            <a:schemeClr val="tx1"/>
-          </a:fontRef>
-        </p:style>
-      </p:cxnSp>
-      <p:cxnSp>
-        <p:nvCxnSpPr>
-          <p:cNvPr id="25" name="Connector 24"/>
-          <p:cNvCxnSpPr/>
-          <p:nvPr/>
-        </p:nvCxnSpPr>
-        <p:spPr>
-          <a:xfrm>
-            <a:off x="2606040" y="2743200"/>
-            <a:ext cx="182880" cy="0"/>
-          </a:xfrm>
-          <a:prstGeom prst="line">
-            <a:avLst/>
-          </a:prstGeom>
-          <a:ln w="22225">
-            <a:solidFill>
-              <a:srgbClr val="1F3A5F"/>
-            </a:solidFill>
-          </a:ln>
-        </p:spPr>
-        <p:style>
-          <a:lnRef idx="2">
-            <a:schemeClr val="accent1"/>
-          </a:lnRef>
-          <a:fillRef idx="0">
-            <a:schemeClr val="accent1"/>
-          </a:fillRef>
-          <a:effectRef idx="1">
-            <a:schemeClr val="accent1"/>
-          </a:effectRef>
-          <a:fontRef idx="minor">
-            <a:schemeClr val="tx1"/>
-          </a:fontRef>
-        </p:style>
-      </p:cxnSp>
-      <p:cxnSp>
-        <p:nvCxnSpPr>
-          <p:cNvPr id="26" name="Connector 25"/>
-          <p:cNvCxnSpPr/>
-          <p:nvPr/>
-        </p:nvCxnSpPr>
-        <p:spPr>
-          <a:xfrm>
-            <a:off x="3657600" y="2743200"/>
-            <a:ext cx="182880" cy="0"/>
-          </a:xfrm>
-          <a:prstGeom prst="line">
-            <a:avLst/>
-          </a:prstGeom>
-          <a:ln w="22225">
-            <a:solidFill>
-              <a:srgbClr val="1F3A5F"/>
-            </a:solidFill>
-          </a:ln>
-        </p:spPr>
-        <p:style>
-          <a:lnRef idx="2">
-            <a:schemeClr val="accent1"/>
-          </a:lnRef>
-          <a:fillRef idx="0">
-            <a:schemeClr val="accent1"/>
-          </a:fillRef>
-          <a:effectRef idx="1">
-            <a:schemeClr val="accent1"/>
-          </a:effectRef>
-          <a:fontRef idx="minor">
-            <a:schemeClr val="tx1"/>
-          </a:fontRef>
-        </p:style>
-      </p:cxnSp>
-      <p:cxnSp>
-        <p:nvCxnSpPr>
-          <p:cNvPr id="27" name="Connector 26"/>
-          <p:cNvCxnSpPr/>
-          <p:nvPr/>
-        </p:nvCxnSpPr>
-        <p:spPr>
-          <a:xfrm>
-            <a:off x="4709160" y="2743200"/>
-            <a:ext cx="182880" cy="0"/>
-          </a:xfrm>
-          <a:prstGeom prst="line">
-            <a:avLst/>
-          </a:prstGeom>
-          <a:ln w="22225">
-            <a:solidFill>
-              <a:srgbClr val="1F3A5F"/>
-            </a:solidFill>
-          </a:ln>
-        </p:spPr>
-        <p:style>
-          <a:lnRef idx="2">
-            <a:schemeClr val="accent1"/>
-          </a:lnRef>
-          <a:fillRef idx="0">
-            <a:schemeClr val="accent1"/>
-          </a:fillRef>
-          <a:effectRef idx="1">
-            <a:schemeClr val="accent1"/>
-          </a:effectRef>
-          <a:fontRef idx="minor">
-            <a:schemeClr val="tx1"/>
-          </a:fontRef>
-        </p:style>
-      </p:cxnSp>
-      <p:cxnSp>
-        <p:nvCxnSpPr>
-          <p:cNvPr id="28" name="Connector 27"/>
-          <p:cNvCxnSpPr/>
-          <p:nvPr/>
-        </p:nvCxnSpPr>
-        <p:spPr>
-          <a:xfrm>
-            <a:off x="5760720" y="2743200"/>
-            <a:ext cx="182880" cy="0"/>
-          </a:xfrm>
-          <a:prstGeom prst="line">
-            <a:avLst/>
-          </a:prstGeom>
-          <a:ln w="22225">
-            <a:solidFill>
-              <a:srgbClr val="1F3A5F"/>
-            </a:solidFill>
-          </a:ln>
-        </p:spPr>
-        <p:style>
-          <a:lnRef idx="2">
-            <a:schemeClr val="accent1"/>
-          </a:lnRef>
-          <a:fillRef idx="0">
-            <a:schemeClr val="accent1"/>
-          </a:fillRef>
-          <a:effectRef idx="1">
-            <a:schemeClr val="accent1"/>
-          </a:effectRef>
-          <a:fontRef idx="minor">
-            <a:schemeClr val="tx1"/>
-          </a:fontRef>
-        </p:style>
-      </p:cxnSp>
-      <p:cxnSp>
-        <p:nvCxnSpPr>
-          <p:cNvPr id="29" name="Connector 28"/>
-          <p:cNvCxnSpPr/>
-          <p:nvPr/>
-        </p:nvCxnSpPr>
-        <p:spPr>
-          <a:xfrm>
-            <a:off x="6812280" y="2743200"/>
-            <a:ext cx="182880" cy="0"/>
-          </a:xfrm>
-          <a:prstGeom prst="line">
-            <a:avLst/>
-          </a:prstGeom>
-          <a:ln w="22225">
-            <a:solidFill>
-              <a:srgbClr val="1F3A5F"/>
-            </a:solidFill>
-          </a:ln>
-        </p:spPr>
-        <p:style>
-          <a:lnRef idx="2">
-            <a:schemeClr val="accent1"/>
-          </a:lnRef>
-          <a:fillRef idx="0">
-            <a:schemeClr val="accent1"/>
-          </a:fillRef>
-          <a:effectRef idx="1">
-            <a:schemeClr val="accent1"/>
-          </a:effectRef>
-          <a:fontRef idx="minor">
-            <a:schemeClr val="tx1"/>
-          </a:fontRef>
-        </p:style>
-      </p:cxnSp>
-      <p:cxnSp>
-        <p:nvCxnSpPr>
-          <p:cNvPr id="30" name="Connector 29"/>
-          <p:cNvCxnSpPr/>
-          <p:nvPr/>
-        </p:nvCxnSpPr>
-        <p:spPr>
-          <a:xfrm>
-            <a:off x="7863840" y="2743200"/>
-            <a:ext cx="182880" cy="0"/>
-          </a:xfrm>
-          <a:prstGeom prst="line">
-            <a:avLst/>
-          </a:prstGeom>
-          <a:ln w="22225">
-            <a:solidFill>
-              <a:srgbClr val="1F3A5F"/>
-            </a:solidFill>
-          </a:ln>
-        </p:spPr>
-        <p:style>
-          <a:lnRef idx="2">
-            <a:schemeClr val="accent1"/>
-          </a:lnRef>
-          <a:fillRef idx="0">
-            <a:schemeClr val="accent1"/>
-          </a:fillRef>
-          <a:effectRef idx="1">
-            <a:schemeClr val="accent1"/>
-          </a:effectRef>
-          <a:fontRef idx="minor">
-            <a:schemeClr val="tx1"/>
-          </a:fontRef>
-        </p:style>
-      </p:cxnSp>
-      <p:cxnSp>
-        <p:nvCxnSpPr>
-          <p:cNvPr id="31" name="Connector 30"/>
-          <p:cNvCxnSpPr/>
-          <p:nvPr/>
-        </p:nvCxnSpPr>
-        <p:spPr>
-          <a:xfrm>
-            <a:off x="8915400" y="2743200"/>
-            <a:ext cx="182880" cy="0"/>
-          </a:xfrm>
-          <a:prstGeom prst="line">
-            <a:avLst/>
-          </a:prstGeom>
-          <a:ln w="22225">
-            <a:solidFill>
-              <a:srgbClr val="1F3A5F"/>
-            </a:solidFill>
-          </a:ln>
-        </p:spPr>
-        <p:style>
-          <a:lnRef idx="2">
-            <a:schemeClr val="accent1"/>
-          </a:lnRef>
-          <a:fillRef idx="0">
-            <a:schemeClr val="accent1"/>
-          </a:fillRef>
-          <a:effectRef idx="1">
-            <a:schemeClr val="accent1"/>
-          </a:effectRef>
-          <a:fontRef idx="minor">
-            <a:schemeClr val="tx1"/>
-          </a:fontRef>
-        </p:style>
-      </p:cxnSp>
-      <p:cxnSp>
-        <p:nvCxnSpPr>
-          <p:cNvPr id="32" name="Connector 31"/>
-          <p:cNvCxnSpPr/>
-          <p:nvPr/>
-        </p:nvCxnSpPr>
-        <p:spPr>
-          <a:xfrm>
-            <a:off x="9966960" y="2743200"/>
-            <a:ext cx="320040" cy="0"/>
-          </a:xfrm>
-          <a:prstGeom prst="line">
-            <a:avLst/>
-          </a:prstGeom>
-          <a:ln w="22225">
-            <a:solidFill>
-              <a:srgbClr val="1F3A5F"/>
-            </a:solidFill>
-          </a:ln>
-        </p:spPr>
-        <p:style>
-          <a:lnRef idx="2">
-            <a:schemeClr val="accent1"/>
-          </a:lnRef>
-          <a:fillRef idx="0">
-            <a:schemeClr val="accent1"/>
-          </a:fillRef>
-          <a:effectRef idx="1">
-            <a:schemeClr val="accent1"/>
-          </a:effectRef>
-          <a:fontRef idx="minor">
-            <a:schemeClr val="tx1"/>
-          </a:fontRef>
-        </p:style>
-      </p:cxnSp>
-      <p:sp>
-        <p:nvSpPr>
-          <p:cNvPr id="33" name="Rectangle 32"/>
-          <p:cNvSpPr/>
-          <p:nvPr/>
-        </p:nvSpPr>
-        <p:spPr>
-          <a:xfrm>
-            <a:off x="1737360" y="2148840"/>
-            <a:ext cx="868680" cy="1188720"/>
+        </p:nvPicPr>
+        <p:blipFill>
+          <a:blip r:embed="rId3"/>
+          <a:stretch>
+            <a:fillRect/>
+          </a:stretch>
+        </p:blipFill>
+        <p:spPr>
+          <a:xfrm>
+            <a:off x="502920" y="1963089"/>
+            <a:ext cx="11185855" cy="1651661"/>
           </a:xfrm>
           <a:prstGeom prst="rect">
             <a:avLst/>
           </a:prstGeom>
-          <a:solidFill>
-            <a:srgbClr val="FFFFFF"/>
-          </a:solidFill>
-          <a:ln w="12700">
-            <a:solidFill>
-              <a:srgbClr val="1F3A5F"/>
-            </a:solidFill>
-          </a:ln>
-          <a:effectLst/>
-        </p:spPr>
-        <p:style>
-          <a:lnRef idx="1">
-            <a:schemeClr val="accent1"/>
-          </a:lnRef>
-          <a:fillRef idx="3">
-            <a:schemeClr val="accent1"/>
-          </a:fillRef>
-          <a:effectRef idx="2">
-            <a:schemeClr val="accent1"/>
-          </a:effectRef>
-          <a:fontRef idx="minor">
-            <a:schemeClr val="lt1"/>
-          </a:fontRef>
-        </p:style>
-        <p:txBody>
-          <a:bodyPr rtlCol="0" anchor="ctr" wrap="square" lIns="45720" rIns="45720" tIns="18288" bIns="18288"/>
-          <a:lstStyle/>
-          <a:p>
-            <a:pPr algn="ctr">
-              <a:lnSpc>
-                <a:spcPct val="100000"/>
-              </a:lnSpc>
-              <a:spcAft>
-                <a:spcPts val="0"/>
-              </a:spcAft>
-              <a:defRPr sz="900" b="0">
-                <a:solidFill>
-                  <a:srgbClr val="222222"/>
-                </a:solidFill>
-                <a:latin typeface="Calibri"/>
-              </a:defRPr>
-            </a:pPr>
-          </a:p>
-        </p:txBody>
-      </p:sp>
-      <p:sp>
-        <p:nvSpPr>
-          <p:cNvPr id="34" name="Oval 33"/>
-          <p:cNvSpPr/>
-          <p:nvPr/>
-        </p:nvSpPr>
-        <p:spPr>
-          <a:xfrm>
-            <a:off x="1837944" y="2331720"/>
-            <a:ext cx="256032" cy="256032"/>
-          </a:xfrm>
-          <a:prstGeom prst="ellipse">
-            <a:avLst/>
-          </a:prstGeom>
-          <a:solidFill>
-            <a:srgbClr val="3CA95C"/>
-          </a:solidFill>
-          <a:ln w="9525">
-            <a:solidFill>
-              <a:srgbClr val="3CA95C"/>
-            </a:solidFill>
-          </a:ln>
-          <a:effectLst/>
-        </p:spPr>
-        <p:style>
-          <a:lnRef idx="1">
-            <a:schemeClr val="accent1"/>
-          </a:lnRef>
-          <a:fillRef idx="3">
-            <a:schemeClr val="accent1"/>
-          </a:fillRef>
-          <a:effectRef idx="2">
-            <a:schemeClr val="accent1"/>
-          </a:effectRef>
-          <a:fontRef idx="minor">
-            <a:schemeClr val="lt1"/>
-          </a:fontRef>
-        </p:style>
-        <p:txBody>
-          <a:bodyPr rtlCol="0" anchor="ctr" wrap="square" lIns="45720" rIns="45720" tIns="18288" bIns="18288"/>
-          <a:lstStyle/>
-          <a:p>
-            <a:pPr algn="ctr">
-              <a:lnSpc>
-                <a:spcPct val="100000"/>
-              </a:lnSpc>
-              <a:spcAft>
-                <a:spcPts val="0"/>
-              </a:spcAft>
-              <a:defRPr sz="900" b="0">
-                <a:solidFill>
-                  <a:srgbClr val="222222"/>
-                </a:solidFill>
-                <a:latin typeface="Calibri"/>
-              </a:defRPr>
-            </a:pPr>
-          </a:p>
-        </p:txBody>
-      </p:sp>
-      <p:sp>
-        <p:nvSpPr>
-          <p:cNvPr id="35" name="Oval 34"/>
-          <p:cNvSpPr/>
-          <p:nvPr/>
-        </p:nvSpPr>
-        <p:spPr>
-          <a:xfrm>
-            <a:off x="2249424" y="2331720"/>
-            <a:ext cx="256032" cy="256032"/>
-          </a:xfrm>
-          <a:prstGeom prst="ellipse">
-            <a:avLst/>
-          </a:prstGeom>
-          <a:solidFill>
-            <a:srgbClr val="2CA6DF"/>
-          </a:solidFill>
-          <a:ln w="9525">
-            <a:solidFill>
-              <a:srgbClr val="2CA6DF"/>
-            </a:solidFill>
-          </a:ln>
-          <a:effectLst/>
-        </p:spPr>
-        <p:style>
-          <a:lnRef idx="1">
-            <a:schemeClr val="accent1"/>
-          </a:lnRef>
-          <a:fillRef idx="3">
-            <a:schemeClr val="accent1"/>
-          </a:fillRef>
-          <a:effectRef idx="2">
-            <a:schemeClr val="accent1"/>
-          </a:effectRef>
-          <a:fontRef idx="minor">
-            <a:schemeClr val="lt1"/>
-          </a:fontRef>
-        </p:style>
-        <p:txBody>
-          <a:bodyPr rtlCol="0" anchor="ctr" wrap="square" lIns="45720" rIns="45720" tIns="18288" bIns="18288"/>
-          <a:lstStyle/>
-          <a:p>
-            <a:pPr algn="ctr">
-              <a:lnSpc>
-                <a:spcPct val="100000"/>
-              </a:lnSpc>
-              <a:spcAft>
-                <a:spcPts val="0"/>
-              </a:spcAft>
-              <a:defRPr sz="900" b="0">
-                <a:solidFill>
-                  <a:srgbClr val="222222"/>
-                </a:solidFill>
-                <a:latin typeface="Calibri"/>
-              </a:defRPr>
-            </a:pPr>
-          </a:p>
-        </p:txBody>
-      </p:sp>
-      <p:sp>
-        <p:nvSpPr>
-          <p:cNvPr id="36" name="Oval 35"/>
-          <p:cNvSpPr/>
-          <p:nvPr/>
-        </p:nvSpPr>
-        <p:spPr>
-          <a:xfrm>
-            <a:off x="2048256" y="2715768"/>
-            <a:ext cx="256032" cy="256032"/>
-          </a:xfrm>
-          <a:prstGeom prst="ellipse">
-            <a:avLst/>
-          </a:prstGeom>
-          <a:solidFill>
-            <a:srgbClr val="E03C31"/>
-          </a:solidFill>
-          <a:ln w="9525">
-            <a:solidFill>
-              <a:srgbClr val="E03C31"/>
-            </a:solidFill>
-          </a:ln>
-          <a:effectLst/>
-        </p:spPr>
-        <p:style>
-          <a:lnRef idx="1">
-            <a:schemeClr val="accent1"/>
-          </a:lnRef>
-          <a:fillRef idx="3">
-            <a:schemeClr val="accent1"/>
-          </a:fillRef>
-          <a:effectRef idx="2">
-            <a:schemeClr val="accent1"/>
-          </a:effectRef>
-          <a:fontRef idx="minor">
-            <a:schemeClr val="lt1"/>
-          </a:fontRef>
-        </p:style>
-        <p:txBody>
-          <a:bodyPr rtlCol="0" anchor="ctr" wrap="square" lIns="45720" rIns="45720" tIns="18288" bIns="18288"/>
-          <a:lstStyle/>
-          <a:p>
-            <a:pPr algn="ctr">
-              <a:lnSpc>
-                <a:spcPct val="100000"/>
-              </a:lnSpc>
-              <a:spcAft>
-                <a:spcPts val="0"/>
-              </a:spcAft>
-              <a:defRPr sz="900" b="0">
-                <a:solidFill>
-                  <a:srgbClr val="222222"/>
-                </a:solidFill>
-                <a:latin typeface="Calibri"/>
-              </a:defRPr>
-            </a:pPr>
-          </a:p>
-        </p:txBody>
-      </p:sp>
-      <p:sp>
-        <p:nvSpPr>
-          <p:cNvPr id="37" name="Rectangle 36"/>
-          <p:cNvSpPr/>
-          <p:nvPr/>
-        </p:nvSpPr>
-        <p:spPr>
-          <a:xfrm>
-            <a:off x="2788920" y="2148840"/>
-            <a:ext cx="868680" cy="1188720"/>
-          </a:xfrm>
-          <a:prstGeom prst="rect">
-            <a:avLst/>
-          </a:prstGeom>
-          <a:solidFill>
-            <a:srgbClr val="FFFFFF"/>
-          </a:solidFill>
-          <a:ln w="12700">
-            <a:solidFill>
-              <a:srgbClr val="1F3A5F"/>
-            </a:solidFill>
-          </a:ln>
-          <a:effectLst/>
-        </p:spPr>
-        <p:style>
-          <a:lnRef idx="1">
-            <a:schemeClr val="accent1"/>
-          </a:lnRef>
-          <a:fillRef idx="3">
-            <a:schemeClr val="accent1"/>
-          </a:fillRef>
-          <a:effectRef idx="2">
-            <a:schemeClr val="accent1"/>
-          </a:effectRef>
-          <a:fontRef idx="minor">
-            <a:schemeClr val="lt1"/>
-          </a:fontRef>
-        </p:style>
-        <p:txBody>
-          <a:bodyPr rtlCol="0" anchor="ctr" wrap="square" lIns="45720" rIns="45720" tIns="18288" bIns="18288"/>
-          <a:lstStyle/>
-          <a:p>
-            <a:pPr algn="ctr">
-              <a:lnSpc>
-                <a:spcPct val="100000"/>
-              </a:lnSpc>
-              <a:spcAft>
-                <a:spcPts val="0"/>
-              </a:spcAft>
-              <a:defRPr sz="900" b="0">
-                <a:solidFill>
-                  <a:srgbClr val="222222"/>
-                </a:solidFill>
-                <a:latin typeface="Calibri"/>
-              </a:defRPr>
-            </a:pPr>
-          </a:p>
-        </p:txBody>
-      </p:sp>
-      <p:sp>
-        <p:nvSpPr>
-          <p:cNvPr id="38" name="Oval 37"/>
-          <p:cNvSpPr/>
-          <p:nvPr/>
-        </p:nvSpPr>
-        <p:spPr>
-          <a:xfrm>
-            <a:off x="2889504" y="2331720"/>
-            <a:ext cx="256032" cy="256032"/>
-          </a:xfrm>
-          <a:prstGeom prst="ellipse">
-            <a:avLst/>
-          </a:prstGeom>
-          <a:solidFill>
-            <a:srgbClr val="3CA95C"/>
-          </a:solidFill>
-          <a:ln w="9525">
-            <a:solidFill>
-              <a:srgbClr val="3CA95C"/>
-            </a:solidFill>
-          </a:ln>
-          <a:effectLst/>
-        </p:spPr>
-        <p:style>
-          <a:lnRef idx="1">
-            <a:schemeClr val="accent1"/>
-          </a:lnRef>
-          <a:fillRef idx="3">
-            <a:schemeClr val="accent1"/>
-          </a:fillRef>
-          <a:effectRef idx="2">
-            <a:schemeClr val="accent1"/>
-          </a:effectRef>
-          <a:fontRef idx="minor">
-            <a:schemeClr val="lt1"/>
-          </a:fontRef>
-        </p:style>
-        <p:txBody>
-          <a:bodyPr rtlCol="0" anchor="ctr" wrap="square" lIns="45720" rIns="45720" tIns="18288" bIns="18288"/>
-          <a:lstStyle/>
-          <a:p>
-            <a:pPr algn="ctr">
-              <a:lnSpc>
-                <a:spcPct val="100000"/>
-              </a:lnSpc>
-              <a:spcAft>
-                <a:spcPts val="0"/>
-              </a:spcAft>
-              <a:defRPr sz="900" b="0">
-                <a:solidFill>
-                  <a:srgbClr val="222222"/>
-                </a:solidFill>
-                <a:latin typeface="Calibri"/>
-              </a:defRPr>
-            </a:pPr>
-          </a:p>
-        </p:txBody>
-      </p:sp>
-      <p:sp>
-        <p:nvSpPr>
-          <p:cNvPr id="39" name="Oval 38"/>
-          <p:cNvSpPr/>
-          <p:nvPr/>
-        </p:nvSpPr>
-        <p:spPr>
-          <a:xfrm>
-            <a:off x="3300984" y="2331720"/>
-            <a:ext cx="256032" cy="256032"/>
-          </a:xfrm>
-          <a:prstGeom prst="ellipse">
-            <a:avLst/>
-          </a:prstGeom>
-          <a:solidFill>
-            <a:srgbClr val="2CA6DF"/>
-          </a:solidFill>
-          <a:ln w="9525">
-            <a:solidFill>
-              <a:srgbClr val="2CA6DF"/>
-            </a:solidFill>
-          </a:ln>
-          <a:effectLst/>
-        </p:spPr>
-        <p:style>
-          <a:lnRef idx="1">
-            <a:schemeClr val="accent1"/>
-          </a:lnRef>
-          <a:fillRef idx="3">
-            <a:schemeClr val="accent1"/>
-          </a:fillRef>
-          <a:effectRef idx="2">
-            <a:schemeClr val="accent1"/>
-          </a:effectRef>
-          <a:fontRef idx="minor">
-            <a:schemeClr val="lt1"/>
-          </a:fontRef>
-        </p:style>
-        <p:txBody>
-          <a:bodyPr rtlCol="0" anchor="ctr" wrap="square" lIns="45720" rIns="45720" tIns="18288" bIns="18288"/>
-          <a:lstStyle/>
-          <a:p>
-            <a:pPr algn="ctr">
-              <a:lnSpc>
-                <a:spcPct val="100000"/>
-              </a:lnSpc>
-              <a:spcAft>
-                <a:spcPts val="0"/>
-              </a:spcAft>
-              <a:defRPr sz="900" b="0">
-                <a:solidFill>
-                  <a:srgbClr val="222222"/>
-                </a:solidFill>
-                <a:latin typeface="Calibri"/>
-              </a:defRPr>
-            </a:pPr>
-          </a:p>
-        </p:txBody>
-      </p:sp>
-      <p:sp>
-        <p:nvSpPr>
-          <p:cNvPr id="40" name="Oval 39"/>
-          <p:cNvSpPr/>
-          <p:nvPr/>
-        </p:nvSpPr>
-        <p:spPr>
-          <a:xfrm>
-            <a:off x="3099816" y="2715768"/>
-            <a:ext cx="256032" cy="256032"/>
-          </a:xfrm>
-          <a:prstGeom prst="ellipse">
-            <a:avLst/>
-          </a:prstGeom>
-          <a:solidFill>
-            <a:srgbClr val="E03C31"/>
-          </a:solidFill>
-          <a:ln w="9525">
-            <a:solidFill>
-              <a:srgbClr val="E03C31"/>
-            </a:solidFill>
-          </a:ln>
-          <a:effectLst/>
-        </p:spPr>
-        <p:style>
-          <a:lnRef idx="1">
-            <a:schemeClr val="accent1"/>
-          </a:lnRef>
-          <a:fillRef idx="3">
-            <a:schemeClr val="accent1"/>
-          </a:fillRef>
-          <a:effectRef idx="2">
-            <a:schemeClr val="accent1"/>
-          </a:effectRef>
-          <a:fontRef idx="minor">
-            <a:schemeClr val="lt1"/>
-          </a:fontRef>
-        </p:style>
-        <p:txBody>
-          <a:bodyPr rtlCol="0" anchor="ctr" wrap="square" lIns="45720" rIns="45720" tIns="18288" bIns="18288"/>
-          <a:lstStyle/>
-          <a:p>
-            <a:pPr algn="ctr">
-              <a:lnSpc>
-                <a:spcPct val="100000"/>
-              </a:lnSpc>
-              <a:spcAft>
-                <a:spcPts val="0"/>
-              </a:spcAft>
-              <a:defRPr sz="900" b="0">
-                <a:solidFill>
-                  <a:srgbClr val="222222"/>
-                </a:solidFill>
-                <a:latin typeface="Calibri"/>
-              </a:defRPr>
-            </a:pPr>
-          </a:p>
-        </p:txBody>
-      </p:sp>
-      <p:sp>
-        <p:nvSpPr>
-          <p:cNvPr id="41" name="Rectangle 40"/>
-          <p:cNvSpPr/>
-          <p:nvPr/>
-        </p:nvSpPr>
-        <p:spPr>
-          <a:xfrm>
-            <a:off x="3840480" y="2148840"/>
-            <a:ext cx="868680" cy="1188720"/>
-          </a:xfrm>
-          <a:prstGeom prst="rect">
-            <a:avLst/>
-          </a:prstGeom>
-          <a:solidFill>
-            <a:srgbClr val="FFFFFF"/>
-          </a:solidFill>
-          <a:ln w="12700">
-            <a:solidFill>
-              <a:srgbClr val="1F3A5F"/>
-            </a:solidFill>
-          </a:ln>
-          <a:effectLst/>
-        </p:spPr>
-        <p:style>
-          <a:lnRef idx="1">
-            <a:schemeClr val="accent1"/>
-          </a:lnRef>
-          <a:fillRef idx="3">
-            <a:schemeClr val="accent1"/>
-          </a:fillRef>
-          <a:effectRef idx="2">
-            <a:schemeClr val="accent1"/>
-          </a:effectRef>
-          <a:fontRef idx="minor">
-            <a:schemeClr val="lt1"/>
-          </a:fontRef>
-        </p:style>
-        <p:txBody>
-          <a:bodyPr rtlCol="0" anchor="ctr" wrap="square" lIns="45720" rIns="45720" tIns="18288" bIns="18288"/>
-          <a:lstStyle/>
-          <a:p>
-            <a:pPr algn="ctr">
-              <a:lnSpc>
-                <a:spcPct val="100000"/>
-              </a:lnSpc>
-              <a:spcAft>
-                <a:spcPts val="0"/>
-              </a:spcAft>
-              <a:defRPr sz="900" b="0">
-                <a:solidFill>
-                  <a:srgbClr val="222222"/>
-                </a:solidFill>
-                <a:latin typeface="Calibri"/>
-              </a:defRPr>
-            </a:pPr>
-          </a:p>
-        </p:txBody>
-      </p:sp>
-      <p:sp>
-        <p:nvSpPr>
-          <p:cNvPr id="42" name="Oval 41"/>
-          <p:cNvSpPr/>
-          <p:nvPr/>
-        </p:nvSpPr>
-        <p:spPr>
-          <a:xfrm>
-            <a:off x="3941064" y="2331720"/>
-            <a:ext cx="256032" cy="256032"/>
-          </a:xfrm>
-          <a:prstGeom prst="ellipse">
-            <a:avLst/>
-          </a:prstGeom>
-          <a:solidFill>
-            <a:srgbClr val="3CA95C"/>
-          </a:solidFill>
-          <a:ln w="9525">
-            <a:solidFill>
-              <a:srgbClr val="3CA95C"/>
-            </a:solidFill>
-          </a:ln>
-          <a:effectLst/>
-        </p:spPr>
-        <p:style>
-          <a:lnRef idx="1">
-            <a:schemeClr val="accent1"/>
-          </a:lnRef>
-          <a:fillRef idx="3">
-            <a:schemeClr val="accent1"/>
-          </a:fillRef>
-          <a:effectRef idx="2">
-            <a:schemeClr val="accent1"/>
-          </a:effectRef>
-          <a:fontRef idx="minor">
-            <a:schemeClr val="lt1"/>
-          </a:fontRef>
-        </p:style>
-        <p:txBody>
-          <a:bodyPr rtlCol="0" anchor="ctr" wrap="square" lIns="45720" rIns="45720" tIns="18288" bIns="18288"/>
-          <a:lstStyle/>
-          <a:p>
-            <a:pPr algn="ctr">
-              <a:lnSpc>
-                <a:spcPct val="100000"/>
-              </a:lnSpc>
-              <a:spcAft>
-                <a:spcPts val="0"/>
-              </a:spcAft>
-              <a:defRPr sz="900" b="0">
-                <a:solidFill>
-                  <a:srgbClr val="222222"/>
-                </a:solidFill>
-                <a:latin typeface="Calibri"/>
-              </a:defRPr>
-            </a:pPr>
-          </a:p>
-        </p:txBody>
-      </p:sp>
-      <p:sp>
-        <p:nvSpPr>
-          <p:cNvPr id="43" name="Oval 42"/>
-          <p:cNvSpPr/>
-          <p:nvPr/>
-        </p:nvSpPr>
-        <p:spPr>
-          <a:xfrm>
-            <a:off x="4352544" y="2331720"/>
-            <a:ext cx="256032" cy="256032"/>
-          </a:xfrm>
-          <a:prstGeom prst="ellipse">
-            <a:avLst/>
-          </a:prstGeom>
-          <a:solidFill>
-            <a:srgbClr val="2CA6DF"/>
-          </a:solidFill>
-          <a:ln w="9525">
-            <a:solidFill>
-              <a:srgbClr val="2CA6DF"/>
-            </a:solidFill>
-          </a:ln>
-          <a:effectLst/>
-        </p:spPr>
-        <p:style>
-          <a:lnRef idx="1">
-            <a:schemeClr val="accent1"/>
-          </a:lnRef>
-          <a:fillRef idx="3">
-            <a:schemeClr val="accent1"/>
-          </a:fillRef>
-          <a:effectRef idx="2">
-            <a:schemeClr val="accent1"/>
-          </a:effectRef>
-          <a:fontRef idx="minor">
-            <a:schemeClr val="lt1"/>
-          </a:fontRef>
-        </p:style>
-        <p:txBody>
-          <a:bodyPr rtlCol="0" anchor="ctr" wrap="square" lIns="45720" rIns="45720" tIns="18288" bIns="18288"/>
-          <a:lstStyle/>
-          <a:p>
-            <a:pPr algn="ctr">
-              <a:lnSpc>
-                <a:spcPct val="100000"/>
-              </a:lnSpc>
-              <a:spcAft>
-                <a:spcPts val="0"/>
-              </a:spcAft>
-              <a:defRPr sz="900" b="0">
-                <a:solidFill>
-                  <a:srgbClr val="222222"/>
-                </a:solidFill>
-                <a:latin typeface="Calibri"/>
-              </a:defRPr>
-            </a:pPr>
-          </a:p>
-        </p:txBody>
-      </p:sp>
-      <p:sp>
-        <p:nvSpPr>
-          <p:cNvPr id="44" name="Oval 43"/>
-          <p:cNvSpPr/>
-          <p:nvPr/>
-        </p:nvSpPr>
-        <p:spPr>
-          <a:xfrm>
-            <a:off x="4151376" y="2715768"/>
-            <a:ext cx="256032" cy="256032"/>
-          </a:xfrm>
-          <a:prstGeom prst="ellipse">
-            <a:avLst/>
-          </a:prstGeom>
-          <a:solidFill>
-            <a:srgbClr val="E03C31"/>
-          </a:solidFill>
-          <a:ln w="9525">
-            <a:solidFill>
-              <a:srgbClr val="E03C31"/>
-            </a:solidFill>
-          </a:ln>
-          <a:effectLst/>
-        </p:spPr>
-        <p:style>
-          <a:lnRef idx="1">
-            <a:schemeClr val="accent1"/>
-          </a:lnRef>
-          <a:fillRef idx="3">
-            <a:schemeClr val="accent1"/>
-          </a:fillRef>
-          <a:effectRef idx="2">
-            <a:schemeClr val="accent1"/>
-          </a:effectRef>
-          <a:fontRef idx="minor">
-            <a:schemeClr val="lt1"/>
-          </a:fontRef>
-        </p:style>
-        <p:txBody>
-          <a:bodyPr rtlCol="0" anchor="ctr" wrap="square" lIns="45720" rIns="45720" tIns="18288" bIns="18288"/>
-          <a:lstStyle/>
-          <a:p>
-            <a:pPr algn="ctr">
-              <a:lnSpc>
-                <a:spcPct val="100000"/>
-              </a:lnSpc>
-              <a:spcAft>
-                <a:spcPts val="0"/>
-              </a:spcAft>
-              <a:defRPr sz="900" b="0">
-                <a:solidFill>
-                  <a:srgbClr val="222222"/>
-                </a:solidFill>
-                <a:latin typeface="Calibri"/>
-              </a:defRPr>
-            </a:pPr>
-          </a:p>
-        </p:txBody>
-      </p:sp>
-      <p:sp>
-        <p:nvSpPr>
-          <p:cNvPr id="45" name="Rectangle 44"/>
-          <p:cNvSpPr/>
-          <p:nvPr/>
-        </p:nvSpPr>
-        <p:spPr>
-          <a:xfrm>
-            <a:off x="4892040" y="2148840"/>
-            <a:ext cx="868680" cy="1188720"/>
-          </a:xfrm>
-          <a:prstGeom prst="rect">
-            <a:avLst/>
-          </a:prstGeom>
-          <a:solidFill>
-            <a:srgbClr val="FFFFFF"/>
-          </a:solidFill>
-          <a:ln w="12700">
-            <a:solidFill>
-              <a:srgbClr val="1F3A5F"/>
-            </a:solidFill>
-          </a:ln>
-          <a:effectLst/>
-        </p:spPr>
-        <p:style>
-          <a:lnRef idx="1">
-            <a:schemeClr val="accent1"/>
-          </a:lnRef>
-          <a:fillRef idx="3">
-            <a:schemeClr val="accent1"/>
-          </a:fillRef>
-          <a:effectRef idx="2">
-            <a:schemeClr val="accent1"/>
-          </a:effectRef>
-          <a:fontRef idx="minor">
-            <a:schemeClr val="lt1"/>
-          </a:fontRef>
-        </p:style>
-        <p:txBody>
-          <a:bodyPr rtlCol="0" anchor="ctr" wrap="square" lIns="45720" rIns="45720" tIns="18288" bIns="18288"/>
-          <a:lstStyle/>
-          <a:p>
-            <a:pPr algn="ctr">
-              <a:lnSpc>
-                <a:spcPct val="100000"/>
-              </a:lnSpc>
-              <a:spcAft>
-                <a:spcPts val="0"/>
-              </a:spcAft>
-              <a:defRPr sz="900" b="0">
-                <a:solidFill>
-                  <a:srgbClr val="222222"/>
-                </a:solidFill>
-                <a:latin typeface="Calibri"/>
-              </a:defRPr>
-            </a:pPr>
-          </a:p>
-        </p:txBody>
-      </p:sp>
-      <p:sp>
-        <p:nvSpPr>
-          <p:cNvPr id="46" name="Oval 45"/>
-          <p:cNvSpPr/>
-          <p:nvPr/>
-        </p:nvSpPr>
-        <p:spPr>
-          <a:xfrm>
-            <a:off x="4992624" y="2331720"/>
-            <a:ext cx="256032" cy="256032"/>
-          </a:xfrm>
-          <a:prstGeom prst="ellipse">
-            <a:avLst/>
-          </a:prstGeom>
-          <a:solidFill>
-            <a:srgbClr val="3CA95C"/>
-          </a:solidFill>
-          <a:ln w="9525">
-            <a:solidFill>
-              <a:srgbClr val="3CA95C"/>
-            </a:solidFill>
-          </a:ln>
-          <a:effectLst/>
-        </p:spPr>
-        <p:style>
-          <a:lnRef idx="1">
-            <a:schemeClr val="accent1"/>
-          </a:lnRef>
-          <a:fillRef idx="3">
-            <a:schemeClr val="accent1"/>
-          </a:fillRef>
-          <a:effectRef idx="2">
-            <a:schemeClr val="accent1"/>
-          </a:effectRef>
-          <a:fontRef idx="minor">
-            <a:schemeClr val="lt1"/>
-          </a:fontRef>
-        </p:style>
-        <p:txBody>
-          <a:bodyPr rtlCol="0" anchor="ctr" wrap="square" lIns="45720" rIns="45720" tIns="18288" bIns="18288"/>
-          <a:lstStyle/>
-          <a:p>
-            <a:pPr algn="ctr">
-              <a:lnSpc>
-                <a:spcPct val="100000"/>
-              </a:lnSpc>
-              <a:spcAft>
-                <a:spcPts val="0"/>
-              </a:spcAft>
-              <a:defRPr sz="900" b="0">
-                <a:solidFill>
-                  <a:srgbClr val="222222"/>
-                </a:solidFill>
-                <a:latin typeface="Calibri"/>
-              </a:defRPr>
-            </a:pPr>
-          </a:p>
-        </p:txBody>
-      </p:sp>
-      <p:sp>
-        <p:nvSpPr>
-          <p:cNvPr id="47" name="Oval 46"/>
-          <p:cNvSpPr/>
-          <p:nvPr/>
-        </p:nvSpPr>
-        <p:spPr>
-          <a:xfrm>
-            <a:off x="5404104" y="2331720"/>
-            <a:ext cx="256032" cy="256032"/>
-          </a:xfrm>
-          <a:prstGeom prst="ellipse">
-            <a:avLst/>
-          </a:prstGeom>
-          <a:solidFill>
-            <a:srgbClr val="2CA6DF"/>
-          </a:solidFill>
-          <a:ln w="9525">
-            <a:solidFill>
-              <a:srgbClr val="2CA6DF"/>
-            </a:solidFill>
-          </a:ln>
-          <a:effectLst/>
-        </p:spPr>
-        <p:style>
-          <a:lnRef idx="1">
-            <a:schemeClr val="accent1"/>
-          </a:lnRef>
-          <a:fillRef idx="3">
-            <a:schemeClr val="accent1"/>
-          </a:fillRef>
-          <a:effectRef idx="2">
-            <a:schemeClr val="accent1"/>
-          </a:effectRef>
-          <a:fontRef idx="minor">
-            <a:schemeClr val="lt1"/>
-          </a:fontRef>
-        </p:style>
-        <p:txBody>
-          <a:bodyPr rtlCol="0" anchor="ctr" wrap="square" lIns="45720" rIns="45720" tIns="18288" bIns="18288"/>
-          <a:lstStyle/>
-          <a:p>
-            <a:pPr algn="ctr">
-              <a:lnSpc>
-                <a:spcPct val="100000"/>
-              </a:lnSpc>
-              <a:spcAft>
-                <a:spcPts val="0"/>
-              </a:spcAft>
-              <a:defRPr sz="900" b="0">
-                <a:solidFill>
-                  <a:srgbClr val="222222"/>
-                </a:solidFill>
-                <a:latin typeface="Calibri"/>
-              </a:defRPr>
-            </a:pPr>
-          </a:p>
-        </p:txBody>
-      </p:sp>
-      <p:sp>
-        <p:nvSpPr>
-          <p:cNvPr id="48" name="Oval 47"/>
-          <p:cNvSpPr/>
-          <p:nvPr/>
-        </p:nvSpPr>
-        <p:spPr>
-          <a:xfrm>
-            <a:off x="5202936" y="2715768"/>
-            <a:ext cx="256032" cy="256032"/>
-          </a:xfrm>
-          <a:prstGeom prst="ellipse">
-            <a:avLst/>
-          </a:prstGeom>
-          <a:solidFill>
-            <a:srgbClr val="E03C31"/>
-          </a:solidFill>
-          <a:ln w="9525">
-            <a:solidFill>
-              <a:srgbClr val="E03C31"/>
-            </a:solidFill>
-          </a:ln>
-          <a:effectLst/>
-        </p:spPr>
-        <p:style>
-          <a:lnRef idx="1">
-            <a:schemeClr val="accent1"/>
-          </a:lnRef>
-          <a:fillRef idx="3">
-            <a:schemeClr val="accent1"/>
-          </a:fillRef>
-          <a:effectRef idx="2">
-            <a:schemeClr val="accent1"/>
-          </a:effectRef>
-          <a:fontRef idx="minor">
-            <a:schemeClr val="lt1"/>
-          </a:fontRef>
-        </p:style>
-        <p:txBody>
-          <a:bodyPr rtlCol="0" anchor="ctr" wrap="square" lIns="45720" rIns="45720" tIns="18288" bIns="18288"/>
-          <a:lstStyle/>
-          <a:p>
-            <a:pPr algn="ctr">
-              <a:lnSpc>
-                <a:spcPct val="100000"/>
-              </a:lnSpc>
-              <a:spcAft>
-                <a:spcPts val="0"/>
-              </a:spcAft>
-              <a:defRPr sz="900" b="0">
-                <a:solidFill>
-                  <a:srgbClr val="222222"/>
-                </a:solidFill>
-                <a:latin typeface="Calibri"/>
-              </a:defRPr>
-            </a:pPr>
-          </a:p>
-        </p:txBody>
-      </p:sp>
-      <p:sp>
-        <p:nvSpPr>
-          <p:cNvPr id="49" name="Rectangle 48"/>
-          <p:cNvSpPr/>
-          <p:nvPr/>
-        </p:nvSpPr>
-        <p:spPr>
-          <a:xfrm>
-            <a:off x="5943600" y="2148840"/>
-            <a:ext cx="868680" cy="1188720"/>
-          </a:xfrm>
-          <a:prstGeom prst="rect">
-            <a:avLst/>
-          </a:prstGeom>
-          <a:solidFill>
-            <a:srgbClr val="FFFFFF"/>
-          </a:solidFill>
-          <a:ln w="12700">
-            <a:solidFill>
-              <a:srgbClr val="1F3A5F"/>
-            </a:solidFill>
-          </a:ln>
-          <a:effectLst/>
-        </p:spPr>
-        <p:style>
-          <a:lnRef idx="1">
-            <a:schemeClr val="accent1"/>
-          </a:lnRef>
-          <a:fillRef idx="3">
-            <a:schemeClr val="accent1"/>
-          </a:fillRef>
-          <a:effectRef idx="2">
-            <a:schemeClr val="accent1"/>
-          </a:effectRef>
-          <a:fontRef idx="minor">
-            <a:schemeClr val="lt1"/>
-          </a:fontRef>
-        </p:style>
-        <p:txBody>
-          <a:bodyPr rtlCol="0" anchor="ctr" wrap="square" lIns="45720" rIns="45720" tIns="18288" bIns="18288"/>
-          <a:lstStyle/>
-          <a:p>
-            <a:pPr algn="ctr">
-              <a:lnSpc>
-                <a:spcPct val="100000"/>
-              </a:lnSpc>
-              <a:spcAft>
-                <a:spcPts val="0"/>
-              </a:spcAft>
-              <a:defRPr sz="900" b="0">
-                <a:solidFill>
-                  <a:srgbClr val="222222"/>
-                </a:solidFill>
-                <a:latin typeface="Calibri"/>
-              </a:defRPr>
-            </a:pPr>
-          </a:p>
-        </p:txBody>
-      </p:sp>
-      <p:sp>
-        <p:nvSpPr>
-          <p:cNvPr id="50" name="Oval 49"/>
-          <p:cNvSpPr/>
-          <p:nvPr/>
-        </p:nvSpPr>
-        <p:spPr>
-          <a:xfrm>
-            <a:off x="6044184" y="2331720"/>
-            <a:ext cx="256032" cy="256032"/>
-          </a:xfrm>
-          <a:prstGeom prst="ellipse">
-            <a:avLst/>
-          </a:prstGeom>
-          <a:solidFill>
-            <a:srgbClr val="3CA95C"/>
-          </a:solidFill>
-          <a:ln w="9525">
-            <a:solidFill>
-              <a:srgbClr val="3CA95C"/>
-            </a:solidFill>
-          </a:ln>
-          <a:effectLst/>
-        </p:spPr>
-        <p:style>
-          <a:lnRef idx="1">
-            <a:schemeClr val="accent1"/>
-          </a:lnRef>
-          <a:fillRef idx="3">
-            <a:schemeClr val="accent1"/>
-          </a:fillRef>
-          <a:effectRef idx="2">
-            <a:schemeClr val="accent1"/>
-          </a:effectRef>
-          <a:fontRef idx="minor">
-            <a:schemeClr val="lt1"/>
-          </a:fontRef>
-        </p:style>
-        <p:txBody>
-          <a:bodyPr rtlCol="0" anchor="ctr" wrap="square" lIns="45720" rIns="45720" tIns="18288" bIns="18288"/>
-          <a:lstStyle/>
-          <a:p>
-            <a:pPr algn="ctr">
-              <a:lnSpc>
-                <a:spcPct val="100000"/>
-              </a:lnSpc>
-              <a:spcAft>
-                <a:spcPts val="0"/>
-              </a:spcAft>
-              <a:defRPr sz="900" b="0">
-                <a:solidFill>
-                  <a:srgbClr val="222222"/>
-                </a:solidFill>
-                <a:latin typeface="Calibri"/>
-              </a:defRPr>
-            </a:pPr>
-          </a:p>
-        </p:txBody>
-      </p:sp>
-      <p:sp>
-        <p:nvSpPr>
-          <p:cNvPr id="51" name="Oval 50"/>
-          <p:cNvSpPr/>
-          <p:nvPr/>
-        </p:nvSpPr>
-        <p:spPr>
-          <a:xfrm>
-            <a:off x="6455664" y="2331720"/>
-            <a:ext cx="256032" cy="256032"/>
-          </a:xfrm>
-          <a:prstGeom prst="ellipse">
-            <a:avLst/>
-          </a:prstGeom>
-          <a:solidFill>
-            <a:srgbClr val="2CA6DF"/>
-          </a:solidFill>
-          <a:ln w="9525">
-            <a:solidFill>
-              <a:srgbClr val="2CA6DF"/>
-            </a:solidFill>
-          </a:ln>
-          <a:effectLst/>
-        </p:spPr>
-        <p:style>
-          <a:lnRef idx="1">
-            <a:schemeClr val="accent1"/>
-          </a:lnRef>
-          <a:fillRef idx="3">
-            <a:schemeClr val="accent1"/>
-          </a:fillRef>
-          <a:effectRef idx="2">
-            <a:schemeClr val="accent1"/>
-          </a:effectRef>
-          <a:fontRef idx="minor">
-            <a:schemeClr val="lt1"/>
-          </a:fontRef>
-        </p:style>
-        <p:txBody>
-          <a:bodyPr rtlCol="0" anchor="ctr" wrap="square" lIns="45720" rIns="45720" tIns="18288" bIns="18288"/>
-          <a:lstStyle/>
-          <a:p>
-            <a:pPr algn="ctr">
-              <a:lnSpc>
-                <a:spcPct val="100000"/>
-              </a:lnSpc>
-              <a:spcAft>
-                <a:spcPts val="0"/>
-              </a:spcAft>
-              <a:defRPr sz="900" b="0">
-                <a:solidFill>
-                  <a:srgbClr val="222222"/>
-                </a:solidFill>
-                <a:latin typeface="Calibri"/>
-              </a:defRPr>
-            </a:pPr>
-          </a:p>
-        </p:txBody>
-      </p:sp>
-      <p:sp>
-        <p:nvSpPr>
-          <p:cNvPr id="52" name="Oval 51"/>
-          <p:cNvSpPr/>
-          <p:nvPr/>
-        </p:nvSpPr>
-        <p:spPr>
-          <a:xfrm>
-            <a:off x="6254496" y="2715768"/>
-            <a:ext cx="256032" cy="256032"/>
-          </a:xfrm>
-          <a:prstGeom prst="ellipse">
-            <a:avLst/>
-          </a:prstGeom>
-          <a:solidFill>
-            <a:srgbClr val="E03C31"/>
-          </a:solidFill>
-          <a:ln w="9525">
-            <a:solidFill>
-              <a:srgbClr val="E03C31"/>
-            </a:solidFill>
-          </a:ln>
-          <a:effectLst/>
-        </p:spPr>
-        <p:style>
-          <a:lnRef idx="1">
-            <a:schemeClr val="accent1"/>
-          </a:lnRef>
-          <a:fillRef idx="3">
-            <a:schemeClr val="accent1"/>
-          </a:fillRef>
-          <a:effectRef idx="2">
-            <a:schemeClr val="accent1"/>
-          </a:effectRef>
-          <a:fontRef idx="minor">
-            <a:schemeClr val="lt1"/>
-          </a:fontRef>
-        </p:style>
-        <p:txBody>
-          <a:bodyPr rtlCol="0" anchor="ctr" wrap="square" lIns="45720" rIns="45720" tIns="18288" bIns="18288"/>
-          <a:lstStyle/>
-          <a:p>
-            <a:pPr algn="ctr">
-              <a:lnSpc>
-                <a:spcPct val="100000"/>
-              </a:lnSpc>
-              <a:spcAft>
-                <a:spcPts val="0"/>
-              </a:spcAft>
-              <a:defRPr sz="900" b="0">
-                <a:solidFill>
-                  <a:srgbClr val="222222"/>
-                </a:solidFill>
-                <a:latin typeface="Calibri"/>
-              </a:defRPr>
-            </a:pPr>
-          </a:p>
-        </p:txBody>
-      </p:sp>
-      <p:sp>
-        <p:nvSpPr>
-          <p:cNvPr id="53" name="Rectangle 52"/>
-          <p:cNvSpPr/>
-          <p:nvPr/>
-        </p:nvSpPr>
-        <p:spPr>
-          <a:xfrm>
-            <a:off x="6995160" y="2148840"/>
-            <a:ext cx="868680" cy="1188720"/>
-          </a:xfrm>
-          <a:prstGeom prst="rect">
-            <a:avLst/>
-          </a:prstGeom>
-          <a:solidFill>
-            <a:srgbClr val="FFFFFF"/>
-          </a:solidFill>
-          <a:ln w="12700">
-            <a:solidFill>
-              <a:srgbClr val="1F3A5F"/>
-            </a:solidFill>
-          </a:ln>
-          <a:effectLst/>
-        </p:spPr>
-        <p:style>
-          <a:lnRef idx="1">
-            <a:schemeClr val="accent1"/>
-          </a:lnRef>
-          <a:fillRef idx="3">
-            <a:schemeClr val="accent1"/>
-          </a:fillRef>
-          <a:effectRef idx="2">
-            <a:schemeClr val="accent1"/>
-          </a:effectRef>
-          <a:fontRef idx="minor">
-            <a:schemeClr val="lt1"/>
-          </a:fontRef>
-        </p:style>
-        <p:txBody>
-          <a:bodyPr rtlCol="0" anchor="ctr" wrap="square" lIns="45720" rIns="45720" tIns="18288" bIns="18288"/>
-          <a:lstStyle/>
-          <a:p>
-            <a:pPr algn="ctr">
-              <a:lnSpc>
-                <a:spcPct val="100000"/>
-              </a:lnSpc>
-              <a:spcAft>
-                <a:spcPts val="0"/>
-              </a:spcAft>
-              <a:defRPr sz="900" b="0">
-                <a:solidFill>
-                  <a:srgbClr val="222222"/>
-                </a:solidFill>
-                <a:latin typeface="Calibri"/>
-              </a:defRPr>
-            </a:pPr>
-          </a:p>
-        </p:txBody>
-      </p:sp>
-      <p:sp>
-        <p:nvSpPr>
-          <p:cNvPr id="54" name="Oval 53"/>
-          <p:cNvSpPr/>
-          <p:nvPr/>
-        </p:nvSpPr>
-        <p:spPr>
-          <a:xfrm>
-            <a:off x="7095744" y="2331720"/>
-            <a:ext cx="256032" cy="256032"/>
-          </a:xfrm>
-          <a:prstGeom prst="ellipse">
-            <a:avLst/>
-          </a:prstGeom>
-          <a:solidFill>
-            <a:srgbClr val="3CA95C"/>
-          </a:solidFill>
-          <a:ln w="9525">
-            <a:solidFill>
-              <a:srgbClr val="3CA95C"/>
-            </a:solidFill>
-          </a:ln>
-          <a:effectLst/>
-        </p:spPr>
-        <p:style>
-          <a:lnRef idx="1">
-            <a:schemeClr val="accent1"/>
-          </a:lnRef>
-          <a:fillRef idx="3">
-            <a:schemeClr val="accent1"/>
-          </a:fillRef>
-          <a:effectRef idx="2">
-            <a:schemeClr val="accent1"/>
-          </a:effectRef>
-          <a:fontRef idx="minor">
-            <a:schemeClr val="lt1"/>
-          </a:fontRef>
-        </p:style>
-        <p:txBody>
-          <a:bodyPr rtlCol="0" anchor="ctr" wrap="square" lIns="45720" rIns="45720" tIns="18288" bIns="18288"/>
-          <a:lstStyle/>
-          <a:p>
-            <a:pPr algn="ctr">
-              <a:lnSpc>
-                <a:spcPct val="100000"/>
-              </a:lnSpc>
-              <a:spcAft>
-                <a:spcPts val="0"/>
-              </a:spcAft>
-              <a:defRPr sz="900" b="0">
-                <a:solidFill>
-                  <a:srgbClr val="222222"/>
-                </a:solidFill>
-                <a:latin typeface="Calibri"/>
-              </a:defRPr>
-            </a:pPr>
-          </a:p>
-        </p:txBody>
-      </p:sp>
-      <p:sp>
-        <p:nvSpPr>
-          <p:cNvPr id="55" name="Oval 54"/>
-          <p:cNvSpPr/>
-          <p:nvPr/>
-        </p:nvSpPr>
-        <p:spPr>
-          <a:xfrm>
-            <a:off x="7507224" y="2331720"/>
-            <a:ext cx="256032" cy="256032"/>
-          </a:xfrm>
-          <a:prstGeom prst="ellipse">
-            <a:avLst/>
-          </a:prstGeom>
-          <a:solidFill>
-            <a:srgbClr val="2CA6DF"/>
-          </a:solidFill>
-          <a:ln w="9525">
-            <a:solidFill>
-              <a:srgbClr val="2CA6DF"/>
-            </a:solidFill>
-          </a:ln>
-          <a:effectLst/>
-        </p:spPr>
-        <p:style>
-          <a:lnRef idx="1">
-            <a:schemeClr val="accent1"/>
-          </a:lnRef>
-          <a:fillRef idx="3">
-            <a:schemeClr val="accent1"/>
-          </a:fillRef>
-          <a:effectRef idx="2">
-            <a:schemeClr val="accent1"/>
-          </a:effectRef>
-          <a:fontRef idx="minor">
-            <a:schemeClr val="lt1"/>
-          </a:fontRef>
-        </p:style>
-        <p:txBody>
-          <a:bodyPr rtlCol="0" anchor="ctr" wrap="square" lIns="45720" rIns="45720" tIns="18288" bIns="18288"/>
-          <a:lstStyle/>
-          <a:p>
-            <a:pPr algn="ctr">
-              <a:lnSpc>
-                <a:spcPct val="100000"/>
-              </a:lnSpc>
-              <a:spcAft>
-                <a:spcPts val="0"/>
-              </a:spcAft>
-              <a:defRPr sz="900" b="0">
-                <a:solidFill>
-                  <a:srgbClr val="222222"/>
-                </a:solidFill>
-                <a:latin typeface="Calibri"/>
-              </a:defRPr>
-            </a:pPr>
-          </a:p>
-        </p:txBody>
-      </p:sp>
-      <p:sp>
-        <p:nvSpPr>
-          <p:cNvPr id="56" name="Oval 55"/>
-          <p:cNvSpPr/>
-          <p:nvPr/>
-        </p:nvSpPr>
-        <p:spPr>
-          <a:xfrm>
-            <a:off x="7306056" y="2715768"/>
-            <a:ext cx="256032" cy="256032"/>
-          </a:xfrm>
-          <a:prstGeom prst="ellipse">
-            <a:avLst/>
-          </a:prstGeom>
-          <a:solidFill>
-            <a:srgbClr val="E03C31"/>
-          </a:solidFill>
-          <a:ln w="9525">
-            <a:solidFill>
-              <a:srgbClr val="E03C31"/>
-            </a:solidFill>
-          </a:ln>
-          <a:effectLst/>
-        </p:spPr>
-        <p:style>
-          <a:lnRef idx="1">
-            <a:schemeClr val="accent1"/>
-          </a:lnRef>
-          <a:fillRef idx="3">
-            <a:schemeClr val="accent1"/>
-          </a:fillRef>
-          <a:effectRef idx="2">
-            <a:schemeClr val="accent1"/>
-          </a:effectRef>
-          <a:fontRef idx="minor">
-            <a:schemeClr val="lt1"/>
-          </a:fontRef>
-        </p:style>
-        <p:txBody>
-          <a:bodyPr rtlCol="0" anchor="ctr" wrap="square" lIns="45720" rIns="45720" tIns="18288" bIns="18288"/>
-          <a:lstStyle/>
-          <a:p>
-            <a:pPr algn="ctr">
-              <a:lnSpc>
-                <a:spcPct val="100000"/>
-              </a:lnSpc>
-              <a:spcAft>
-                <a:spcPts val="0"/>
-              </a:spcAft>
-              <a:defRPr sz="900" b="0">
-                <a:solidFill>
-                  <a:srgbClr val="222222"/>
-                </a:solidFill>
-                <a:latin typeface="Calibri"/>
-              </a:defRPr>
-            </a:pPr>
-          </a:p>
-        </p:txBody>
-      </p:sp>
-      <p:sp>
-        <p:nvSpPr>
-          <p:cNvPr id="57" name="Rectangle 56"/>
-          <p:cNvSpPr/>
-          <p:nvPr/>
-        </p:nvSpPr>
-        <p:spPr>
-          <a:xfrm>
-            <a:off x="8046720" y="2148840"/>
-            <a:ext cx="868680" cy="1188720"/>
-          </a:xfrm>
-          <a:prstGeom prst="rect">
-            <a:avLst/>
-          </a:prstGeom>
-          <a:solidFill>
-            <a:srgbClr val="FFFFFF"/>
-          </a:solidFill>
-          <a:ln w="12700">
-            <a:solidFill>
-              <a:srgbClr val="1F3A5F"/>
-            </a:solidFill>
-          </a:ln>
-          <a:effectLst/>
-        </p:spPr>
-        <p:style>
-          <a:lnRef idx="1">
-            <a:schemeClr val="accent1"/>
-          </a:lnRef>
-          <a:fillRef idx="3">
-            <a:schemeClr val="accent1"/>
-          </a:fillRef>
-          <a:effectRef idx="2">
-            <a:schemeClr val="accent1"/>
-          </a:effectRef>
-          <a:fontRef idx="minor">
-            <a:schemeClr val="lt1"/>
-          </a:fontRef>
-        </p:style>
-        <p:txBody>
-          <a:bodyPr rtlCol="0" anchor="ctr" wrap="square" lIns="45720" rIns="45720" tIns="18288" bIns="18288"/>
-          <a:lstStyle/>
-          <a:p>
-            <a:pPr algn="ctr">
-              <a:lnSpc>
-                <a:spcPct val="100000"/>
-              </a:lnSpc>
-              <a:spcAft>
-                <a:spcPts val="0"/>
-              </a:spcAft>
-              <a:defRPr sz="900" b="0">
-                <a:solidFill>
-                  <a:srgbClr val="222222"/>
-                </a:solidFill>
-                <a:latin typeface="Calibri"/>
-              </a:defRPr>
-            </a:pPr>
-          </a:p>
-        </p:txBody>
-      </p:sp>
-      <p:sp>
-        <p:nvSpPr>
-          <p:cNvPr id="58" name="Oval 57"/>
-          <p:cNvSpPr/>
-          <p:nvPr/>
-        </p:nvSpPr>
-        <p:spPr>
-          <a:xfrm>
-            <a:off x="8147304" y="2331720"/>
-            <a:ext cx="256032" cy="256032"/>
-          </a:xfrm>
-          <a:prstGeom prst="ellipse">
-            <a:avLst/>
-          </a:prstGeom>
-          <a:solidFill>
-            <a:srgbClr val="3CA95C"/>
-          </a:solidFill>
-          <a:ln w="9525">
-            <a:solidFill>
-              <a:srgbClr val="3CA95C"/>
-            </a:solidFill>
-          </a:ln>
-          <a:effectLst/>
-        </p:spPr>
-        <p:style>
-          <a:lnRef idx="1">
-            <a:schemeClr val="accent1"/>
-          </a:lnRef>
-          <a:fillRef idx="3">
-            <a:schemeClr val="accent1"/>
-          </a:fillRef>
-          <a:effectRef idx="2">
-            <a:schemeClr val="accent1"/>
-          </a:effectRef>
-          <a:fontRef idx="minor">
-            <a:schemeClr val="lt1"/>
-          </a:fontRef>
-        </p:style>
-        <p:txBody>
-          <a:bodyPr rtlCol="0" anchor="ctr" wrap="square" lIns="45720" rIns="45720" tIns="18288" bIns="18288"/>
-          <a:lstStyle/>
-          <a:p>
-            <a:pPr algn="ctr">
-              <a:lnSpc>
-                <a:spcPct val="100000"/>
-              </a:lnSpc>
-              <a:spcAft>
-                <a:spcPts val="0"/>
-              </a:spcAft>
-              <a:defRPr sz="900" b="0">
-                <a:solidFill>
-                  <a:srgbClr val="222222"/>
-                </a:solidFill>
-                <a:latin typeface="Calibri"/>
-              </a:defRPr>
-            </a:pPr>
-          </a:p>
-        </p:txBody>
-      </p:sp>
-      <p:sp>
-        <p:nvSpPr>
-          <p:cNvPr id="59" name="Oval 58"/>
-          <p:cNvSpPr/>
-          <p:nvPr/>
-        </p:nvSpPr>
-        <p:spPr>
-          <a:xfrm>
-            <a:off x="8558784" y="2331720"/>
-            <a:ext cx="256032" cy="256032"/>
-          </a:xfrm>
-          <a:prstGeom prst="ellipse">
-            <a:avLst/>
-          </a:prstGeom>
-          <a:solidFill>
-            <a:srgbClr val="2CA6DF"/>
-          </a:solidFill>
-          <a:ln w="9525">
-            <a:solidFill>
-              <a:srgbClr val="2CA6DF"/>
-            </a:solidFill>
-          </a:ln>
-          <a:effectLst/>
-        </p:spPr>
-        <p:style>
-          <a:lnRef idx="1">
-            <a:schemeClr val="accent1"/>
-          </a:lnRef>
-          <a:fillRef idx="3">
-            <a:schemeClr val="accent1"/>
-          </a:fillRef>
-          <a:effectRef idx="2">
-            <a:schemeClr val="accent1"/>
-          </a:effectRef>
-          <a:fontRef idx="minor">
-            <a:schemeClr val="lt1"/>
-          </a:fontRef>
-        </p:style>
-        <p:txBody>
-          <a:bodyPr rtlCol="0" anchor="ctr" wrap="square" lIns="45720" rIns="45720" tIns="18288" bIns="18288"/>
-          <a:lstStyle/>
-          <a:p>
-            <a:pPr algn="ctr">
-              <a:lnSpc>
-                <a:spcPct val="100000"/>
-              </a:lnSpc>
-              <a:spcAft>
-                <a:spcPts val="0"/>
-              </a:spcAft>
-              <a:defRPr sz="900" b="0">
-                <a:solidFill>
-                  <a:srgbClr val="222222"/>
-                </a:solidFill>
-                <a:latin typeface="Calibri"/>
-              </a:defRPr>
-            </a:pPr>
-          </a:p>
-        </p:txBody>
-      </p:sp>
-      <p:sp>
-        <p:nvSpPr>
-          <p:cNvPr id="60" name="Oval 59"/>
-          <p:cNvSpPr/>
-          <p:nvPr/>
-        </p:nvSpPr>
-        <p:spPr>
-          <a:xfrm>
-            <a:off x="8357616" y="2715768"/>
-            <a:ext cx="256032" cy="256032"/>
-          </a:xfrm>
-          <a:prstGeom prst="ellipse">
-            <a:avLst/>
-          </a:prstGeom>
-          <a:solidFill>
-            <a:srgbClr val="E03C31"/>
-          </a:solidFill>
-          <a:ln w="9525">
-            <a:solidFill>
-              <a:srgbClr val="E03C31"/>
-            </a:solidFill>
-          </a:ln>
-          <a:effectLst/>
-        </p:spPr>
-        <p:style>
-          <a:lnRef idx="1">
-            <a:schemeClr val="accent1"/>
-          </a:lnRef>
-          <a:fillRef idx="3">
-            <a:schemeClr val="accent1"/>
-          </a:fillRef>
-          <a:effectRef idx="2">
-            <a:schemeClr val="accent1"/>
-          </a:effectRef>
-          <a:fontRef idx="minor">
-            <a:schemeClr val="lt1"/>
-          </a:fontRef>
-        </p:style>
-        <p:txBody>
-          <a:bodyPr rtlCol="0" anchor="ctr" wrap="square" lIns="45720" rIns="45720" tIns="18288" bIns="18288"/>
-          <a:lstStyle/>
-          <a:p>
-            <a:pPr algn="ctr">
-              <a:lnSpc>
-                <a:spcPct val="100000"/>
-              </a:lnSpc>
-              <a:spcAft>
-                <a:spcPts val="0"/>
-              </a:spcAft>
-              <a:defRPr sz="900" b="0">
-                <a:solidFill>
-                  <a:srgbClr val="222222"/>
-                </a:solidFill>
-                <a:latin typeface="Calibri"/>
-              </a:defRPr>
-            </a:pPr>
-          </a:p>
-        </p:txBody>
-      </p:sp>
-      <p:sp>
-        <p:nvSpPr>
-          <p:cNvPr id="61" name="Rectangle 60"/>
-          <p:cNvSpPr/>
-          <p:nvPr/>
-        </p:nvSpPr>
-        <p:spPr>
-          <a:xfrm>
-            <a:off x="9098280" y="2148840"/>
-            <a:ext cx="868680" cy="1188720"/>
-          </a:xfrm>
-          <a:prstGeom prst="rect">
-            <a:avLst/>
-          </a:prstGeom>
-          <a:solidFill>
-            <a:srgbClr val="FFFFFF"/>
-          </a:solidFill>
-          <a:ln w="12700">
-            <a:solidFill>
-              <a:srgbClr val="1F3A5F"/>
-            </a:solidFill>
-          </a:ln>
-          <a:effectLst/>
-        </p:spPr>
-        <p:style>
-          <a:lnRef idx="1">
-            <a:schemeClr val="accent1"/>
-          </a:lnRef>
-          <a:fillRef idx="3">
-            <a:schemeClr val="accent1"/>
-          </a:fillRef>
-          <a:effectRef idx="2">
-            <a:schemeClr val="accent1"/>
-          </a:effectRef>
-          <a:fontRef idx="minor">
-            <a:schemeClr val="lt1"/>
-          </a:fontRef>
-        </p:style>
-        <p:txBody>
-          <a:bodyPr rtlCol="0" anchor="ctr" wrap="square" lIns="45720" rIns="45720" tIns="18288" bIns="18288"/>
-          <a:lstStyle/>
-          <a:p>
-            <a:pPr algn="ctr">
-              <a:lnSpc>
-                <a:spcPct val="100000"/>
-              </a:lnSpc>
-              <a:spcAft>
-                <a:spcPts val="0"/>
-              </a:spcAft>
-              <a:defRPr sz="900" b="0">
-                <a:solidFill>
-                  <a:srgbClr val="222222"/>
-                </a:solidFill>
-                <a:latin typeface="Calibri"/>
-              </a:defRPr>
-            </a:pPr>
-          </a:p>
-        </p:txBody>
-      </p:sp>
-      <p:sp>
-        <p:nvSpPr>
-          <p:cNvPr id="62" name="Oval 61"/>
-          <p:cNvSpPr/>
-          <p:nvPr/>
-        </p:nvSpPr>
-        <p:spPr>
-          <a:xfrm>
-            <a:off x="9198864" y="2331720"/>
-            <a:ext cx="256032" cy="256032"/>
-          </a:xfrm>
-          <a:prstGeom prst="ellipse">
-            <a:avLst/>
-          </a:prstGeom>
-          <a:solidFill>
-            <a:srgbClr val="3CA95C"/>
-          </a:solidFill>
-          <a:ln w="9525">
-            <a:solidFill>
-              <a:srgbClr val="3CA95C"/>
-            </a:solidFill>
-          </a:ln>
-          <a:effectLst/>
-        </p:spPr>
-        <p:style>
-          <a:lnRef idx="1">
-            <a:schemeClr val="accent1"/>
-          </a:lnRef>
-          <a:fillRef idx="3">
-            <a:schemeClr val="accent1"/>
-          </a:fillRef>
-          <a:effectRef idx="2">
-            <a:schemeClr val="accent1"/>
-          </a:effectRef>
-          <a:fontRef idx="minor">
-            <a:schemeClr val="lt1"/>
-          </a:fontRef>
-        </p:style>
-        <p:txBody>
-          <a:bodyPr rtlCol="0" anchor="ctr" wrap="square" lIns="45720" rIns="45720" tIns="18288" bIns="18288"/>
-          <a:lstStyle/>
-          <a:p>
-            <a:pPr algn="ctr">
-              <a:lnSpc>
-                <a:spcPct val="100000"/>
-              </a:lnSpc>
-              <a:spcAft>
-                <a:spcPts val="0"/>
-              </a:spcAft>
-              <a:defRPr sz="900" b="0">
-                <a:solidFill>
-                  <a:srgbClr val="222222"/>
-                </a:solidFill>
-                <a:latin typeface="Calibri"/>
-              </a:defRPr>
-            </a:pPr>
-          </a:p>
-        </p:txBody>
-      </p:sp>
-      <p:sp>
-        <p:nvSpPr>
-          <p:cNvPr id="63" name="Oval 62"/>
-          <p:cNvSpPr/>
-          <p:nvPr/>
-        </p:nvSpPr>
-        <p:spPr>
-          <a:xfrm>
-            <a:off x="9610344" y="2331720"/>
-            <a:ext cx="256032" cy="256032"/>
-          </a:xfrm>
-          <a:prstGeom prst="ellipse">
-            <a:avLst/>
-          </a:prstGeom>
-          <a:solidFill>
-            <a:srgbClr val="2CA6DF"/>
-          </a:solidFill>
-          <a:ln w="9525">
-            <a:solidFill>
-              <a:srgbClr val="2CA6DF"/>
-            </a:solidFill>
-          </a:ln>
-          <a:effectLst/>
-        </p:spPr>
-        <p:style>
-          <a:lnRef idx="1">
-            <a:schemeClr val="accent1"/>
-          </a:lnRef>
-          <a:fillRef idx="3">
-            <a:schemeClr val="accent1"/>
-          </a:fillRef>
-          <a:effectRef idx="2">
-            <a:schemeClr val="accent1"/>
-          </a:effectRef>
-          <a:fontRef idx="minor">
-            <a:schemeClr val="lt1"/>
-          </a:fontRef>
-        </p:style>
-        <p:txBody>
-          <a:bodyPr rtlCol="0" anchor="ctr" wrap="square" lIns="45720" rIns="45720" tIns="18288" bIns="18288"/>
-          <a:lstStyle/>
-          <a:p>
-            <a:pPr algn="ctr">
-              <a:lnSpc>
-                <a:spcPct val="100000"/>
-              </a:lnSpc>
-              <a:spcAft>
-                <a:spcPts val="0"/>
-              </a:spcAft>
-              <a:defRPr sz="900" b="0">
-                <a:solidFill>
-                  <a:srgbClr val="222222"/>
-                </a:solidFill>
-                <a:latin typeface="Calibri"/>
-              </a:defRPr>
-            </a:pPr>
-          </a:p>
-        </p:txBody>
-      </p:sp>
-      <p:sp>
-        <p:nvSpPr>
-          <p:cNvPr id="64" name="Oval 63"/>
-          <p:cNvSpPr/>
-          <p:nvPr/>
-        </p:nvSpPr>
-        <p:spPr>
-          <a:xfrm>
-            <a:off x="9409176" y="2715768"/>
-            <a:ext cx="256032" cy="256032"/>
-          </a:xfrm>
-          <a:prstGeom prst="ellipse">
-            <a:avLst/>
-          </a:prstGeom>
-          <a:solidFill>
-            <a:srgbClr val="E03C31"/>
-          </a:solidFill>
-          <a:ln w="9525">
-            <a:solidFill>
-              <a:srgbClr val="E03C31"/>
-            </a:solidFill>
-          </a:ln>
-          <a:effectLst/>
-        </p:spPr>
-        <p:style>
-          <a:lnRef idx="1">
-            <a:schemeClr val="accent1"/>
-          </a:lnRef>
-          <a:fillRef idx="3">
-            <a:schemeClr val="accent1"/>
-          </a:fillRef>
-          <a:effectRef idx="2">
-            <a:schemeClr val="accent1"/>
-          </a:effectRef>
-          <a:fontRef idx="minor">
-            <a:schemeClr val="lt1"/>
-          </a:fontRef>
-        </p:style>
-        <p:txBody>
-          <a:bodyPr rtlCol="0" anchor="ctr" wrap="square" lIns="45720" rIns="45720" tIns="18288" bIns="18288"/>
-          <a:lstStyle/>
-          <a:p>
-            <a:pPr algn="ctr">
-              <a:lnSpc>
-                <a:spcPct val="100000"/>
-              </a:lnSpc>
-              <a:spcAft>
-                <a:spcPts val="0"/>
-              </a:spcAft>
-              <a:defRPr sz="900" b="0">
-                <a:solidFill>
-                  <a:srgbClr val="222222"/>
-                </a:solidFill>
-                <a:latin typeface="Calibri"/>
-              </a:defRPr>
-            </a:pPr>
-          </a:p>
-        </p:txBody>
-      </p:sp>
-      <p:sp>
-        <p:nvSpPr>
-          <p:cNvPr id="65" name="TextBox 64"/>
+        </p:spPr>
+      </p:pic>
+      <p:sp>
+        <p:nvSpPr>
+          <p:cNvPr id="7" name="TextBox 6"/>
           <p:cNvSpPr txBox="1"/>
           <p:nvPr/>
         </p:nvSpPr>
         <p:spPr>
           <a:xfrm>
-            <a:off x="502920" y="1517904"/>
-            <a:ext cx="777240" cy="367792"/>
+            <a:off x="502920" y="3840480"/>
+            <a:ext cx="11185855" cy="646684"/>
           </a:xfrm>
           <a:prstGeom prst="rect">
             <a:avLst/>
@@ -25024,14 +22215,14 @@
           </a:bodyPr>
           <a:lstStyle/>
           <a:p>
-            <a:pPr algn="r">
+            <a:pPr algn="ctr">
               <a:lnSpc>
                 <a:spcPct val="100000"/>
               </a:lnSpc>
               <a:spcAft>
                 <a:spcPts val="0"/>
               </a:spcAft>
-              <a:defRPr sz="1800" b="1">
+              <a:defRPr sz="1800" b="0">
                 <a:solidFill>
                   <a:srgbClr val="666666"/>
                 </a:solidFill>
@@ -25039,212 +22230,20 @@
               </a:defRPr>
             </a:pPr>
             <a:r>
-              <a:rPr sz="1800" b="1">
+              <a:rPr sz="1800" b="0">
                 <a:solidFill>
                   <a:srgbClr val="666666"/>
                 </a:solidFill>
                 <a:latin typeface="Calibri"/>
               </a:rPr>
-              <a:t>Power</a:t>
-            </a:r>
-          </a:p>
-        </p:txBody>
-      </p:sp>
-      <p:sp>
-        <p:nvSpPr>
-          <p:cNvPr id="66" name="TextBox 65"/>
-          <p:cNvSpPr txBox="1"/>
-          <p:nvPr/>
-        </p:nvSpPr>
-        <p:spPr>
-          <a:xfrm>
-            <a:off x="502920" y="2615184"/>
-            <a:ext cx="777240" cy="646684"/>
-          </a:xfrm>
-          <a:prstGeom prst="rect">
-            <a:avLst/>
-          </a:prstGeom>
-          <a:noFill/>
-        </p:spPr>
-        <p:txBody>
-          <a:bodyPr wrap="square" lIns="0" tIns="0" rIns="0" bIns="0">
-            <a:spAutoFit/>
-          </a:bodyPr>
-          <a:lstStyle/>
-          <a:p>
-            <a:pPr algn="r">
-              <a:lnSpc>
-                <a:spcPct val="100000"/>
-              </a:lnSpc>
-              <a:spcAft>
-                <a:spcPts val="0"/>
-              </a:spcAft>
-              <a:defRPr sz="1800" b="1">
-                <a:solidFill>
-                  <a:srgbClr val="0E7C86"/>
-                </a:solidFill>
-                <a:latin typeface="Calibri"/>
-              </a:defRPr>
-            </a:pPr>
-            <a:r>
-              <a:rPr sz="1800" b="1">
-                <a:solidFill>
-                  <a:srgbClr val="0E7C86"/>
-                </a:solidFill>
-                <a:latin typeface="Calibri"/>
-              </a:rPr>
-              <a:t>Data In</a:t>
-            </a:r>
-          </a:p>
-        </p:txBody>
-      </p:sp>
-      <p:sp>
-        <p:nvSpPr>
-          <p:cNvPr id="67" name="TextBox 66"/>
-          <p:cNvSpPr txBox="1"/>
-          <p:nvPr/>
-        </p:nvSpPr>
-        <p:spPr>
-          <a:xfrm>
-            <a:off x="502920" y="3712464"/>
-            <a:ext cx="777240" cy="367792"/>
-          </a:xfrm>
-          <a:prstGeom prst="rect">
-            <a:avLst/>
-          </a:prstGeom>
-          <a:noFill/>
-        </p:spPr>
-        <p:txBody>
-          <a:bodyPr wrap="square" lIns="0" tIns="0" rIns="0" bIns="0">
-            <a:spAutoFit/>
-          </a:bodyPr>
-          <a:lstStyle/>
-          <a:p>
-            <a:pPr algn="r">
-              <a:lnSpc>
-                <a:spcPct val="100000"/>
-              </a:lnSpc>
-              <a:spcAft>
-                <a:spcPts val="0"/>
-              </a:spcAft>
-              <a:defRPr sz="1800" b="1">
-                <a:solidFill>
-                  <a:srgbClr val="666666"/>
-                </a:solidFill>
-                <a:latin typeface="Calibri"/>
-              </a:defRPr>
-            </a:pPr>
-            <a:r>
-              <a:rPr sz="1800" b="1">
-                <a:solidFill>
-                  <a:srgbClr val="666666"/>
-                </a:solidFill>
-                <a:latin typeface="Calibri"/>
-              </a:rPr>
-              <a:t>GND</a:t>
-            </a:r>
-          </a:p>
-        </p:txBody>
-      </p:sp>
-      <p:sp>
-        <p:nvSpPr>
-          <p:cNvPr id="68" name="TextBox 67"/>
-          <p:cNvSpPr txBox="1"/>
-          <p:nvPr/>
-        </p:nvSpPr>
-        <p:spPr>
-          <a:xfrm>
-            <a:off x="10332720" y="2615184"/>
-            <a:ext cx="1353312" cy="367792"/>
-          </a:xfrm>
-          <a:prstGeom prst="rect">
-            <a:avLst/>
-          </a:prstGeom>
-          <a:noFill/>
-        </p:spPr>
-        <p:txBody>
-          <a:bodyPr wrap="square" lIns="0" tIns="0" rIns="0" bIns="0">
-            <a:spAutoFit/>
-          </a:bodyPr>
-          <a:lstStyle/>
-          <a:p>
-            <a:pPr algn="l">
-              <a:lnSpc>
-                <a:spcPct val="100000"/>
-              </a:lnSpc>
-              <a:spcAft>
-                <a:spcPts val="0"/>
-              </a:spcAft>
-              <a:defRPr sz="1800" b="1">
-                <a:solidFill>
-                  <a:srgbClr val="0E7C86"/>
-                </a:solidFill>
-                <a:latin typeface="Calibri"/>
-              </a:defRPr>
-            </a:pPr>
-            <a:r>
-              <a:rPr sz="1800" b="1">
-                <a:solidFill>
-                  <a:srgbClr val="0E7C86"/>
-                </a:solidFill>
-                <a:latin typeface="Calibri"/>
-              </a:rPr>
-              <a:t>Data out</a:t>
-            </a:r>
-          </a:p>
-        </p:txBody>
-      </p:sp>
-      <p:sp>
-        <p:nvSpPr>
-          <p:cNvPr id="69" name="TextBox 68"/>
-          <p:cNvSpPr txBox="1"/>
-          <p:nvPr/>
-        </p:nvSpPr>
-        <p:spPr>
-          <a:xfrm>
-            <a:off x="502920" y="4133088"/>
-            <a:ext cx="11185855" cy="367792"/>
-          </a:xfrm>
-          <a:prstGeom prst="rect">
-            <a:avLst/>
-          </a:prstGeom>
-          <a:noFill/>
-        </p:spPr>
-        <p:txBody>
-          <a:bodyPr wrap="square" lIns="0" tIns="0" rIns="0" bIns="0">
-            <a:spAutoFit/>
-          </a:bodyPr>
-          <a:lstStyle/>
-          <a:p>
-            <a:pPr algn="ctr">
-              <a:lnSpc>
-                <a:spcPct val="100000"/>
-              </a:lnSpc>
-              <a:spcAft>
-                <a:spcPts val="0"/>
-              </a:spcAft>
-              <a:defRPr sz="1800" b="0">
-                <a:solidFill>
-                  <a:srgbClr val="666666"/>
-                </a:solidFill>
-                <a:latin typeface="Calibri"/>
-              </a:defRPr>
-            </a:pPr>
-            <a:r>
-              <a:rPr sz="1800" b="0">
-                <a:solidFill>
-                  <a:srgbClr val="666666"/>
-                </a:solidFill>
-                <a:latin typeface="Calibri"/>
-              </a:rPr>
-              <a:t>Inside each box: a controller chip and three LEDs. Eight are drawn here; the vehicle has 32.</a:t>
-            </a:r>
-          </a:p>
-        </p:txBody>
-      </p:sp>
-      <p:sp>
-        <p:nvSpPr>
-          <p:cNvPr id="70" name="Rounded Rectangle 69"/>
+              <a:t>Each box is one NeoPixel: a controller chip and three LEDs, one red, one green and one blue. Eight are drawn here; your vehicle has 32.</a:t>
+            </a:r>
+          </a:p>
+        </p:txBody>
+      </p:sp>
+      <p:sp>
+        <p:nvSpPr>
+          <p:cNvPr id="8" name="Rounded Rectangle 7"/>
           <p:cNvSpPr/>
           <p:nvPr/>
         </p:nvSpPr>
@@ -25303,7 +22302,7 @@
                 </a:solidFill>
                 <a:latin typeface="Calibri"/>
               </a:rPr>
-              <a:t>Power and ground are RAILS - every pixel taps the same two wires. Data is a CHAIN - each pixel keeps the first message and passes the rest out to the next one. That is why one GPIO drives the whole strip, and why a break in the data line puts out every pixel after it and none before it.</a:t>
+              <a:t>Power and ground are RAILS - every pixel taps the same two wires. Data is a CHAIN - each pixel keeps the first message and passes the rest out to the next one. That is why one pin drives the whole strip, and why a break in the data line puts out every pixel after it and none before it.</a:t>
             </a:r>
           </a:p>
         </p:txBody>
